--- a/material/[SeSAC_YDP_6] 03_CSS_3.pptx
+++ b/material/[SeSAC_YDP_6] 03_CSS_3.pptx
@@ -5,34 +5,35 @@
     <p:sldMasterId id="2147483661" r:id="rId1"/>
   </p:sldMasterIdLst>
   <p:notesMasterIdLst>
-    <p:notesMasterId r:id="rId27"/>
+    <p:notesMasterId r:id="rId28"/>
   </p:notesMasterIdLst>
   <p:sldIdLst>
-    <p:sldId id="342" r:id="rId2"/>
-    <p:sldId id="689" r:id="rId3"/>
-    <p:sldId id="312" r:id="rId4"/>
-    <p:sldId id="339" r:id="rId5"/>
-    <p:sldId id="315" r:id="rId6"/>
-    <p:sldId id="690" r:id="rId7"/>
-    <p:sldId id="688" r:id="rId8"/>
-    <p:sldId id="322" r:id="rId9"/>
-    <p:sldId id="324" r:id="rId10"/>
-    <p:sldId id="323" r:id="rId11"/>
-    <p:sldId id="691" r:id="rId12"/>
-    <p:sldId id="692" r:id="rId13"/>
-    <p:sldId id="373" r:id="rId14"/>
-    <p:sldId id="316" r:id="rId15"/>
-    <p:sldId id="687" r:id="rId16"/>
-    <p:sldId id="693" r:id="rId17"/>
-    <p:sldId id="314" r:id="rId18"/>
-    <p:sldId id="398" r:id="rId19"/>
-    <p:sldId id="317" r:id="rId20"/>
-    <p:sldId id="374" r:id="rId21"/>
-    <p:sldId id="375" r:id="rId22"/>
-    <p:sldId id="376" r:id="rId23"/>
-    <p:sldId id="330" r:id="rId24"/>
-    <p:sldId id="318" r:id="rId25"/>
-    <p:sldId id="319" r:id="rId26"/>
+    <p:sldId id="675" r:id="rId2"/>
+    <p:sldId id="342" r:id="rId3"/>
+    <p:sldId id="689" r:id="rId4"/>
+    <p:sldId id="312" r:id="rId5"/>
+    <p:sldId id="339" r:id="rId6"/>
+    <p:sldId id="315" r:id="rId7"/>
+    <p:sldId id="690" r:id="rId8"/>
+    <p:sldId id="688" r:id="rId9"/>
+    <p:sldId id="322" r:id="rId10"/>
+    <p:sldId id="324" r:id="rId11"/>
+    <p:sldId id="323" r:id="rId12"/>
+    <p:sldId id="691" r:id="rId13"/>
+    <p:sldId id="692" r:id="rId14"/>
+    <p:sldId id="373" r:id="rId15"/>
+    <p:sldId id="316" r:id="rId16"/>
+    <p:sldId id="687" r:id="rId17"/>
+    <p:sldId id="693" r:id="rId18"/>
+    <p:sldId id="314" r:id="rId19"/>
+    <p:sldId id="398" r:id="rId20"/>
+    <p:sldId id="317" r:id="rId21"/>
+    <p:sldId id="374" r:id="rId22"/>
+    <p:sldId id="375" r:id="rId23"/>
+    <p:sldId id="376" r:id="rId24"/>
+    <p:sldId id="330" r:id="rId25"/>
+    <p:sldId id="318" r:id="rId26"/>
+    <p:sldId id="319" r:id="rId27"/>
   </p:sldIdLst>
   <p:sldSz cx="12192000" cy="6858000"/>
   <p:notesSz cx="6858000" cy="9144000"/>
@@ -221,7 +222,7 @@
           <a:p>
             <a:fld id="{00524019-D21D-4F04-AF43-2AEEE922364E}" type="datetimeFigureOut">
               <a:rPr lang="ko-KR" altLang="en-US" smtClean="0"/>
-              <a:t>2024-05-17</a:t>
+              <a:t>2024-05-20</a:t>
             </a:fld>
             <a:endParaRPr lang="ko-KR" altLang="en-US"/>
           </a:p>
@@ -543,7 +544,7 @@
             <a:spLocks noGrp="1"/>
           </p:cNvSpPr>
           <p:nvPr>
-            <p:ph type="sldNum" sz="quarter" idx="5"/>
+            <p:ph type="sldNum" sz="quarter" idx="10"/>
           </p:nvPr>
         </p:nvSpPr>
         <p:spPr/>
@@ -553,7 +554,7 @@
           <a:p>
             <a:fld id="{C09E5BFC-1559-42F1-8940-AB342D56BF02}" type="slidenum">
               <a:rPr lang="ko-KR" altLang="en-US" smtClean="0"/>
-              <a:t>3</a:t>
+              <a:t>1</a:t>
             </a:fld>
             <a:endParaRPr lang="ko-KR" altLang="en-US"/>
           </a:p>
@@ -562,7 +563,7 @@
     </p:spTree>
     <p:extLst>
       <p:ext uri="{BB962C8B-B14F-4D97-AF65-F5344CB8AC3E}">
-        <p14:creationId xmlns:p14="http://schemas.microsoft.com/office/powerpoint/2010/main" val="2782272883"/>
+        <p14:creationId xmlns:p14="http://schemas.microsoft.com/office/powerpoint/2010/main" val="4075598355"/>
       </p:ext>
     </p:extLst>
   </p:cSld>
@@ -616,7 +617,515 @@
           <a:bodyPr/>
           <a:lstStyle/>
           <a:p>
-            <a:endParaRPr lang="ko-KR" altLang="en-US" dirty="0"/>
+            <a:pPr algn="l">
+              <a:buFont typeface="+mj-lt"/>
+              <a:buAutoNum type="arabicPeriod"/>
+            </a:pPr>
+            <a:r>
+              <a:rPr lang="en-US" altLang="ko-KR" b="1" i="0" dirty="0">
+                <a:solidFill>
+                  <a:srgbClr val="0D0D0D"/>
+                </a:solidFill>
+                <a:effectLst/>
+                <a:highlight>
+                  <a:srgbClr val="FFFFFF"/>
+                </a:highlight>
+                <a:latin typeface="Söhne"/>
+              </a:rPr>
+              <a:t>transition-property</a:t>
+            </a:r>
+            <a:r>
+              <a:rPr lang="en-US" altLang="ko-KR" b="0" i="0" dirty="0">
+                <a:solidFill>
+                  <a:srgbClr val="0D0D0D"/>
+                </a:solidFill>
+                <a:effectLst/>
+                <a:highlight>
+                  <a:srgbClr val="FFFFFF"/>
+                </a:highlight>
+                <a:latin typeface="Söhne"/>
+              </a:rPr>
+              <a:t>: </a:t>
+            </a:r>
+            <a:r>
+              <a:rPr lang="ko-KR" altLang="en-US" b="0" i="0" dirty="0">
+                <a:solidFill>
+                  <a:srgbClr val="0D0D0D"/>
+                </a:solidFill>
+                <a:effectLst/>
+                <a:highlight>
+                  <a:srgbClr val="FFFFFF"/>
+                </a:highlight>
+                <a:latin typeface="Söhne"/>
+              </a:rPr>
+              <a:t>애니메이션 효과를 줄 속성 </a:t>
+            </a:r>
+            <a:r>
+              <a:rPr lang="en-US" altLang="ko-KR" b="0" i="0" dirty="0">
+                <a:solidFill>
+                  <a:srgbClr val="0D0D0D"/>
+                </a:solidFill>
+                <a:effectLst/>
+                <a:highlight>
+                  <a:srgbClr val="FFFFFF"/>
+                </a:highlight>
+                <a:latin typeface="Söhne"/>
+              </a:rPr>
+              <a:t>(</a:t>
+            </a:r>
+            <a:r>
+              <a:rPr lang="ko-KR" altLang="en-US" b="0" i="0" dirty="0">
+                <a:solidFill>
+                  <a:srgbClr val="0D0D0D"/>
+                </a:solidFill>
+                <a:effectLst/>
+                <a:highlight>
+                  <a:srgbClr val="FFFFFF"/>
+                </a:highlight>
+                <a:latin typeface="Söhne"/>
+              </a:rPr>
+              <a:t>여기서는 </a:t>
+            </a:r>
+            <a:r>
+              <a:rPr lang="en-US" altLang="ko-KR" b="0" i="0" dirty="0">
+                <a:solidFill>
+                  <a:srgbClr val="0D0D0D"/>
+                </a:solidFill>
+                <a:effectLst/>
+                <a:highlight>
+                  <a:srgbClr val="FFFFFF"/>
+                </a:highlight>
+                <a:latin typeface="Söhne"/>
+              </a:rPr>
+              <a:t>transform).</a:t>
+            </a:r>
+          </a:p>
+          <a:p>
+            <a:pPr algn="l">
+              <a:buFont typeface="+mj-lt"/>
+              <a:buAutoNum type="arabicPeriod"/>
+            </a:pPr>
+            <a:r>
+              <a:rPr lang="en-US" altLang="ko-KR" b="1" i="0" dirty="0">
+                <a:solidFill>
+                  <a:srgbClr val="0D0D0D"/>
+                </a:solidFill>
+                <a:effectLst/>
+                <a:highlight>
+                  <a:srgbClr val="FFFFFF"/>
+                </a:highlight>
+                <a:latin typeface="Söhne"/>
+              </a:rPr>
+              <a:t>transition-duration</a:t>
+            </a:r>
+            <a:r>
+              <a:rPr lang="en-US" altLang="ko-KR" b="0" i="0" dirty="0">
+                <a:solidFill>
+                  <a:srgbClr val="0D0D0D"/>
+                </a:solidFill>
+                <a:effectLst/>
+                <a:highlight>
+                  <a:srgbClr val="FFFFFF"/>
+                </a:highlight>
+                <a:latin typeface="Söhne"/>
+              </a:rPr>
+              <a:t>: </a:t>
+            </a:r>
+            <a:r>
+              <a:rPr lang="ko-KR" altLang="en-US" b="0" i="0" dirty="0">
+                <a:solidFill>
+                  <a:srgbClr val="0D0D0D"/>
+                </a:solidFill>
+                <a:effectLst/>
+                <a:highlight>
+                  <a:srgbClr val="FFFFFF"/>
+                </a:highlight>
+                <a:latin typeface="Söhne"/>
+              </a:rPr>
+              <a:t>애니메이션이 완료되는 시간 </a:t>
+            </a:r>
+            <a:r>
+              <a:rPr lang="en-US" altLang="ko-KR" b="0" i="0" dirty="0">
+                <a:solidFill>
+                  <a:srgbClr val="0D0D0D"/>
+                </a:solidFill>
+                <a:effectLst/>
+                <a:highlight>
+                  <a:srgbClr val="FFFFFF"/>
+                </a:highlight>
+                <a:latin typeface="Söhne"/>
+              </a:rPr>
+              <a:t>(</a:t>
+            </a:r>
+            <a:r>
+              <a:rPr lang="ko-KR" altLang="en-US" b="0" i="0" dirty="0">
+                <a:solidFill>
+                  <a:srgbClr val="0D0D0D"/>
+                </a:solidFill>
+                <a:effectLst/>
+                <a:highlight>
+                  <a:srgbClr val="FFFFFF"/>
+                </a:highlight>
+                <a:latin typeface="Söhne"/>
+              </a:rPr>
+              <a:t>여기서는 </a:t>
+            </a:r>
+            <a:r>
+              <a:rPr lang="en-US" altLang="ko-KR" b="0" i="0" dirty="0">
+                <a:solidFill>
+                  <a:srgbClr val="0D0D0D"/>
+                </a:solidFill>
+                <a:effectLst/>
+                <a:highlight>
+                  <a:srgbClr val="FFFFFF"/>
+                </a:highlight>
+                <a:latin typeface="Söhne"/>
+              </a:rPr>
+              <a:t>1s).</a:t>
+            </a:r>
+          </a:p>
+          <a:p>
+            <a:pPr algn="l">
+              <a:buFont typeface="+mj-lt"/>
+              <a:buAutoNum type="arabicPeriod"/>
+            </a:pPr>
+            <a:r>
+              <a:rPr lang="en-US" altLang="ko-KR" b="1" i="0" dirty="0">
+                <a:solidFill>
+                  <a:srgbClr val="0D0D0D"/>
+                </a:solidFill>
+                <a:effectLst/>
+                <a:highlight>
+                  <a:srgbClr val="FFFFFF"/>
+                </a:highlight>
+                <a:latin typeface="Söhne"/>
+              </a:rPr>
+              <a:t>transition-timing-function</a:t>
+            </a:r>
+            <a:r>
+              <a:rPr lang="ko-KR" altLang="en-US" b="0" i="0" dirty="0">
+                <a:solidFill>
+                  <a:srgbClr val="0D0D0D"/>
+                </a:solidFill>
+                <a:effectLst/>
+                <a:highlight>
+                  <a:srgbClr val="FFFFFF"/>
+                </a:highlight>
+                <a:latin typeface="Söhne"/>
+              </a:rPr>
+              <a:t> </a:t>
+            </a:r>
+            <a:r>
+              <a:rPr lang="en-US" altLang="ko-KR" b="0" i="0" dirty="0">
+                <a:solidFill>
+                  <a:srgbClr val="0D0D0D"/>
+                </a:solidFill>
+                <a:effectLst/>
+                <a:highlight>
+                  <a:srgbClr val="FFFFFF"/>
+                </a:highlight>
+                <a:latin typeface="Söhne"/>
+              </a:rPr>
+              <a:t>(</a:t>
+            </a:r>
+            <a:r>
+              <a:rPr lang="ko-KR" altLang="en-US" b="0" i="0" dirty="0">
+                <a:solidFill>
+                  <a:srgbClr val="0D0D0D"/>
+                </a:solidFill>
+                <a:effectLst/>
+                <a:highlight>
+                  <a:srgbClr val="FFFFFF"/>
+                </a:highlight>
+                <a:latin typeface="Söhne"/>
+              </a:rPr>
+              <a:t>선택 사항</a:t>
+            </a:r>
+            <a:r>
+              <a:rPr lang="en-US" altLang="ko-KR" b="0" i="0" dirty="0">
+                <a:solidFill>
+                  <a:srgbClr val="0D0D0D"/>
+                </a:solidFill>
+                <a:effectLst/>
+                <a:highlight>
+                  <a:srgbClr val="FFFFFF"/>
+                </a:highlight>
+                <a:latin typeface="Söhne"/>
+              </a:rPr>
+              <a:t>): </a:t>
+            </a:r>
+            <a:r>
+              <a:rPr lang="ko-KR" altLang="en-US" b="0" i="0" dirty="0">
+                <a:solidFill>
+                  <a:srgbClr val="0D0D0D"/>
+                </a:solidFill>
+                <a:effectLst/>
+                <a:highlight>
+                  <a:srgbClr val="FFFFFF"/>
+                </a:highlight>
+                <a:latin typeface="Söhne"/>
+              </a:rPr>
+              <a:t>애니메이션 속도의 변화를 정의 </a:t>
+            </a:r>
+            <a:r>
+              <a:rPr lang="en-US" altLang="ko-KR" b="0" i="0" dirty="0">
+                <a:solidFill>
+                  <a:srgbClr val="0D0D0D"/>
+                </a:solidFill>
+                <a:effectLst/>
+                <a:highlight>
+                  <a:srgbClr val="FFFFFF"/>
+                </a:highlight>
+                <a:latin typeface="Söhne"/>
+              </a:rPr>
+              <a:t>(</a:t>
+            </a:r>
+            <a:r>
+              <a:rPr lang="ko-KR" altLang="en-US" b="0" i="0" dirty="0">
+                <a:solidFill>
+                  <a:srgbClr val="0D0D0D"/>
+                </a:solidFill>
+                <a:effectLst/>
+                <a:highlight>
+                  <a:srgbClr val="FFFFFF"/>
+                </a:highlight>
+                <a:latin typeface="Söhne"/>
+              </a:rPr>
+              <a:t>기본값은 </a:t>
+            </a:r>
+            <a:r>
+              <a:rPr lang="en-US" altLang="ko-KR" b="0" i="0" dirty="0">
+                <a:solidFill>
+                  <a:srgbClr val="0D0D0D"/>
+                </a:solidFill>
+                <a:effectLst/>
+                <a:highlight>
+                  <a:srgbClr val="FFFFFF"/>
+                </a:highlight>
+                <a:latin typeface="Söhne"/>
+              </a:rPr>
+              <a:t>ease). – </a:t>
+            </a:r>
+            <a:r>
+              <a:rPr lang="ko-KR" altLang="en-US" b="0" i="0" dirty="0" err="1">
+                <a:solidFill>
+                  <a:srgbClr val="0D0D0D"/>
+                </a:solidFill>
+                <a:effectLst/>
+                <a:highlight>
+                  <a:srgbClr val="FFFFFF"/>
+                </a:highlight>
+                <a:latin typeface="Söhne"/>
+              </a:rPr>
+              <a:t>느렸다가</a:t>
+            </a:r>
+            <a:r>
+              <a:rPr lang="ko-KR" altLang="en-US" b="0" i="0" dirty="0">
+                <a:solidFill>
+                  <a:srgbClr val="0D0D0D"/>
+                </a:solidFill>
+                <a:effectLst/>
+                <a:highlight>
+                  <a:srgbClr val="FFFFFF"/>
+                </a:highlight>
+                <a:latin typeface="Söhne"/>
+              </a:rPr>
+              <a:t> 빨라지게</a:t>
+            </a:r>
+            <a:r>
+              <a:rPr lang="en-US" altLang="ko-KR" b="0" i="0" dirty="0">
+                <a:solidFill>
+                  <a:srgbClr val="0D0D0D"/>
+                </a:solidFill>
+                <a:effectLst/>
+                <a:highlight>
+                  <a:srgbClr val="FFFFFF"/>
+                </a:highlight>
+                <a:latin typeface="Söhne"/>
+              </a:rPr>
+              <a:t>, </a:t>
+            </a:r>
+            <a:r>
+              <a:rPr lang="ko-KR" altLang="en-US" b="0" i="0" dirty="0">
+                <a:solidFill>
+                  <a:srgbClr val="0D0D0D"/>
+                </a:solidFill>
+                <a:effectLst/>
+                <a:highlight>
+                  <a:srgbClr val="FFFFFF"/>
+                </a:highlight>
+                <a:latin typeface="Söhne"/>
+              </a:rPr>
+              <a:t>빨라졌다 느려지게</a:t>
+            </a:r>
+            <a:endParaRPr lang="en-US" altLang="ko-KR" b="0" i="0" dirty="0">
+              <a:solidFill>
+                <a:srgbClr val="0D0D0D"/>
+              </a:solidFill>
+              <a:effectLst/>
+              <a:highlight>
+                <a:srgbClr val="FFFFFF"/>
+              </a:highlight>
+              <a:latin typeface="Söhne"/>
+            </a:endParaRPr>
+          </a:p>
+          <a:p>
+            <a:pPr algn="l">
+              <a:buFont typeface="+mj-lt"/>
+              <a:buAutoNum type="arabicPeriod"/>
+            </a:pPr>
+            <a:r>
+              <a:rPr lang="en-US" altLang="ko-KR" b="1" i="0" dirty="0">
+                <a:solidFill>
+                  <a:srgbClr val="0D0D0D"/>
+                </a:solidFill>
+                <a:effectLst/>
+                <a:highlight>
+                  <a:srgbClr val="FFFFFF"/>
+                </a:highlight>
+                <a:latin typeface="Söhne"/>
+              </a:rPr>
+              <a:t>transition-delay</a:t>
+            </a:r>
+            <a:r>
+              <a:rPr lang="ko-KR" altLang="en-US" b="0" i="0" dirty="0">
+                <a:solidFill>
+                  <a:srgbClr val="0D0D0D"/>
+                </a:solidFill>
+                <a:effectLst/>
+                <a:highlight>
+                  <a:srgbClr val="FFFFFF"/>
+                </a:highlight>
+                <a:latin typeface="Söhne"/>
+              </a:rPr>
+              <a:t> </a:t>
+            </a:r>
+            <a:r>
+              <a:rPr lang="en-US" altLang="ko-KR" b="0" i="0" dirty="0">
+                <a:solidFill>
+                  <a:srgbClr val="0D0D0D"/>
+                </a:solidFill>
+                <a:effectLst/>
+                <a:highlight>
+                  <a:srgbClr val="FFFFFF"/>
+                </a:highlight>
+                <a:latin typeface="Söhne"/>
+              </a:rPr>
+              <a:t>(</a:t>
+            </a:r>
+            <a:r>
+              <a:rPr lang="ko-KR" altLang="en-US" b="0" i="0" dirty="0">
+                <a:solidFill>
+                  <a:srgbClr val="0D0D0D"/>
+                </a:solidFill>
+                <a:effectLst/>
+                <a:highlight>
+                  <a:srgbClr val="FFFFFF"/>
+                </a:highlight>
+                <a:latin typeface="Söhne"/>
+              </a:rPr>
+              <a:t>선택 사항</a:t>
+            </a:r>
+            <a:r>
+              <a:rPr lang="en-US" altLang="ko-KR" b="0" i="0" dirty="0">
+                <a:solidFill>
+                  <a:srgbClr val="0D0D0D"/>
+                </a:solidFill>
+                <a:effectLst/>
+                <a:highlight>
+                  <a:srgbClr val="FFFFFF"/>
+                </a:highlight>
+                <a:latin typeface="Söhne"/>
+              </a:rPr>
+              <a:t>): </a:t>
+            </a:r>
+            <a:r>
+              <a:rPr lang="ko-KR" altLang="en-US" b="0" i="0" dirty="0">
+                <a:solidFill>
+                  <a:srgbClr val="0D0D0D"/>
+                </a:solidFill>
+                <a:effectLst/>
+                <a:highlight>
+                  <a:srgbClr val="FFFFFF"/>
+                </a:highlight>
+                <a:latin typeface="Söhne"/>
+              </a:rPr>
+              <a:t>애니메이션이 시작되기 전의 지연 시간 </a:t>
+            </a:r>
+            <a:r>
+              <a:rPr lang="en-US" altLang="ko-KR" b="0" i="0" dirty="0">
+                <a:solidFill>
+                  <a:srgbClr val="0D0D0D"/>
+                </a:solidFill>
+                <a:effectLst/>
+                <a:highlight>
+                  <a:srgbClr val="FFFFFF"/>
+                </a:highlight>
+                <a:latin typeface="Söhne"/>
+              </a:rPr>
+              <a:t>(</a:t>
+            </a:r>
+            <a:r>
+              <a:rPr lang="ko-KR" altLang="en-US" b="0" i="0" dirty="0">
+                <a:solidFill>
+                  <a:srgbClr val="0D0D0D"/>
+                </a:solidFill>
+                <a:effectLst/>
+                <a:highlight>
+                  <a:srgbClr val="FFFFFF"/>
+                </a:highlight>
+                <a:latin typeface="Söhne"/>
+              </a:rPr>
+              <a:t>기본값은 </a:t>
+            </a:r>
+            <a:r>
+              <a:rPr lang="en-US" altLang="ko-KR" b="0" i="0" dirty="0">
+                <a:solidFill>
+                  <a:srgbClr val="0D0D0D"/>
+                </a:solidFill>
+                <a:effectLst/>
+                <a:highlight>
+                  <a:srgbClr val="FFFFFF"/>
+                </a:highlight>
+                <a:latin typeface="Söhne"/>
+              </a:rPr>
+              <a:t>0s).</a:t>
+            </a:r>
+          </a:p>
+          <a:p>
+            <a:pPr algn="l">
+              <a:buFont typeface="+mj-lt"/>
+              <a:buAutoNum type="arabicPeriod"/>
+            </a:pPr>
+            <a:endParaRPr lang="en-US" altLang="ko-KR" b="0" i="0" dirty="0">
+              <a:solidFill>
+                <a:srgbClr val="0D0D0D"/>
+              </a:solidFill>
+              <a:effectLst/>
+              <a:highlight>
+                <a:srgbClr val="FFFFFF"/>
+              </a:highlight>
+              <a:latin typeface="Söhne"/>
+            </a:endParaRPr>
+          </a:p>
+          <a:p>
+            <a:pPr algn="l">
+              <a:buFont typeface="+mj-lt"/>
+              <a:buAutoNum type="arabicPeriod"/>
+            </a:pPr>
+            <a:r>
+              <a:rPr lang="en-US" altLang="ko-KR" b="0" i="0" dirty="0">
+                <a:solidFill>
+                  <a:srgbClr val="0D0D0D"/>
+                </a:solidFill>
+                <a:effectLst/>
+                <a:highlight>
+                  <a:srgbClr val="FFFFFF"/>
+                </a:highlight>
+                <a:latin typeface="Söhne"/>
+              </a:rPr>
+              <a:t>https://developer.mozilla.org/en-US/docs/Web/CSS/transition-timing-function</a:t>
+            </a:r>
           </a:p>
         </p:txBody>
       </p:sp>
@@ -646,7 +1155,7 @@
     </p:spTree>
     <p:extLst>
       <p:ext uri="{BB962C8B-B14F-4D97-AF65-F5344CB8AC3E}">
-        <p14:creationId xmlns:p14="http://schemas.microsoft.com/office/powerpoint/2010/main" val="637346648"/>
+        <p14:creationId xmlns:p14="http://schemas.microsoft.com/office/powerpoint/2010/main" val="2770638098"/>
       </p:ext>
     </p:extLst>
   </p:cSld>
@@ -730,7 +1239,7 @@
     </p:spTree>
     <p:extLst>
       <p:ext uri="{BB962C8B-B14F-4D97-AF65-F5344CB8AC3E}">
-        <p14:creationId xmlns:p14="http://schemas.microsoft.com/office/powerpoint/2010/main" val="3007118491"/>
+        <p14:creationId xmlns:p14="http://schemas.microsoft.com/office/powerpoint/2010/main" val="637346648"/>
       </p:ext>
     </p:extLst>
   </p:cSld>
@@ -784,14 +1293,6 @@
           <a:bodyPr/>
           <a:lstStyle/>
           <a:p>
-            <a:r>
-              <a:rPr lang="ko-KR" altLang="en-US" dirty="0"/>
-              <a:t>실습 풀이 있음</a:t>
-            </a:r>
-            <a:r>
-              <a:rPr lang="en-US" altLang="ko-KR" dirty="0"/>
-              <a:t>.</a:t>
-            </a:r>
             <a:endParaRPr lang="ko-KR" altLang="en-US" dirty="0"/>
           </a:p>
         </p:txBody>
@@ -822,7 +1323,7 @@
     </p:spTree>
     <p:extLst>
       <p:ext uri="{BB962C8B-B14F-4D97-AF65-F5344CB8AC3E}">
-        <p14:creationId xmlns:p14="http://schemas.microsoft.com/office/powerpoint/2010/main" val="1600196581"/>
+        <p14:creationId xmlns:p14="http://schemas.microsoft.com/office/powerpoint/2010/main" val="3007118491"/>
       </p:ext>
     </p:extLst>
   </p:cSld>
@@ -876,6 +1377,14 @@
           <a:bodyPr/>
           <a:lstStyle/>
           <a:p>
+            <a:r>
+              <a:rPr lang="ko-KR" altLang="en-US" dirty="0"/>
+              <a:t>실습 풀이 있음</a:t>
+            </a:r>
+            <a:r>
+              <a:rPr lang="en-US" altLang="ko-KR" dirty="0"/>
+              <a:t>.</a:t>
+            </a:r>
             <a:endParaRPr lang="ko-KR" altLang="en-US" dirty="0"/>
           </a:p>
         </p:txBody>
@@ -906,7 +1415,7 @@
     </p:spTree>
     <p:extLst>
       <p:ext uri="{BB962C8B-B14F-4D97-AF65-F5344CB8AC3E}">
-        <p14:creationId xmlns:p14="http://schemas.microsoft.com/office/powerpoint/2010/main" val="124899427"/>
+        <p14:creationId xmlns:p14="http://schemas.microsoft.com/office/powerpoint/2010/main" val="1600196581"/>
       </p:ext>
     </p:extLst>
   </p:cSld>
@@ -960,18 +1469,6 @@
           <a:bodyPr/>
           <a:lstStyle/>
           <a:p>
-            <a:r>
-              <a:rPr lang="en-US" altLang="ko-KR" dirty="0"/>
-              <a:t>grid</a:t>
-            </a:r>
-            <a:r>
-              <a:rPr lang="ko-KR" altLang="en-US" dirty="0"/>
-              <a:t> 는 지금 배우기에 너무 어지러우니 나중에 다시 만나요</a:t>
-            </a:r>
-            <a:r>
-              <a:rPr lang="en-US" altLang="ko-KR" dirty="0"/>
-              <a:t>!!</a:t>
-            </a:r>
             <a:endParaRPr lang="ko-KR" altLang="en-US" dirty="0"/>
           </a:p>
         </p:txBody>
@@ -1002,7 +1499,7 @@
     </p:spTree>
     <p:extLst>
       <p:ext uri="{BB962C8B-B14F-4D97-AF65-F5344CB8AC3E}">
-        <p14:creationId xmlns:p14="http://schemas.microsoft.com/office/powerpoint/2010/main" val="1985377475"/>
+        <p14:creationId xmlns:p14="http://schemas.microsoft.com/office/powerpoint/2010/main" val="124899427"/>
       </p:ext>
     </p:extLst>
   </p:cSld>
@@ -1057,64 +1554,18 @@
           <a:lstStyle/>
           <a:p>
             <a:r>
+              <a:rPr lang="en-US" altLang="ko-KR" dirty="0"/>
+              <a:t>grid</a:t>
+            </a:r>
+            <a:r>
               <a:rPr lang="ko-KR" altLang="en-US" dirty="0"/>
-              <a:t>요거는 수업 끝나고 만들어 볼 것</a:t>
+              <a:t> 는 지금 배우기에 너무 어지러우니 나중에 다시 만나요</a:t>
             </a:r>
             <a:r>
               <a:rPr lang="en-US" altLang="ko-KR" dirty="0"/>
-              <a:t>. </a:t>
-            </a:r>
-          </a:p>
-          <a:p>
-            <a:r>
-              <a:rPr lang="ko-KR" altLang="en-US" dirty="0"/>
-              <a:t>윤곽이 잡혀있는 </a:t>
-            </a:r>
-            <a:r>
-              <a:rPr lang="en-US" altLang="ko-KR" dirty="0"/>
-              <a:t>html</a:t>
-            </a:r>
-            <a:r>
-              <a:rPr lang="ko-KR" altLang="en-US" dirty="0"/>
-              <a:t>파일과  </a:t>
-            </a:r>
-            <a:r>
-              <a:rPr lang="en-US" altLang="ko-KR" dirty="0" err="1"/>
-              <a:t>css</a:t>
-            </a:r>
-            <a:r>
-              <a:rPr lang="ko-KR" altLang="en-US" dirty="0"/>
-              <a:t>파일을 드릴 것이니 미리 풀지 말라</a:t>
-            </a:r>
-            <a:r>
-              <a:rPr lang="en-US" altLang="ko-KR" dirty="0"/>
-              <a:t>~~~~~~</a:t>
-            </a:r>
-          </a:p>
-          <a:p>
-            <a:endParaRPr lang="en-US" altLang="ko-KR" dirty="0"/>
-          </a:p>
-          <a:p>
-            <a:r>
-              <a:rPr lang="ko-KR" altLang="en-US" dirty="0"/>
-              <a:t>수업준비</a:t>
-            </a:r>
-            <a:r>
-              <a:rPr lang="en-US" altLang="ko-KR" dirty="0"/>
-              <a:t>/230705/practice/header.html </a:t>
-            </a:r>
-            <a:r>
-              <a:rPr lang="ko-KR" altLang="en-US" dirty="0"/>
-              <a:t>과 </a:t>
-            </a:r>
-            <a:r>
-              <a:rPr lang="en-US" altLang="ko-KR" dirty="0"/>
-              <a:t>header.css </a:t>
-            </a:r>
-            <a:r>
-              <a:rPr lang="ko-KR" altLang="en-US" dirty="0"/>
-              <a:t>전달하기</a:t>
-            </a:r>
+              <a:t>!!</a:t>
+            </a:r>
+            <a:endParaRPr lang="ko-KR" altLang="en-US" dirty="0"/>
           </a:p>
         </p:txBody>
       </p:sp>
@@ -1125,15 +1576,15 @@
             <a:spLocks noGrp="1"/>
           </p:cNvSpPr>
           <p:nvPr>
-            <p:ph type="sldNum" sz="quarter" idx="10"/>
-          </p:nvPr>
-        </p:nvSpPr>
-        <p:spPr/>
-        <p:txBody>
-          <a:bodyPr/>
-          <a:lstStyle/>
-          <a:p>
-            <a:fld id="{A55743F5-9E7E-4395-8C78-F5A3CC3D6840}" type="slidenum">
+            <p:ph type="sldNum" sz="quarter" idx="5"/>
+          </p:nvPr>
+        </p:nvSpPr>
+        <p:spPr/>
+        <p:txBody>
+          <a:bodyPr/>
+          <a:lstStyle/>
+          <a:p>
+            <a:fld id="{C09E5BFC-1559-42F1-8940-AB342D56BF02}" type="slidenum">
               <a:rPr lang="ko-KR" altLang="en-US" smtClean="0"/>
               <a:t>18</a:t>
             </a:fld>
@@ -1144,7 +1595,7 @@
     </p:spTree>
     <p:extLst>
       <p:ext uri="{BB962C8B-B14F-4D97-AF65-F5344CB8AC3E}">
-        <p14:creationId xmlns:p14="http://schemas.microsoft.com/office/powerpoint/2010/main" val="864912781"/>
+        <p14:creationId xmlns:p14="http://schemas.microsoft.com/office/powerpoint/2010/main" val="1985377475"/>
       </p:ext>
     </p:extLst>
   </p:cSld>
@@ -1198,7 +1649,65 @@
           <a:bodyPr/>
           <a:lstStyle/>
           <a:p>
-            <a:endParaRPr lang="ko-KR" altLang="en-US" dirty="0"/>
+            <a:r>
+              <a:rPr lang="ko-KR" altLang="en-US" dirty="0"/>
+              <a:t>요거는 수업 끝나고 만들어 볼 것</a:t>
+            </a:r>
+            <a:r>
+              <a:rPr lang="en-US" altLang="ko-KR" dirty="0"/>
+              <a:t>. </a:t>
+            </a:r>
+          </a:p>
+          <a:p>
+            <a:r>
+              <a:rPr lang="ko-KR" altLang="en-US" dirty="0"/>
+              <a:t>윤곽이 잡혀있는 </a:t>
+            </a:r>
+            <a:r>
+              <a:rPr lang="en-US" altLang="ko-KR" dirty="0"/>
+              <a:t>html</a:t>
+            </a:r>
+            <a:r>
+              <a:rPr lang="ko-KR" altLang="en-US" dirty="0"/>
+              <a:t>파일과  </a:t>
+            </a:r>
+            <a:r>
+              <a:rPr lang="en-US" altLang="ko-KR" dirty="0" err="1"/>
+              <a:t>css</a:t>
+            </a:r>
+            <a:r>
+              <a:rPr lang="ko-KR" altLang="en-US" dirty="0"/>
+              <a:t>파일을 드릴 것이니 미리 풀지 말라</a:t>
+            </a:r>
+            <a:r>
+              <a:rPr lang="en-US" altLang="ko-KR" dirty="0"/>
+              <a:t>~~~~~~</a:t>
+            </a:r>
+          </a:p>
+          <a:p>
+            <a:endParaRPr lang="en-US" altLang="ko-KR" dirty="0"/>
+          </a:p>
+          <a:p>
+            <a:r>
+              <a:rPr lang="ko-KR" altLang="en-US" dirty="0"/>
+              <a:t>수업준비</a:t>
+            </a:r>
+            <a:r>
+              <a:rPr lang="en-US" altLang="ko-KR" dirty="0"/>
+              <a:t>/230705/practice/header.html </a:t>
+            </a:r>
+            <a:r>
+              <a:rPr lang="ko-KR" altLang="en-US" dirty="0"/>
+              <a:t>과 </a:t>
+            </a:r>
+            <a:r>
+              <a:rPr lang="en-US" altLang="ko-KR" dirty="0"/>
+              <a:t>header.css </a:t>
+            </a:r>
+            <a:r>
+              <a:rPr lang="ko-KR" altLang="en-US" dirty="0"/>
+              <a:t>전달하기</a:t>
+            </a:r>
           </a:p>
         </p:txBody>
       </p:sp>
@@ -1209,17 +1718,17 @@
             <a:spLocks noGrp="1"/>
           </p:cNvSpPr>
           <p:nvPr>
-            <p:ph type="sldNum" sz="quarter" idx="5"/>
-          </p:nvPr>
-        </p:nvSpPr>
-        <p:spPr/>
-        <p:txBody>
-          <a:bodyPr/>
-          <a:lstStyle/>
-          <a:p>
-            <a:fld id="{C09E5BFC-1559-42F1-8940-AB342D56BF02}" type="slidenum">
+            <p:ph type="sldNum" sz="quarter" idx="10"/>
+          </p:nvPr>
+        </p:nvSpPr>
+        <p:spPr/>
+        <p:txBody>
+          <a:bodyPr/>
+          <a:lstStyle/>
+          <a:p>
+            <a:fld id="{A55743F5-9E7E-4395-8C78-F5A3CC3D6840}" type="slidenum">
               <a:rPr lang="ko-KR" altLang="en-US" smtClean="0"/>
-              <a:t>20</a:t>
+              <a:t>19</a:t>
             </a:fld>
             <a:endParaRPr lang="ko-KR" altLang="en-US"/>
           </a:p>
@@ -1228,7 +1737,7 @@
     </p:spTree>
     <p:extLst>
       <p:ext uri="{BB962C8B-B14F-4D97-AF65-F5344CB8AC3E}">
-        <p14:creationId xmlns:p14="http://schemas.microsoft.com/office/powerpoint/2010/main" val="1031924123"/>
+        <p14:creationId xmlns:p14="http://schemas.microsoft.com/office/powerpoint/2010/main" val="864912781"/>
       </p:ext>
     </p:extLst>
   </p:cSld>
@@ -1282,127 +1791,6 @@
           <a:bodyPr/>
           <a:lstStyle/>
           <a:p>
-            <a:r>
-              <a:rPr lang="ko-KR" altLang="en-US" dirty="0"/>
-              <a:t>우리가 만들어주는 이름</a:t>
-            </a:r>
-            <a:endParaRPr lang="en-US" altLang="ko-KR" dirty="0"/>
-          </a:p>
-          <a:p>
-            <a:r>
-              <a:rPr lang="ko-KR" altLang="en-US" dirty="0"/>
-              <a:t>지속시간 </a:t>
-            </a:r>
-            <a:r>
-              <a:rPr lang="en-US" altLang="ko-KR" dirty="0"/>
-              <a:t>~s</a:t>
-            </a:r>
-            <a:r>
-              <a:rPr lang="en-US" altLang="ko-KR" baseline="0" dirty="0"/>
-              <a:t> </a:t>
-            </a:r>
-            <a:r>
-              <a:rPr lang="ko-KR" altLang="en-US" baseline="0" dirty="0"/>
-              <a:t>의 몇 초 형태</a:t>
-            </a:r>
-            <a:endParaRPr lang="en-US" altLang="ko-KR" baseline="0" dirty="0"/>
-          </a:p>
-          <a:p>
-            <a:r>
-              <a:rPr lang="ko-KR" altLang="en-US" baseline="0" dirty="0"/>
-              <a:t>진행 형태 </a:t>
-            </a:r>
-            <a:r>
-              <a:rPr lang="en-US" altLang="ko-KR" baseline="0" dirty="0"/>
-              <a:t>: </a:t>
-            </a:r>
-            <a:r>
-              <a:rPr lang="ko-KR" altLang="en-US" baseline="0" dirty="0"/>
-              <a:t>시간 함수</a:t>
-            </a:r>
-            <a:r>
-              <a:rPr lang="en-US" altLang="ko-KR" baseline="0" dirty="0"/>
-              <a:t>, transition </a:t>
-            </a:r>
-            <a:r>
-              <a:rPr lang="ko-KR" altLang="en-US" baseline="0" dirty="0"/>
-              <a:t>의 </a:t>
-            </a:r>
-            <a:r>
-              <a:rPr lang="en-US" altLang="ko-KR" baseline="0" dirty="0"/>
-              <a:t>timing-function</a:t>
-            </a:r>
-            <a:r>
-              <a:rPr lang="ko-KR" altLang="en-US" baseline="0" dirty="0"/>
-              <a:t>과 동일</a:t>
-            </a:r>
-            <a:r>
-              <a:rPr lang="en-US" altLang="ko-KR" baseline="0" dirty="0"/>
-              <a:t>. </a:t>
-            </a:r>
-            <a:r>
-              <a:rPr lang="en-US" altLang="ko-KR" baseline="0" dirty="0" err="1"/>
-              <a:t>animatio</a:t>
-            </a:r>
-            <a:r>
-              <a:rPr lang="ko-KR" altLang="en-US" baseline="0" dirty="0"/>
-              <a:t>의 길이는 </a:t>
-            </a:r>
-            <a:r>
-              <a:rPr lang="en-US" altLang="ko-KR" baseline="0" dirty="0" err="1"/>
-              <a:t>transitio</a:t>
-            </a:r>
-            <a:r>
-              <a:rPr lang="ko-KR" altLang="en-US" baseline="0" dirty="0"/>
-              <a:t>과 다르게 지속 시간이 긴 경우가 많기 때문에 움직임이 </a:t>
-            </a:r>
-            <a:r>
-              <a:rPr lang="en-US" altLang="ko-KR" baseline="0" dirty="0"/>
-              <a:t>timing </a:t>
-            </a:r>
-            <a:r>
-              <a:rPr lang="en-US" altLang="ko-KR" baseline="0" dirty="0" err="1"/>
-              <a:t>functio</a:t>
-            </a:r>
-            <a:r>
-              <a:rPr lang="ko-KR" altLang="en-US" baseline="0" dirty="0"/>
-              <a:t>에 따라서 바뀐다</a:t>
-            </a:r>
-            <a:r>
-              <a:rPr lang="en-US" altLang="ko-KR" baseline="0" dirty="0"/>
-              <a:t>. </a:t>
-            </a:r>
-            <a:r>
-              <a:rPr lang="en-US" altLang="ko-KR" baseline="0" dirty="0" err="1"/>
-              <a:t>animaitio</a:t>
-            </a:r>
-            <a:r>
-              <a:rPr lang="ko-KR" altLang="en-US" baseline="0" dirty="0"/>
-              <a:t>에서의 </a:t>
-            </a:r>
-            <a:r>
-              <a:rPr lang="en-US" altLang="ko-KR" baseline="0" dirty="0"/>
-              <a:t>ease linear </a:t>
-            </a:r>
-            <a:r>
-              <a:rPr lang="ko-KR" altLang="en-US" baseline="0" dirty="0"/>
-              <a:t>등의 시간 함수는 꽤 중요한 역할을 함</a:t>
-            </a:r>
-            <a:endParaRPr lang="en-US" altLang="ko-KR" baseline="0" dirty="0"/>
-          </a:p>
-          <a:p>
-            <a:r>
-              <a:rPr lang="ko-KR" altLang="en-US" dirty="0" err="1"/>
-              <a:t>반복횟수</a:t>
-            </a:r>
-            <a:r>
-              <a:rPr lang="ko-KR" altLang="en-US" dirty="0"/>
-              <a:t> </a:t>
-            </a:r>
-            <a:r>
-              <a:rPr lang="en-US" altLang="ko-KR" dirty="0"/>
-              <a:t>(iteration-count)</a:t>
-            </a:r>
             <a:endParaRPr lang="ko-KR" altLang="en-US" dirty="0"/>
           </a:p>
         </p:txBody>
@@ -1414,27 +1802,26 @@
             <a:spLocks noGrp="1"/>
           </p:cNvSpPr>
           <p:nvPr>
-            <p:ph type="sldNum" sz="quarter" idx="10"/>
-          </p:nvPr>
-        </p:nvSpPr>
-        <p:spPr/>
-        <p:txBody>
-          <a:bodyPr/>
-          <a:lstStyle/>
-          <a:p>
-            <a:fld id="{B4FAD15D-3FC6-4EBB-8A1D-F20C53EB7780}" type="slidenum">
+            <p:ph type="sldNum" sz="quarter" idx="5"/>
+          </p:nvPr>
+        </p:nvSpPr>
+        <p:spPr/>
+        <p:txBody>
+          <a:bodyPr/>
+          <a:lstStyle/>
+          <a:p>
+            <a:fld id="{C09E5BFC-1559-42F1-8940-AB342D56BF02}" type="slidenum">
               <a:rPr lang="ko-KR" altLang="en-US" smtClean="0"/>
-              <a:pPr/>
               <a:t>21</a:t>
             </a:fld>
-            <a:endParaRPr lang="ko-KR" altLang="en-US" dirty="0"/>
+            <a:endParaRPr lang="ko-KR" altLang="en-US"/>
           </a:p>
         </p:txBody>
       </p:sp>
     </p:spTree>
     <p:extLst>
       <p:ext uri="{BB962C8B-B14F-4D97-AF65-F5344CB8AC3E}">
-        <p14:creationId xmlns:p14="http://schemas.microsoft.com/office/powerpoint/2010/main" val="2638017959"/>
+        <p14:creationId xmlns:p14="http://schemas.microsoft.com/office/powerpoint/2010/main" val="1031924123"/>
       </p:ext>
     </p:extLst>
   </p:cSld>
@@ -1489,58 +1876,125 @@
           <a:lstStyle/>
           <a:p>
             <a:r>
+              <a:rPr lang="ko-KR" altLang="en-US" dirty="0"/>
+              <a:t>우리가 만들어주는 이름</a:t>
+            </a:r>
+            <a:endParaRPr lang="en-US" altLang="ko-KR" dirty="0"/>
+          </a:p>
+          <a:p>
+            <a:r>
+              <a:rPr lang="ko-KR" altLang="en-US" dirty="0"/>
+              <a:t>지속시간 </a:t>
+            </a:r>
+            <a:r>
+              <a:rPr lang="en-US" altLang="ko-KR" dirty="0"/>
+              <a:t>~s</a:t>
+            </a:r>
+            <a:r>
+              <a:rPr lang="en-US" altLang="ko-KR" baseline="0" dirty="0"/>
+              <a:t> </a:t>
+            </a:r>
+            <a:r>
+              <a:rPr lang="ko-KR" altLang="en-US" baseline="0" dirty="0"/>
+              <a:t>의 몇 초 형태</a:t>
+            </a:r>
+            <a:endParaRPr lang="en-US" altLang="ko-KR" baseline="0" dirty="0"/>
+          </a:p>
+          <a:p>
+            <a:r>
+              <a:rPr lang="ko-KR" altLang="en-US" baseline="0" dirty="0"/>
+              <a:t>진행 형태 </a:t>
+            </a:r>
+            <a:r>
+              <a:rPr lang="en-US" altLang="ko-KR" baseline="0" dirty="0"/>
+              <a:t>: </a:t>
+            </a:r>
+            <a:r>
+              <a:rPr lang="ko-KR" altLang="en-US" baseline="0" dirty="0"/>
+              <a:t>시간 함수</a:t>
+            </a:r>
+            <a:r>
+              <a:rPr lang="en-US" altLang="ko-KR" baseline="0" dirty="0"/>
+              <a:t>, transition </a:t>
+            </a:r>
+            <a:r>
+              <a:rPr lang="ko-KR" altLang="en-US" baseline="0" dirty="0"/>
+              <a:t>의 </a:t>
+            </a:r>
+            <a:r>
+              <a:rPr lang="en-US" altLang="ko-KR" baseline="0" dirty="0"/>
+              <a:t>timing-function</a:t>
+            </a:r>
+            <a:r>
+              <a:rPr lang="ko-KR" altLang="en-US" baseline="0" dirty="0"/>
+              <a:t>과 동일</a:t>
+            </a:r>
+            <a:r>
+              <a:rPr lang="en-US" altLang="ko-KR" baseline="0" dirty="0"/>
+              <a:t>. </a:t>
+            </a:r>
+            <a:r>
+              <a:rPr lang="en-US" altLang="ko-KR" baseline="0" dirty="0" err="1"/>
+              <a:t>animatio</a:t>
+            </a:r>
+            <a:r>
+              <a:rPr lang="ko-KR" altLang="en-US" baseline="0" dirty="0"/>
+              <a:t>의 길이는 </a:t>
+            </a:r>
+            <a:r>
+              <a:rPr lang="en-US" altLang="ko-KR" baseline="0" dirty="0" err="1"/>
+              <a:t>transitio</a:t>
+            </a:r>
+            <a:r>
+              <a:rPr lang="ko-KR" altLang="en-US" baseline="0" dirty="0"/>
+              <a:t>과 다르게 지속 시간이 긴 경우가 많기 때문에 움직임이 </a:t>
+            </a:r>
+            <a:r>
+              <a:rPr lang="en-US" altLang="ko-KR" baseline="0" dirty="0"/>
+              <a:t>timing </a:t>
+            </a:r>
+            <a:r>
+              <a:rPr lang="en-US" altLang="ko-KR" baseline="0" dirty="0" err="1"/>
+              <a:t>functio</a:t>
+            </a:r>
+            <a:r>
+              <a:rPr lang="ko-KR" altLang="en-US" baseline="0" dirty="0"/>
+              <a:t>에 따라서 바뀐다</a:t>
+            </a:r>
+            <a:r>
+              <a:rPr lang="en-US" altLang="ko-KR" baseline="0" dirty="0"/>
+              <a:t>. </a:t>
+            </a:r>
+            <a:r>
+              <a:rPr lang="en-US" altLang="ko-KR" baseline="0" dirty="0" err="1"/>
+              <a:t>animaitio</a:t>
+            </a:r>
+            <a:r>
+              <a:rPr lang="ko-KR" altLang="en-US" baseline="0" dirty="0"/>
+              <a:t>에서의 </a:t>
+            </a:r>
+            <a:r>
+              <a:rPr lang="en-US" altLang="ko-KR" baseline="0" dirty="0"/>
+              <a:t>ease linear </a:t>
+            </a:r>
+            <a:r>
+              <a:rPr lang="ko-KR" altLang="en-US" baseline="0" dirty="0"/>
+              <a:t>등의 시간 함수는 꽤 중요한 역할을 함</a:t>
+            </a:r>
+            <a:endParaRPr lang="en-US" altLang="ko-KR" baseline="0" dirty="0"/>
+          </a:p>
+          <a:p>
+            <a:r>
               <a:rPr lang="ko-KR" altLang="en-US" dirty="0" err="1"/>
-              <a:t>파란글씨</a:t>
+              <a:t>반복횟수</a:t>
             </a:r>
             <a:r>
               <a:rPr lang="ko-KR" altLang="en-US" dirty="0"/>
-              <a:t> 필수 속성 </a:t>
-            </a:r>
-            <a:endParaRPr lang="en-US" altLang="ko-KR" dirty="0"/>
-          </a:p>
-          <a:p>
-            <a:r>
-              <a:rPr lang="ko-KR" altLang="en-US" dirty="0"/>
-              <a:t>까만 글씨 생략 가능 </a:t>
-            </a:r>
-            <a:endParaRPr lang="en-US" altLang="ko-KR" dirty="0"/>
-          </a:p>
-          <a:p>
+              <a:t> </a:t>
+            </a:r>
             <a:r>
               <a:rPr lang="en-US" altLang="ko-KR" dirty="0"/>
-              <a:t>Timing-</a:t>
-            </a:r>
-            <a:r>
-              <a:rPr lang="en-US" altLang="ko-KR" dirty="0" err="1"/>
-              <a:t>funciton</a:t>
-            </a:r>
-            <a:r>
-              <a:rPr lang="ko-KR" altLang="en-US" dirty="0"/>
-              <a:t>은 보통 써주지만 </a:t>
-            </a:r>
-            <a:r>
-              <a:rPr lang="en-US" altLang="ko-KR" dirty="0"/>
-              <a:t>delay</a:t>
-            </a:r>
-            <a:r>
-              <a:rPr lang="ko-KR" altLang="en-US" dirty="0"/>
-              <a:t>랑 </a:t>
-            </a:r>
-            <a:r>
-              <a:rPr lang="en-US" altLang="ko-KR" dirty="0"/>
-              <a:t>direction</a:t>
-            </a:r>
-            <a:r>
-              <a:rPr lang="ko-KR" altLang="en-US" dirty="0"/>
-              <a:t>은 안써주는 경우가 </a:t>
-            </a:r>
-            <a:r>
-              <a:rPr lang="ko-KR" altLang="en-US" dirty="0" err="1"/>
-              <a:t>만타</a:t>
-            </a:r>
-            <a:r>
-              <a:rPr lang="en-US" altLang="ko-KR" dirty="0"/>
-              <a:t>!</a:t>
+              <a:t>(iteration-count)</a:t>
             </a:r>
             <a:endParaRPr lang="ko-KR" altLang="en-US" dirty="0"/>
           </a:p>
@@ -1563,16 +2017,17 @@
           <a:p>
             <a:fld id="{B4FAD15D-3FC6-4EBB-8A1D-F20C53EB7780}" type="slidenum">
               <a:rPr lang="ko-KR" altLang="en-US" smtClean="0"/>
+              <a:pPr/>
               <a:t>22</a:t>
             </a:fld>
-            <a:endParaRPr lang="ko-KR" altLang="en-US"/>
+            <a:endParaRPr lang="ko-KR" altLang="en-US" dirty="0"/>
           </a:p>
         </p:txBody>
       </p:sp>
     </p:spTree>
     <p:extLst>
       <p:ext uri="{BB962C8B-B14F-4D97-AF65-F5344CB8AC3E}">
-        <p14:creationId xmlns:p14="http://schemas.microsoft.com/office/powerpoint/2010/main" val="2277054390"/>
+        <p14:creationId xmlns:p14="http://schemas.microsoft.com/office/powerpoint/2010/main" val="2638017959"/>
       </p:ext>
     </p:extLst>
   </p:cSld>
@@ -1626,410 +2081,62 @@
           <a:bodyPr/>
           <a:lstStyle/>
           <a:p>
-            <a:pPr marL="0" marR="0" lvl="0" indent="0" algn="l" defTabSz="914400" rtl="0" eaLnBrk="1" fontAlgn="auto" latinLnBrk="1" hangingPunct="1">
-              <a:lnSpc>
-                <a:spcPct val="100000"/>
-              </a:lnSpc>
-              <a:spcBef>
-                <a:spcPts val="0"/>
-              </a:spcBef>
-              <a:spcAft>
-                <a:spcPts val="0"/>
-              </a:spcAft>
-              <a:buClrTx/>
-              <a:buSzTx/>
-              <a:buFontTx/>
-              <a:buNone/>
-              <a:tabLst/>
-              <a:defRPr/>
-            </a:pPr>
+            <a:r>
+              <a:rPr lang="ko-KR" altLang="en-US" dirty="0" err="1"/>
+              <a:t>파란글씨</a:t>
+            </a:r>
+            <a:r>
+              <a:rPr lang="ko-KR" altLang="en-US" dirty="0"/>
+              <a:t> 필수 속성 </a:t>
+            </a:r>
+            <a:endParaRPr lang="en-US" altLang="ko-KR" dirty="0"/>
+          </a:p>
+          <a:p>
+            <a:r>
+              <a:rPr lang="ko-KR" altLang="en-US" dirty="0"/>
+              <a:t>까만 글씨 생략 가능 </a:t>
+            </a:r>
+            <a:endParaRPr lang="en-US" altLang="ko-KR" dirty="0"/>
+          </a:p>
+          <a:p>
             <a:r>
               <a:rPr lang="en-US" altLang="ko-KR" dirty="0"/>
-              <a:t>kdt3rd-workspace/03_css/</a:t>
-            </a:r>
-            <a:r>
-              <a:rPr lang="en-US" altLang="ko-KR" b="1" dirty="0"/>
-              <a:t>index10.html </a:t>
-            </a:r>
-          </a:p>
-          <a:p>
-            <a:pPr marL="0" marR="0" lvl="0" indent="0" algn="l" defTabSz="914400" rtl="0" eaLnBrk="1" fontAlgn="auto" latinLnBrk="1" hangingPunct="1">
-              <a:lnSpc>
-                <a:spcPct val="100000"/>
-              </a:lnSpc>
-              <a:spcBef>
-                <a:spcPts val="0"/>
-              </a:spcBef>
-              <a:spcAft>
-                <a:spcPts val="0"/>
-              </a:spcAft>
-              <a:buClrTx/>
-              <a:buSzTx/>
-              <a:buFontTx/>
-              <a:buNone/>
-              <a:tabLst/>
-              <a:defRPr/>
-            </a:pPr>
+              <a:t>Timing-</a:t>
+            </a:r>
+            <a:r>
+              <a:rPr lang="en-US" altLang="ko-KR" dirty="0" err="1"/>
+              <a:t>funciton</a:t>
+            </a:r>
+            <a:r>
+              <a:rPr lang="ko-KR" altLang="en-US" dirty="0"/>
+              <a:t>은 보통 써주지만 </a:t>
+            </a:r>
             <a:r>
               <a:rPr lang="en-US" altLang="ko-KR" dirty="0"/>
-              <a:t>kdt3rd-workspace/03_css/</a:t>
-            </a:r>
-            <a:r>
-              <a:rPr lang="en-US" altLang="ko-KR" b="1" dirty="0"/>
-              <a:t>index10.css</a:t>
-            </a:r>
-          </a:p>
-          <a:p>
-            <a:pPr marL="0" marR="0" lvl="0" indent="0" algn="l" defTabSz="914400" rtl="0" eaLnBrk="1" fontAlgn="auto" latinLnBrk="1" hangingPunct="1">
-              <a:lnSpc>
-                <a:spcPct val="100000"/>
-              </a:lnSpc>
-              <a:spcBef>
-                <a:spcPts val="0"/>
-              </a:spcBef>
-              <a:spcAft>
-                <a:spcPts val="0"/>
-              </a:spcAft>
-              <a:buClrTx/>
-              <a:buSzTx/>
-              <a:buFontTx/>
-              <a:buNone/>
-              <a:tabLst/>
-              <a:defRPr/>
-            </a:pPr>
-            <a:endParaRPr lang="en-US" altLang="ko-KR" b="1" dirty="0"/>
-          </a:p>
-          <a:p>
-            <a:pPr marL="0" marR="0" lvl="0" indent="0" algn="l" defTabSz="914400" rtl="0" eaLnBrk="1" fontAlgn="auto" latinLnBrk="1" hangingPunct="1">
-              <a:lnSpc>
-                <a:spcPct val="100000"/>
-              </a:lnSpc>
-              <a:spcBef>
-                <a:spcPts val="0"/>
-              </a:spcBef>
-              <a:spcAft>
-                <a:spcPts val="0"/>
-              </a:spcAft>
-              <a:buClrTx/>
-              <a:buSzTx/>
-              <a:buFontTx/>
-              <a:buNone/>
-              <a:tabLst/>
-              <a:defRPr/>
-            </a:pPr>
-            <a:endParaRPr lang="en-US" altLang="ko-KR" b="1" dirty="0"/>
-          </a:p>
-          <a:p>
-            <a:pPr marL="0" marR="0" lvl="0" indent="0" algn="l" defTabSz="914400" rtl="0" eaLnBrk="1" fontAlgn="auto" latinLnBrk="1" hangingPunct="1">
-              <a:lnSpc>
-                <a:spcPct val="100000"/>
-              </a:lnSpc>
-              <a:spcBef>
-                <a:spcPts val="0"/>
-              </a:spcBef>
-              <a:spcAft>
-                <a:spcPts val="0"/>
-              </a:spcAft>
-              <a:buClrTx/>
-              <a:buSzTx/>
-              <a:buFontTx/>
-              <a:buNone/>
-              <a:tabLst/>
-              <a:defRPr/>
-            </a:pPr>
-            <a:r>
-              <a:rPr lang="en-US" altLang="ko-KR" b="1" dirty="0"/>
-              <a:t>=============================</a:t>
-            </a:r>
-          </a:p>
-          <a:p>
-            <a:pPr marL="0" marR="0" lvl="0" indent="0" algn="l" defTabSz="914400" rtl="0" eaLnBrk="1" fontAlgn="auto" latinLnBrk="1" hangingPunct="1">
-              <a:lnSpc>
-                <a:spcPct val="100000"/>
-              </a:lnSpc>
-              <a:spcBef>
-                <a:spcPts val="0"/>
-              </a:spcBef>
-              <a:spcAft>
-                <a:spcPts val="0"/>
-              </a:spcAft>
-              <a:buClrTx/>
-              <a:buSzTx/>
-              <a:buFontTx/>
-              <a:buNone/>
-              <a:tabLst/>
-              <a:defRPr/>
-            </a:pPr>
-            <a:r>
-              <a:rPr lang="ko-KR" altLang="en-US" b="1" dirty="0"/>
-              <a:t>다음 페이지 </a:t>
-            </a:r>
-            <a:r>
-              <a:rPr lang="en-US" altLang="ko-KR" b="1" dirty="0"/>
-              <a:t>&gt; </a:t>
-            </a:r>
-            <a:r>
-              <a:rPr lang="ko-KR" altLang="en-US" b="1" dirty="0"/>
-              <a:t>실습 </a:t>
-            </a:r>
-            <a:r>
-              <a:rPr lang="en-US" altLang="ko-KR" b="1" dirty="0"/>
-              <a:t>10</a:t>
-            </a:r>
-          </a:p>
-          <a:p>
-            <a:pPr marL="0" marR="0" lvl="0" indent="0" algn="l" defTabSz="914400" rtl="0" eaLnBrk="1" fontAlgn="auto" latinLnBrk="1" hangingPunct="1">
-              <a:lnSpc>
-                <a:spcPct val="100000"/>
-              </a:lnSpc>
-              <a:spcBef>
-                <a:spcPts val="0"/>
-              </a:spcBef>
-              <a:spcAft>
-                <a:spcPts val="0"/>
-              </a:spcAft>
-              <a:buClrTx/>
-              <a:buSzTx/>
-              <a:buFontTx/>
-              <a:buNone/>
-              <a:tabLst/>
-              <a:defRPr/>
-            </a:pPr>
+              <a:t>delay</a:t>
+            </a:r>
+            <a:r>
+              <a:rPr lang="ko-KR" altLang="en-US" dirty="0"/>
+              <a:t>랑 </a:t>
+            </a:r>
             <a:r>
               <a:rPr lang="en-US" altLang="ko-KR" dirty="0"/>
-              <a:t>kdt3rd-workspace/03_css/</a:t>
-            </a:r>
-            <a:r>
-              <a:rPr lang="en-US" altLang="ko-KR" b="1" dirty="0"/>
-              <a:t>practice10.html </a:t>
-            </a:r>
-          </a:p>
-          <a:p>
-            <a:pPr marL="0" marR="0" lvl="0" indent="0" algn="l" defTabSz="914400" rtl="0" eaLnBrk="1" fontAlgn="auto" latinLnBrk="1" hangingPunct="1">
-              <a:lnSpc>
-                <a:spcPct val="100000"/>
-              </a:lnSpc>
-              <a:spcBef>
-                <a:spcPts val="0"/>
-              </a:spcBef>
-              <a:spcAft>
-                <a:spcPts val="0"/>
-              </a:spcAft>
-              <a:buClrTx/>
-              <a:buSzTx/>
-              <a:buFontTx/>
-              <a:buNone/>
-              <a:tabLst/>
-              <a:defRPr/>
-            </a:pPr>
+              <a:t>direction</a:t>
+            </a:r>
+            <a:r>
+              <a:rPr lang="ko-KR" altLang="en-US" dirty="0"/>
+              <a:t>은 안써주는 경우가 </a:t>
+            </a:r>
+            <a:r>
+              <a:rPr lang="ko-KR" altLang="en-US" dirty="0" err="1"/>
+              <a:t>만타</a:t>
+            </a:r>
             <a:r>
               <a:rPr lang="en-US" altLang="ko-KR" dirty="0"/>
-              <a:t>kdt3rd-workspace/03_css/</a:t>
-            </a:r>
-            <a:r>
-              <a:rPr lang="en-US" altLang="ko-KR" b="1" dirty="0"/>
-              <a:t>practice10.css</a:t>
-            </a:r>
-          </a:p>
-          <a:p>
-            <a:pPr marL="0" marR="0" lvl="0" indent="0" algn="l" defTabSz="914400" rtl="0" eaLnBrk="1" fontAlgn="auto" latinLnBrk="1" hangingPunct="1">
-              <a:lnSpc>
-                <a:spcPct val="100000"/>
-              </a:lnSpc>
-              <a:spcBef>
-                <a:spcPts val="0"/>
-              </a:spcBef>
-              <a:spcAft>
-                <a:spcPts val="0"/>
-              </a:spcAft>
-              <a:buClrTx/>
-              <a:buSzTx/>
-              <a:buFontTx/>
-              <a:buNone/>
-              <a:tabLst/>
-              <a:defRPr/>
-            </a:pPr>
-            <a:endParaRPr lang="en-US" altLang="ko-KR" b="1" dirty="0"/>
-          </a:p>
-          <a:p>
-            <a:pPr marL="0" marR="0" lvl="0" indent="0" algn="l" defTabSz="914400" rtl="0" eaLnBrk="1" fontAlgn="auto" latinLnBrk="1" hangingPunct="1">
-              <a:lnSpc>
-                <a:spcPct val="100000"/>
-              </a:lnSpc>
-              <a:spcBef>
-                <a:spcPts val="0"/>
-              </a:spcBef>
-              <a:spcAft>
-                <a:spcPts val="0"/>
-              </a:spcAft>
-              <a:buClrTx/>
-              <a:buSzTx/>
-              <a:buFontTx/>
-              <a:buNone/>
-              <a:tabLst/>
-              <a:defRPr/>
-            </a:pPr>
-            <a:r>
-              <a:rPr lang="en-US" altLang="ko-KR" b="1" dirty="0"/>
-              <a:t>=============================</a:t>
-            </a:r>
-          </a:p>
-          <a:p>
-            <a:pPr marL="0" marR="0" lvl="0" indent="0" algn="l" defTabSz="914400" rtl="0" eaLnBrk="1" fontAlgn="auto" latinLnBrk="1" hangingPunct="1">
-              <a:lnSpc>
-                <a:spcPct val="100000"/>
-              </a:lnSpc>
-              <a:spcBef>
-                <a:spcPts val="0"/>
-              </a:spcBef>
-              <a:spcAft>
-                <a:spcPts val="0"/>
-              </a:spcAft>
-              <a:buClrTx/>
-              <a:buSzTx/>
-              <a:buFontTx/>
-              <a:buNone/>
-              <a:tabLst/>
-              <a:defRPr/>
-            </a:pPr>
-            <a:r>
-              <a:rPr lang="ko-KR" altLang="en-US" b="1" dirty="0"/>
-              <a:t>다음 페이지 </a:t>
-            </a:r>
-            <a:r>
-              <a:rPr lang="en-US" altLang="ko-KR" b="1" dirty="0"/>
-              <a:t>&gt; </a:t>
-            </a:r>
-            <a:r>
-              <a:rPr lang="ko-KR" altLang="en-US" b="1" dirty="0"/>
-              <a:t>실습 </a:t>
-            </a:r>
-            <a:r>
-              <a:rPr lang="en-US" altLang="ko-KR" b="1" dirty="0"/>
-              <a:t>11</a:t>
-            </a:r>
-          </a:p>
-          <a:p>
-            <a:pPr marL="0" marR="0" lvl="0" indent="0" algn="l" defTabSz="914400" rtl="0" eaLnBrk="1" fontAlgn="auto" latinLnBrk="1" hangingPunct="1">
-              <a:lnSpc>
-                <a:spcPct val="100000"/>
-              </a:lnSpc>
-              <a:spcBef>
-                <a:spcPts val="0"/>
-              </a:spcBef>
-              <a:spcAft>
-                <a:spcPts val="0"/>
-              </a:spcAft>
-              <a:buClrTx/>
-              <a:buSzTx/>
-              <a:buFontTx/>
-              <a:buNone/>
-              <a:tabLst/>
-              <a:defRPr/>
-            </a:pPr>
-            <a:r>
-              <a:rPr lang="en-US" altLang="ko-KR" dirty="0"/>
-              <a:t>kdt3rd-workspace/03_css/</a:t>
-            </a:r>
-            <a:r>
-              <a:rPr lang="en-US" altLang="ko-KR" b="1" dirty="0"/>
-              <a:t>practice11.html </a:t>
-            </a:r>
-          </a:p>
-          <a:p>
-            <a:pPr marL="0" marR="0" lvl="0" indent="0" algn="l" defTabSz="914400" rtl="0" eaLnBrk="1" fontAlgn="auto" latinLnBrk="1" hangingPunct="1">
-              <a:lnSpc>
-                <a:spcPct val="100000"/>
-              </a:lnSpc>
-              <a:spcBef>
-                <a:spcPts val="0"/>
-              </a:spcBef>
-              <a:spcAft>
-                <a:spcPts val="0"/>
-              </a:spcAft>
-              <a:buClrTx/>
-              <a:buSzTx/>
-              <a:buFontTx/>
-              <a:buNone/>
-              <a:tabLst/>
-              <a:defRPr/>
-            </a:pPr>
-            <a:r>
-              <a:rPr lang="en-US" altLang="ko-KR" dirty="0"/>
-              <a:t>kdt3rd-workspace/03_css</a:t>
-            </a:r>
-            <a:r>
-              <a:rPr lang="en-US" altLang="ko-KR"/>
-              <a:t>/</a:t>
-            </a:r>
-            <a:r>
-              <a:rPr lang="en-US" altLang="ko-KR" b="1"/>
-              <a:t>practice11.</a:t>
-            </a:r>
-            <a:r>
-              <a:rPr lang="en-US" altLang="ko-KR" b="1" dirty="0"/>
-              <a:t>css</a:t>
-            </a:r>
-            <a:endParaRPr lang="en-US" altLang="ko-KR" dirty="0"/>
-          </a:p>
-          <a:p>
-            <a:pPr marL="0" marR="0" lvl="0" indent="0" algn="l" defTabSz="914400" rtl="0" eaLnBrk="1" fontAlgn="auto" latinLnBrk="1" hangingPunct="1">
-              <a:lnSpc>
-                <a:spcPct val="100000"/>
-              </a:lnSpc>
-              <a:spcBef>
-                <a:spcPts val="0"/>
-              </a:spcBef>
-              <a:spcAft>
-                <a:spcPts val="0"/>
-              </a:spcAft>
-              <a:buClrTx/>
-              <a:buSzTx/>
-              <a:buFontTx/>
-              <a:buNone/>
-              <a:tabLst/>
-              <a:defRPr/>
-            </a:pPr>
-            <a:endParaRPr lang="en-US" altLang="ko-KR" dirty="0"/>
-          </a:p>
-          <a:p>
+              <a:t>!</a:t>
+            </a:r>
             <a:endParaRPr lang="ko-KR" altLang="en-US" dirty="0"/>
           </a:p>
-          <a:p>
-            <a:endParaRPr lang="ko-KR" altLang="en-US" dirty="0"/>
-          </a:p>
-          <a:p>
-            <a:pPr marL="0" marR="0" lvl="0" indent="0" algn="l" defTabSz="914400" rtl="0" eaLnBrk="1" fontAlgn="auto" latinLnBrk="1" hangingPunct="1">
-              <a:lnSpc>
-                <a:spcPct val="100000"/>
-              </a:lnSpc>
-              <a:spcBef>
-                <a:spcPts val="0"/>
-              </a:spcBef>
-              <a:spcAft>
-                <a:spcPts val="0"/>
-              </a:spcAft>
-              <a:buClrTx/>
-              <a:buSzTx/>
-              <a:buFontTx/>
-              <a:buNone/>
-              <a:tabLst/>
-              <a:defRPr/>
-            </a:pPr>
-            <a:endParaRPr lang="en-US" altLang="ko-KR" dirty="0"/>
-          </a:p>
-          <a:p>
-            <a:endParaRPr lang="ko-KR" altLang="en-US" dirty="0"/>
-          </a:p>
-          <a:p>
-            <a:endParaRPr lang="ko-KR" altLang="en-US" dirty="0"/>
-          </a:p>
-          <a:p>
-            <a:endParaRPr lang="ko-KR" altLang="en-US" dirty="0"/>
-          </a:p>
-          <a:p>
-            <a:endParaRPr lang="ko-KR" altLang="en-US" dirty="0"/>
-          </a:p>
         </p:txBody>
       </p:sp>
       <p:sp>
@@ -2039,15 +2146,15 @@
             <a:spLocks noGrp="1"/>
           </p:cNvSpPr>
           <p:nvPr>
-            <p:ph type="sldNum" sz="quarter" idx="5"/>
-          </p:nvPr>
-        </p:nvSpPr>
-        <p:spPr/>
-        <p:txBody>
-          <a:bodyPr/>
-          <a:lstStyle/>
-          <a:p>
-            <a:fld id="{C09E5BFC-1559-42F1-8940-AB342D56BF02}" type="slidenum">
+            <p:ph type="sldNum" sz="quarter" idx="10"/>
+          </p:nvPr>
+        </p:nvSpPr>
+        <p:spPr/>
+        <p:txBody>
+          <a:bodyPr/>
+          <a:lstStyle/>
+          <a:p>
+            <a:fld id="{B4FAD15D-3FC6-4EBB-8A1D-F20C53EB7780}" type="slidenum">
               <a:rPr lang="ko-KR" altLang="en-US" smtClean="0"/>
               <a:t>23</a:t>
             </a:fld>
@@ -2058,7 +2165,7 @@
     </p:spTree>
     <p:extLst>
       <p:ext uri="{BB962C8B-B14F-4D97-AF65-F5344CB8AC3E}">
-        <p14:creationId xmlns:p14="http://schemas.microsoft.com/office/powerpoint/2010/main" val="3704610732"/>
+        <p14:creationId xmlns:p14="http://schemas.microsoft.com/office/powerpoint/2010/main" val="2277054390"/>
       </p:ext>
     </p:extLst>
   </p:cSld>
@@ -2112,227 +2219,7 @@
           <a:bodyPr/>
           <a:lstStyle/>
           <a:p>
-            <a:pPr marL="0" marR="0" lvl="0" indent="0" algn="l" defTabSz="914400" rtl="0" eaLnBrk="1" fontAlgn="auto" latinLnBrk="1" hangingPunct="1">
-              <a:lnSpc>
-                <a:spcPct val="100000"/>
-              </a:lnSpc>
-              <a:spcBef>
-                <a:spcPts val="0"/>
-              </a:spcBef>
-              <a:spcAft>
-                <a:spcPts val="0"/>
-              </a:spcAft>
-              <a:buClrTx/>
-              <a:buSzTx/>
-              <a:buFontTx/>
-              <a:buNone/>
-              <a:tabLst/>
-              <a:defRPr/>
-            </a:pPr>
-            <a:r>
-              <a:rPr lang="en-US" altLang="ko-KR" dirty="0"/>
-              <a:t>index6.html &amp; </a:t>
-            </a:r>
-            <a:r>
-              <a:rPr lang="en-US" altLang="ko-KR" dirty="0" err="1"/>
-              <a:t>css</a:t>
-            </a:r>
-            <a:endParaRPr lang="en-US" altLang="ko-KR" dirty="0"/>
-          </a:p>
-          <a:p>
-            <a:pPr marL="0" marR="0" lvl="0" indent="0" algn="l" defTabSz="914400" rtl="0" eaLnBrk="1" fontAlgn="auto" latinLnBrk="1" hangingPunct="1">
-              <a:lnSpc>
-                <a:spcPct val="100000"/>
-              </a:lnSpc>
-              <a:spcBef>
-                <a:spcPts val="0"/>
-              </a:spcBef>
-              <a:spcAft>
-                <a:spcPts val="0"/>
-              </a:spcAft>
-              <a:buClrTx/>
-              <a:buSzTx/>
-              <a:buFontTx/>
-              <a:buNone/>
-              <a:tabLst/>
-              <a:defRPr/>
-            </a:pPr>
-            <a:r>
-              <a:rPr lang="ko-KR" altLang="en-US" dirty="0" err="1"/>
-              <a:t>ㄴ</a:t>
-            </a:r>
-            <a:r>
-              <a:rPr lang="ko-KR" altLang="en-US" dirty="0"/>
-              <a:t> </a:t>
-            </a:r>
-            <a:r>
-              <a:rPr lang="en-US" altLang="ko-KR" dirty="0"/>
-              <a:t>position</a:t>
-            </a:r>
-          </a:p>
-          <a:p>
-            <a:pPr marL="0" marR="0" lvl="0" indent="0" algn="l" defTabSz="914400" rtl="0" eaLnBrk="1" fontAlgn="auto" latinLnBrk="1" hangingPunct="1">
-              <a:lnSpc>
-                <a:spcPct val="100000"/>
-              </a:lnSpc>
-              <a:spcBef>
-                <a:spcPts val="0"/>
-              </a:spcBef>
-              <a:spcAft>
-                <a:spcPts val="0"/>
-              </a:spcAft>
-              <a:buClrTx/>
-              <a:buSzTx/>
-              <a:buFontTx/>
-              <a:buNone/>
-              <a:tabLst/>
-              <a:defRPr/>
-            </a:pPr>
-            <a:endParaRPr lang="en-US" altLang="ko-KR" dirty="0"/>
-          </a:p>
-          <a:p>
-            <a:pPr marL="0" marR="0" lvl="0" indent="0" algn="l" defTabSz="914400" rtl="0" eaLnBrk="1" fontAlgn="auto" latinLnBrk="1" hangingPunct="1">
-              <a:lnSpc>
-                <a:spcPct val="100000"/>
-              </a:lnSpc>
-              <a:spcBef>
-                <a:spcPts val="0"/>
-              </a:spcBef>
-              <a:spcAft>
-                <a:spcPts val="0"/>
-              </a:spcAft>
-              <a:buClrTx/>
-              <a:buSzTx/>
-              <a:buFontTx/>
-              <a:buNone/>
-              <a:tabLst/>
-              <a:defRPr/>
-            </a:pPr>
-            <a:r>
-              <a:rPr lang="en-US" altLang="ko-KR" dirty="0"/>
-              <a:t>Index7.html &amp; </a:t>
-            </a:r>
-            <a:r>
-              <a:rPr lang="en-US" altLang="ko-KR" dirty="0" err="1"/>
-              <a:t>css</a:t>
-            </a:r>
-            <a:endParaRPr lang="en-US" altLang="ko-KR" dirty="0"/>
-          </a:p>
-          <a:p>
-            <a:pPr marL="0" marR="0" lvl="0" indent="0" algn="l" defTabSz="914400" rtl="0" eaLnBrk="1" fontAlgn="auto" latinLnBrk="1" hangingPunct="1">
-              <a:lnSpc>
-                <a:spcPct val="100000"/>
-              </a:lnSpc>
-              <a:spcBef>
-                <a:spcPts val="0"/>
-              </a:spcBef>
-              <a:spcAft>
-                <a:spcPts val="0"/>
-              </a:spcAft>
-              <a:buClrTx/>
-              <a:buSzTx/>
-              <a:buFontTx/>
-              <a:buNone/>
-              <a:tabLst/>
-              <a:defRPr/>
-            </a:pPr>
-            <a:r>
-              <a:rPr lang="ko-KR" altLang="en-US" dirty="0" err="1"/>
-              <a:t>ㄴ</a:t>
-            </a:r>
-            <a:r>
-              <a:rPr lang="ko-KR" altLang="en-US" dirty="0"/>
-              <a:t> </a:t>
-            </a:r>
-            <a:r>
-              <a:rPr lang="en-US" altLang="ko-KR" dirty="0"/>
-              <a:t>z-index</a:t>
-            </a:r>
-          </a:p>
-          <a:p>
-            <a:pPr marL="0" marR="0" lvl="0" indent="0" algn="l" defTabSz="914400" rtl="0" eaLnBrk="1" fontAlgn="auto" latinLnBrk="1" hangingPunct="1">
-              <a:lnSpc>
-                <a:spcPct val="100000"/>
-              </a:lnSpc>
-              <a:spcBef>
-                <a:spcPts val="0"/>
-              </a:spcBef>
-              <a:spcAft>
-                <a:spcPts val="0"/>
-              </a:spcAft>
-              <a:buClrTx/>
-              <a:buSzTx/>
-              <a:buFontTx/>
-              <a:buNone/>
-              <a:tabLst/>
-              <a:defRPr/>
-            </a:pPr>
-            <a:endParaRPr lang="en-US" altLang="ko-KR" dirty="0"/>
-          </a:p>
-          <a:p>
-            <a:pPr marL="0" marR="0" lvl="0" indent="0" algn="l" defTabSz="914400" rtl="0" eaLnBrk="1" fontAlgn="auto" latinLnBrk="1" hangingPunct="1">
-              <a:lnSpc>
-                <a:spcPct val="100000"/>
-              </a:lnSpc>
-              <a:spcBef>
-                <a:spcPts val="0"/>
-              </a:spcBef>
-              <a:spcAft>
-                <a:spcPts val="0"/>
-              </a:spcAft>
-              <a:buClrTx/>
-              <a:buSzTx/>
-              <a:buFontTx/>
-              <a:buNone/>
-              <a:tabLst/>
-              <a:defRPr/>
-            </a:pPr>
-            <a:r>
-              <a:rPr lang="en-US" altLang="ko-KR" dirty="0"/>
-              <a:t>Index8.html &amp; </a:t>
-            </a:r>
-            <a:r>
-              <a:rPr lang="en-US" altLang="ko-KR" dirty="0" err="1"/>
-              <a:t>css</a:t>
-            </a:r>
-            <a:endParaRPr lang="en-US" altLang="ko-KR" dirty="0"/>
-          </a:p>
-          <a:p>
-            <a:pPr marL="0" marR="0" lvl="0" indent="0" algn="l" defTabSz="914400" rtl="0" eaLnBrk="1" fontAlgn="auto" latinLnBrk="1" hangingPunct="1">
-              <a:lnSpc>
-                <a:spcPct val="100000"/>
-              </a:lnSpc>
-              <a:spcBef>
-                <a:spcPts val="0"/>
-              </a:spcBef>
-              <a:spcAft>
-                <a:spcPts val="0"/>
-              </a:spcAft>
-              <a:buClrTx/>
-              <a:buSzTx/>
-              <a:buFontTx/>
-              <a:buNone/>
-              <a:tabLst/>
-              <a:defRPr/>
-            </a:pPr>
-            <a:r>
-              <a:rPr lang="ko-KR" altLang="en-US" dirty="0" err="1"/>
-              <a:t>ㄴ</a:t>
-            </a:r>
-            <a:r>
-              <a:rPr lang="ko-KR" altLang="en-US" dirty="0"/>
-              <a:t> </a:t>
-            </a:r>
-            <a:r>
-              <a:rPr lang="en-US" altLang="ko-KR" dirty="0"/>
-              <a:t>overflow</a:t>
-            </a:r>
-          </a:p>
-          <a:p>
-            <a:endParaRPr lang="en-US" altLang="ko-KR" dirty="0"/>
-          </a:p>
-          <a:p>
-            <a:endParaRPr lang="en-US" altLang="ko-KR" dirty="0"/>
+            <a:endParaRPr lang="ko-KR" altLang="en-US" dirty="0"/>
           </a:p>
         </p:txBody>
       </p:sp>
@@ -2362,7 +2249,7 @@
     </p:spTree>
     <p:extLst>
       <p:ext uri="{BB962C8B-B14F-4D97-AF65-F5344CB8AC3E}">
-        <p14:creationId xmlns:p14="http://schemas.microsoft.com/office/powerpoint/2010/main" val="2153334979"/>
+        <p14:creationId xmlns:p14="http://schemas.microsoft.com/office/powerpoint/2010/main" val="2782272883"/>
       </p:ext>
     </p:extLst>
   </p:cSld>
@@ -2416,6 +2303,492 @@
           <a:bodyPr/>
           <a:lstStyle/>
           <a:p>
+            <a:pPr marL="0" marR="0" lvl="0" indent="0" algn="l" defTabSz="914400" rtl="0" eaLnBrk="1" fontAlgn="auto" latinLnBrk="1" hangingPunct="1">
+              <a:lnSpc>
+                <a:spcPct val="100000"/>
+              </a:lnSpc>
+              <a:spcBef>
+                <a:spcPts val="0"/>
+              </a:spcBef>
+              <a:spcAft>
+                <a:spcPts val="0"/>
+              </a:spcAft>
+              <a:buClrTx/>
+              <a:buSzTx/>
+              <a:buFontTx/>
+              <a:buNone/>
+              <a:tabLst/>
+              <a:defRPr/>
+            </a:pPr>
+            <a:r>
+              <a:rPr lang="en-US" altLang="ko-KR" dirty="0"/>
+              <a:t>kdt3rd-workspace/03_css/</a:t>
+            </a:r>
+            <a:r>
+              <a:rPr lang="en-US" altLang="ko-KR" b="1" dirty="0"/>
+              <a:t>index10.html </a:t>
+            </a:r>
+          </a:p>
+          <a:p>
+            <a:pPr marL="0" marR="0" lvl="0" indent="0" algn="l" defTabSz="914400" rtl="0" eaLnBrk="1" fontAlgn="auto" latinLnBrk="1" hangingPunct="1">
+              <a:lnSpc>
+                <a:spcPct val="100000"/>
+              </a:lnSpc>
+              <a:spcBef>
+                <a:spcPts val="0"/>
+              </a:spcBef>
+              <a:spcAft>
+                <a:spcPts val="0"/>
+              </a:spcAft>
+              <a:buClrTx/>
+              <a:buSzTx/>
+              <a:buFontTx/>
+              <a:buNone/>
+              <a:tabLst/>
+              <a:defRPr/>
+            </a:pPr>
+            <a:r>
+              <a:rPr lang="en-US" altLang="ko-KR" dirty="0"/>
+              <a:t>kdt3rd-workspace/03_css/</a:t>
+            </a:r>
+            <a:r>
+              <a:rPr lang="en-US" altLang="ko-KR" b="1" dirty="0"/>
+              <a:t>index10.css</a:t>
+            </a:r>
+          </a:p>
+          <a:p>
+            <a:pPr marL="0" marR="0" lvl="0" indent="0" algn="l" defTabSz="914400" rtl="0" eaLnBrk="1" fontAlgn="auto" latinLnBrk="1" hangingPunct="1">
+              <a:lnSpc>
+                <a:spcPct val="100000"/>
+              </a:lnSpc>
+              <a:spcBef>
+                <a:spcPts val="0"/>
+              </a:spcBef>
+              <a:spcAft>
+                <a:spcPts val="0"/>
+              </a:spcAft>
+              <a:buClrTx/>
+              <a:buSzTx/>
+              <a:buFontTx/>
+              <a:buNone/>
+              <a:tabLst/>
+              <a:defRPr/>
+            </a:pPr>
+            <a:endParaRPr lang="en-US" altLang="ko-KR" b="1" dirty="0"/>
+          </a:p>
+          <a:p>
+            <a:pPr marL="0" marR="0" lvl="0" indent="0" algn="l" defTabSz="914400" rtl="0" eaLnBrk="1" fontAlgn="auto" latinLnBrk="1" hangingPunct="1">
+              <a:lnSpc>
+                <a:spcPct val="100000"/>
+              </a:lnSpc>
+              <a:spcBef>
+                <a:spcPts val="0"/>
+              </a:spcBef>
+              <a:spcAft>
+                <a:spcPts val="0"/>
+              </a:spcAft>
+              <a:buClrTx/>
+              <a:buSzTx/>
+              <a:buFontTx/>
+              <a:buNone/>
+              <a:tabLst/>
+              <a:defRPr/>
+            </a:pPr>
+            <a:endParaRPr lang="en-US" altLang="ko-KR" b="1" dirty="0"/>
+          </a:p>
+          <a:p>
+            <a:pPr marL="0" marR="0" lvl="0" indent="0" algn="l" defTabSz="914400" rtl="0" eaLnBrk="1" fontAlgn="auto" latinLnBrk="1" hangingPunct="1">
+              <a:lnSpc>
+                <a:spcPct val="100000"/>
+              </a:lnSpc>
+              <a:spcBef>
+                <a:spcPts val="0"/>
+              </a:spcBef>
+              <a:spcAft>
+                <a:spcPts val="0"/>
+              </a:spcAft>
+              <a:buClrTx/>
+              <a:buSzTx/>
+              <a:buFontTx/>
+              <a:buNone/>
+              <a:tabLst/>
+              <a:defRPr/>
+            </a:pPr>
+            <a:r>
+              <a:rPr lang="en-US" altLang="ko-KR" b="1" dirty="0"/>
+              <a:t>=============================</a:t>
+            </a:r>
+          </a:p>
+          <a:p>
+            <a:pPr marL="0" marR="0" lvl="0" indent="0" algn="l" defTabSz="914400" rtl="0" eaLnBrk="1" fontAlgn="auto" latinLnBrk="1" hangingPunct="1">
+              <a:lnSpc>
+                <a:spcPct val="100000"/>
+              </a:lnSpc>
+              <a:spcBef>
+                <a:spcPts val="0"/>
+              </a:spcBef>
+              <a:spcAft>
+                <a:spcPts val="0"/>
+              </a:spcAft>
+              <a:buClrTx/>
+              <a:buSzTx/>
+              <a:buFontTx/>
+              <a:buNone/>
+              <a:tabLst/>
+              <a:defRPr/>
+            </a:pPr>
+            <a:r>
+              <a:rPr lang="ko-KR" altLang="en-US" b="1" dirty="0"/>
+              <a:t>다음 페이지 </a:t>
+            </a:r>
+            <a:r>
+              <a:rPr lang="en-US" altLang="ko-KR" b="1" dirty="0"/>
+              <a:t>&gt; </a:t>
+            </a:r>
+            <a:r>
+              <a:rPr lang="ko-KR" altLang="en-US" b="1" dirty="0"/>
+              <a:t>실습 </a:t>
+            </a:r>
+            <a:r>
+              <a:rPr lang="en-US" altLang="ko-KR" b="1" dirty="0"/>
+              <a:t>10</a:t>
+            </a:r>
+          </a:p>
+          <a:p>
+            <a:pPr marL="0" marR="0" lvl="0" indent="0" algn="l" defTabSz="914400" rtl="0" eaLnBrk="1" fontAlgn="auto" latinLnBrk="1" hangingPunct="1">
+              <a:lnSpc>
+                <a:spcPct val="100000"/>
+              </a:lnSpc>
+              <a:spcBef>
+                <a:spcPts val="0"/>
+              </a:spcBef>
+              <a:spcAft>
+                <a:spcPts val="0"/>
+              </a:spcAft>
+              <a:buClrTx/>
+              <a:buSzTx/>
+              <a:buFontTx/>
+              <a:buNone/>
+              <a:tabLst/>
+              <a:defRPr/>
+            </a:pPr>
+            <a:r>
+              <a:rPr lang="en-US" altLang="ko-KR" dirty="0"/>
+              <a:t>kdt3rd-workspace/03_css/</a:t>
+            </a:r>
+            <a:r>
+              <a:rPr lang="en-US" altLang="ko-KR" b="1" dirty="0"/>
+              <a:t>practice10.html </a:t>
+            </a:r>
+          </a:p>
+          <a:p>
+            <a:pPr marL="0" marR="0" lvl="0" indent="0" algn="l" defTabSz="914400" rtl="0" eaLnBrk="1" fontAlgn="auto" latinLnBrk="1" hangingPunct="1">
+              <a:lnSpc>
+                <a:spcPct val="100000"/>
+              </a:lnSpc>
+              <a:spcBef>
+                <a:spcPts val="0"/>
+              </a:spcBef>
+              <a:spcAft>
+                <a:spcPts val="0"/>
+              </a:spcAft>
+              <a:buClrTx/>
+              <a:buSzTx/>
+              <a:buFontTx/>
+              <a:buNone/>
+              <a:tabLst/>
+              <a:defRPr/>
+            </a:pPr>
+            <a:r>
+              <a:rPr lang="en-US" altLang="ko-KR" dirty="0"/>
+              <a:t>kdt3rd-workspace/03_css/</a:t>
+            </a:r>
+            <a:r>
+              <a:rPr lang="en-US" altLang="ko-KR" b="1" dirty="0"/>
+              <a:t>practice10.css</a:t>
+            </a:r>
+          </a:p>
+          <a:p>
+            <a:pPr marL="0" marR="0" lvl="0" indent="0" algn="l" defTabSz="914400" rtl="0" eaLnBrk="1" fontAlgn="auto" latinLnBrk="1" hangingPunct="1">
+              <a:lnSpc>
+                <a:spcPct val="100000"/>
+              </a:lnSpc>
+              <a:spcBef>
+                <a:spcPts val="0"/>
+              </a:spcBef>
+              <a:spcAft>
+                <a:spcPts val="0"/>
+              </a:spcAft>
+              <a:buClrTx/>
+              <a:buSzTx/>
+              <a:buFontTx/>
+              <a:buNone/>
+              <a:tabLst/>
+              <a:defRPr/>
+            </a:pPr>
+            <a:endParaRPr lang="en-US" altLang="ko-KR" b="1" dirty="0"/>
+          </a:p>
+          <a:p>
+            <a:pPr marL="0" marR="0" lvl="0" indent="0" algn="l" defTabSz="914400" rtl="0" eaLnBrk="1" fontAlgn="auto" latinLnBrk="1" hangingPunct="1">
+              <a:lnSpc>
+                <a:spcPct val="100000"/>
+              </a:lnSpc>
+              <a:spcBef>
+                <a:spcPts val="0"/>
+              </a:spcBef>
+              <a:spcAft>
+                <a:spcPts val="0"/>
+              </a:spcAft>
+              <a:buClrTx/>
+              <a:buSzTx/>
+              <a:buFontTx/>
+              <a:buNone/>
+              <a:tabLst/>
+              <a:defRPr/>
+            </a:pPr>
+            <a:r>
+              <a:rPr lang="en-US" altLang="ko-KR" b="1" dirty="0"/>
+              <a:t>=============================</a:t>
+            </a:r>
+          </a:p>
+          <a:p>
+            <a:pPr marL="0" marR="0" lvl="0" indent="0" algn="l" defTabSz="914400" rtl="0" eaLnBrk="1" fontAlgn="auto" latinLnBrk="1" hangingPunct="1">
+              <a:lnSpc>
+                <a:spcPct val="100000"/>
+              </a:lnSpc>
+              <a:spcBef>
+                <a:spcPts val="0"/>
+              </a:spcBef>
+              <a:spcAft>
+                <a:spcPts val="0"/>
+              </a:spcAft>
+              <a:buClrTx/>
+              <a:buSzTx/>
+              <a:buFontTx/>
+              <a:buNone/>
+              <a:tabLst/>
+              <a:defRPr/>
+            </a:pPr>
+            <a:r>
+              <a:rPr lang="ko-KR" altLang="en-US" b="1" dirty="0"/>
+              <a:t>다음 페이지 </a:t>
+            </a:r>
+            <a:r>
+              <a:rPr lang="en-US" altLang="ko-KR" b="1" dirty="0"/>
+              <a:t>&gt; </a:t>
+            </a:r>
+            <a:r>
+              <a:rPr lang="ko-KR" altLang="en-US" b="1" dirty="0"/>
+              <a:t>실습 </a:t>
+            </a:r>
+            <a:r>
+              <a:rPr lang="en-US" altLang="ko-KR" b="1" dirty="0"/>
+              <a:t>11</a:t>
+            </a:r>
+          </a:p>
+          <a:p>
+            <a:pPr marL="0" marR="0" lvl="0" indent="0" algn="l" defTabSz="914400" rtl="0" eaLnBrk="1" fontAlgn="auto" latinLnBrk="1" hangingPunct="1">
+              <a:lnSpc>
+                <a:spcPct val="100000"/>
+              </a:lnSpc>
+              <a:spcBef>
+                <a:spcPts val="0"/>
+              </a:spcBef>
+              <a:spcAft>
+                <a:spcPts val="0"/>
+              </a:spcAft>
+              <a:buClrTx/>
+              <a:buSzTx/>
+              <a:buFontTx/>
+              <a:buNone/>
+              <a:tabLst/>
+              <a:defRPr/>
+            </a:pPr>
+            <a:r>
+              <a:rPr lang="en-US" altLang="ko-KR" dirty="0"/>
+              <a:t>kdt3rd-workspace/03_css/</a:t>
+            </a:r>
+            <a:r>
+              <a:rPr lang="en-US" altLang="ko-KR" b="1" dirty="0"/>
+              <a:t>practice11.html </a:t>
+            </a:r>
+          </a:p>
+          <a:p>
+            <a:pPr marL="0" marR="0" lvl="0" indent="0" algn="l" defTabSz="914400" rtl="0" eaLnBrk="1" fontAlgn="auto" latinLnBrk="1" hangingPunct="1">
+              <a:lnSpc>
+                <a:spcPct val="100000"/>
+              </a:lnSpc>
+              <a:spcBef>
+                <a:spcPts val="0"/>
+              </a:spcBef>
+              <a:spcAft>
+                <a:spcPts val="0"/>
+              </a:spcAft>
+              <a:buClrTx/>
+              <a:buSzTx/>
+              <a:buFontTx/>
+              <a:buNone/>
+              <a:tabLst/>
+              <a:defRPr/>
+            </a:pPr>
+            <a:r>
+              <a:rPr lang="en-US" altLang="ko-KR" dirty="0"/>
+              <a:t>kdt3rd-workspace/03_css</a:t>
+            </a:r>
+            <a:r>
+              <a:rPr lang="en-US" altLang="ko-KR"/>
+              <a:t>/</a:t>
+            </a:r>
+            <a:r>
+              <a:rPr lang="en-US" altLang="ko-KR" b="1"/>
+              <a:t>practice11.</a:t>
+            </a:r>
+            <a:r>
+              <a:rPr lang="en-US" altLang="ko-KR" b="1" dirty="0"/>
+              <a:t>css</a:t>
+            </a:r>
+            <a:endParaRPr lang="en-US" altLang="ko-KR" dirty="0"/>
+          </a:p>
+          <a:p>
+            <a:pPr marL="0" marR="0" lvl="0" indent="0" algn="l" defTabSz="914400" rtl="0" eaLnBrk="1" fontAlgn="auto" latinLnBrk="1" hangingPunct="1">
+              <a:lnSpc>
+                <a:spcPct val="100000"/>
+              </a:lnSpc>
+              <a:spcBef>
+                <a:spcPts val="0"/>
+              </a:spcBef>
+              <a:spcAft>
+                <a:spcPts val="0"/>
+              </a:spcAft>
+              <a:buClrTx/>
+              <a:buSzTx/>
+              <a:buFontTx/>
+              <a:buNone/>
+              <a:tabLst/>
+              <a:defRPr/>
+            </a:pPr>
+            <a:endParaRPr lang="en-US" altLang="ko-KR" dirty="0"/>
+          </a:p>
+          <a:p>
+            <a:endParaRPr lang="ko-KR" altLang="en-US" dirty="0"/>
+          </a:p>
+          <a:p>
+            <a:endParaRPr lang="ko-KR" altLang="en-US" dirty="0"/>
+          </a:p>
+          <a:p>
+            <a:pPr marL="0" marR="0" lvl="0" indent="0" algn="l" defTabSz="914400" rtl="0" eaLnBrk="1" fontAlgn="auto" latinLnBrk="1" hangingPunct="1">
+              <a:lnSpc>
+                <a:spcPct val="100000"/>
+              </a:lnSpc>
+              <a:spcBef>
+                <a:spcPts val="0"/>
+              </a:spcBef>
+              <a:spcAft>
+                <a:spcPts val="0"/>
+              </a:spcAft>
+              <a:buClrTx/>
+              <a:buSzTx/>
+              <a:buFontTx/>
+              <a:buNone/>
+              <a:tabLst/>
+              <a:defRPr/>
+            </a:pPr>
+            <a:endParaRPr lang="en-US" altLang="ko-KR" dirty="0"/>
+          </a:p>
+          <a:p>
+            <a:endParaRPr lang="ko-KR" altLang="en-US" dirty="0"/>
+          </a:p>
+          <a:p>
+            <a:endParaRPr lang="ko-KR" altLang="en-US" dirty="0"/>
+          </a:p>
+          <a:p>
+            <a:endParaRPr lang="ko-KR" altLang="en-US" dirty="0"/>
+          </a:p>
+          <a:p>
+            <a:endParaRPr lang="ko-KR" altLang="en-US" dirty="0"/>
+          </a:p>
+        </p:txBody>
+      </p:sp>
+      <p:sp>
+        <p:nvSpPr>
+          <p:cNvPr id="4" name="슬라이드 번호 개체 틀 3"/>
+          <p:cNvSpPr>
+            <a:spLocks noGrp="1"/>
+          </p:cNvSpPr>
+          <p:nvPr>
+            <p:ph type="sldNum" sz="quarter" idx="5"/>
+          </p:nvPr>
+        </p:nvSpPr>
+        <p:spPr/>
+        <p:txBody>
+          <a:bodyPr/>
+          <a:lstStyle/>
+          <a:p>
+            <a:fld id="{C09E5BFC-1559-42F1-8940-AB342D56BF02}" type="slidenum">
+              <a:rPr lang="ko-KR" altLang="en-US" smtClean="0"/>
+              <a:t>24</a:t>
+            </a:fld>
+            <a:endParaRPr lang="ko-KR" altLang="en-US"/>
+          </a:p>
+        </p:txBody>
+      </p:sp>
+    </p:spTree>
+    <p:extLst>
+      <p:ext uri="{BB962C8B-B14F-4D97-AF65-F5344CB8AC3E}">
+        <p14:creationId xmlns:p14="http://schemas.microsoft.com/office/powerpoint/2010/main" val="3704610732"/>
+      </p:ext>
+    </p:extLst>
+  </p:cSld>
+  <p:clrMapOvr>
+    <a:masterClrMapping/>
+  </p:clrMapOvr>
+</p:notes>
+</file>
+
+<file path=ppt/notesSlides/notesSlide21.xml><?xml version="1.0" encoding="utf-8"?>
+<p:notes xmlns:a="http://schemas.openxmlformats.org/drawingml/2006/main" xmlns:r="http://schemas.openxmlformats.org/officeDocument/2006/relationships" xmlns:p="http://schemas.openxmlformats.org/presentationml/2006/main">
+  <p:cSld>
+    <p:spTree>
+      <p:nvGrpSpPr>
+        <p:cNvPr id="1" name=""/>
+        <p:cNvGrpSpPr/>
+        <p:nvPr/>
+      </p:nvGrpSpPr>
+      <p:grpSpPr>
+        <a:xfrm>
+          <a:off x="0" y="0"/>
+          <a:ext cx="0" cy="0"/>
+          <a:chOff x="0" y="0"/>
+          <a:chExt cx="0" cy="0"/>
+        </a:xfrm>
+      </p:grpSpPr>
+      <p:sp>
+        <p:nvSpPr>
+          <p:cNvPr id="2" name="슬라이드 이미지 개체 틀 1"/>
+          <p:cNvSpPr>
+            <a:spLocks noGrp="1" noRot="1" noChangeAspect="1"/>
+          </p:cNvSpPr>
+          <p:nvPr>
+            <p:ph type="sldImg"/>
+          </p:nvPr>
+        </p:nvSpPr>
+        <p:spPr/>
+      </p:sp>
+      <p:sp>
+        <p:nvSpPr>
+          <p:cNvPr id="3" name="슬라이드 노트 개체 틀 2"/>
+          <p:cNvSpPr>
+            <a:spLocks noGrp="1"/>
+          </p:cNvSpPr>
+          <p:nvPr>
+            <p:ph type="body" idx="1"/>
+          </p:nvPr>
+        </p:nvSpPr>
+        <p:spPr/>
+        <p:txBody>
+          <a:bodyPr/>
+          <a:lstStyle/>
+          <a:p>
             <a:endParaRPr lang="en-US" altLang="ko-KR" b="0" dirty="0">
               <a:solidFill>
                 <a:srgbClr val="D4D4D4"/>
@@ -2602,7 +2975,7 @@
           <a:p>
             <a:fld id="{C09E5BFC-1559-42F1-8940-AB342D56BF02}" type="slidenum">
               <a:rPr lang="ko-KR" altLang="en-US" smtClean="0"/>
-              <a:t>25</a:t>
+              <a:t>26</a:t>
             </a:fld>
             <a:endParaRPr lang="ko-KR" altLang="en-US"/>
           </a:p>
@@ -2665,14 +3038,227 @@
           <a:bodyPr/>
           <a:lstStyle/>
           <a:p>
+            <a:pPr marL="0" marR="0" lvl="0" indent="0" algn="l" defTabSz="914400" rtl="0" eaLnBrk="1" fontAlgn="auto" latinLnBrk="1" hangingPunct="1">
+              <a:lnSpc>
+                <a:spcPct val="100000"/>
+              </a:lnSpc>
+              <a:spcBef>
+                <a:spcPts val="0"/>
+              </a:spcBef>
+              <a:spcAft>
+                <a:spcPts val="0"/>
+              </a:spcAft>
+              <a:buClrTx/>
+              <a:buSzTx/>
+              <a:buFontTx/>
+              <a:buNone/>
+              <a:tabLst/>
+              <a:defRPr/>
+            </a:pPr>
             <a:r>
               <a:rPr lang="en-US" altLang="ko-KR" dirty="0"/>
-              <a:t>LMS </a:t>
+              <a:t>index6.html &amp; </a:t>
+            </a:r>
+            <a:r>
+              <a:rPr lang="en-US" altLang="ko-KR" dirty="0" err="1"/>
+              <a:t>css</a:t>
+            </a:r>
+            <a:endParaRPr lang="en-US" altLang="ko-KR" dirty="0"/>
+          </a:p>
+          <a:p>
+            <a:pPr marL="0" marR="0" lvl="0" indent="0" algn="l" defTabSz="914400" rtl="0" eaLnBrk="1" fontAlgn="auto" latinLnBrk="1" hangingPunct="1">
+              <a:lnSpc>
+                <a:spcPct val="100000"/>
+              </a:lnSpc>
+              <a:spcBef>
+                <a:spcPts val="0"/>
+              </a:spcBef>
+              <a:spcAft>
+                <a:spcPts val="0"/>
+              </a:spcAft>
+              <a:buClrTx/>
+              <a:buSzTx/>
+              <a:buFontTx/>
+              <a:buNone/>
+              <a:tabLst/>
+              <a:defRPr/>
+            </a:pPr>
+            <a:r>
+              <a:rPr lang="ko-KR" altLang="en-US" dirty="0" err="1"/>
+              <a:t>ㄴ</a:t>
             </a:r>
             <a:r>
               <a:rPr lang="ko-KR" altLang="en-US" dirty="0"/>
-              <a:t>실습</a:t>
-            </a:r>
+              <a:t> </a:t>
+            </a:r>
+            <a:r>
+              <a:rPr lang="en-US" altLang="ko-KR" dirty="0"/>
+              <a:t>position</a:t>
+            </a:r>
+          </a:p>
+          <a:p>
+            <a:pPr marL="0" marR="0" lvl="0" indent="0" algn="l" defTabSz="914400" rtl="0" eaLnBrk="1" fontAlgn="auto" latinLnBrk="1" hangingPunct="1">
+              <a:lnSpc>
+                <a:spcPct val="100000"/>
+              </a:lnSpc>
+              <a:spcBef>
+                <a:spcPts val="0"/>
+              </a:spcBef>
+              <a:spcAft>
+                <a:spcPts val="0"/>
+              </a:spcAft>
+              <a:buClrTx/>
+              <a:buSzTx/>
+              <a:buFontTx/>
+              <a:buNone/>
+              <a:tabLst/>
+              <a:defRPr/>
+            </a:pPr>
+            <a:endParaRPr lang="en-US" altLang="ko-KR" dirty="0"/>
+          </a:p>
+          <a:p>
+            <a:pPr marL="0" marR="0" lvl="0" indent="0" algn="l" defTabSz="914400" rtl="0" eaLnBrk="1" fontAlgn="auto" latinLnBrk="1" hangingPunct="1">
+              <a:lnSpc>
+                <a:spcPct val="100000"/>
+              </a:lnSpc>
+              <a:spcBef>
+                <a:spcPts val="0"/>
+              </a:spcBef>
+              <a:spcAft>
+                <a:spcPts val="0"/>
+              </a:spcAft>
+              <a:buClrTx/>
+              <a:buSzTx/>
+              <a:buFontTx/>
+              <a:buNone/>
+              <a:tabLst/>
+              <a:defRPr/>
+            </a:pPr>
+            <a:r>
+              <a:rPr lang="en-US" altLang="ko-KR" dirty="0"/>
+              <a:t>Index7.html &amp; </a:t>
+            </a:r>
+            <a:r>
+              <a:rPr lang="en-US" altLang="ko-KR" dirty="0" err="1"/>
+              <a:t>css</a:t>
+            </a:r>
+            <a:endParaRPr lang="en-US" altLang="ko-KR" dirty="0"/>
+          </a:p>
+          <a:p>
+            <a:pPr marL="0" marR="0" lvl="0" indent="0" algn="l" defTabSz="914400" rtl="0" eaLnBrk="1" fontAlgn="auto" latinLnBrk="1" hangingPunct="1">
+              <a:lnSpc>
+                <a:spcPct val="100000"/>
+              </a:lnSpc>
+              <a:spcBef>
+                <a:spcPts val="0"/>
+              </a:spcBef>
+              <a:spcAft>
+                <a:spcPts val="0"/>
+              </a:spcAft>
+              <a:buClrTx/>
+              <a:buSzTx/>
+              <a:buFontTx/>
+              <a:buNone/>
+              <a:tabLst/>
+              <a:defRPr/>
+            </a:pPr>
+            <a:r>
+              <a:rPr lang="ko-KR" altLang="en-US" dirty="0" err="1"/>
+              <a:t>ㄴ</a:t>
+            </a:r>
+            <a:r>
+              <a:rPr lang="ko-KR" altLang="en-US" dirty="0"/>
+              <a:t> </a:t>
+            </a:r>
+            <a:r>
+              <a:rPr lang="en-US" altLang="ko-KR" dirty="0"/>
+              <a:t>z-index</a:t>
+            </a:r>
+          </a:p>
+          <a:p>
+            <a:pPr marL="0" marR="0" lvl="0" indent="0" algn="l" defTabSz="914400" rtl="0" eaLnBrk="1" fontAlgn="auto" latinLnBrk="1" hangingPunct="1">
+              <a:lnSpc>
+                <a:spcPct val="100000"/>
+              </a:lnSpc>
+              <a:spcBef>
+                <a:spcPts val="0"/>
+              </a:spcBef>
+              <a:spcAft>
+                <a:spcPts val="0"/>
+              </a:spcAft>
+              <a:buClrTx/>
+              <a:buSzTx/>
+              <a:buFontTx/>
+              <a:buNone/>
+              <a:tabLst/>
+              <a:defRPr/>
+            </a:pPr>
+            <a:endParaRPr lang="en-US" altLang="ko-KR" dirty="0"/>
+          </a:p>
+          <a:p>
+            <a:pPr marL="0" marR="0" lvl="0" indent="0" algn="l" defTabSz="914400" rtl="0" eaLnBrk="1" fontAlgn="auto" latinLnBrk="1" hangingPunct="1">
+              <a:lnSpc>
+                <a:spcPct val="100000"/>
+              </a:lnSpc>
+              <a:spcBef>
+                <a:spcPts val="0"/>
+              </a:spcBef>
+              <a:spcAft>
+                <a:spcPts val="0"/>
+              </a:spcAft>
+              <a:buClrTx/>
+              <a:buSzTx/>
+              <a:buFontTx/>
+              <a:buNone/>
+              <a:tabLst/>
+              <a:defRPr/>
+            </a:pPr>
+            <a:r>
+              <a:rPr lang="en-US" altLang="ko-KR" dirty="0"/>
+              <a:t>Index8.html &amp; </a:t>
+            </a:r>
+            <a:r>
+              <a:rPr lang="en-US" altLang="ko-KR" dirty="0" err="1"/>
+              <a:t>css</a:t>
+            </a:r>
+            <a:endParaRPr lang="en-US" altLang="ko-KR" dirty="0"/>
+          </a:p>
+          <a:p>
+            <a:pPr marL="0" marR="0" lvl="0" indent="0" algn="l" defTabSz="914400" rtl="0" eaLnBrk="1" fontAlgn="auto" latinLnBrk="1" hangingPunct="1">
+              <a:lnSpc>
+                <a:spcPct val="100000"/>
+              </a:lnSpc>
+              <a:spcBef>
+                <a:spcPts val="0"/>
+              </a:spcBef>
+              <a:spcAft>
+                <a:spcPts val="0"/>
+              </a:spcAft>
+              <a:buClrTx/>
+              <a:buSzTx/>
+              <a:buFontTx/>
+              <a:buNone/>
+              <a:tabLst/>
+              <a:defRPr/>
+            </a:pPr>
+            <a:r>
+              <a:rPr lang="ko-KR" altLang="en-US" dirty="0" err="1"/>
+              <a:t>ㄴ</a:t>
+            </a:r>
+            <a:r>
+              <a:rPr lang="ko-KR" altLang="en-US" dirty="0"/>
+              <a:t> </a:t>
+            </a:r>
+            <a:r>
+              <a:rPr lang="en-US" altLang="ko-KR" dirty="0"/>
+              <a:t>overflow</a:t>
+            </a:r>
+          </a:p>
+          <a:p>
+            <a:endParaRPr lang="en-US" altLang="ko-KR" dirty="0"/>
+          </a:p>
+          <a:p>
+            <a:endParaRPr lang="en-US" altLang="ko-KR" dirty="0"/>
           </a:p>
         </p:txBody>
       </p:sp>
@@ -2702,7 +3288,7 @@
     </p:spTree>
     <p:extLst>
       <p:ext uri="{BB962C8B-B14F-4D97-AF65-F5344CB8AC3E}">
-        <p14:creationId xmlns:p14="http://schemas.microsoft.com/office/powerpoint/2010/main" val="314342318"/>
+        <p14:creationId xmlns:p14="http://schemas.microsoft.com/office/powerpoint/2010/main" val="2153334979"/>
       </p:ext>
     </p:extLst>
   </p:cSld>
@@ -2756,7 +3342,14 @@
           <a:bodyPr/>
           <a:lstStyle/>
           <a:p>
-            <a:endParaRPr lang="ko-KR" altLang="en-US" dirty="0"/>
+            <a:r>
+              <a:rPr lang="en-US" altLang="ko-KR" dirty="0"/>
+              <a:t>LMS </a:t>
+            </a:r>
+            <a:r>
+              <a:rPr lang="ko-KR" altLang="en-US" dirty="0"/>
+              <a:t>실습</a:t>
+            </a:r>
           </a:p>
         </p:txBody>
       </p:sp>
@@ -2777,7 +3370,7 @@
           <a:p>
             <a:fld id="{C09E5BFC-1559-42F1-8940-AB342D56BF02}" type="slidenum">
               <a:rPr lang="ko-KR" altLang="en-US" smtClean="0"/>
-              <a:t>7</a:t>
+              <a:t>6</a:t>
             </a:fld>
             <a:endParaRPr lang="ko-KR" altLang="en-US"/>
           </a:p>
@@ -2786,7 +3379,7 @@
     </p:spTree>
     <p:extLst>
       <p:ext uri="{BB962C8B-B14F-4D97-AF65-F5344CB8AC3E}">
-        <p14:creationId xmlns:p14="http://schemas.microsoft.com/office/powerpoint/2010/main" val="632662012"/>
+        <p14:creationId xmlns:p14="http://schemas.microsoft.com/office/powerpoint/2010/main" val="314342318"/>
       </p:ext>
     </p:extLst>
   </p:cSld>
@@ -2840,43 +3433,6 @@
           <a:bodyPr/>
           <a:lstStyle/>
           <a:p>
-            <a:r>
-              <a:rPr lang="en-US" altLang="ko-KR" dirty="0"/>
-              <a:t>kdt3rd-workspace/03_css/</a:t>
-            </a:r>
-            <a:r>
-              <a:rPr lang="en-US" altLang="ko-KR" b="1" dirty="0"/>
-              <a:t>index8.html</a:t>
-            </a:r>
-          </a:p>
-          <a:p>
-            <a:pPr marL="0" marR="0" lvl="0" indent="0" algn="l" defTabSz="914400" rtl="0" eaLnBrk="1" fontAlgn="auto" latinLnBrk="1" hangingPunct="1">
-              <a:lnSpc>
-                <a:spcPct val="100000"/>
-              </a:lnSpc>
-              <a:spcBef>
-                <a:spcPts val="0"/>
-              </a:spcBef>
-              <a:spcAft>
-                <a:spcPts val="0"/>
-              </a:spcAft>
-              <a:buClrTx/>
-              <a:buSzTx/>
-              <a:buFontTx/>
-              <a:buNone/>
-              <a:tabLst/>
-              <a:defRPr/>
-            </a:pPr>
-            <a:r>
-              <a:rPr lang="en-US" altLang="ko-KR" dirty="0"/>
-              <a:t>kdt3rd-workspace/03_css/</a:t>
-            </a:r>
-            <a:r>
-              <a:rPr lang="en-US" altLang="ko-KR" b="1" dirty="0"/>
-              <a:t>index8.css</a:t>
-            </a:r>
-          </a:p>
-          <a:p>
             <a:endParaRPr lang="ko-KR" altLang="en-US" dirty="0"/>
           </a:p>
         </p:txBody>
@@ -2907,7 +3463,7 @@
     </p:spTree>
     <p:extLst>
       <p:ext uri="{BB962C8B-B14F-4D97-AF65-F5344CB8AC3E}">
-        <p14:creationId xmlns:p14="http://schemas.microsoft.com/office/powerpoint/2010/main" val="3559503167"/>
+        <p14:creationId xmlns:p14="http://schemas.microsoft.com/office/powerpoint/2010/main" val="632662012"/>
       </p:ext>
     </p:extLst>
   </p:cSld>
@@ -3000,9 +3556,6 @@
           <a:p>
             <a:endParaRPr lang="ko-KR" altLang="en-US" dirty="0"/>
           </a:p>
-          <a:p>
-            <a:endParaRPr lang="ko-KR" altLang="en-US" dirty="0"/>
-          </a:p>
         </p:txBody>
       </p:sp>
       <p:sp>
@@ -3031,7 +3584,7 @@
     </p:spTree>
     <p:extLst>
       <p:ext uri="{BB962C8B-B14F-4D97-AF65-F5344CB8AC3E}">
-        <p14:creationId xmlns:p14="http://schemas.microsoft.com/office/powerpoint/2010/main" val="3557405413"/>
+        <p14:creationId xmlns:p14="http://schemas.microsoft.com/office/powerpoint/2010/main" val="3559503167"/>
       </p:ext>
     </p:extLst>
   </p:cSld>
@@ -3155,7 +3708,7 @@
     </p:spTree>
     <p:extLst>
       <p:ext uri="{BB962C8B-B14F-4D97-AF65-F5344CB8AC3E}">
-        <p14:creationId xmlns:p14="http://schemas.microsoft.com/office/powerpoint/2010/main" val="172256748"/>
+        <p14:creationId xmlns:p14="http://schemas.microsoft.com/office/powerpoint/2010/main" val="3557405413"/>
       </p:ext>
     </p:extLst>
   </p:cSld>
@@ -3209,6 +3762,46 @@
           <a:bodyPr/>
           <a:lstStyle/>
           <a:p>
+            <a:r>
+              <a:rPr lang="en-US" altLang="ko-KR" dirty="0"/>
+              <a:t>kdt3rd-workspace/03_css/</a:t>
+            </a:r>
+            <a:r>
+              <a:rPr lang="en-US" altLang="ko-KR" b="1" dirty="0"/>
+              <a:t>index8.html</a:t>
+            </a:r>
+          </a:p>
+          <a:p>
+            <a:pPr marL="0" marR="0" lvl="0" indent="0" algn="l" defTabSz="914400" rtl="0" eaLnBrk="1" fontAlgn="auto" latinLnBrk="1" hangingPunct="1">
+              <a:lnSpc>
+                <a:spcPct val="100000"/>
+              </a:lnSpc>
+              <a:spcBef>
+                <a:spcPts val="0"/>
+              </a:spcBef>
+              <a:spcAft>
+                <a:spcPts val="0"/>
+              </a:spcAft>
+              <a:buClrTx/>
+              <a:buSzTx/>
+              <a:buFontTx/>
+              <a:buNone/>
+              <a:tabLst/>
+              <a:defRPr/>
+            </a:pPr>
+            <a:r>
+              <a:rPr lang="en-US" altLang="ko-KR" dirty="0"/>
+              <a:t>kdt3rd-workspace/03_css/</a:t>
+            </a:r>
+            <a:r>
+              <a:rPr lang="en-US" altLang="ko-KR" b="1" dirty="0"/>
+              <a:t>index8.css</a:t>
+            </a:r>
+          </a:p>
+          <a:p>
+            <a:endParaRPr lang="ko-KR" altLang="en-US" dirty="0"/>
+          </a:p>
+          <a:p>
             <a:endParaRPr lang="ko-KR" altLang="en-US" dirty="0"/>
           </a:p>
         </p:txBody>
@@ -3239,7 +3832,7 @@
     </p:spTree>
     <p:extLst>
       <p:ext uri="{BB962C8B-B14F-4D97-AF65-F5344CB8AC3E}">
-        <p14:creationId xmlns:p14="http://schemas.microsoft.com/office/powerpoint/2010/main" val="1880237966"/>
+        <p14:creationId xmlns:p14="http://schemas.microsoft.com/office/powerpoint/2010/main" val="172256748"/>
       </p:ext>
     </p:extLst>
   </p:cSld>
@@ -3293,515 +3886,7 @@
           <a:bodyPr/>
           <a:lstStyle/>
           <a:p>
-            <a:pPr algn="l">
-              <a:buFont typeface="+mj-lt"/>
-              <a:buAutoNum type="arabicPeriod"/>
-            </a:pPr>
-            <a:r>
-              <a:rPr lang="en-US" altLang="ko-KR" b="1" i="0" dirty="0">
-                <a:solidFill>
-                  <a:srgbClr val="0D0D0D"/>
-                </a:solidFill>
-                <a:effectLst/>
-                <a:highlight>
-                  <a:srgbClr val="FFFFFF"/>
-                </a:highlight>
-                <a:latin typeface="Söhne"/>
-              </a:rPr>
-              <a:t>transition-property</a:t>
-            </a:r>
-            <a:r>
-              <a:rPr lang="en-US" altLang="ko-KR" b="0" i="0" dirty="0">
-                <a:solidFill>
-                  <a:srgbClr val="0D0D0D"/>
-                </a:solidFill>
-                <a:effectLst/>
-                <a:highlight>
-                  <a:srgbClr val="FFFFFF"/>
-                </a:highlight>
-                <a:latin typeface="Söhne"/>
-              </a:rPr>
-              <a:t>: </a:t>
-            </a:r>
-            <a:r>
-              <a:rPr lang="ko-KR" altLang="en-US" b="0" i="0" dirty="0">
-                <a:solidFill>
-                  <a:srgbClr val="0D0D0D"/>
-                </a:solidFill>
-                <a:effectLst/>
-                <a:highlight>
-                  <a:srgbClr val="FFFFFF"/>
-                </a:highlight>
-                <a:latin typeface="Söhne"/>
-              </a:rPr>
-              <a:t>애니메이션 효과를 줄 속성 </a:t>
-            </a:r>
-            <a:r>
-              <a:rPr lang="en-US" altLang="ko-KR" b="0" i="0" dirty="0">
-                <a:solidFill>
-                  <a:srgbClr val="0D0D0D"/>
-                </a:solidFill>
-                <a:effectLst/>
-                <a:highlight>
-                  <a:srgbClr val="FFFFFF"/>
-                </a:highlight>
-                <a:latin typeface="Söhne"/>
-              </a:rPr>
-              <a:t>(</a:t>
-            </a:r>
-            <a:r>
-              <a:rPr lang="ko-KR" altLang="en-US" b="0" i="0" dirty="0">
-                <a:solidFill>
-                  <a:srgbClr val="0D0D0D"/>
-                </a:solidFill>
-                <a:effectLst/>
-                <a:highlight>
-                  <a:srgbClr val="FFFFFF"/>
-                </a:highlight>
-                <a:latin typeface="Söhne"/>
-              </a:rPr>
-              <a:t>여기서는 </a:t>
-            </a:r>
-            <a:r>
-              <a:rPr lang="en-US" altLang="ko-KR" b="0" i="0" dirty="0">
-                <a:solidFill>
-                  <a:srgbClr val="0D0D0D"/>
-                </a:solidFill>
-                <a:effectLst/>
-                <a:highlight>
-                  <a:srgbClr val="FFFFFF"/>
-                </a:highlight>
-                <a:latin typeface="Söhne"/>
-              </a:rPr>
-              <a:t>transform).</a:t>
-            </a:r>
-          </a:p>
-          <a:p>
-            <a:pPr algn="l">
-              <a:buFont typeface="+mj-lt"/>
-              <a:buAutoNum type="arabicPeriod"/>
-            </a:pPr>
-            <a:r>
-              <a:rPr lang="en-US" altLang="ko-KR" b="1" i="0" dirty="0">
-                <a:solidFill>
-                  <a:srgbClr val="0D0D0D"/>
-                </a:solidFill>
-                <a:effectLst/>
-                <a:highlight>
-                  <a:srgbClr val="FFFFFF"/>
-                </a:highlight>
-                <a:latin typeface="Söhne"/>
-              </a:rPr>
-              <a:t>transition-duration</a:t>
-            </a:r>
-            <a:r>
-              <a:rPr lang="en-US" altLang="ko-KR" b="0" i="0" dirty="0">
-                <a:solidFill>
-                  <a:srgbClr val="0D0D0D"/>
-                </a:solidFill>
-                <a:effectLst/>
-                <a:highlight>
-                  <a:srgbClr val="FFFFFF"/>
-                </a:highlight>
-                <a:latin typeface="Söhne"/>
-              </a:rPr>
-              <a:t>: </a:t>
-            </a:r>
-            <a:r>
-              <a:rPr lang="ko-KR" altLang="en-US" b="0" i="0" dirty="0">
-                <a:solidFill>
-                  <a:srgbClr val="0D0D0D"/>
-                </a:solidFill>
-                <a:effectLst/>
-                <a:highlight>
-                  <a:srgbClr val="FFFFFF"/>
-                </a:highlight>
-                <a:latin typeface="Söhne"/>
-              </a:rPr>
-              <a:t>애니메이션이 완료되는 시간 </a:t>
-            </a:r>
-            <a:r>
-              <a:rPr lang="en-US" altLang="ko-KR" b="0" i="0" dirty="0">
-                <a:solidFill>
-                  <a:srgbClr val="0D0D0D"/>
-                </a:solidFill>
-                <a:effectLst/>
-                <a:highlight>
-                  <a:srgbClr val="FFFFFF"/>
-                </a:highlight>
-                <a:latin typeface="Söhne"/>
-              </a:rPr>
-              <a:t>(</a:t>
-            </a:r>
-            <a:r>
-              <a:rPr lang="ko-KR" altLang="en-US" b="0" i="0" dirty="0">
-                <a:solidFill>
-                  <a:srgbClr val="0D0D0D"/>
-                </a:solidFill>
-                <a:effectLst/>
-                <a:highlight>
-                  <a:srgbClr val="FFFFFF"/>
-                </a:highlight>
-                <a:latin typeface="Söhne"/>
-              </a:rPr>
-              <a:t>여기서는 </a:t>
-            </a:r>
-            <a:r>
-              <a:rPr lang="en-US" altLang="ko-KR" b="0" i="0" dirty="0">
-                <a:solidFill>
-                  <a:srgbClr val="0D0D0D"/>
-                </a:solidFill>
-                <a:effectLst/>
-                <a:highlight>
-                  <a:srgbClr val="FFFFFF"/>
-                </a:highlight>
-                <a:latin typeface="Söhne"/>
-              </a:rPr>
-              <a:t>1s).</a:t>
-            </a:r>
-          </a:p>
-          <a:p>
-            <a:pPr algn="l">
-              <a:buFont typeface="+mj-lt"/>
-              <a:buAutoNum type="arabicPeriod"/>
-            </a:pPr>
-            <a:r>
-              <a:rPr lang="en-US" altLang="ko-KR" b="1" i="0" dirty="0">
-                <a:solidFill>
-                  <a:srgbClr val="0D0D0D"/>
-                </a:solidFill>
-                <a:effectLst/>
-                <a:highlight>
-                  <a:srgbClr val="FFFFFF"/>
-                </a:highlight>
-                <a:latin typeface="Söhne"/>
-              </a:rPr>
-              <a:t>transition-timing-function</a:t>
-            </a:r>
-            <a:r>
-              <a:rPr lang="ko-KR" altLang="en-US" b="0" i="0" dirty="0">
-                <a:solidFill>
-                  <a:srgbClr val="0D0D0D"/>
-                </a:solidFill>
-                <a:effectLst/>
-                <a:highlight>
-                  <a:srgbClr val="FFFFFF"/>
-                </a:highlight>
-                <a:latin typeface="Söhne"/>
-              </a:rPr>
-              <a:t> </a:t>
-            </a:r>
-            <a:r>
-              <a:rPr lang="en-US" altLang="ko-KR" b="0" i="0" dirty="0">
-                <a:solidFill>
-                  <a:srgbClr val="0D0D0D"/>
-                </a:solidFill>
-                <a:effectLst/>
-                <a:highlight>
-                  <a:srgbClr val="FFFFFF"/>
-                </a:highlight>
-                <a:latin typeface="Söhne"/>
-              </a:rPr>
-              <a:t>(</a:t>
-            </a:r>
-            <a:r>
-              <a:rPr lang="ko-KR" altLang="en-US" b="0" i="0" dirty="0">
-                <a:solidFill>
-                  <a:srgbClr val="0D0D0D"/>
-                </a:solidFill>
-                <a:effectLst/>
-                <a:highlight>
-                  <a:srgbClr val="FFFFFF"/>
-                </a:highlight>
-                <a:latin typeface="Söhne"/>
-              </a:rPr>
-              <a:t>선택 사항</a:t>
-            </a:r>
-            <a:r>
-              <a:rPr lang="en-US" altLang="ko-KR" b="0" i="0" dirty="0">
-                <a:solidFill>
-                  <a:srgbClr val="0D0D0D"/>
-                </a:solidFill>
-                <a:effectLst/>
-                <a:highlight>
-                  <a:srgbClr val="FFFFFF"/>
-                </a:highlight>
-                <a:latin typeface="Söhne"/>
-              </a:rPr>
-              <a:t>): </a:t>
-            </a:r>
-            <a:r>
-              <a:rPr lang="ko-KR" altLang="en-US" b="0" i="0" dirty="0">
-                <a:solidFill>
-                  <a:srgbClr val="0D0D0D"/>
-                </a:solidFill>
-                <a:effectLst/>
-                <a:highlight>
-                  <a:srgbClr val="FFFFFF"/>
-                </a:highlight>
-                <a:latin typeface="Söhne"/>
-              </a:rPr>
-              <a:t>애니메이션 속도의 변화를 정의 </a:t>
-            </a:r>
-            <a:r>
-              <a:rPr lang="en-US" altLang="ko-KR" b="0" i="0" dirty="0">
-                <a:solidFill>
-                  <a:srgbClr val="0D0D0D"/>
-                </a:solidFill>
-                <a:effectLst/>
-                <a:highlight>
-                  <a:srgbClr val="FFFFFF"/>
-                </a:highlight>
-                <a:latin typeface="Söhne"/>
-              </a:rPr>
-              <a:t>(</a:t>
-            </a:r>
-            <a:r>
-              <a:rPr lang="ko-KR" altLang="en-US" b="0" i="0" dirty="0">
-                <a:solidFill>
-                  <a:srgbClr val="0D0D0D"/>
-                </a:solidFill>
-                <a:effectLst/>
-                <a:highlight>
-                  <a:srgbClr val="FFFFFF"/>
-                </a:highlight>
-                <a:latin typeface="Söhne"/>
-              </a:rPr>
-              <a:t>기본값은 </a:t>
-            </a:r>
-            <a:r>
-              <a:rPr lang="en-US" altLang="ko-KR" b="0" i="0" dirty="0">
-                <a:solidFill>
-                  <a:srgbClr val="0D0D0D"/>
-                </a:solidFill>
-                <a:effectLst/>
-                <a:highlight>
-                  <a:srgbClr val="FFFFFF"/>
-                </a:highlight>
-                <a:latin typeface="Söhne"/>
-              </a:rPr>
-              <a:t>ease). – </a:t>
-            </a:r>
-            <a:r>
-              <a:rPr lang="ko-KR" altLang="en-US" b="0" i="0" dirty="0" err="1">
-                <a:solidFill>
-                  <a:srgbClr val="0D0D0D"/>
-                </a:solidFill>
-                <a:effectLst/>
-                <a:highlight>
-                  <a:srgbClr val="FFFFFF"/>
-                </a:highlight>
-                <a:latin typeface="Söhne"/>
-              </a:rPr>
-              <a:t>느렸다가</a:t>
-            </a:r>
-            <a:r>
-              <a:rPr lang="ko-KR" altLang="en-US" b="0" i="0" dirty="0">
-                <a:solidFill>
-                  <a:srgbClr val="0D0D0D"/>
-                </a:solidFill>
-                <a:effectLst/>
-                <a:highlight>
-                  <a:srgbClr val="FFFFFF"/>
-                </a:highlight>
-                <a:latin typeface="Söhne"/>
-              </a:rPr>
-              <a:t> 빨라지게</a:t>
-            </a:r>
-            <a:r>
-              <a:rPr lang="en-US" altLang="ko-KR" b="0" i="0" dirty="0">
-                <a:solidFill>
-                  <a:srgbClr val="0D0D0D"/>
-                </a:solidFill>
-                <a:effectLst/>
-                <a:highlight>
-                  <a:srgbClr val="FFFFFF"/>
-                </a:highlight>
-                <a:latin typeface="Söhne"/>
-              </a:rPr>
-              <a:t>, </a:t>
-            </a:r>
-            <a:r>
-              <a:rPr lang="ko-KR" altLang="en-US" b="0" i="0" dirty="0">
-                <a:solidFill>
-                  <a:srgbClr val="0D0D0D"/>
-                </a:solidFill>
-                <a:effectLst/>
-                <a:highlight>
-                  <a:srgbClr val="FFFFFF"/>
-                </a:highlight>
-                <a:latin typeface="Söhne"/>
-              </a:rPr>
-              <a:t>빨라졌다 느려지게</a:t>
-            </a:r>
-            <a:endParaRPr lang="en-US" altLang="ko-KR" b="0" i="0" dirty="0">
-              <a:solidFill>
-                <a:srgbClr val="0D0D0D"/>
-              </a:solidFill>
-              <a:effectLst/>
-              <a:highlight>
-                <a:srgbClr val="FFFFFF"/>
-              </a:highlight>
-              <a:latin typeface="Söhne"/>
-            </a:endParaRPr>
-          </a:p>
-          <a:p>
-            <a:pPr algn="l">
-              <a:buFont typeface="+mj-lt"/>
-              <a:buAutoNum type="arabicPeriod"/>
-            </a:pPr>
-            <a:r>
-              <a:rPr lang="en-US" altLang="ko-KR" b="1" i="0" dirty="0">
-                <a:solidFill>
-                  <a:srgbClr val="0D0D0D"/>
-                </a:solidFill>
-                <a:effectLst/>
-                <a:highlight>
-                  <a:srgbClr val="FFFFFF"/>
-                </a:highlight>
-                <a:latin typeface="Söhne"/>
-              </a:rPr>
-              <a:t>transition-delay</a:t>
-            </a:r>
-            <a:r>
-              <a:rPr lang="ko-KR" altLang="en-US" b="0" i="0" dirty="0">
-                <a:solidFill>
-                  <a:srgbClr val="0D0D0D"/>
-                </a:solidFill>
-                <a:effectLst/>
-                <a:highlight>
-                  <a:srgbClr val="FFFFFF"/>
-                </a:highlight>
-                <a:latin typeface="Söhne"/>
-              </a:rPr>
-              <a:t> </a:t>
-            </a:r>
-            <a:r>
-              <a:rPr lang="en-US" altLang="ko-KR" b="0" i="0" dirty="0">
-                <a:solidFill>
-                  <a:srgbClr val="0D0D0D"/>
-                </a:solidFill>
-                <a:effectLst/>
-                <a:highlight>
-                  <a:srgbClr val="FFFFFF"/>
-                </a:highlight>
-                <a:latin typeface="Söhne"/>
-              </a:rPr>
-              <a:t>(</a:t>
-            </a:r>
-            <a:r>
-              <a:rPr lang="ko-KR" altLang="en-US" b="0" i="0" dirty="0">
-                <a:solidFill>
-                  <a:srgbClr val="0D0D0D"/>
-                </a:solidFill>
-                <a:effectLst/>
-                <a:highlight>
-                  <a:srgbClr val="FFFFFF"/>
-                </a:highlight>
-                <a:latin typeface="Söhne"/>
-              </a:rPr>
-              <a:t>선택 사항</a:t>
-            </a:r>
-            <a:r>
-              <a:rPr lang="en-US" altLang="ko-KR" b="0" i="0" dirty="0">
-                <a:solidFill>
-                  <a:srgbClr val="0D0D0D"/>
-                </a:solidFill>
-                <a:effectLst/>
-                <a:highlight>
-                  <a:srgbClr val="FFFFFF"/>
-                </a:highlight>
-                <a:latin typeface="Söhne"/>
-              </a:rPr>
-              <a:t>): </a:t>
-            </a:r>
-            <a:r>
-              <a:rPr lang="ko-KR" altLang="en-US" b="0" i="0" dirty="0">
-                <a:solidFill>
-                  <a:srgbClr val="0D0D0D"/>
-                </a:solidFill>
-                <a:effectLst/>
-                <a:highlight>
-                  <a:srgbClr val="FFFFFF"/>
-                </a:highlight>
-                <a:latin typeface="Söhne"/>
-              </a:rPr>
-              <a:t>애니메이션이 시작되기 전의 지연 시간 </a:t>
-            </a:r>
-            <a:r>
-              <a:rPr lang="en-US" altLang="ko-KR" b="0" i="0" dirty="0">
-                <a:solidFill>
-                  <a:srgbClr val="0D0D0D"/>
-                </a:solidFill>
-                <a:effectLst/>
-                <a:highlight>
-                  <a:srgbClr val="FFFFFF"/>
-                </a:highlight>
-                <a:latin typeface="Söhne"/>
-              </a:rPr>
-              <a:t>(</a:t>
-            </a:r>
-            <a:r>
-              <a:rPr lang="ko-KR" altLang="en-US" b="0" i="0" dirty="0">
-                <a:solidFill>
-                  <a:srgbClr val="0D0D0D"/>
-                </a:solidFill>
-                <a:effectLst/>
-                <a:highlight>
-                  <a:srgbClr val="FFFFFF"/>
-                </a:highlight>
-                <a:latin typeface="Söhne"/>
-              </a:rPr>
-              <a:t>기본값은 </a:t>
-            </a:r>
-            <a:r>
-              <a:rPr lang="en-US" altLang="ko-KR" b="0" i="0" dirty="0">
-                <a:solidFill>
-                  <a:srgbClr val="0D0D0D"/>
-                </a:solidFill>
-                <a:effectLst/>
-                <a:highlight>
-                  <a:srgbClr val="FFFFFF"/>
-                </a:highlight>
-                <a:latin typeface="Söhne"/>
-              </a:rPr>
-              <a:t>0s).</a:t>
-            </a:r>
-          </a:p>
-          <a:p>
-            <a:pPr algn="l">
-              <a:buFont typeface="+mj-lt"/>
-              <a:buAutoNum type="arabicPeriod"/>
-            </a:pPr>
-            <a:endParaRPr lang="en-US" altLang="ko-KR" b="0" i="0" dirty="0">
-              <a:solidFill>
-                <a:srgbClr val="0D0D0D"/>
-              </a:solidFill>
-              <a:effectLst/>
-              <a:highlight>
-                <a:srgbClr val="FFFFFF"/>
-              </a:highlight>
-              <a:latin typeface="Söhne"/>
-            </a:endParaRPr>
-          </a:p>
-          <a:p>
-            <a:pPr algn="l">
-              <a:buFont typeface="+mj-lt"/>
-              <a:buAutoNum type="arabicPeriod"/>
-            </a:pPr>
-            <a:r>
-              <a:rPr lang="en-US" altLang="ko-KR" b="0" i="0" dirty="0">
-                <a:solidFill>
-                  <a:srgbClr val="0D0D0D"/>
-                </a:solidFill>
-                <a:effectLst/>
-                <a:highlight>
-                  <a:srgbClr val="FFFFFF"/>
-                </a:highlight>
-                <a:latin typeface="Söhne"/>
-              </a:rPr>
-              <a:t>https://developer.mozilla.org/en-US/docs/Web/CSS/transition-timing-function</a:t>
-            </a:r>
+            <a:endParaRPr lang="ko-KR" altLang="en-US" dirty="0"/>
           </a:p>
         </p:txBody>
       </p:sp>
@@ -3831,7 +3916,7 @@
     </p:spTree>
     <p:extLst>
       <p:ext uri="{BB962C8B-B14F-4D97-AF65-F5344CB8AC3E}">
-        <p14:creationId xmlns:p14="http://schemas.microsoft.com/office/powerpoint/2010/main" val="2770638098"/>
+        <p14:creationId xmlns:p14="http://schemas.microsoft.com/office/powerpoint/2010/main" val="1880237966"/>
       </p:ext>
     </p:extLst>
   </p:cSld>
@@ -7689,7 +7774,52 @@
       </p:grpSpPr>
       <p:sp>
         <p:nvSpPr>
-          <p:cNvPr id="2" name="날짜 개체 틀 1"/>
+          <p:cNvPr id="2" name="제목 1"/>
+          <p:cNvSpPr>
+            <a:spLocks noGrp="1"/>
+          </p:cNvSpPr>
+          <p:nvPr>
+            <p:ph type="ctrTitle"/>
+          </p:nvPr>
+        </p:nvSpPr>
+        <p:spPr/>
+        <p:txBody>
+          <a:bodyPr/>
+          <a:lstStyle/>
+          <a:p>
+            <a:r>
+              <a:rPr lang="ko-KR" altLang="en-US" dirty="0"/>
+              <a:t>웹 개발자 부트캠프 과정</a:t>
+            </a:r>
+          </a:p>
+        </p:txBody>
+      </p:sp>
+      <p:sp>
+        <p:nvSpPr>
+          <p:cNvPr id="3" name="부제목 2"/>
+          <p:cNvSpPr>
+            <a:spLocks noGrp="1"/>
+          </p:cNvSpPr>
+          <p:nvPr>
+            <p:ph type="subTitle" idx="1"/>
+          </p:nvPr>
+        </p:nvSpPr>
+        <p:spPr/>
+        <p:txBody>
+          <a:bodyPr/>
+          <a:lstStyle/>
+          <a:p>
+            <a:r>
+              <a:rPr lang="en-US" altLang="ko-KR" dirty="0" err="1"/>
+              <a:t>CodingOn</a:t>
+            </a:r>
+            <a:endParaRPr lang="ko-KR" altLang="en-US" dirty="0"/>
+          </a:p>
+        </p:txBody>
+      </p:sp>
+      <p:sp>
+        <p:nvSpPr>
+          <p:cNvPr id="4" name="날짜 개체 틀 3"/>
           <p:cNvSpPr>
             <a:spLocks noGrp="1"/>
           </p:cNvSpPr>
@@ -7712,7 +7842,7 @@
       </p:sp>
       <p:sp>
         <p:nvSpPr>
-          <p:cNvPr id="3" name="슬라이드 번호 개체 틀 2"/>
+          <p:cNvPr id="5" name="슬라이드 번호 개체 틀 4"/>
           <p:cNvSpPr>
             <a:spLocks noGrp="1"/>
           </p:cNvSpPr>
@@ -7733,36 +7863,10 @@
           </a:p>
         </p:txBody>
       </p:sp>
-      <p:sp>
-        <p:nvSpPr>
-          <p:cNvPr id="4" name="제목 3"/>
-          <p:cNvSpPr>
-            <a:spLocks noGrp="1"/>
-          </p:cNvSpPr>
-          <p:nvPr>
-            <p:ph type="title"/>
-          </p:nvPr>
-        </p:nvSpPr>
-        <p:spPr/>
-        <p:txBody>
-          <a:bodyPr/>
-          <a:lstStyle/>
-          <a:p>
-            <a:r>
-              <a:rPr lang="en-US" altLang="ko-KR" sz="8000" dirty="0"/>
-              <a:t>CSS </a:t>
-            </a:r>
-            <a:r>
-              <a:rPr lang="ko-KR" altLang="en-US" sz="8000" dirty="0"/>
-              <a:t>복잡한 속성</a:t>
-            </a:r>
-          </a:p>
-        </p:txBody>
-      </p:sp>
     </p:spTree>
     <p:extLst>
       <p:ext uri="{BB962C8B-B14F-4D97-AF65-F5344CB8AC3E}">
-        <p14:creationId xmlns:p14="http://schemas.microsoft.com/office/powerpoint/2010/main" val="2290481859"/>
+        <p14:creationId xmlns:p14="http://schemas.microsoft.com/office/powerpoint/2010/main" val="2183790230"/>
       </p:ext>
     </p:extLst>
   </p:cSld>
@@ -7794,7 +7898,7 @@
           <p:cNvPr id="5" name="날짜 개체 틀 4">
             <a:extLst>
               <a:ext uri="{FF2B5EF4-FFF2-40B4-BE49-F238E27FC236}">
-                <a16:creationId xmlns:a16="http://schemas.microsoft.com/office/drawing/2014/main" id="{E7FDE02C-EB9C-E208-3F25-DE54396F035A}"/>
+                <a16:creationId xmlns:a16="http://schemas.microsoft.com/office/drawing/2014/main" id="{FF28005D-C3B3-0345-8E72-EAC850CC55BB}"/>
               </a:ext>
             </a:extLst>
           </p:cNvPr>
@@ -7819,7 +7923,7 @@
           <p:cNvPr id="4" name="슬라이드 번호 개체 틀 3">
             <a:extLst>
               <a:ext uri="{FF2B5EF4-FFF2-40B4-BE49-F238E27FC236}">
-                <a16:creationId xmlns:a16="http://schemas.microsoft.com/office/drawing/2014/main" id="{9F143398-BC25-1AF2-28F5-643094CF9CFE}"/>
+                <a16:creationId xmlns:a16="http://schemas.microsoft.com/office/drawing/2014/main" id="{6AB730F9-1B38-77DA-37B0-877B8EE83F64}"/>
               </a:ext>
             </a:extLst>
           </p:cNvPr>
@@ -7848,7 +7952,7 @@
           <p:cNvPr id="6" name="제목 1">
             <a:extLst>
               <a:ext uri="{FF2B5EF4-FFF2-40B4-BE49-F238E27FC236}">
-                <a16:creationId xmlns:a16="http://schemas.microsoft.com/office/drawing/2014/main" id="{5572E856-2744-3177-F4D6-C34F5D5B609B}"/>
+                <a16:creationId xmlns:a16="http://schemas.microsoft.com/office/drawing/2014/main" id="{588C3C44-5967-85DC-3ED4-2830FAE370C6}"/>
               </a:ext>
             </a:extLst>
           </p:cNvPr>
@@ -7885,7 +7989,7 @@
           <p:cNvPr id="8" name="날짜 개체 틀 3">
             <a:extLst>
               <a:ext uri="{FF2B5EF4-FFF2-40B4-BE49-F238E27FC236}">
-                <a16:creationId xmlns:a16="http://schemas.microsoft.com/office/drawing/2014/main" id="{A1630AAA-9B55-18D3-332D-AFBF264CC9F9}"/>
+                <a16:creationId xmlns:a16="http://schemas.microsoft.com/office/drawing/2014/main" id="{6FD7CA5C-A72D-FFC1-A78B-FE0820A75160}"/>
               </a:ext>
             </a:extLst>
           </p:cNvPr>
@@ -7908,7 +8012,295 @@
           <a:p>
             <a:fld id="{0F78D9C4-20C1-4B15-A116-16DC77AD9A1E}" type="datetime1">
               <a:rPr lang="ko-KR" altLang="en-US" smtClean="0"/>
-              <a:t>2024-05-17</a:t>
+              <a:t>2024-05-20</a:t>
+            </a:fld>
+            <a:endParaRPr lang="ko-KR" altLang="en-US"/>
+          </a:p>
+        </p:txBody>
+      </p:sp>
+      <p:sp>
+        <p:nvSpPr>
+          <p:cNvPr id="7" name="TextBox 6">
+            <a:extLst>
+              <a:ext uri="{FF2B5EF4-FFF2-40B4-BE49-F238E27FC236}">
+                <a16:creationId xmlns:a16="http://schemas.microsoft.com/office/drawing/2014/main" id="{A2B1B55B-F1C6-0A10-1027-CFD8B7D83D79}"/>
+              </a:ext>
+            </a:extLst>
+          </p:cNvPr>
+          <p:cNvSpPr txBox="1"/>
+          <p:nvPr/>
+        </p:nvSpPr>
+        <p:spPr>
+          <a:xfrm>
+            <a:off x="578895" y="1403122"/>
+            <a:ext cx="6134582" cy="461665"/>
+          </a:xfrm>
+          <a:prstGeom prst="rect">
+            <a:avLst/>
+          </a:prstGeom>
+          <a:noFill/>
+        </p:spPr>
+        <p:txBody>
+          <a:bodyPr wrap="square">
+            <a:spAutoFit/>
+          </a:bodyPr>
+          <a:lstStyle/>
+          <a:p>
+            <a:pPr marL="285750" indent="-285750">
+              <a:buFont typeface="Arial" panose="020B0604020202020204" pitchFamily="34" charset="0"/>
+              <a:buChar char="•"/>
+            </a:pPr>
+            <a:r>
+              <a:rPr lang="en-US" altLang="ko-KR" sz="2400" dirty="0"/>
+              <a:t>rotate : </a:t>
+            </a:r>
+            <a:r>
+              <a:rPr lang="ko-KR" altLang="en-US" sz="2400" dirty="0"/>
+              <a:t>회전</a:t>
+            </a:r>
+            <a:endParaRPr lang="en-US" altLang="ko-KR" sz="2400" dirty="0"/>
+          </a:p>
+        </p:txBody>
+      </p:sp>
+      <p:sp>
+        <p:nvSpPr>
+          <p:cNvPr id="10" name="TextBox 9">
+            <a:extLst>
+              <a:ext uri="{FF2B5EF4-FFF2-40B4-BE49-F238E27FC236}">
+                <a16:creationId xmlns:a16="http://schemas.microsoft.com/office/drawing/2014/main" id="{0E43F812-1055-34ED-1764-51CA5AAD8D34}"/>
+              </a:ext>
+            </a:extLst>
+          </p:cNvPr>
+          <p:cNvSpPr txBox="1"/>
+          <p:nvPr/>
+        </p:nvSpPr>
+        <p:spPr>
+          <a:xfrm>
+            <a:off x="1615440" y="6089209"/>
+            <a:ext cx="10414517" cy="276999"/>
+          </a:xfrm>
+          <a:prstGeom prst="rect">
+            <a:avLst/>
+          </a:prstGeom>
+          <a:noFill/>
+        </p:spPr>
+        <p:txBody>
+          <a:bodyPr wrap="square">
+            <a:spAutoFit/>
+          </a:bodyPr>
+          <a:lstStyle/>
+          <a:p>
+            <a:pPr algn="r"/>
+            <a:r>
+              <a:rPr lang="ko-KR" altLang="en-US" sz="1200" dirty="0">
+                <a:solidFill>
+                  <a:schemeClr val="bg2">
+                    <a:lumMod val="50000"/>
+                  </a:schemeClr>
+                </a:solidFill>
+              </a:rPr>
+              <a:t>사진 출처</a:t>
+            </a:r>
+            <a:r>
+              <a:rPr lang="en-US" altLang="ko-KR" sz="1200" dirty="0">
+                <a:solidFill>
+                  <a:schemeClr val="bg2">
+                    <a:lumMod val="50000"/>
+                  </a:schemeClr>
+                </a:solidFill>
+              </a:rPr>
+              <a:t>: https://dev.to/kunaal438/css-transform-complete-guide-on-css-transform-everything-you-need-for-good-developer-841</a:t>
+            </a:r>
+            <a:endParaRPr lang="ko-KR" altLang="en-US" sz="1200" dirty="0">
+              <a:solidFill>
+                <a:schemeClr val="bg2">
+                  <a:lumMod val="50000"/>
+                </a:schemeClr>
+              </a:solidFill>
+            </a:endParaRPr>
+          </a:p>
+        </p:txBody>
+      </p:sp>
+      <p:pic>
+        <p:nvPicPr>
+          <p:cNvPr id="12" name="그림 11">
+            <a:extLst>
+              <a:ext uri="{FF2B5EF4-FFF2-40B4-BE49-F238E27FC236}">
+                <a16:creationId xmlns:a16="http://schemas.microsoft.com/office/drawing/2014/main" id="{8127D8A1-0953-615B-45A2-D16B65AEB6CB}"/>
+              </a:ext>
+            </a:extLst>
+          </p:cNvPr>
+          <p:cNvPicPr>
+            <a:picLocks noChangeAspect="1"/>
+          </p:cNvPicPr>
+          <p:nvPr/>
+        </p:nvPicPr>
+        <p:blipFill>
+          <a:blip r:embed="rId3"/>
+          <a:stretch>
+            <a:fillRect/>
+          </a:stretch>
+        </p:blipFill>
+        <p:spPr>
+          <a:xfrm>
+            <a:off x="3201326" y="1179517"/>
+            <a:ext cx="7619074" cy="4714143"/>
+          </a:xfrm>
+          <a:prstGeom prst="rect">
+            <a:avLst/>
+          </a:prstGeom>
+        </p:spPr>
+      </p:pic>
+    </p:spTree>
+    <p:extLst>
+      <p:ext uri="{BB962C8B-B14F-4D97-AF65-F5344CB8AC3E}">
+        <p14:creationId xmlns:p14="http://schemas.microsoft.com/office/powerpoint/2010/main" val="4116496482"/>
+      </p:ext>
+    </p:extLst>
+  </p:cSld>
+  <p:clrMapOvr>
+    <a:masterClrMapping/>
+  </p:clrMapOvr>
+</p:sld>
+</file>
+
+<file path=ppt/slides/slide11.xml><?xml version="1.0" encoding="utf-8"?>
+<p:sld xmlns:a="http://schemas.openxmlformats.org/drawingml/2006/main" xmlns:r="http://schemas.openxmlformats.org/officeDocument/2006/relationships" xmlns:p="http://schemas.openxmlformats.org/presentationml/2006/main">
+  <p:cSld>
+    <p:spTree>
+      <p:nvGrpSpPr>
+        <p:cNvPr id="1" name=""/>
+        <p:cNvGrpSpPr/>
+        <p:nvPr/>
+      </p:nvGrpSpPr>
+      <p:grpSpPr>
+        <a:xfrm>
+          <a:off x="0" y="0"/>
+          <a:ext cx="0" cy="0"/>
+          <a:chOff x="0" y="0"/>
+          <a:chExt cx="0" cy="0"/>
+        </a:xfrm>
+      </p:grpSpPr>
+      <p:sp>
+        <p:nvSpPr>
+          <p:cNvPr id="5" name="날짜 개체 틀 4">
+            <a:extLst>
+              <a:ext uri="{FF2B5EF4-FFF2-40B4-BE49-F238E27FC236}">
+                <a16:creationId xmlns:a16="http://schemas.microsoft.com/office/drawing/2014/main" id="{E7FDE02C-EB9C-E208-3F25-DE54396F035A}"/>
+              </a:ext>
+            </a:extLst>
+          </p:cNvPr>
+          <p:cNvSpPr>
+            <a:spLocks noGrp="1"/>
+          </p:cNvSpPr>
+          <p:nvPr>
+            <p:ph type="dt" sz="half" idx="10"/>
+          </p:nvPr>
+        </p:nvSpPr>
+        <p:spPr/>
+        <p:txBody>
+          <a:bodyPr/>
+          <a:lstStyle/>
+          <a:p>
+            <a:endParaRPr lang="ko-KR" altLang="en-US" dirty="0"/>
+          </a:p>
+        </p:txBody>
+      </p:sp>
+      <p:sp>
+        <p:nvSpPr>
+          <p:cNvPr id="4" name="슬라이드 번호 개체 틀 3">
+            <a:extLst>
+              <a:ext uri="{FF2B5EF4-FFF2-40B4-BE49-F238E27FC236}">
+                <a16:creationId xmlns:a16="http://schemas.microsoft.com/office/drawing/2014/main" id="{9F143398-BC25-1AF2-28F5-643094CF9CFE}"/>
+              </a:ext>
+            </a:extLst>
+          </p:cNvPr>
+          <p:cNvSpPr>
+            <a:spLocks noGrp="1"/>
+          </p:cNvSpPr>
+          <p:nvPr>
+            <p:ph type="sldNum" sz="quarter" idx="12"/>
+          </p:nvPr>
+        </p:nvSpPr>
+        <p:spPr/>
+        <p:txBody>
+          <a:bodyPr/>
+          <a:lstStyle/>
+          <a:p>
+            <a:fld id="{083A2CE0-18CD-4102-B738-4ACFF9E68BA4}" type="slidenum">
+              <a:rPr lang="ko-KR" altLang="en-US" smtClean="0"/>
+              <a:t>11</a:t>
+            </a:fld>
+            <a:endParaRPr lang="ko-KR" altLang="en-US"/>
+          </a:p>
+        </p:txBody>
+      </p:sp>
+      <p:sp>
+        <p:nvSpPr>
+          <p:cNvPr id="6" name="제목 1">
+            <a:extLst>
+              <a:ext uri="{FF2B5EF4-FFF2-40B4-BE49-F238E27FC236}">
+                <a16:creationId xmlns:a16="http://schemas.microsoft.com/office/drawing/2014/main" id="{5572E856-2744-3177-F4D6-C34F5D5B609B}"/>
+              </a:ext>
+            </a:extLst>
+          </p:cNvPr>
+          <p:cNvSpPr>
+            <a:spLocks noGrp="1"/>
+          </p:cNvSpPr>
+          <p:nvPr>
+            <p:ph type="title"/>
+          </p:nvPr>
+        </p:nvSpPr>
+        <p:spPr/>
+        <p:txBody>
+          <a:bodyPr/>
+          <a:lstStyle/>
+          <a:p>
+            <a:r>
+              <a:rPr lang="en-US" altLang="ko-KR" dirty="0"/>
+              <a:t>CSS </a:t>
+            </a:r>
+            <a:r>
+              <a:rPr lang="ko-KR" altLang="en-US" dirty="0"/>
+              <a:t>복잡한 속성 </a:t>
+            </a:r>
+            <a:r>
+              <a:rPr lang="en-US" altLang="ko-KR" dirty="0"/>
+              <a:t>- transform</a:t>
+            </a:r>
+            <a:endParaRPr lang="ko-KR" altLang="en-US" dirty="0"/>
+          </a:p>
+        </p:txBody>
+      </p:sp>
+      <p:sp>
+        <p:nvSpPr>
+          <p:cNvPr id="8" name="날짜 개체 틀 3">
+            <a:extLst>
+              <a:ext uri="{FF2B5EF4-FFF2-40B4-BE49-F238E27FC236}">
+                <a16:creationId xmlns:a16="http://schemas.microsoft.com/office/drawing/2014/main" id="{A1630AAA-9B55-18D3-332D-AFBF264CC9F9}"/>
+              </a:ext>
+            </a:extLst>
+          </p:cNvPr>
+          <p:cNvSpPr>
+            <a:spLocks noGrp="1"/>
+          </p:cNvSpPr>
+          <p:nvPr>
+            <p:ph type="dt" sz="half" idx="4294967295"/>
+          </p:nvPr>
+        </p:nvSpPr>
+        <p:spPr>
+          <a:xfrm>
+            <a:off x="0" y="6480175"/>
+            <a:ext cx="2743200" cy="365125"/>
+          </a:xfrm>
+        </p:spPr>
+        <p:txBody>
+          <a:bodyPr/>
+          <a:lstStyle/>
+          <a:p>
+            <a:fld id="{0F78D9C4-20C1-4B15-A116-16DC77AD9A1E}" type="datetime1">
+              <a:rPr lang="ko-KR" altLang="en-US" smtClean="0"/>
+              <a:t>2024-05-20</a:t>
             </a:fld>
             <a:endParaRPr lang="ko-KR" altLang="en-US" dirty="0"/>
           </a:p>
@@ -8060,123 +8452,6 @@
 </p:sld>
 </file>
 
-<file path=ppt/slides/slide11.xml><?xml version="1.0" encoding="utf-8"?>
-<p:sld xmlns:a="http://schemas.openxmlformats.org/drawingml/2006/main" xmlns:r="http://schemas.openxmlformats.org/officeDocument/2006/relationships" xmlns:p="http://schemas.openxmlformats.org/presentationml/2006/main">
-  <p:cSld>
-    <p:spTree>
-      <p:nvGrpSpPr>
-        <p:cNvPr id="1" name=""/>
-        <p:cNvGrpSpPr/>
-        <p:nvPr/>
-      </p:nvGrpSpPr>
-      <p:grpSpPr>
-        <a:xfrm>
-          <a:off x="0" y="0"/>
-          <a:ext cx="0" cy="0"/>
-          <a:chOff x="0" y="0"/>
-          <a:chExt cx="0" cy="0"/>
-        </a:xfrm>
-      </p:grpSpPr>
-      <p:sp>
-        <p:nvSpPr>
-          <p:cNvPr id="2" name="날짜 개체 틀 1">
-            <a:extLst>
-              <a:ext uri="{FF2B5EF4-FFF2-40B4-BE49-F238E27FC236}">
-                <a16:creationId xmlns:a16="http://schemas.microsoft.com/office/drawing/2014/main" id="{55BDFA10-ECF7-38FE-C364-618B7085F1E3}"/>
-              </a:ext>
-            </a:extLst>
-          </p:cNvPr>
-          <p:cNvSpPr>
-            <a:spLocks noGrp="1"/>
-          </p:cNvSpPr>
-          <p:nvPr>
-            <p:ph type="dt" sz="half" idx="10"/>
-          </p:nvPr>
-        </p:nvSpPr>
-        <p:spPr/>
-        <p:txBody>
-          <a:bodyPr/>
-          <a:lstStyle/>
-          <a:p>
-            <a:fld id="{0E19CB95-6D28-40F1-9DA3-1BAC5D4B5B4F}" type="datetime6">
-              <a:rPr lang="ko-KR" altLang="en-US" smtClean="0"/>
-              <a:t>2024년 5월</a:t>
-            </a:fld>
-            <a:endParaRPr lang="ko-KR" altLang="en-US"/>
-          </a:p>
-        </p:txBody>
-      </p:sp>
-      <p:sp>
-        <p:nvSpPr>
-          <p:cNvPr id="3" name="슬라이드 번호 개체 틀 2">
-            <a:extLst>
-              <a:ext uri="{FF2B5EF4-FFF2-40B4-BE49-F238E27FC236}">
-                <a16:creationId xmlns:a16="http://schemas.microsoft.com/office/drawing/2014/main" id="{BEAC1192-3240-5090-C940-3FE8EE2E796E}"/>
-              </a:ext>
-            </a:extLst>
-          </p:cNvPr>
-          <p:cNvSpPr>
-            <a:spLocks noGrp="1"/>
-          </p:cNvSpPr>
-          <p:nvPr>
-            <p:ph type="sldNum" sz="quarter" idx="12"/>
-          </p:nvPr>
-        </p:nvSpPr>
-        <p:spPr/>
-        <p:txBody>
-          <a:bodyPr/>
-          <a:lstStyle/>
-          <a:p>
-            <a:fld id="{083A2CE0-18CD-4102-B738-4ACFF9E68BA4}" type="slidenum">
-              <a:rPr lang="ko-KR" altLang="en-US" smtClean="0"/>
-              <a:t>11</a:t>
-            </a:fld>
-            <a:endParaRPr lang="ko-KR" altLang="en-US"/>
-          </a:p>
-        </p:txBody>
-      </p:sp>
-      <p:sp>
-        <p:nvSpPr>
-          <p:cNvPr id="4" name="제목 3">
-            <a:extLst>
-              <a:ext uri="{FF2B5EF4-FFF2-40B4-BE49-F238E27FC236}">
-                <a16:creationId xmlns:a16="http://schemas.microsoft.com/office/drawing/2014/main" id="{45DC42BC-3382-7592-84ED-A0A40D69B177}"/>
-              </a:ext>
-            </a:extLst>
-          </p:cNvPr>
-          <p:cNvSpPr>
-            <a:spLocks noGrp="1"/>
-          </p:cNvSpPr>
-          <p:nvPr>
-            <p:ph type="title"/>
-          </p:nvPr>
-        </p:nvSpPr>
-        <p:spPr/>
-        <p:txBody>
-          <a:bodyPr/>
-          <a:lstStyle/>
-          <a:p>
-            <a:r>
-              <a:rPr lang="en-US" altLang="ko-KR" sz="11500" dirty="0"/>
-              <a:t>transition</a:t>
-            </a:r>
-            <a:endParaRPr lang="ko-KR" altLang="en-US" sz="11500" dirty="0"/>
-          </a:p>
-        </p:txBody>
-      </p:sp>
-    </p:spTree>
-    <p:extLst>
-      <p:ext uri="{BB962C8B-B14F-4D97-AF65-F5344CB8AC3E}">
-        <p14:creationId xmlns:p14="http://schemas.microsoft.com/office/powerpoint/2010/main" val="1034469439"/>
-      </p:ext>
-    </p:extLst>
-  </p:cSld>
-  <p:clrMapOvr>
-    <a:masterClrMapping/>
-  </p:clrMapOvr>
-</p:sld>
-</file>
-
 <file path=ppt/slides/slide12.xml><?xml version="1.0" encoding="utf-8"?>
 <p:sld xmlns:a="http://schemas.openxmlformats.org/drawingml/2006/main" xmlns:r="http://schemas.openxmlformats.org/officeDocument/2006/relationships" xmlns:p="http://schemas.openxmlformats.org/presentationml/2006/main">
   <p:cSld>
@@ -8199,7 +8474,7 @@
           <p:cNvPr id="2" name="날짜 개체 틀 1">
             <a:extLst>
               <a:ext uri="{FF2B5EF4-FFF2-40B4-BE49-F238E27FC236}">
-                <a16:creationId xmlns:a16="http://schemas.microsoft.com/office/drawing/2014/main" id="{3E267FBA-00D8-6DD1-2E1C-9E61B9811B31}"/>
+                <a16:creationId xmlns:a16="http://schemas.microsoft.com/office/drawing/2014/main" id="{55BDFA10-ECF7-38FE-C364-618B7085F1E3}"/>
               </a:ext>
             </a:extLst>
           </p:cNvPr>
@@ -8228,7 +8503,7 @@
           <p:cNvPr id="3" name="슬라이드 번호 개체 틀 2">
             <a:extLst>
               <a:ext uri="{FF2B5EF4-FFF2-40B4-BE49-F238E27FC236}">
-                <a16:creationId xmlns:a16="http://schemas.microsoft.com/office/drawing/2014/main" id="{F7A50C0E-9399-A65E-FEBD-B5B85EE38040}"/>
+                <a16:creationId xmlns:a16="http://schemas.microsoft.com/office/drawing/2014/main" id="{BEAC1192-3240-5090-C940-3FE8EE2E796E}"/>
               </a:ext>
             </a:extLst>
           </p:cNvPr>
@@ -8247,6 +8522,123 @@
             <a:fld id="{083A2CE0-18CD-4102-B738-4ACFF9E68BA4}" type="slidenum">
               <a:rPr lang="ko-KR" altLang="en-US" smtClean="0"/>
               <a:t>12</a:t>
+            </a:fld>
+            <a:endParaRPr lang="ko-KR" altLang="en-US"/>
+          </a:p>
+        </p:txBody>
+      </p:sp>
+      <p:sp>
+        <p:nvSpPr>
+          <p:cNvPr id="4" name="제목 3">
+            <a:extLst>
+              <a:ext uri="{FF2B5EF4-FFF2-40B4-BE49-F238E27FC236}">
+                <a16:creationId xmlns:a16="http://schemas.microsoft.com/office/drawing/2014/main" id="{45DC42BC-3382-7592-84ED-A0A40D69B177}"/>
+              </a:ext>
+            </a:extLst>
+          </p:cNvPr>
+          <p:cNvSpPr>
+            <a:spLocks noGrp="1"/>
+          </p:cNvSpPr>
+          <p:nvPr>
+            <p:ph type="title"/>
+          </p:nvPr>
+        </p:nvSpPr>
+        <p:spPr/>
+        <p:txBody>
+          <a:bodyPr/>
+          <a:lstStyle/>
+          <a:p>
+            <a:r>
+              <a:rPr lang="en-US" altLang="ko-KR" sz="11500" dirty="0"/>
+              <a:t>transition</a:t>
+            </a:r>
+            <a:endParaRPr lang="ko-KR" altLang="en-US" sz="11500" dirty="0"/>
+          </a:p>
+        </p:txBody>
+      </p:sp>
+    </p:spTree>
+    <p:extLst>
+      <p:ext uri="{BB962C8B-B14F-4D97-AF65-F5344CB8AC3E}">
+        <p14:creationId xmlns:p14="http://schemas.microsoft.com/office/powerpoint/2010/main" val="1034469439"/>
+      </p:ext>
+    </p:extLst>
+  </p:cSld>
+  <p:clrMapOvr>
+    <a:masterClrMapping/>
+  </p:clrMapOvr>
+</p:sld>
+</file>
+
+<file path=ppt/slides/slide13.xml><?xml version="1.0" encoding="utf-8"?>
+<p:sld xmlns:a="http://schemas.openxmlformats.org/drawingml/2006/main" xmlns:r="http://schemas.openxmlformats.org/officeDocument/2006/relationships" xmlns:p="http://schemas.openxmlformats.org/presentationml/2006/main">
+  <p:cSld>
+    <p:spTree>
+      <p:nvGrpSpPr>
+        <p:cNvPr id="1" name=""/>
+        <p:cNvGrpSpPr/>
+        <p:nvPr/>
+      </p:nvGrpSpPr>
+      <p:grpSpPr>
+        <a:xfrm>
+          <a:off x="0" y="0"/>
+          <a:ext cx="0" cy="0"/>
+          <a:chOff x="0" y="0"/>
+          <a:chExt cx="0" cy="0"/>
+        </a:xfrm>
+      </p:grpSpPr>
+      <p:sp>
+        <p:nvSpPr>
+          <p:cNvPr id="2" name="날짜 개체 틀 1">
+            <a:extLst>
+              <a:ext uri="{FF2B5EF4-FFF2-40B4-BE49-F238E27FC236}">
+                <a16:creationId xmlns:a16="http://schemas.microsoft.com/office/drawing/2014/main" id="{3E267FBA-00D8-6DD1-2E1C-9E61B9811B31}"/>
+              </a:ext>
+            </a:extLst>
+          </p:cNvPr>
+          <p:cNvSpPr>
+            <a:spLocks noGrp="1"/>
+          </p:cNvSpPr>
+          <p:nvPr>
+            <p:ph type="dt" sz="half" idx="10"/>
+          </p:nvPr>
+        </p:nvSpPr>
+        <p:spPr/>
+        <p:txBody>
+          <a:bodyPr/>
+          <a:lstStyle/>
+          <a:p>
+            <a:fld id="{0E19CB95-6D28-40F1-9DA3-1BAC5D4B5B4F}" type="datetime6">
+              <a:rPr lang="ko-KR" altLang="en-US" smtClean="0"/>
+              <a:t>2024년 5월</a:t>
+            </a:fld>
+            <a:endParaRPr lang="ko-KR" altLang="en-US"/>
+          </a:p>
+        </p:txBody>
+      </p:sp>
+      <p:sp>
+        <p:nvSpPr>
+          <p:cNvPr id="3" name="슬라이드 번호 개체 틀 2">
+            <a:extLst>
+              <a:ext uri="{FF2B5EF4-FFF2-40B4-BE49-F238E27FC236}">
+                <a16:creationId xmlns:a16="http://schemas.microsoft.com/office/drawing/2014/main" id="{F7A50C0E-9399-A65E-FEBD-B5B85EE38040}"/>
+              </a:ext>
+            </a:extLst>
+          </p:cNvPr>
+          <p:cNvSpPr>
+            <a:spLocks noGrp="1"/>
+          </p:cNvSpPr>
+          <p:nvPr>
+            <p:ph type="sldNum" sz="quarter" idx="12"/>
+          </p:nvPr>
+        </p:nvSpPr>
+        <p:spPr/>
+        <p:txBody>
+          <a:bodyPr/>
+          <a:lstStyle/>
+          <a:p>
+            <a:fld id="{083A2CE0-18CD-4102-B738-4ACFF9E68BA4}" type="slidenum">
+              <a:rPr lang="ko-KR" altLang="en-US" smtClean="0"/>
+              <a:t>13</a:t>
             </a:fld>
             <a:endParaRPr lang="ko-KR" altLang="en-US"/>
           </a:p>
@@ -8712,7 +9104,7 @@
 </p:sld>
 </file>
 
-<file path=ppt/slides/slide13.xml><?xml version="1.0" encoding="utf-8"?>
+<file path=ppt/slides/slide14.xml><?xml version="1.0" encoding="utf-8"?>
 <p:sld xmlns:a="http://schemas.openxmlformats.org/drawingml/2006/main" xmlns:r="http://schemas.openxmlformats.org/officeDocument/2006/relationships" xmlns:p="http://schemas.openxmlformats.org/presentationml/2006/main">
   <p:cSld>
     <p:spTree>
@@ -8860,7 +9252,7 @@
           <a:p>
             <a:fld id="{0F78D9C4-20C1-4B15-A116-16DC77AD9A1E}" type="datetime1">
               <a:rPr lang="ko-KR" altLang="en-US" smtClean="0"/>
-              <a:t>2024-05-17</a:t>
+              <a:t>2024-05-20</a:t>
             </a:fld>
             <a:endParaRPr lang="ko-KR" altLang="en-US"/>
           </a:p>
@@ -8889,7 +9281,7 @@
           <a:p>
             <a:fld id="{083A2CE0-18CD-4102-B738-4ACFF9E68BA4}" type="slidenum">
               <a:rPr lang="ko-KR" altLang="en-US" smtClean="0"/>
-              <a:t>13</a:t>
+              <a:t>14</a:t>
             </a:fld>
             <a:endParaRPr lang="ko-KR" altLang="en-US"/>
           </a:p>
@@ -8994,7 +9386,7 @@
 </p:sld>
 </file>
 
-<file path=ppt/slides/slide14.xml><?xml version="1.0" encoding="utf-8"?>
+<file path=ppt/slides/slide15.xml><?xml version="1.0" encoding="utf-8"?>
 <p:sld xmlns:a="http://schemas.openxmlformats.org/drawingml/2006/main" xmlns:r="http://schemas.openxmlformats.org/officeDocument/2006/relationships" xmlns:p="http://schemas.openxmlformats.org/presentationml/2006/main">
   <p:cSld>
     <p:spTree>
@@ -9090,7 +9482,7 @@
           <a:p>
             <a:fld id="{0F78D9C4-20C1-4B15-A116-16DC77AD9A1E}" type="datetime1">
               <a:rPr lang="ko-KR" altLang="en-US" smtClean="0"/>
-              <a:t>2024-05-17</a:t>
+              <a:t>2024-05-20</a:t>
             </a:fld>
             <a:endParaRPr lang="ko-KR" altLang="en-US"/>
           </a:p>
@@ -9119,7 +9511,7 @@
           <a:p>
             <a:fld id="{083A2CE0-18CD-4102-B738-4ACFF9E68BA4}" type="slidenum">
               <a:rPr lang="ko-KR" altLang="en-US" smtClean="0"/>
-              <a:t>14</a:t>
+              <a:t>15</a:t>
             </a:fld>
             <a:endParaRPr lang="ko-KR" altLang="en-US"/>
           </a:p>
@@ -9229,7 +9621,7 @@
 </p:sld>
 </file>
 
-<file path=ppt/slides/slide15.xml><?xml version="1.0" encoding="utf-8"?>
+<file path=ppt/slides/slide16.xml><?xml version="1.0" encoding="utf-8"?>
 <p:sld xmlns:a="http://schemas.openxmlformats.org/drawingml/2006/main" xmlns:r="http://schemas.openxmlformats.org/officeDocument/2006/relationships" xmlns:p="http://schemas.openxmlformats.org/presentationml/2006/main">
   <p:cSld>
     <p:spTree>
@@ -9702,7 +10094,7 @@
           <a:p>
             <a:fld id="{083A2CE0-18CD-4102-B738-4ACFF9E68BA4}" type="slidenum">
               <a:rPr lang="ko-KR" altLang="en-US" smtClean="0"/>
-              <a:t>15</a:t>
+              <a:t>16</a:t>
             </a:fld>
             <a:endParaRPr lang="ko-KR" altLang="en-US"/>
           </a:p>
@@ -9973,123 +10365,6 @@
 </p:sld>
 </file>
 
-<file path=ppt/slides/slide16.xml><?xml version="1.0" encoding="utf-8"?>
-<p:sld xmlns:a="http://schemas.openxmlformats.org/drawingml/2006/main" xmlns:r="http://schemas.openxmlformats.org/officeDocument/2006/relationships" xmlns:p="http://schemas.openxmlformats.org/presentationml/2006/main">
-  <p:cSld>
-    <p:spTree>
-      <p:nvGrpSpPr>
-        <p:cNvPr id="1" name=""/>
-        <p:cNvGrpSpPr/>
-        <p:nvPr/>
-      </p:nvGrpSpPr>
-      <p:grpSpPr>
-        <a:xfrm>
-          <a:off x="0" y="0"/>
-          <a:ext cx="0" cy="0"/>
-          <a:chOff x="0" y="0"/>
-          <a:chExt cx="0" cy="0"/>
-        </a:xfrm>
-      </p:grpSpPr>
-      <p:sp>
-        <p:nvSpPr>
-          <p:cNvPr id="2" name="날짜 개체 틀 1">
-            <a:extLst>
-              <a:ext uri="{FF2B5EF4-FFF2-40B4-BE49-F238E27FC236}">
-                <a16:creationId xmlns:a16="http://schemas.microsoft.com/office/drawing/2014/main" id="{55BDFA10-ECF7-38FE-C364-618B7085F1E3}"/>
-              </a:ext>
-            </a:extLst>
-          </p:cNvPr>
-          <p:cNvSpPr>
-            <a:spLocks noGrp="1"/>
-          </p:cNvSpPr>
-          <p:nvPr>
-            <p:ph type="dt" sz="half" idx="10"/>
-          </p:nvPr>
-        </p:nvSpPr>
-        <p:spPr/>
-        <p:txBody>
-          <a:bodyPr/>
-          <a:lstStyle/>
-          <a:p>
-            <a:fld id="{0E19CB95-6D28-40F1-9DA3-1BAC5D4B5B4F}" type="datetime6">
-              <a:rPr lang="ko-KR" altLang="en-US" smtClean="0"/>
-              <a:t>2024년 5월</a:t>
-            </a:fld>
-            <a:endParaRPr lang="ko-KR" altLang="en-US"/>
-          </a:p>
-        </p:txBody>
-      </p:sp>
-      <p:sp>
-        <p:nvSpPr>
-          <p:cNvPr id="3" name="슬라이드 번호 개체 틀 2">
-            <a:extLst>
-              <a:ext uri="{FF2B5EF4-FFF2-40B4-BE49-F238E27FC236}">
-                <a16:creationId xmlns:a16="http://schemas.microsoft.com/office/drawing/2014/main" id="{BEAC1192-3240-5090-C940-3FE8EE2E796E}"/>
-              </a:ext>
-            </a:extLst>
-          </p:cNvPr>
-          <p:cNvSpPr>
-            <a:spLocks noGrp="1"/>
-          </p:cNvSpPr>
-          <p:nvPr>
-            <p:ph type="sldNum" sz="quarter" idx="12"/>
-          </p:nvPr>
-        </p:nvSpPr>
-        <p:spPr/>
-        <p:txBody>
-          <a:bodyPr/>
-          <a:lstStyle/>
-          <a:p>
-            <a:fld id="{083A2CE0-18CD-4102-B738-4ACFF9E68BA4}" type="slidenum">
-              <a:rPr lang="ko-KR" altLang="en-US" smtClean="0"/>
-              <a:t>16</a:t>
-            </a:fld>
-            <a:endParaRPr lang="ko-KR" altLang="en-US"/>
-          </a:p>
-        </p:txBody>
-      </p:sp>
-      <p:sp>
-        <p:nvSpPr>
-          <p:cNvPr id="4" name="제목 3">
-            <a:extLst>
-              <a:ext uri="{FF2B5EF4-FFF2-40B4-BE49-F238E27FC236}">
-                <a16:creationId xmlns:a16="http://schemas.microsoft.com/office/drawing/2014/main" id="{45DC42BC-3382-7592-84ED-A0A40D69B177}"/>
-              </a:ext>
-            </a:extLst>
-          </p:cNvPr>
-          <p:cNvSpPr>
-            <a:spLocks noGrp="1"/>
-          </p:cNvSpPr>
-          <p:nvPr>
-            <p:ph type="title"/>
-          </p:nvPr>
-        </p:nvSpPr>
-        <p:spPr/>
-        <p:txBody>
-          <a:bodyPr/>
-          <a:lstStyle/>
-          <a:p>
-            <a:r>
-              <a:rPr lang="en-US" altLang="ko-KR" sz="11500" dirty="0"/>
-              <a:t>display</a:t>
-            </a:r>
-            <a:endParaRPr lang="ko-KR" altLang="en-US" sz="11500" dirty="0"/>
-          </a:p>
-        </p:txBody>
-      </p:sp>
-    </p:spTree>
-    <p:extLst>
-      <p:ext uri="{BB962C8B-B14F-4D97-AF65-F5344CB8AC3E}">
-        <p14:creationId xmlns:p14="http://schemas.microsoft.com/office/powerpoint/2010/main" val="1561224962"/>
-      </p:ext>
-    </p:extLst>
-  </p:cSld>
-  <p:clrMapOvr>
-    <a:masterClrMapping/>
-  </p:clrMapOvr>
-</p:sld>
-</file>
-
 <file path=ppt/slides/slide17.xml><?xml version="1.0" encoding="utf-8"?>
 <p:sld xmlns:a="http://schemas.openxmlformats.org/drawingml/2006/main" xmlns:r="http://schemas.openxmlformats.org/officeDocument/2006/relationships" xmlns:p="http://schemas.openxmlformats.org/presentationml/2006/main">
   <p:cSld>
@@ -10109,81 +10384,10 @@
       </p:grpSpPr>
       <p:sp>
         <p:nvSpPr>
-          <p:cNvPr id="6" name="내용 개체 틀 6">
-            <a:extLst>
-              <a:ext uri="{FF2B5EF4-FFF2-40B4-BE49-F238E27FC236}">
-                <a16:creationId xmlns:a16="http://schemas.microsoft.com/office/drawing/2014/main" id="{21AC2E97-18FD-4237-589C-515E36846713}"/>
-              </a:ext>
-            </a:extLst>
-          </p:cNvPr>
-          <p:cNvSpPr>
-            <a:spLocks noGrp="1"/>
-          </p:cNvSpPr>
-          <p:nvPr>
-            <p:ph idx="1"/>
-          </p:nvPr>
-        </p:nvSpPr>
-        <p:spPr>
-          <a:xfrm>
-            <a:off x="4721087" y="1573833"/>
-            <a:ext cx="3654286" cy="4351338"/>
-          </a:xfrm>
-        </p:spPr>
-        <p:txBody>
-          <a:bodyPr>
-            <a:normAutofit lnSpcReduction="10000"/>
-          </a:bodyPr>
-          <a:lstStyle/>
-          <a:p>
-            <a:r>
-              <a:rPr lang="en-US" altLang="ko-KR" dirty="0"/>
-              <a:t>inline / block</a:t>
-            </a:r>
-          </a:p>
-          <a:p>
-            <a:endParaRPr lang="en-US" altLang="ko-KR" dirty="0"/>
-          </a:p>
-          <a:p>
-            <a:r>
-              <a:rPr lang="en-US" altLang="ko-KR" dirty="0"/>
-              <a:t>inline-block</a:t>
-            </a:r>
-          </a:p>
-          <a:p>
-            <a:endParaRPr lang="en-US" altLang="ko-KR" dirty="0"/>
-          </a:p>
-          <a:p>
-            <a:r>
-              <a:rPr lang="en-US" altLang="ko-KR" dirty="0"/>
-              <a:t>flex</a:t>
-            </a:r>
-          </a:p>
-          <a:p>
-            <a:endParaRPr lang="en-US" altLang="ko-KR" dirty="0"/>
-          </a:p>
-          <a:p>
-            <a:r>
-              <a:rPr lang="en-US" altLang="ko-KR" dirty="0"/>
-              <a:t>grid</a:t>
-            </a:r>
-          </a:p>
-          <a:p>
-            <a:endParaRPr lang="en-US" altLang="ko-KR" dirty="0"/>
-          </a:p>
-          <a:p>
-            <a:r>
-              <a:rPr lang="en-US" altLang="ko-KR" dirty="0"/>
-              <a:t>grid</a:t>
-            </a:r>
-          </a:p>
-        </p:txBody>
-      </p:sp>
-      <p:sp>
-        <p:nvSpPr>
-          <p:cNvPr id="4" name="날짜 개체 틀 3">
-            <a:extLst>
-              <a:ext uri="{FF2B5EF4-FFF2-40B4-BE49-F238E27FC236}">
-                <a16:creationId xmlns:a16="http://schemas.microsoft.com/office/drawing/2014/main" id="{8D53B6E7-C258-1708-6F45-31FFDE080827}"/>
+          <p:cNvPr id="2" name="날짜 개체 틀 1">
+            <a:extLst>
+              <a:ext uri="{FF2B5EF4-FFF2-40B4-BE49-F238E27FC236}">
+                <a16:creationId xmlns:a16="http://schemas.microsoft.com/office/drawing/2014/main" id="{55BDFA10-ECF7-38FE-C364-618B7085F1E3}"/>
               </a:ext>
             </a:extLst>
           </p:cNvPr>
@@ -10199,9 +10403,9 @@
           <a:bodyPr/>
           <a:lstStyle/>
           <a:p>
-            <a:fld id="{0F78D9C4-20C1-4B15-A116-16DC77AD9A1E}" type="datetime1">
+            <a:fld id="{0E19CB95-6D28-40F1-9DA3-1BAC5D4B5B4F}" type="datetime6">
               <a:rPr lang="ko-KR" altLang="en-US" smtClean="0"/>
-              <a:t>2024-05-17</a:t>
+              <a:t>2024년 5월</a:t>
             </a:fld>
             <a:endParaRPr lang="ko-KR" altLang="en-US"/>
           </a:p>
@@ -10209,10 +10413,10 @@
       </p:sp>
       <p:sp>
         <p:nvSpPr>
-          <p:cNvPr id="5" name="슬라이드 번호 개체 틀 4">
-            <a:extLst>
-              <a:ext uri="{FF2B5EF4-FFF2-40B4-BE49-F238E27FC236}">
-                <a16:creationId xmlns:a16="http://schemas.microsoft.com/office/drawing/2014/main" id="{2299A0EE-47F7-D110-E2A1-2ACF334E18E3}"/>
+          <p:cNvPr id="3" name="슬라이드 번호 개체 틀 2">
+            <a:extLst>
+              <a:ext uri="{FF2B5EF4-FFF2-40B4-BE49-F238E27FC236}">
+                <a16:creationId xmlns:a16="http://schemas.microsoft.com/office/drawing/2014/main" id="{BEAC1192-3240-5090-C940-3FE8EE2E796E}"/>
               </a:ext>
             </a:extLst>
           </p:cNvPr>
@@ -10238,10 +10442,10 @@
       </p:sp>
       <p:sp>
         <p:nvSpPr>
-          <p:cNvPr id="2" name="제목 1">
-            <a:extLst>
-              <a:ext uri="{FF2B5EF4-FFF2-40B4-BE49-F238E27FC236}">
-                <a16:creationId xmlns:a16="http://schemas.microsoft.com/office/drawing/2014/main" id="{02C53F9D-FAD3-2E9F-1E65-5F5FB3F0F6C0}"/>
+          <p:cNvPr id="4" name="제목 3">
+            <a:extLst>
+              <a:ext uri="{FF2B5EF4-FFF2-40B4-BE49-F238E27FC236}">
+                <a16:creationId xmlns:a16="http://schemas.microsoft.com/office/drawing/2014/main" id="{45DC42BC-3382-7592-84ED-A0A40D69B177}"/>
               </a:ext>
             </a:extLst>
           </p:cNvPr>
@@ -10258,25 +10462,17 @@
           <a:lstStyle/>
           <a:p>
             <a:r>
-              <a:rPr lang="en-US" altLang="ko-KR" dirty="0"/>
-              <a:t>CSS </a:t>
-            </a:r>
-            <a:r>
-              <a:rPr lang="ko-KR" altLang="en-US" dirty="0"/>
-              <a:t>복잡한 속성 </a:t>
-            </a:r>
-            <a:r>
-              <a:rPr lang="en-US" altLang="ko-KR" dirty="0"/>
-              <a:t>- display</a:t>
-            </a:r>
-            <a:endParaRPr lang="ko-KR" altLang="en-US" dirty="0"/>
+              <a:rPr lang="en-US" altLang="ko-KR" sz="11500" dirty="0"/>
+              <a:t>display</a:t>
+            </a:r>
+            <a:endParaRPr lang="ko-KR" altLang="en-US" sz="11500" dirty="0"/>
           </a:p>
         </p:txBody>
       </p:sp>
     </p:spTree>
     <p:extLst>
       <p:ext uri="{BB962C8B-B14F-4D97-AF65-F5344CB8AC3E}">
-        <p14:creationId xmlns:p14="http://schemas.microsoft.com/office/powerpoint/2010/main" val="2429561381"/>
+        <p14:creationId xmlns:p14="http://schemas.microsoft.com/office/powerpoint/2010/main" val="1561224962"/>
       </p:ext>
     </p:extLst>
   </p:cSld>
@@ -10303,42 +10499,141 @@
           <a:chExt cx="0" cy="0"/>
         </a:xfrm>
       </p:grpSpPr>
-      <p:pic>
-        <p:nvPicPr>
-          <p:cNvPr id="3" name="그림 2"/>
-          <p:cNvPicPr>
-            <a:picLocks noChangeAspect="1"/>
-          </p:cNvPicPr>
-          <p:nvPr/>
-        </p:nvPicPr>
-        <p:blipFill>
-          <a:blip r:embed="rId3">
-            <a:extLst>
-              <a:ext uri="{28A0092B-C50C-407E-A947-70E740481C1C}">
-                <a14:useLocalDpi xmlns:a14="http://schemas.microsoft.com/office/drawing/2010/main" val="0"/>
-              </a:ext>
-            </a:extLst>
-          </a:blip>
-          <a:stretch>
-            <a:fillRect/>
-          </a:stretch>
-        </p:blipFill>
+      <p:sp>
+        <p:nvSpPr>
+          <p:cNvPr id="6" name="내용 개체 틀 6">
+            <a:extLst>
+              <a:ext uri="{FF2B5EF4-FFF2-40B4-BE49-F238E27FC236}">
+                <a16:creationId xmlns:a16="http://schemas.microsoft.com/office/drawing/2014/main" id="{21AC2E97-18FD-4237-589C-515E36846713}"/>
+              </a:ext>
+            </a:extLst>
+          </p:cNvPr>
+          <p:cNvSpPr>
+            <a:spLocks noGrp="1"/>
+          </p:cNvSpPr>
+          <p:nvPr>
+            <p:ph idx="1"/>
+          </p:nvPr>
+        </p:nvSpPr>
         <p:spPr>
           <a:xfrm>
-            <a:off x="920261" y="1565213"/>
-            <a:ext cx="10351478" cy="4548585"/>
+            <a:off x="4721087" y="1573833"/>
+            <a:ext cx="3654286" cy="4351338"/>
           </a:xfrm>
-          <a:prstGeom prst="rect">
-            <a:avLst/>
-          </a:prstGeom>
         </p:spPr>
-      </p:pic>
+        <p:txBody>
+          <a:bodyPr>
+            <a:normAutofit lnSpcReduction="10000"/>
+          </a:bodyPr>
+          <a:lstStyle/>
+          <a:p>
+            <a:r>
+              <a:rPr lang="en-US" altLang="ko-KR" dirty="0"/>
+              <a:t>inline / block</a:t>
+            </a:r>
+          </a:p>
+          <a:p>
+            <a:endParaRPr lang="en-US" altLang="ko-KR" dirty="0"/>
+          </a:p>
+          <a:p>
+            <a:r>
+              <a:rPr lang="en-US" altLang="ko-KR" dirty="0"/>
+              <a:t>inline-block</a:t>
+            </a:r>
+          </a:p>
+          <a:p>
+            <a:endParaRPr lang="en-US" altLang="ko-KR" dirty="0"/>
+          </a:p>
+          <a:p>
+            <a:r>
+              <a:rPr lang="en-US" altLang="ko-KR" dirty="0"/>
+              <a:t>flex</a:t>
+            </a:r>
+          </a:p>
+          <a:p>
+            <a:endParaRPr lang="en-US" altLang="ko-KR" dirty="0"/>
+          </a:p>
+          <a:p>
+            <a:r>
+              <a:rPr lang="en-US" altLang="ko-KR" dirty="0"/>
+              <a:t>grid</a:t>
+            </a:r>
+          </a:p>
+          <a:p>
+            <a:endParaRPr lang="en-US" altLang="ko-KR" dirty="0"/>
+          </a:p>
+          <a:p>
+            <a:r>
+              <a:rPr lang="en-US" altLang="ko-KR" dirty="0"/>
+              <a:t>grid</a:t>
+            </a:r>
+          </a:p>
+        </p:txBody>
+      </p:sp>
+      <p:sp>
+        <p:nvSpPr>
+          <p:cNvPr id="4" name="날짜 개체 틀 3">
+            <a:extLst>
+              <a:ext uri="{FF2B5EF4-FFF2-40B4-BE49-F238E27FC236}">
+                <a16:creationId xmlns:a16="http://schemas.microsoft.com/office/drawing/2014/main" id="{8D53B6E7-C258-1708-6F45-31FFDE080827}"/>
+              </a:ext>
+            </a:extLst>
+          </p:cNvPr>
+          <p:cNvSpPr>
+            <a:spLocks noGrp="1"/>
+          </p:cNvSpPr>
+          <p:nvPr>
+            <p:ph type="dt" sz="half" idx="10"/>
+          </p:nvPr>
+        </p:nvSpPr>
+        <p:spPr/>
+        <p:txBody>
+          <a:bodyPr/>
+          <a:lstStyle/>
+          <a:p>
+            <a:fld id="{0F78D9C4-20C1-4B15-A116-16DC77AD9A1E}" type="datetime1">
+              <a:rPr lang="ko-KR" altLang="en-US" smtClean="0"/>
+              <a:t>2024-05-20</a:t>
+            </a:fld>
+            <a:endParaRPr lang="ko-KR" altLang="en-US"/>
+          </a:p>
+        </p:txBody>
+      </p:sp>
+      <p:sp>
+        <p:nvSpPr>
+          <p:cNvPr id="5" name="슬라이드 번호 개체 틀 4">
+            <a:extLst>
+              <a:ext uri="{FF2B5EF4-FFF2-40B4-BE49-F238E27FC236}">
+                <a16:creationId xmlns:a16="http://schemas.microsoft.com/office/drawing/2014/main" id="{2299A0EE-47F7-D110-E2A1-2ACF334E18E3}"/>
+              </a:ext>
+            </a:extLst>
+          </p:cNvPr>
+          <p:cNvSpPr>
+            <a:spLocks noGrp="1"/>
+          </p:cNvSpPr>
+          <p:nvPr>
+            <p:ph type="sldNum" sz="quarter" idx="12"/>
+          </p:nvPr>
+        </p:nvSpPr>
+        <p:spPr/>
+        <p:txBody>
+          <a:bodyPr/>
+          <a:lstStyle/>
+          <a:p>
+            <a:fld id="{083A2CE0-18CD-4102-B738-4ACFF9E68BA4}" type="slidenum">
+              <a:rPr lang="ko-KR" altLang="en-US" smtClean="0"/>
+              <a:t>18</a:t>
+            </a:fld>
+            <a:endParaRPr lang="ko-KR" altLang="en-US"/>
+          </a:p>
+        </p:txBody>
+      </p:sp>
       <p:sp>
         <p:nvSpPr>
           <p:cNvPr id="2" name="제목 1">
             <a:extLst>
               <a:ext uri="{FF2B5EF4-FFF2-40B4-BE49-F238E27FC236}">
-                <a16:creationId xmlns:a16="http://schemas.microsoft.com/office/drawing/2014/main" id="{2281EE9B-083C-1657-437D-D3E4A1E0D007}"/>
+                <a16:creationId xmlns:a16="http://schemas.microsoft.com/office/drawing/2014/main" id="{02C53F9D-FAD3-2E9F-1E65-5F5FB3F0F6C0}"/>
               </a:ext>
             </a:extLst>
           </p:cNvPr>
@@ -10355,28 +10650,16 @@
           <a:lstStyle/>
           <a:p>
             <a:r>
-              <a:rPr lang="ko-KR" altLang="en-US" dirty="0">
-                <a:solidFill>
-                  <a:srgbClr val="6EC173"/>
-                </a:solidFill>
-              </a:rPr>
-              <a:t>실습</a:t>
-            </a:r>
-            <a:r>
-              <a:rPr lang="en-US" altLang="ko-KR" dirty="0">
-                <a:solidFill>
-                  <a:srgbClr val="6EC173"/>
-                </a:solidFill>
-              </a:rPr>
-              <a:t>. </a:t>
+              <a:rPr lang="en-US" altLang="ko-KR" dirty="0"/>
+              <a:t>CSS </a:t>
             </a:r>
             <a:r>
               <a:rPr lang="ko-KR" altLang="en-US" dirty="0"/>
-              <a:t>다양한 헤더 만들기 </a:t>
+              <a:t>복잡한 속성 </a:t>
             </a:r>
             <a:r>
               <a:rPr lang="en-US" altLang="ko-KR" dirty="0"/>
-              <a:t>(with. flex)</a:t>
+              <a:t>- display</a:t>
             </a:r>
             <a:endParaRPr lang="ko-KR" altLang="en-US" dirty="0"/>
           </a:p>
@@ -10385,7 +10668,7 @@
     </p:spTree>
     <p:extLst>
       <p:ext uri="{BB962C8B-B14F-4D97-AF65-F5344CB8AC3E}">
-        <p14:creationId xmlns:p14="http://schemas.microsoft.com/office/powerpoint/2010/main" val="3887244353"/>
+        <p14:creationId xmlns:p14="http://schemas.microsoft.com/office/powerpoint/2010/main" val="2429561381"/>
       </p:ext>
     </p:extLst>
   </p:cSld>
@@ -10412,6 +10695,217 @@
           <a:chExt cx="0" cy="0"/>
         </a:xfrm>
       </p:grpSpPr>
+      <p:pic>
+        <p:nvPicPr>
+          <p:cNvPr id="3" name="그림 2"/>
+          <p:cNvPicPr>
+            <a:picLocks noChangeAspect="1"/>
+          </p:cNvPicPr>
+          <p:nvPr/>
+        </p:nvPicPr>
+        <p:blipFill>
+          <a:blip r:embed="rId3">
+            <a:extLst>
+              <a:ext uri="{28A0092B-C50C-407E-A947-70E740481C1C}">
+                <a14:useLocalDpi xmlns:a14="http://schemas.microsoft.com/office/drawing/2010/main" val="0"/>
+              </a:ext>
+            </a:extLst>
+          </a:blip>
+          <a:stretch>
+            <a:fillRect/>
+          </a:stretch>
+        </p:blipFill>
+        <p:spPr>
+          <a:xfrm>
+            <a:off x="920261" y="1565213"/>
+            <a:ext cx="10351478" cy="4548585"/>
+          </a:xfrm>
+          <a:prstGeom prst="rect">
+            <a:avLst/>
+          </a:prstGeom>
+        </p:spPr>
+      </p:pic>
+      <p:sp>
+        <p:nvSpPr>
+          <p:cNvPr id="2" name="제목 1">
+            <a:extLst>
+              <a:ext uri="{FF2B5EF4-FFF2-40B4-BE49-F238E27FC236}">
+                <a16:creationId xmlns:a16="http://schemas.microsoft.com/office/drawing/2014/main" id="{2281EE9B-083C-1657-437D-D3E4A1E0D007}"/>
+              </a:ext>
+            </a:extLst>
+          </p:cNvPr>
+          <p:cNvSpPr>
+            <a:spLocks noGrp="1"/>
+          </p:cNvSpPr>
+          <p:nvPr>
+            <p:ph type="title"/>
+          </p:nvPr>
+        </p:nvSpPr>
+        <p:spPr/>
+        <p:txBody>
+          <a:bodyPr/>
+          <a:lstStyle/>
+          <a:p>
+            <a:r>
+              <a:rPr lang="ko-KR" altLang="en-US" dirty="0">
+                <a:solidFill>
+                  <a:srgbClr val="6EC173"/>
+                </a:solidFill>
+              </a:rPr>
+              <a:t>실습</a:t>
+            </a:r>
+            <a:r>
+              <a:rPr lang="en-US" altLang="ko-KR" dirty="0">
+                <a:solidFill>
+                  <a:srgbClr val="6EC173"/>
+                </a:solidFill>
+              </a:rPr>
+              <a:t>. </a:t>
+            </a:r>
+            <a:r>
+              <a:rPr lang="ko-KR" altLang="en-US" dirty="0"/>
+              <a:t>다양한 헤더 만들기 </a:t>
+            </a:r>
+            <a:r>
+              <a:rPr lang="en-US" altLang="ko-KR" dirty="0"/>
+              <a:t>(with. flex)</a:t>
+            </a:r>
+            <a:endParaRPr lang="ko-KR" altLang="en-US" dirty="0"/>
+          </a:p>
+        </p:txBody>
+      </p:sp>
+    </p:spTree>
+    <p:extLst>
+      <p:ext uri="{BB962C8B-B14F-4D97-AF65-F5344CB8AC3E}">
+        <p14:creationId xmlns:p14="http://schemas.microsoft.com/office/powerpoint/2010/main" val="3887244353"/>
+      </p:ext>
+    </p:extLst>
+  </p:cSld>
+  <p:clrMapOvr>
+    <a:masterClrMapping/>
+  </p:clrMapOvr>
+</p:sld>
+</file>
+
+<file path=ppt/slides/slide2.xml><?xml version="1.0" encoding="utf-8"?>
+<p:sld xmlns:a="http://schemas.openxmlformats.org/drawingml/2006/main" xmlns:r="http://schemas.openxmlformats.org/officeDocument/2006/relationships" xmlns:p="http://schemas.openxmlformats.org/presentationml/2006/main">
+  <p:cSld>
+    <p:spTree>
+      <p:nvGrpSpPr>
+        <p:cNvPr id="1" name=""/>
+        <p:cNvGrpSpPr/>
+        <p:nvPr/>
+      </p:nvGrpSpPr>
+      <p:grpSpPr>
+        <a:xfrm>
+          <a:off x="0" y="0"/>
+          <a:ext cx="0" cy="0"/>
+          <a:chOff x="0" y="0"/>
+          <a:chExt cx="0" cy="0"/>
+        </a:xfrm>
+      </p:grpSpPr>
+      <p:sp>
+        <p:nvSpPr>
+          <p:cNvPr id="2" name="날짜 개체 틀 1"/>
+          <p:cNvSpPr>
+            <a:spLocks noGrp="1"/>
+          </p:cNvSpPr>
+          <p:nvPr>
+            <p:ph type="dt" sz="half" idx="10"/>
+          </p:nvPr>
+        </p:nvSpPr>
+        <p:spPr/>
+        <p:txBody>
+          <a:bodyPr/>
+          <a:lstStyle/>
+          <a:p>
+            <a:fld id="{0E19CB95-6D28-40F1-9DA3-1BAC5D4B5B4F}" type="datetime6">
+              <a:rPr lang="ko-KR" altLang="en-US" smtClean="0"/>
+              <a:t>2024년 5월</a:t>
+            </a:fld>
+            <a:endParaRPr lang="ko-KR" altLang="en-US"/>
+          </a:p>
+        </p:txBody>
+      </p:sp>
+      <p:sp>
+        <p:nvSpPr>
+          <p:cNvPr id="3" name="슬라이드 번호 개체 틀 2"/>
+          <p:cNvSpPr>
+            <a:spLocks noGrp="1"/>
+          </p:cNvSpPr>
+          <p:nvPr>
+            <p:ph type="sldNum" sz="quarter" idx="12"/>
+          </p:nvPr>
+        </p:nvSpPr>
+        <p:spPr/>
+        <p:txBody>
+          <a:bodyPr/>
+          <a:lstStyle/>
+          <a:p>
+            <a:fld id="{083A2CE0-18CD-4102-B738-4ACFF9E68BA4}" type="slidenum">
+              <a:rPr lang="ko-KR" altLang="en-US" smtClean="0"/>
+              <a:t>2</a:t>
+            </a:fld>
+            <a:endParaRPr lang="ko-KR" altLang="en-US"/>
+          </a:p>
+        </p:txBody>
+      </p:sp>
+      <p:sp>
+        <p:nvSpPr>
+          <p:cNvPr id="4" name="제목 3"/>
+          <p:cNvSpPr>
+            <a:spLocks noGrp="1"/>
+          </p:cNvSpPr>
+          <p:nvPr>
+            <p:ph type="title"/>
+          </p:nvPr>
+        </p:nvSpPr>
+        <p:spPr/>
+        <p:txBody>
+          <a:bodyPr/>
+          <a:lstStyle/>
+          <a:p>
+            <a:r>
+              <a:rPr lang="en-US" altLang="ko-KR" sz="8000" dirty="0"/>
+              <a:t>CSS </a:t>
+            </a:r>
+            <a:r>
+              <a:rPr lang="ko-KR" altLang="en-US" sz="8000" dirty="0"/>
+              <a:t>복잡한 속성</a:t>
+            </a:r>
+          </a:p>
+        </p:txBody>
+      </p:sp>
+    </p:spTree>
+    <p:extLst>
+      <p:ext uri="{BB962C8B-B14F-4D97-AF65-F5344CB8AC3E}">
+        <p14:creationId xmlns:p14="http://schemas.microsoft.com/office/powerpoint/2010/main" val="2290481859"/>
+      </p:ext>
+    </p:extLst>
+  </p:cSld>
+  <p:clrMapOvr>
+    <a:masterClrMapping/>
+  </p:clrMapOvr>
+</p:sld>
+</file>
+
+<file path=ppt/slides/slide20.xml><?xml version="1.0" encoding="utf-8"?>
+<p:sld xmlns:a="http://schemas.openxmlformats.org/drawingml/2006/main" xmlns:r="http://schemas.openxmlformats.org/officeDocument/2006/relationships" xmlns:p="http://schemas.openxmlformats.org/presentationml/2006/main">
+  <p:cSld>
+    <p:spTree>
+      <p:nvGrpSpPr>
+        <p:cNvPr id="1" name=""/>
+        <p:cNvGrpSpPr/>
+        <p:nvPr/>
+      </p:nvGrpSpPr>
+      <p:grpSpPr>
+        <a:xfrm>
+          <a:off x="0" y="0"/>
+          <a:ext cx="0" cy="0"/>
+          <a:chOff x="0" y="0"/>
+          <a:chExt cx="0" cy="0"/>
+        </a:xfrm>
+      </p:grpSpPr>
       <p:sp>
         <p:nvSpPr>
           <p:cNvPr id="6" name="내용 개체 틀 6">
@@ -10517,7 +11011,7 @@
           <a:p>
             <a:fld id="{0F78D9C4-20C1-4B15-A116-16DC77AD9A1E}" type="datetime1">
               <a:rPr lang="ko-KR" altLang="en-US" smtClean="0"/>
-              <a:t>2024-05-17</a:t>
+              <a:t>2024-05-20</a:t>
             </a:fld>
             <a:endParaRPr lang="ko-KR" altLang="en-US"/>
           </a:p>
@@ -10546,7 +11040,7 @@
           <a:p>
             <a:fld id="{083A2CE0-18CD-4102-B738-4ACFF9E68BA4}" type="slidenum">
               <a:rPr lang="ko-KR" altLang="en-US" smtClean="0"/>
-              <a:t>19</a:t>
+              <a:t>20</a:t>
             </a:fld>
             <a:endParaRPr lang="ko-KR" altLang="en-US"/>
           </a:p>
@@ -10667,326 +11161,6 @@
 </p:sld>
 </file>
 
-<file path=ppt/slides/slide2.xml><?xml version="1.0" encoding="utf-8"?>
-<p:sld xmlns:a="http://schemas.openxmlformats.org/drawingml/2006/main" xmlns:r="http://schemas.openxmlformats.org/officeDocument/2006/relationships" xmlns:p="http://schemas.openxmlformats.org/presentationml/2006/main">
-  <p:cSld>
-    <p:spTree>
-      <p:nvGrpSpPr>
-        <p:cNvPr id="1" name=""/>
-        <p:cNvGrpSpPr/>
-        <p:nvPr/>
-      </p:nvGrpSpPr>
-      <p:grpSpPr>
-        <a:xfrm>
-          <a:off x="0" y="0"/>
-          <a:ext cx="0" cy="0"/>
-          <a:chOff x="0" y="0"/>
-          <a:chExt cx="0" cy="0"/>
-        </a:xfrm>
-      </p:grpSpPr>
-      <p:sp>
-        <p:nvSpPr>
-          <p:cNvPr id="2" name="날짜 개체 틀 1">
-            <a:extLst>
-              <a:ext uri="{FF2B5EF4-FFF2-40B4-BE49-F238E27FC236}">
-                <a16:creationId xmlns:a16="http://schemas.microsoft.com/office/drawing/2014/main" id="{55BDFA10-ECF7-38FE-C364-618B7085F1E3}"/>
-              </a:ext>
-            </a:extLst>
-          </p:cNvPr>
-          <p:cNvSpPr>
-            <a:spLocks noGrp="1"/>
-          </p:cNvSpPr>
-          <p:nvPr>
-            <p:ph type="dt" sz="half" idx="10"/>
-          </p:nvPr>
-        </p:nvSpPr>
-        <p:spPr/>
-        <p:txBody>
-          <a:bodyPr/>
-          <a:lstStyle/>
-          <a:p>
-            <a:fld id="{0E19CB95-6D28-40F1-9DA3-1BAC5D4B5B4F}" type="datetime6">
-              <a:rPr lang="ko-KR" altLang="en-US" smtClean="0"/>
-              <a:t>2024년 5월</a:t>
-            </a:fld>
-            <a:endParaRPr lang="ko-KR" altLang="en-US"/>
-          </a:p>
-        </p:txBody>
-      </p:sp>
-      <p:sp>
-        <p:nvSpPr>
-          <p:cNvPr id="3" name="슬라이드 번호 개체 틀 2">
-            <a:extLst>
-              <a:ext uri="{FF2B5EF4-FFF2-40B4-BE49-F238E27FC236}">
-                <a16:creationId xmlns:a16="http://schemas.microsoft.com/office/drawing/2014/main" id="{BEAC1192-3240-5090-C940-3FE8EE2E796E}"/>
-              </a:ext>
-            </a:extLst>
-          </p:cNvPr>
-          <p:cNvSpPr>
-            <a:spLocks noGrp="1"/>
-          </p:cNvSpPr>
-          <p:nvPr>
-            <p:ph type="sldNum" sz="quarter" idx="12"/>
-          </p:nvPr>
-        </p:nvSpPr>
-        <p:spPr/>
-        <p:txBody>
-          <a:bodyPr/>
-          <a:lstStyle/>
-          <a:p>
-            <a:fld id="{083A2CE0-18CD-4102-B738-4ACFF9E68BA4}" type="slidenum">
-              <a:rPr lang="ko-KR" altLang="en-US" smtClean="0"/>
-              <a:t>2</a:t>
-            </a:fld>
-            <a:endParaRPr lang="ko-KR" altLang="en-US"/>
-          </a:p>
-        </p:txBody>
-      </p:sp>
-      <p:sp>
-        <p:nvSpPr>
-          <p:cNvPr id="4" name="제목 3">
-            <a:extLst>
-              <a:ext uri="{FF2B5EF4-FFF2-40B4-BE49-F238E27FC236}">
-                <a16:creationId xmlns:a16="http://schemas.microsoft.com/office/drawing/2014/main" id="{45DC42BC-3382-7592-84ED-A0A40D69B177}"/>
-              </a:ext>
-            </a:extLst>
-          </p:cNvPr>
-          <p:cNvSpPr>
-            <a:spLocks noGrp="1"/>
-          </p:cNvSpPr>
-          <p:nvPr>
-            <p:ph type="title"/>
-          </p:nvPr>
-        </p:nvSpPr>
-        <p:spPr/>
-        <p:txBody>
-          <a:bodyPr/>
-          <a:lstStyle/>
-          <a:p>
-            <a:r>
-              <a:rPr lang="en-US" altLang="ko-KR" sz="11500" dirty="0"/>
-              <a:t>position</a:t>
-            </a:r>
-            <a:endParaRPr lang="ko-KR" altLang="en-US" sz="11500" dirty="0"/>
-          </a:p>
-        </p:txBody>
-      </p:sp>
-    </p:spTree>
-    <p:extLst>
-      <p:ext uri="{BB962C8B-B14F-4D97-AF65-F5344CB8AC3E}">
-        <p14:creationId xmlns:p14="http://schemas.microsoft.com/office/powerpoint/2010/main" val="696798197"/>
-      </p:ext>
-    </p:extLst>
-  </p:cSld>
-  <p:clrMapOvr>
-    <a:masterClrMapping/>
-  </p:clrMapOvr>
-</p:sld>
-</file>
-
-<file path=ppt/slides/slide20.xml><?xml version="1.0" encoding="utf-8"?>
-<p:sld xmlns:a="http://schemas.openxmlformats.org/drawingml/2006/main" xmlns:r="http://schemas.openxmlformats.org/officeDocument/2006/relationships" xmlns:p="http://schemas.openxmlformats.org/presentationml/2006/main">
-  <p:cSld>
-    <p:spTree>
-      <p:nvGrpSpPr>
-        <p:cNvPr id="1" name=""/>
-        <p:cNvGrpSpPr/>
-        <p:nvPr/>
-      </p:nvGrpSpPr>
-      <p:grpSpPr>
-        <a:xfrm>
-          <a:off x="0" y="0"/>
-          <a:ext cx="0" cy="0"/>
-          <a:chOff x="0" y="0"/>
-          <a:chExt cx="0" cy="0"/>
-        </a:xfrm>
-      </p:grpSpPr>
-      <p:sp>
-        <p:nvSpPr>
-          <p:cNvPr id="3" name="내용 개체 틀 2">
-            <a:extLst>
-              <a:ext uri="{FF2B5EF4-FFF2-40B4-BE49-F238E27FC236}">
-                <a16:creationId xmlns:a16="http://schemas.microsoft.com/office/drawing/2014/main" id="{0E287412-1235-5E33-5E2D-CB2C9A183506}"/>
-              </a:ext>
-            </a:extLst>
-          </p:cNvPr>
-          <p:cNvSpPr>
-            <a:spLocks noGrp="1"/>
-          </p:cNvSpPr>
-          <p:nvPr>
-            <p:ph idx="1"/>
-          </p:nvPr>
-        </p:nvSpPr>
-        <p:spPr/>
-        <p:txBody>
-          <a:bodyPr>
-            <a:normAutofit/>
-          </a:bodyPr>
-          <a:lstStyle/>
-          <a:p>
-            <a:r>
-              <a:rPr lang="en-US" altLang="ko-KR" dirty="0">
-                <a:sym typeface="Wingdings" panose="05000000000000000000" pitchFamily="2" charset="2"/>
-              </a:rPr>
-              <a:t>CSS</a:t>
-            </a:r>
-            <a:r>
-              <a:rPr lang="ko-KR" altLang="en-US" dirty="0">
-                <a:sym typeface="Wingdings" panose="05000000000000000000" pitchFamily="2" charset="2"/>
-              </a:rPr>
-              <a:t>의 애니메이션 효과를 개발자가 직접 지정하는 기능</a:t>
-            </a:r>
-            <a:endParaRPr lang="en-US" altLang="ko-KR" dirty="0">
-              <a:sym typeface="Wingdings" panose="05000000000000000000" pitchFamily="2" charset="2"/>
-            </a:endParaRPr>
-          </a:p>
-          <a:p>
-            <a:r>
-              <a:rPr lang="ko-KR" altLang="en-US" dirty="0">
-                <a:sym typeface="Wingdings" panose="05000000000000000000" pitchFamily="2" charset="2"/>
-              </a:rPr>
-              <a:t>애니메이션의 중간 지점마다 </a:t>
-            </a:r>
-            <a:r>
-              <a:rPr lang="en-US" altLang="ko-KR" dirty="0">
-                <a:sym typeface="Wingdings" panose="05000000000000000000" pitchFamily="2" charset="2"/>
-              </a:rPr>
-              <a:t>CSS </a:t>
-            </a:r>
-            <a:r>
-              <a:rPr lang="ko-KR" altLang="en-US" dirty="0">
-                <a:sym typeface="Wingdings" panose="05000000000000000000" pitchFamily="2" charset="2"/>
-              </a:rPr>
-              <a:t>속성 값을 지정하여 세밀하게 애니메이션 조절하는 기능</a:t>
-            </a:r>
-            <a:endParaRPr lang="en-US" altLang="ko-KR" dirty="0">
-              <a:sym typeface="Wingdings" panose="05000000000000000000" pitchFamily="2" charset="2"/>
-            </a:endParaRPr>
-          </a:p>
-          <a:p>
-            <a:r>
-              <a:rPr lang="ko-KR" altLang="en-US" dirty="0">
-                <a:sym typeface="Wingdings" panose="05000000000000000000" pitchFamily="2" charset="2"/>
-              </a:rPr>
-              <a:t>키프레임을 변수에 선언하고 해당 변수를 </a:t>
-            </a:r>
-            <a:r>
-              <a:rPr lang="en-US" altLang="ko-KR" dirty="0">
-                <a:sym typeface="Wingdings" panose="05000000000000000000" pitchFamily="2" charset="2"/>
-              </a:rPr>
-              <a:t>CSS </a:t>
-            </a:r>
-            <a:r>
-              <a:rPr lang="ko-KR" altLang="en-US" dirty="0">
-                <a:sym typeface="Wingdings" panose="05000000000000000000" pitchFamily="2" charset="2"/>
-              </a:rPr>
-              <a:t>에서 불러와서 사용할 수 있다</a:t>
-            </a:r>
-            <a:r>
-              <a:rPr lang="en-US" altLang="ko-KR" dirty="0">
-                <a:sym typeface="Wingdings" panose="05000000000000000000" pitchFamily="2" charset="2"/>
-              </a:rPr>
-              <a:t>!</a:t>
-            </a:r>
-          </a:p>
-          <a:p>
-            <a:endParaRPr lang="en-US" altLang="ko-KR" dirty="0">
-              <a:sym typeface="Wingdings" panose="05000000000000000000" pitchFamily="2" charset="2"/>
-            </a:endParaRPr>
-          </a:p>
-          <a:p>
-            <a:r>
-              <a:rPr lang="en-US" altLang="ko-KR" dirty="0" err="1">
-                <a:sym typeface="Wingdings" panose="05000000000000000000" pitchFamily="2" charset="2"/>
-              </a:rPr>
-              <a:t>Keyframes</a:t>
-            </a:r>
-            <a:r>
-              <a:rPr lang="en-US" altLang="ko-KR" dirty="0">
-                <a:sym typeface="Wingdings" panose="05000000000000000000" pitchFamily="2" charset="2"/>
-              </a:rPr>
-              <a:t> </a:t>
-            </a:r>
-            <a:r>
-              <a:rPr lang="ko-KR" altLang="en-US" dirty="0">
-                <a:sym typeface="Wingdings" panose="05000000000000000000" pitchFamily="2" charset="2"/>
-              </a:rPr>
-              <a:t>로 설정되는 값</a:t>
-            </a:r>
-            <a:endParaRPr lang="en-US" altLang="ko-KR" dirty="0">
-              <a:sym typeface="Wingdings" panose="05000000000000000000" pitchFamily="2" charset="2"/>
-            </a:endParaRPr>
-          </a:p>
-          <a:p>
-            <a:pPr lvl="1"/>
-            <a:r>
-              <a:rPr lang="en-US" altLang="ko-KR" dirty="0">
-                <a:sym typeface="Wingdings" panose="05000000000000000000" pitchFamily="2" charset="2"/>
-              </a:rPr>
-              <a:t>to/from</a:t>
-            </a:r>
-          </a:p>
-          <a:p>
-            <a:pPr lvl="1"/>
-            <a:r>
-              <a:rPr lang="en-US" altLang="ko-KR" dirty="0">
-                <a:sym typeface="Wingdings" panose="05000000000000000000" pitchFamily="2" charset="2"/>
-              </a:rPr>
-              <a:t>0% ~ 100%</a:t>
-            </a:r>
-          </a:p>
-        </p:txBody>
-      </p:sp>
-      <p:sp>
-        <p:nvSpPr>
-          <p:cNvPr id="2" name="제목 1">
-            <a:extLst>
-              <a:ext uri="{FF2B5EF4-FFF2-40B4-BE49-F238E27FC236}">
-                <a16:creationId xmlns:a16="http://schemas.microsoft.com/office/drawing/2014/main" id="{5872D8F0-548E-0B0A-DD3A-5FBD6A2B463D}"/>
-              </a:ext>
-            </a:extLst>
-          </p:cNvPr>
-          <p:cNvSpPr>
-            <a:spLocks noGrp="1"/>
-          </p:cNvSpPr>
-          <p:nvPr>
-            <p:ph type="title"/>
-          </p:nvPr>
-        </p:nvSpPr>
-        <p:spPr/>
-        <p:txBody>
-          <a:bodyPr/>
-          <a:lstStyle/>
-          <a:p>
-            <a:r>
-              <a:rPr lang="en-US" altLang="ko-KR" dirty="0">
-                <a:solidFill>
-                  <a:srgbClr val="6EC173"/>
-                </a:solidFill>
-              </a:rPr>
-              <a:t>@keyframes</a:t>
-            </a:r>
-            <a:endParaRPr lang="ko-KR" altLang="en-US" dirty="0">
-              <a:solidFill>
-                <a:srgbClr val="6EC173"/>
-              </a:solidFill>
-            </a:endParaRPr>
-          </a:p>
-        </p:txBody>
-      </p:sp>
-    </p:spTree>
-    <p:extLst>
-      <p:ext uri="{BB962C8B-B14F-4D97-AF65-F5344CB8AC3E}">
-        <p14:creationId xmlns:p14="http://schemas.microsoft.com/office/powerpoint/2010/main" val="3930300740"/>
-      </p:ext>
-    </p:extLst>
-  </p:cSld>
-  <p:clrMapOvr>
-    <a:masterClrMapping/>
-  </p:clrMapOvr>
-</p:sld>
-</file>
-
 <file path=ppt/slides/slide21.xml><?xml version="1.0" encoding="utf-8"?>
 <p:sld xmlns:a="http://schemas.openxmlformats.org/drawingml/2006/main" xmlns:r="http://schemas.openxmlformats.org/officeDocument/2006/relationships" xmlns:p="http://schemas.openxmlformats.org/presentationml/2006/main">
   <p:cSld>
@@ -11027,6 +11201,209 @@
           </a:bodyPr>
           <a:lstStyle/>
           <a:p>
+            <a:r>
+              <a:rPr lang="en-US" altLang="ko-KR" dirty="0">
+                <a:sym typeface="Wingdings" panose="05000000000000000000" pitchFamily="2" charset="2"/>
+              </a:rPr>
+              <a:t>CSS</a:t>
+            </a:r>
+            <a:r>
+              <a:rPr lang="ko-KR" altLang="en-US" dirty="0">
+                <a:sym typeface="Wingdings" panose="05000000000000000000" pitchFamily="2" charset="2"/>
+              </a:rPr>
+              <a:t>의 애니메이션 효과를 개발자가 직접 지정하는 기능</a:t>
+            </a:r>
+            <a:endParaRPr lang="en-US" altLang="ko-KR" dirty="0">
+              <a:sym typeface="Wingdings" panose="05000000000000000000" pitchFamily="2" charset="2"/>
+            </a:endParaRPr>
+          </a:p>
+          <a:p>
+            <a:r>
+              <a:rPr lang="ko-KR" altLang="en-US" dirty="0">
+                <a:sym typeface="Wingdings" panose="05000000000000000000" pitchFamily="2" charset="2"/>
+              </a:rPr>
+              <a:t>애니메이션의 중간 지점마다 </a:t>
+            </a:r>
+            <a:r>
+              <a:rPr lang="en-US" altLang="ko-KR" dirty="0">
+                <a:sym typeface="Wingdings" panose="05000000000000000000" pitchFamily="2" charset="2"/>
+              </a:rPr>
+              <a:t>CSS </a:t>
+            </a:r>
+            <a:r>
+              <a:rPr lang="ko-KR" altLang="en-US" dirty="0">
+                <a:sym typeface="Wingdings" panose="05000000000000000000" pitchFamily="2" charset="2"/>
+              </a:rPr>
+              <a:t>속성 값을 지정하여 세밀하게 애니메이션 조절하는 기능</a:t>
+            </a:r>
+            <a:endParaRPr lang="en-US" altLang="ko-KR" dirty="0">
+              <a:sym typeface="Wingdings" panose="05000000000000000000" pitchFamily="2" charset="2"/>
+            </a:endParaRPr>
+          </a:p>
+          <a:p>
+            <a:r>
+              <a:rPr lang="ko-KR" altLang="en-US" dirty="0">
+                <a:sym typeface="Wingdings" panose="05000000000000000000" pitchFamily="2" charset="2"/>
+              </a:rPr>
+              <a:t>키프레임을 변수에 선언하고 해당 변수를 </a:t>
+            </a:r>
+            <a:r>
+              <a:rPr lang="en-US" altLang="ko-KR" dirty="0">
+                <a:sym typeface="Wingdings" panose="05000000000000000000" pitchFamily="2" charset="2"/>
+              </a:rPr>
+              <a:t>CSS </a:t>
+            </a:r>
+            <a:r>
+              <a:rPr lang="ko-KR" altLang="en-US" dirty="0">
+                <a:sym typeface="Wingdings" panose="05000000000000000000" pitchFamily="2" charset="2"/>
+              </a:rPr>
+              <a:t>에서 불러와서 사용할 수 있다</a:t>
+            </a:r>
+            <a:r>
+              <a:rPr lang="en-US" altLang="ko-KR" dirty="0">
+                <a:sym typeface="Wingdings" panose="05000000000000000000" pitchFamily="2" charset="2"/>
+              </a:rPr>
+              <a:t>!</a:t>
+            </a:r>
+          </a:p>
+          <a:p>
+            <a:endParaRPr lang="en-US" altLang="ko-KR" dirty="0">
+              <a:sym typeface="Wingdings" panose="05000000000000000000" pitchFamily="2" charset="2"/>
+            </a:endParaRPr>
+          </a:p>
+          <a:p>
+            <a:r>
+              <a:rPr lang="en-US" altLang="ko-KR" dirty="0" err="1">
+                <a:sym typeface="Wingdings" panose="05000000000000000000" pitchFamily="2" charset="2"/>
+              </a:rPr>
+              <a:t>Keyframes</a:t>
+            </a:r>
+            <a:r>
+              <a:rPr lang="en-US" altLang="ko-KR" dirty="0">
+                <a:sym typeface="Wingdings" panose="05000000000000000000" pitchFamily="2" charset="2"/>
+              </a:rPr>
+              <a:t> </a:t>
+            </a:r>
+            <a:r>
+              <a:rPr lang="ko-KR" altLang="en-US" dirty="0">
+                <a:sym typeface="Wingdings" panose="05000000000000000000" pitchFamily="2" charset="2"/>
+              </a:rPr>
+              <a:t>로 설정되는 값</a:t>
+            </a:r>
+            <a:endParaRPr lang="en-US" altLang="ko-KR" dirty="0">
+              <a:sym typeface="Wingdings" panose="05000000000000000000" pitchFamily="2" charset="2"/>
+            </a:endParaRPr>
+          </a:p>
+          <a:p>
+            <a:pPr lvl="1"/>
+            <a:r>
+              <a:rPr lang="en-US" altLang="ko-KR" dirty="0">
+                <a:sym typeface="Wingdings" panose="05000000000000000000" pitchFamily="2" charset="2"/>
+              </a:rPr>
+              <a:t>to/from</a:t>
+            </a:r>
+          </a:p>
+          <a:p>
+            <a:pPr lvl="1"/>
+            <a:r>
+              <a:rPr lang="en-US" altLang="ko-KR" dirty="0">
+                <a:sym typeface="Wingdings" panose="05000000000000000000" pitchFamily="2" charset="2"/>
+              </a:rPr>
+              <a:t>0% ~ 100%</a:t>
+            </a:r>
+          </a:p>
+        </p:txBody>
+      </p:sp>
+      <p:sp>
+        <p:nvSpPr>
+          <p:cNvPr id="2" name="제목 1">
+            <a:extLst>
+              <a:ext uri="{FF2B5EF4-FFF2-40B4-BE49-F238E27FC236}">
+                <a16:creationId xmlns:a16="http://schemas.microsoft.com/office/drawing/2014/main" id="{5872D8F0-548E-0B0A-DD3A-5FBD6A2B463D}"/>
+              </a:ext>
+            </a:extLst>
+          </p:cNvPr>
+          <p:cNvSpPr>
+            <a:spLocks noGrp="1"/>
+          </p:cNvSpPr>
+          <p:nvPr>
+            <p:ph type="title"/>
+          </p:nvPr>
+        </p:nvSpPr>
+        <p:spPr/>
+        <p:txBody>
+          <a:bodyPr/>
+          <a:lstStyle/>
+          <a:p>
+            <a:r>
+              <a:rPr lang="en-US" altLang="ko-KR" dirty="0">
+                <a:solidFill>
+                  <a:srgbClr val="6EC173"/>
+                </a:solidFill>
+              </a:rPr>
+              <a:t>@keyframes</a:t>
+            </a:r>
+            <a:endParaRPr lang="ko-KR" altLang="en-US" dirty="0">
+              <a:solidFill>
+                <a:srgbClr val="6EC173"/>
+              </a:solidFill>
+            </a:endParaRPr>
+          </a:p>
+        </p:txBody>
+      </p:sp>
+    </p:spTree>
+    <p:extLst>
+      <p:ext uri="{BB962C8B-B14F-4D97-AF65-F5344CB8AC3E}">
+        <p14:creationId xmlns:p14="http://schemas.microsoft.com/office/powerpoint/2010/main" val="3930300740"/>
+      </p:ext>
+    </p:extLst>
+  </p:cSld>
+  <p:clrMapOvr>
+    <a:masterClrMapping/>
+  </p:clrMapOvr>
+</p:sld>
+</file>
+
+<file path=ppt/slides/slide22.xml><?xml version="1.0" encoding="utf-8"?>
+<p:sld xmlns:a="http://schemas.openxmlformats.org/drawingml/2006/main" xmlns:r="http://schemas.openxmlformats.org/officeDocument/2006/relationships" xmlns:p="http://schemas.openxmlformats.org/presentationml/2006/main">
+  <p:cSld>
+    <p:spTree>
+      <p:nvGrpSpPr>
+        <p:cNvPr id="1" name=""/>
+        <p:cNvGrpSpPr/>
+        <p:nvPr/>
+      </p:nvGrpSpPr>
+      <p:grpSpPr>
+        <a:xfrm>
+          <a:off x="0" y="0"/>
+          <a:ext cx="0" cy="0"/>
+          <a:chOff x="0" y="0"/>
+          <a:chExt cx="0" cy="0"/>
+        </a:xfrm>
+      </p:grpSpPr>
+      <p:sp>
+        <p:nvSpPr>
+          <p:cNvPr id="3" name="내용 개체 틀 2">
+            <a:extLst>
+              <a:ext uri="{FF2B5EF4-FFF2-40B4-BE49-F238E27FC236}">
+                <a16:creationId xmlns:a16="http://schemas.microsoft.com/office/drawing/2014/main" id="{0E287412-1235-5E33-5E2D-CB2C9A183506}"/>
+              </a:ext>
+            </a:extLst>
+          </p:cNvPr>
+          <p:cNvSpPr>
+            <a:spLocks noGrp="1"/>
+          </p:cNvSpPr>
+          <p:nvPr>
+            <p:ph idx="1"/>
+          </p:nvPr>
+        </p:nvSpPr>
+        <p:spPr/>
+        <p:txBody>
+          <a:bodyPr>
+            <a:normAutofit/>
+          </a:bodyPr>
+          <a:lstStyle/>
+          <a:p>
             <a:pPr>
               <a:lnSpc>
                 <a:spcPct val="150000"/>
@@ -11195,7 +11572,7 @@
 </p:sld>
 </file>
 
-<file path=ppt/slides/slide22.xml><?xml version="1.0" encoding="utf-8"?>
+<file path=ppt/slides/slide23.xml><?xml version="1.0" encoding="utf-8"?>
 <p:sld xmlns:a="http://schemas.openxmlformats.org/drawingml/2006/main" xmlns:r="http://schemas.openxmlformats.org/officeDocument/2006/relationships" xmlns:p="http://schemas.openxmlformats.org/presentationml/2006/main">
   <p:cSld>
     <p:spTree>
@@ -11635,389 +12012,6 @@
 </p:sld>
 </file>
 
-<file path=ppt/slides/slide23.xml><?xml version="1.0" encoding="utf-8"?>
-<p:sld xmlns:a="http://schemas.openxmlformats.org/drawingml/2006/main" xmlns:r="http://schemas.openxmlformats.org/officeDocument/2006/relationships" xmlns:p="http://schemas.openxmlformats.org/presentationml/2006/main">
-  <p:cSld>
-    <p:spTree>
-      <p:nvGrpSpPr>
-        <p:cNvPr id="1" name=""/>
-        <p:cNvGrpSpPr/>
-        <p:nvPr/>
-      </p:nvGrpSpPr>
-      <p:grpSpPr>
-        <a:xfrm>
-          <a:off x="0" y="0"/>
-          <a:ext cx="0" cy="0"/>
-          <a:chOff x="0" y="0"/>
-          <a:chExt cx="0" cy="0"/>
-        </a:xfrm>
-      </p:grpSpPr>
-      <p:sp>
-        <p:nvSpPr>
-          <p:cNvPr id="7" name="날짜 개체 틀 3">
-            <a:extLst>
-              <a:ext uri="{FF2B5EF4-FFF2-40B4-BE49-F238E27FC236}">
-                <a16:creationId xmlns:a16="http://schemas.microsoft.com/office/drawing/2014/main" id="{A1630AAA-9B55-18D3-332D-AFBF264CC9F9}"/>
-              </a:ext>
-            </a:extLst>
-          </p:cNvPr>
-          <p:cNvSpPr>
-            <a:spLocks noGrp="1"/>
-          </p:cNvSpPr>
-          <p:nvPr>
-            <p:ph type="dt" sz="half" idx="10"/>
-          </p:nvPr>
-        </p:nvSpPr>
-        <p:spPr/>
-        <p:txBody>
-          <a:bodyPr/>
-          <a:lstStyle/>
-          <a:p>
-            <a:fld id="{0F78D9C4-20C1-4B15-A116-16DC77AD9A1E}" type="datetime1">
-              <a:rPr lang="ko-KR" altLang="en-US" smtClean="0"/>
-              <a:t>2024-05-17</a:t>
-            </a:fld>
-            <a:endParaRPr lang="ko-KR" altLang="en-US" dirty="0"/>
-          </a:p>
-        </p:txBody>
-      </p:sp>
-      <p:sp>
-        <p:nvSpPr>
-          <p:cNvPr id="5" name="슬라이드 번호 개체 틀 4">
-            <a:extLst>
-              <a:ext uri="{FF2B5EF4-FFF2-40B4-BE49-F238E27FC236}">
-                <a16:creationId xmlns:a16="http://schemas.microsoft.com/office/drawing/2014/main" id="{1C5ED8DA-072B-7FC5-E113-8C17B68B5929}"/>
-              </a:ext>
-            </a:extLst>
-          </p:cNvPr>
-          <p:cNvSpPr>
-            <a:spLocks noGrp="1"/>
-          </p:cNvSpPr>
-          <p:nvPr>
-            <p:ph type="sldNum" sz="quarter" idx="12"/>
-          </p:nvPr>
-        </p:nvSpPr>
-        <p:spPr/>
-        <p:txBody>
-          <a:bodyPr/>
-          <a:lstStyle/>
-          <a:p>
-            <a:fld id="{083A2CE0-18CD-4102-B738-4ACFF9E68BA4}" type="slidenum">
-              <a:rPr lang="ko-KR" altLang="en-US" smtClean="0"/>
-              <a:t>23</a:t>
-            </a:fld>
-            <a:endParaRPr lang="ko-KR" altLang="en-US"/>
-          </a:p>
-        </p:txBody>
-      </p:sp>
-      <p:sp>
-        <p:nvSpPr>
-          <p:cNvPr id="2" name="제목 1">
-            <a:extLst>
-              <a:ext uri="{FF2B5EF4-FFF2-40B4-BE49-F238E27FC236}">
-                <a16:creationId xmlns:a16="http://schemas.microsoft.com/office/drawing/2014/main" id="{A4C6097A-AC2A-AACF-3345-E85A4A06FE17}"/>
-              </a:ext>
-            </a:extLst>
-          </p:cNvPr>
-          <p:cNvSpPr>
-            <a:spLocks noGrp="1"/>
-          </p:cNvSpPr>
-          <p:nvPr>
-            <p:ph type="title"/>
-          </p:nvPr>
-        </p:nvSpPr>
-        <p:spPr/>
-        <p:txBody>
-          <a:bodyPr/>
-          <a:lstStyle/>
-          <a:p>
-            <a:r>
-              <a:rPr lang="en-US" altLang="ko-KR" dirty="0"/>
-              <a:t>CSS </a:t>
-            </a:r>
-            <a:r>
-              <a:rPr lang="ko-KR" altLang="en-US" dirty="0"/>
-              <a:t>복잡한 속성 </a:t>
-            </a:r>
-            <a:r>
-              <a:rPr lang="en-US" altLang="ko-KR" dirty="0"/>
-              <a:t>- animation</a:t>
-            </a:r>
-            <a:endParaRPr lang="ko-KR" altLang="en-US" dirty="0"/>
-          </a:p>
-        </p:txBody>
-      </p:sp>
-      <p:sp>
-        <p:nvSpPr>
-          <p:cNvPr id="6" name="내용 개체 틀 6">
-            <a:extLst>
-              <a:ext uri="{FF2B5EF4-FFF2-40B4-BE49-F238E27FC236}">
-                <a16:creationId xmlns:a16="http://schemas.microsoft.com/office/drawing/2014/main" id="{86A9CA44-D60E-DE88-52D8-5E8743377533}"/>
-              </a:ext>
-            </a:extLst>
-          </p:cNvPr>
-          <p:cNvSpPr txBox="1">
-            <a:spLocks/>
-          </p:cNvSpPr>
-          <p:nvPr/>
-        </p:nvSpPr>
-        <p:spPr>
-          <a:xfrm>
-            <a:off x="866274" y="1534110"/>
-            <a:ext cx="5775158" cy="4219289"/>
-          </a:xfrm>
-          <a:prstGeom prst="rect">
-            <a:avLst/>
-          </a:prstGeom>
-        </p:spPr>
-        <p:txBody>
-          <a:bodyPr vert="horz" lIns="91440" tIns="45720" rIns="91440" bIns="45720" rtlCol="0">
-            <a:normAutofit/>
-          </a:bodyPr>
-          <a:lstStyle>
-            <a:lvl1pPr marL="228600" indent="-228600" algn="l" defTabSz="914400" rtl="0" eaLnBrk="1" latinLnBrk="1" hangingPunct="1">
-              <a:lnSpc>
-                <a:spcPct val="90000"/>
-              </a:lnSpc>
-              <a:spcBef>
-                <a:spcPts val="1000"/>
-              </a:spcBef>
-              <a:buFont typeface="Arial" panose="020B0604020202020204" pitchFamily="34" charset="0"/>
-              <a:buChar char="•"/>
-              <a:defRPr sz="2800" kern="1200">
-                <a:solidFill>
-                  <a:schemeClr val="tx1"/>
-                </a:solidFill>
-                <a:latin typeface="+mn-lt"/>
-                <a:ea typeface="+mn-ea"/>
-                <a:cs typeface="+mn-cs"/>
-              </a:defRPr>
-            </a:lvl1pPr>
-            <a:lvl2pPr marL="685800" indent="-228600" algn="l" defTabSz="914400" rtl="0" eaLnBrk="1" latinLnBrk="1" hangingPunct="1">
-              <a:lnSpc>
-                <a:spcPct val="90000"/>
-              </a:lnSpc>
-              <a:spcBef>
-                <a:spcPts val="500"/>
-              </a:spcBef>
-              <a:buFont typeface="Arial" panose="020B0604020202020204" pitchFamily="34" charset="0"/>
-              <a:buChar char="•"/>
-              <a:defRPr sz="2400" kern="1200">
-                <a:solidFill>
-                  <a:schemeClr val="tx1"/>
-                </a:solidFill>
-                <a:latin typeface="+mn-lt"/>
-                <a:ea typeface="+mn-ea"/>
-                <a:cs typeface="+mn-cs"/>
-              </a:defRPr>
-            </a:lvl2pPr>
-            <a:lvl3pPr marL="1143000" indent="-228600" algn="l" defTabSz="914400" rtl="0" eaLnBrk="1" latinLnBrk="1" hangingPunct="1">
-              <a:lnSpc>
-                <a:spcPct val="90000"/>
-              </a:lnSpc>
-              <a:spcBef>
-                <a:spcPts val="500"/>
-              </a:spcBef>
-              <a:buFont typeface="Arial" panose="020B0604020202020204" pitchFamily="34" charset="0"/>
-              <a:buChar char="•"/>
-              <a:defRPr sz="2000" kern="1200">
-                <a:solidFill>
-                  <a:schemeClr val="tx1"/>
-                </a:solidFill>
-                <a:latin typeface="+mn-lt"/>
-                <a:ea typeface="+mn-ea"/>
-                <a:cs typeface="+mn-cs"/>
-              </a:defRPr>
-            </a:lvl3pPr>
-            <a:lvl4pPr marL="1600200" indent="-228600" algn="l" defTabSz="914400" rtl="0" eaLnBrk="1" latinLnBrk="1" hangingPunct="1">
-              <a:lnSpc>
-                <a:spcPct val="90000"/>
-              </a:lnSpc>
-              <a:spcBef>
-                <a:spcPts val="500"/>
-              </a:spcBef>
-              <a:buFont typeface="Arial" panose="020B0604020202020204" pitchFamily="34" charset="0"/>
-              <a:buChar char="•"/>
-              <a:defRPr sz="1800" kern="1200">
-                <a:solidFill>
-                  <a:schemeClr val="tx1"/>
-                </a:solidFill>
-                <a:latin typeface="+mn-lt"/>
-                <a:ea typeface="+mn-ea"/>
-                <a:cs typeface="+mn-cs"/>
-              </a:defRPr>
-            </a:lvl4pPr>
-            <a:lvl5pPr marL="2057400" indent="-228600" algn="l" defTabSz="914400" rtl="0" eaLnBrk="1" latinLnBrk="1" hangingPunct="1">
-              <a:lnSpc>
-                <a:spcPct val="90000"/>
-              </a:lnSpc>
-              <a:spcBef>
-                <a:spcPts val="500"/>
-              </a:spcBef>
-              <a:buFont typeface="Arial" panose="020B0604020202020204" pitchFamily="34" charset="0"/>
-              <a:buChar char="•"/>
-              <a:defRPr sz="1800" kern="1200">
-                <a:solidFill>
-                  <a:schemeClr val="tx1"/>
-                </a:solidFill>
-                <a:latin typeface="+mn-lt"/>
-                <a:ea typeface="+mn-ea"/>
-                <a:cs typeface="+mn-cs"/>
-              </a:defRPr>
-            </a:lvl5pPr>
-            <a:lvl6pPr marL="2514600" indent="-228600" algn="l" defTabSz="914400" rtl="0" eaLnBrk="1" latinLnBrk="1" hangingPunct="1">
-              <a:lnSpc>
-                <a:spcPct val="90000"/>
-              </a:lnSpc>
-              <a:spcBef>
-                <a:spcPts val="500"/>
-              </a:spcBef>
-              <a:buFont typeface="Arial" panose="020B0604020202020204" pitchFamily="34" charset="0"/>
-              <a:buChar char="•"/>
-              <a:defRPr sz="1800" kern="1200">
-                <a:solidFill>
-                  <a:schemeClr val="tx1"/>
-                </a:solidFill>
-                <a:latin typeface="+mn-lt"/>
-                <a:ea typeface="+mn-ea"/>
-                <a:cs typeface="+mn-cs"/>
-              </a:defRPr>
-            </a:lvl6pPr>
-            <a:lvl7pPr marL="2971800" indent="-228600" algn="l" defTabSz="914400" rtl="0" eaLnBrk="1" latinLnBrk="1" hangingPunct="1">
-              <a:lnSpc>
-                <a:spcPct val="90000"/>
-              </a:lnSpc>
-              <a:spcBef>
-                <a:spcPts val="500"/>
-              </a:spcBef>
-              <a:buFont typeface="Arial" panose="020B0604020202020204" pitchFamily="34" charset="0"/>
-              <a:buChar char="•"/>
-              <a:defRPr sz="1800" kern="1200">
-                <a:solidFill>
-                  <a:schemeClr val="tx1"/>
-                </a:solidFill>
-                <a:latin typeface="+mn-lt"/>
-                <a:ea typeface="+mn-ea"/>
-                <a:cs typeface="+mn-cs"/>
-              </a:defRPr>
-            </a:lvl7pPr>
-            <a:lvl8pPr marL="3429000" indent="-228600" algn="l" defTabSz="914400" rtl="0" eaLnBrk="1" latinLnBrk="1" hangingPunct="1">
-              <a:lnSpc>
-                <a:spcPct val="90000"/>
-              </a:lnSpc>
-              <a:spcBef>
-                <a:spcPts val="500"/>
-              </a:spcBef>
-              <a:buFont typeface="Arial" panose="020B0604020202020204" pitchFamily="34" charset="0"/>
-              <a:buChar char="•"/>
-              <a:defRPr sz="1800" kern="1200">
-                <a:solidFill>
-                  <a:schemeClr val="tx1"/>
-                </a:solidFill>
-                <a:latin typeface="+mn-lt"/>
-                <a:ea typeface="+mn-ea"/>
-                <a:cs typeface="+mn-cs"/>
-              </a:defRPr>
-            </a:lvl8pPr>
-            <a:lvl9pPr marL="3886200" indent="-228600" algn="l" defTabSz="914400" rtl="0" eaLnBrk="1" latinLnBrk="1" hangingPunct="1">
-              <a:lnSpc>
-                <a:spcPct val="90000"/>
-              </a:lnSpc>
-              <a:spcBef>
-                <a:spcPts val="500"/>
-              </a:spcBef>
-              <a:buFont typeface="Arial" panose="020B0604020202020204" pitchFamily="34" charset="0"/>
-              <a:buChar char="•"/>
-              <a:defRPr sz="1800" kern="1200">
-                <a:solidFill>
-                  <a:schemeClr val="tx1"/>
-                </a:solidFill>
-                <a:latin typeface="+mn-lt"/>
-                <a:ea typeface="+mn-ea"/>
-                <a:cs typeface="+mn-cs"/>
-              </a:defRPr>
-            </a:lvl9pPr>
-          </a:lstStyle>
-          <a:p>
-            <a:pPr>
-              <a:lnSpc>
-                <a:spcPct val="130000"/>
-              </a:lnSpc>
-            </a:pPr>
-            <a:r>
-              <a:rPr lang="en-US" altLang="ko-KR" dirty="0"/>
-              <a:t>Animation-timing-function</a:t>
-            </a:r>
-          </a:p>
-          <a:p>
-            <a:pPr marL="0" indent="0">
-              <a:lnSpc>
-                <a:spcPct val="130000"/>
-              </a:lnSpc>
-              <a:buNone/>
-            </a:pPr>
-            <a:endParaRPr lang="en-US" altLang="ko-KR" dirty="0"/>
-          </a:p>
-        </p:txBody>
-      </p:sp>
-      <p:pic>
-        <p:nvPicPr>
-          <p:cNvPr id="1028" name="Picture 4">
-            <a:extLst>
-              <a:ext uri="{FF2B5EF4-FFF2-40B4-BE49-F238E27FC236}">
-                <a16:creationId xmlns:a16="http://schemas.microsoft.com/office/drawing/2014/main" id="{AC4354F2-3D8A-0128-3312-3AD029D5BCB0}"/>
-              </a:ext>
-            </a:extLst>
-          </p:cNvPr>
-          <p:cNvPicPr>
-            <a:picLocks noChangeAspect="1" noChangeArrowheads="1"/>
-          </p:cNvPicPr>
-          <p:nvPr/>
-        </p:nvPicPr>
-        <p:blipFill rotWithShape="1">
-          <a:blip r:embed="rId3">
-            <a:extLst>
-              <a:ext uri="{28A0092B-C50C-407E-A947-70E740481C1C}">
-                <a14:useLocalDpi xmlns:a14="http://schemas.microsoft.com/office/drawing/2010/main" val="0"/>
-              </a:ext>
-            </a:extLst>
-          </a:blip>
-          <a:srcRect/>
-          <a:stretch/>
-        </p:blipFill>
-        <p:spPr bwMode="auto">
-          <a:xfrm>
-            <a:off x="363152" y="2407021"/>
-            <a:ext cx="11465695" cy="3230883"/>
-          </a:xfrm>
-          <a:prstGeom prst="rect">
-            <a:avLst/>
-          </a:prstGeom>
-          <a:noFill/>
-          <a:extLst>
-            <a:ext uri="{909E8E84-426E-40DD-AFC4-6F175D3DCCD1}">
-              <a14:hiddenFill xmlns:a14="http://schemas.microsoft.com/office/drawing/2010/main">
-                <a:solidFill>
-                  <a:srgbClr val="FFFFFF"/>
-                </a:solidFill>
-              </a14:hiddenFill>
-            </a:ext>
-          </a:extLst>
-        </p:spPr>
-      </p:pic>
-    </p:spTree>
-    <p:extLst>
-      <p:ext uri="{BB962C8B-B14F-4D97-AF65-F5344CB8AC3E}">
-        <p14:creationId xmlns:p14="http://schemas.microsoft.com/office/powerpoint/2010/main" val="3962503383"/>
-      </p:ext>
-    </p:extLst>
-  </p:cSld>
-  <p:clrMapOvr>
-    <a:masterClrMapping/>
-  </p:clrMapOvr>
-</p:sld>
-</file>
-
 <file path=ppt/slides/slide24.xml><?xml version="1.0" encoding="utf-8"?>
 <p:sld xmlns:a="http://schemas.openxmlformats.org/drawingml/2006/main" xmlns:r="http://schemas.openxmlformats.org/officeDocument/2006/relationships" xmlns:p="http://schemas.openxmlformats.org/presentationml/2006/main">
   <p:cSld>
@@ -12037,155 +12031,10 @@
       </p:grpSpPr>
       <p:sp>
         <p:nvSpPr>
-          <p:cNvPr id="13" name="내용 개체 틀 2">
-            <a:extLst>
-              <a:ext uri="{FF2B5EF4-FFF2-40B4-BE49-F238E27FC236}">
-                <a16:creationId xmlns:a16="http://schemas.microsoft.com/office/drawing/2014/main" id="{847FD532-7F61-A001-537F-B970BD821AF3}"/>
-              </a:ext>
-            </a:extLst>
-          </p:cNvPr>
-          <p:cNvSpPr>
-            <a:spLocks noGrp="1"/>
-          </p:cNvSpPr>
-          <p:nvPr>
-            <p:ph idx="1"/>
-          </p:nvPr>
-        </p:nvSpPr>
-        <p:spPr>
-          <a:xfrm>
-            <a:off x="577251" y="1614224"/>
-            <a:ext cx="6274125" cy="3786948"/>
-          </a:xfrm>
-        </p:spPr>
-        <p:txBody>
-          <a:bodyPr>
-            <a:normAutofit fontScale="92500" lnSpcReduction="10000"/>
-          </a:bodyPr>
-          <a:lstStyle/>
-          <a:p>
-            <a:pPr marL="0" indent="0">
-              <a:lnSpc>
-                <a:spcPct val="120000"/>
-              </a:lnSpc>
-              <a:buNone/>
-            </a:pPr>
-            <a:r>
-              <a:rPr lang="en-US" altLang="ko-KR" dirty="0"/>
-              <a:t>1. </a:t>
-            </a:r>
-            <a:r>
-              <a:rPr lang="ko-KR" altLang="en-US" dirty="0"/>
-              <a:t>키프레임을 사용하세요</a:t>
-            </a:r>
-            <a:r>
-              <a:rPr lang="en-US" altLang="ko-KR" dirty="0"/>
-              <a:t>.</a:t>
-            </a:r>
-          </a:p>
-          <a:p>
-            <a:pPr marL="0" indent="0">
-              <a:lnSpc>
-                <a:spcPct val="120000"/>
-              </a:lnSpc>
-              <a:buNone/>
-            </a:pPr>
-            <a:r>
-              <a:rPr lang="en-US" altLang="ko-KR" dirty="0"/>
-              <a:t>2. </a:t>
-            </a:r>
-            <a:r>
-              <a:rPr lang="ko-KR" altLang="en-US" dirty="0"/>
-              <a:t>왼쪽 상단에서 시작하여 시계 방향으로 사각형을 그리는 애니메이션을 완성하세요</a:t>
-            </a:r>
-            <a:r>
-              <a:rPr lang="en-US" altLang="ko-KR" dirty="0"/>
-              <a:t>.</a:t>
-            </a:r>
-          </a:p>
-          <a:p>
-            <a:pPr marL="0" indent="0">
-              <a:lnSpc>
-                <a:spcPct val="120000"/>
-              </a:lnSpc>
-              <a:buNone/>
-            </a:pPr>
-            <a:r>
-              <a:rPr lang="en-US" altLang="ko-KR" dirty="0"/>
-              <a:t>3. </a:t>
-            </a:r>
-            <a:r>
-              <a:rPr lang="ko-KR" altLang="en-US" dirty="0"/>
-              <a:t>애니메이션 대상은 원입니다</a:t>
-            </a:r>
-            <a:r>
-              <a:rPr lang="en-US" altLang="ko-KR" dirty="0"/>
-              <a:t>.</a:t>
-            </a:r>
-          </a:p>
-          <a:p>
-            <a:pPr marL="0" indent="0">
-              <a:lnSpc>
-                <a:spcPct val="120000"/>
-              </a:lnSpc>
-              <a:buNone/>
-            </a:pPr>
-            <a:r>
-              <a:rPr lang="en-US" altLang="ko-KR" dirty="0"/>
-              <a:t>4. </a:t>
-            </a:r>
-            <a:r>
-              <a:rPr lang="ko-KR" altLang="en-US" dirty="0"/>
-              <a:t>애니메이션은 </a:t>
-            </a:r>
-            <a:r>
-              <a:rPr lang="en-US" altLang="ko-KR" dirty="0"/>
-              <a:t>3</a:t>
-            </a:r>
-            <a:r>
-              <a:rPr lang="ko-KR" altLang="en-US" dirty="0"/>
-              <a:t>초 동안 지속됩니다</a:t>
-            </a:r>
-            <a:r>
-              <a:rPr lang="en-US" altLang="ko-KR" dirty="0"/>
-              <a:t>.</a:t>
-            </a:r>
-          </a:p>
-          <a:p>
-            <a:pPr marL="0" indent="0">
-              <a:lnSpc>
-                <a:spcPct val="120000"/>
-              </a:lnSpc>
-              <a:buNone/>
-            </a:pPr>
-            <a:r>
-              <a:rPr lang="en-US" altLang="ko-KR" dirty="0"/>
-              <a:t>5. </a:t>
-            </a:r>
-            <a:r>
-              <a:rPr lang="ko-KR" altLang="en-US" dirty="0"/>
-              <a:t>애니메이션은 </a:t>
-            </a:r>
-            <a:r>
-              <a:rPr lang="en-US" altLang="ko-KR" dirty="0"/>
-              <a:t>6</a:t>
-            </a:r>
-            <a:r>
-              <a:rPr lang="ko-KR" altLang="en-US" dirty="0"/>
-              <a:t>번 반복됩니다</a:t>
-            </a:r>
-            <a:r>
-              <a:rPr lang="en-US" altLang="ko-KR" dirty="0"/>
-              <a:t>.</a:t>
-            </a:r>
-          </a:p>
-        </p:txBody>
-      </p:sp>
-      <p:sp>
-        <p:nvSpPr>
-          <p:cNvPr id="4" name="날짜 개체 틀 3">
-            <a:extLst>
-              <a:ext uri="{FF2B5EF4-FFF2-40B4-BE49-F238E27FC236}">
-                <a16:creationId xmlns:a16="http://schemas.microsoft.com/office/drawing/2014/main" id="{A695DDE5-0A39-A366-4CFE-A283911999CD}"/>
+          <p:cNvPr id="7" name="날짜 개체 틀 3">
+            <a:extLst>
+              <a:ext uri="{FF2B5EF4-FFF2-40B4-BE49-F238E27FC236}">
+                <a16:creationId xmlns:a16="http://schemas.microsoft.com/office/drawing/2014/main" id="{A1630AAA-9B55-18D3-332D-AFBF264CC9F9}"/>
               </a:ext>
             </a:extLst>
           </p:cNvPr>
@@ -12203,9 +12052,9 @@
           <a:p>
             <a:fld id="{0F78D9C4-20C1-4B15-A116-16DC77AD9A1E}" type="datetime1">
               <a:rPr lang="ko-KR" altLang="en-US" smtClean="0"/>
-              <a:t>2024-05-17</a:t>
+              <a:t>2024-05-20</a:t>
             </a:fld>
-            <a:endParaRPr lang="ko-KR" altLang="en-US"/>
+            <a:endParaRPr lang="ko-KR" altLang="en-US" dirty="0"/>
           </a:p>
         </p:txBody>
       </p:sp>
@@ -12214,7 +12063,7 @@
           <p:cNvPr id="5" name="슬라이드 번호 개체 틀 4">
             <a:extLst>
               <a:ext uri="{FF2B5EF4-FFF2-40B4-BE49-F238E27FC236}">
-                <a16:creationId xmlns:a16="http://schemas.microsoft.com/office/drawing/2014/main" id="{5E040F43-60A7-C50D-1F5B-F984054F2D7C}"/>
+                <a16:creationId xmlns:a16="http://schemas.microsoft.com/office/drawing/2014/main" id="{1C5ED8DA-072B-7FC5-E113-8C17B68B5929}"/>
               </a:ext>
             </a:extLst>
           </p:cNvPr>
@@ -12243,7 +12092,7 @@
           <p:cNvPr id="2" name="제목 1">
             <a:extLst>
               <a:ext uri="{FF2B5EF4-FFF2-40B4-BE49-F238E27FC236}">
-                <a16:creationId xmlns:a16="http://schemas.microsoft.com/office/drawing/2014/main" id="{5FAC57F5-99D7-9C46-B6C1-D16224151FE9}"/>
+                <a16:creationId xmlns:a16="http://schemas.microsoft.com/office/drawing/2014/main" id="{A4C6097A-AC2A-AACF-3345-E85A4A06FE17}"/>
               </a:ext>
             </a:extLst>
           </p:cNvPr>
@@ -12260,34 +12109,240 @@
           <a:lstStyle/>
           <a:p>
             <a:r>
-              <a:rPr lang="ko-KR" altLang="en-US" dirty="0">
-                <a:solidFill>
-                  <a:srgbClr val="6EC173"/>
-                </a:solidFill>
-              </a:rPr>
-              <a:t>실습</a:t>
-            </a:r>
-            <a:r>
-              <a:rPr lang="en-US" altLang="ko-KR" dirty="0">
-                <a:solidFill>
-                  <a:srgbClr val="6EC173"/>
-                </a:solidFill>
-              </a:rPr>
-              <a:t>. </a:t>
+              <a:rPr lang="en-US" altLang="ko-KR" dirty="0"/>
+              <a:t>CSS </a:t>
             </a:r>
             <a:r>
               <a:rPr lang="ko-KR" altLang="en-US" dirty="0"/>
-              <a:t>원 움직이기</a:t>
-            </a:r>
+              <a:t>복잡한 속성 </a:t>
+            </a:r>
+            <a:r>
+              <a:rPr lang="en-US" altLang="ko-KR" dirty="0"/>
+              <a:t>- animation</a:t>
+            </a:r>
+            <a:endParaRPr lang="ko-KR" altLang="en-US" dirty="0"/>
+          </a:p>
+        </p:txBody>
+      </p:sp>
+      <p:sp>
+        <p:nvSpPr>
+          <p:cNvPr id="6" name="내용 개체 틀 6">
+            <a:extLst>
+              <a:ext uri="{FF2B5EF4-FFF2-40B4-BE49-F238E27FC236}">
+                <a16:creationId xmlns:a16="http://schemas.microsoft.com/office/drawing/2014/main" id="{86A9CA44-D60E-DE88-52D8-5E8743377533}"/>
+              </a:ext>
+            </a:extLst>
+          </p:cNvPr>
+          <p:cNvSpPr txBox="1">
+            <a:spLocks/>
+          </p:cNvSpPr>
+          <p:nvPr/>
+        </p:nvSpPr>
+        <p:spPr>
+          <a:xfrm>
+            <a:off x="866274" y="1534110"/>
+            <a:ext cx="5775158" cy="4219289"/>
+          </a:xfrm>
+          <a:prstGeom prst="rect">
+            <a:avLst/>
+          </a:prstGeom>
+        </p:spPr>
+        <p:txBody>
+          <a:bodyPr vert="horz" lIns="91440" tIns="45720" rIns="91440" bIns="45720" rtlCol="0">
+            <a:normAutofit/>
+          </a:bodyPr>
+          <a:lstStyle>
+            <a:lvl1pPr marL="228600" indent="-228600" algn="l" defTabSz="914400" rtl="0" eaLnBrk="1" latinLnBrk="1" hangingPunct="1">
+              <a:lnSpc>
+                <a:spcPct val="90000"/>
+              </a:lnSpc>
+              <a:spcBef>
+                <a:spcPts val="1000"/>
+              </a:spcBef>
+              <a:buFont typeface="Arial" panose="020B0604020202020204" pitchFamily="34" charset="0"/>
+              <a:buChar char="•"/>
+              <a:defRPr sz="2800" kern="1200">
+                <a:solidFill>
+                  <a:schemeClr val="tx1"/>
+                </a:solidFill>
+                <a:latin typeface="+mn-lt"/>
+                <a:ea typeface="+mn-ea"/>
+                <a:cs typeface="+mn-cs"/>
+              </a:defRPr>
+            </a:lvl1pPr>
+            <a:lvl2pPr marL="685800" indent="-228600" algn="l" defTabSz="914400" rtl="0" eaLnBrk="1" latinLnBrk="1" hangingPunct="1">
+              <a:lnSpc>
+                <a:spcPct val="90000"/>
+              </a:lnSpc>
+              <a:spcBef>
+                <a:spcPts val="500"/>
+              </a:spcBef>
+              <a:buFont typeface="Arial" panose="020B0604020202020204" pitchFamily="34" charset="0"/>
+              <a:buChar char="•"/>
+              <a:defRPr sz="2400" kern="1200">
+                <a:solidFill>
+                  <a:schemeClr val="tx1"/>
+                </a:solidFill>
+                <a:latin typeface="+mn-lt"/>
+                <a:ea typeface="+mn-ea"/>
+                <a:cs typeface="+mn-cs"/>
+              </a:defRPr>
+            </a:lvl2pPr>
+            <a:lvl3pPr marL="1143000" indent="-228600" algn="l" defTabSz="914400" rtl="0" eaLnBrk="1" latinLnBrk="1" hangingPunct="1">
+              <a:lnSpc>
+                <a:spcPct val="90000"/>
+              </a:lnSpc>
+              <a:spcBef>
+                <a:spcPts val="500"/>
+              </a:spcBef>
+              <a:buFont typeface="Arial" panose="020B0604020202020204" pitchFamily="34" charset="0"/>
+              <a:buChar char="•"/>
+              <a:defRPr sz="2000" kern="1200">
+                <a:solidFill>
+                  <a:schemeClr val="tx1"/>
+                </a:solidFill>
+                <a:latin typeface="+mn-lt"/>
+                <a:ea typeface="+mn-ea"/>
+                <a:cs typeface="+mn-cs"/>
+              </a:defRPr>
+            </a:lvl3pPr>
+            <a:lvl4pPr marL="1600200" indent="-228600" algn="l" defTabSz="914400" rtl="0" eaLnBrk="1" latinLnBrk="1" hangingPunct="1">
+              <a:lnSpc>
+                <a:spcPct val="90000"/>
+              </a:lnSpc>
+              <a:spcBef>
+                <a:spcPts val="500"/>
+              </a:spcBef>
+              <a:buFont typeface="Arial" panose="020B0604020202020204" pitchFamily="34" charset="0"/>
+              <a:buChar char="•"/>
+              <a:defRPr sz="1800" kern="1200">
+                <a:solidFill>
+                  <a:schemeClr val="tx1"/>
+                </a:solidFill>
+                <a:latin typeface="+mn-lt"/>
+                <a:ea typeface="+mn-ea"/>
+                <a:cs typeface="+mn-cs"/>
+              </a:defRPr>
+            </a:lvl4pPr>
+            <a:lvl5pPr marL="2057400" indent="-228600" algn="l" defTabSz="914400" rtl="0" eaLnBrk="1" latinLnBrk="1" hangingPunct="1">
+              <a:lnSpc>
+                <a:spcPct val="90000"/>
+              </a:lnSpc>
+              <a:spcBef>
+                <a:spcPts val="500"/>
+              </a:spcBef>
+              <a:buFont typeface="Arial" panose="020B0604020202020204" pitchFamily="34" charset="0"/>
+              <a:buChar char="•"/>
+              <a:defRPr sz="1800" kern="1200">
+                <a:solidFill>
+                  <a:schemeClr val="tx1"/>
+                </a:solidFill>
+                <a:latin typeface="+mn-lt"/>
+                <a:ea typeface="+mn-ea"/>
+                <a:cs typeface="+mn-cs"/>
+              </a:defRPr>
+            </a:lvl5pPr>
+            <a:lvl6pPr marL="2514600" indent="-228600" algn="l" defTabSz="914400" rtl="0" eaLnBrk="1" latinLnBrk="1" hangingPunct="1">
+              <a:lnSpc>
+                <a:spcPct val="90000"/>
+              </a:lnSpc>
+              <a:spcBef>
+                <a:spcPts val="500"/>
+              </a:spcBef>
+              <a:buFont typeface="Arial" panose="020B0604020202020204" pitchFamily="34" charset="0"/>
+              <a:buChar char="•"/>
+              <a:defRPr sz="1800" kern="1200">
+                <a:solidFill>
+                  <a:schemeClr val="tx1"/>
+                </a:solidFill>
+                <a:latin typeface="+mn-lt"/>
+                <a:ea typeface="+mn-ea"/>
+                <a:cs typeface="+mn-cs"/>
+              </a:defRPr>
+            </a:lvl6pPr>
+            <a:lvl7pPr marL="2971800" indent="-228600" algn="l" defTabSz="914400" rtl="0" eaLnBrk="1" latinLnBrk="1" hangingPunct="1">
+              <a:lnSpc>
+                <a:spcPct val="90000"/>
+              </a:lnSpc>
+              <a:spcBef>
+                <a:spcPts val="500"/>
+              </a:spcBef>
+              <a:buFont typeface="Arial" panose="020B0604020202020204" pitchFamily="34" charset="0"/>
+              <a:buChar char="•"/>
+              <a:defRPr sz="1800" kern="1200">
+                <a:solidFill>
+                  <a:schemeClr val="tx1"/>
+                </a:solidFill>
+                <a:latin typeface="+mn-lt"/>
+                <a:ea typeface="+mn-ea"/>
+                <a:cs typeface="+mn-cs"/>
+              </a:defRPr>
+            </a:lvl7pPr>
+            <a:lvl8pPr marL="3429000" indent="-228600" algn="l" defTabSz="914400" rtl="0" eaLnBrk="1" latinLnBrk="1" hangingPunct="1">
+              <a:lnSpc>
+                <a:spcPct val="90000"/>
+              </a:lnSpc>
+              <a:spcBef>
+                <a:spcPts val="500"/>
+              </a:spcBef>
+              <a:buFont typeface="Arial" panose="020B0604020202020204" pitchFamily="34" charset="0"/>
+              <a:buChar char="•"/>
+              <a:defRPr sz="1800" kern="1200">
+                <a:solidFill>
+                  <a:schemeClr val="tx1"/>
+                </a:solidFill>
+                <a:latin typeface="+mn-lt"/>
+                <a:ea typeface="+mn-ea"/>
+                <a:cs typeface="+mn-cs"/>
+              </a:defRPr>
+            </a:lvl8pPr>
+            <a:lvl9pPr marL="3886200" indent="-228600" algn="l" defTabSz="914400" rtl="0" eaLnBrk="1" latinLnBrk="1" hangingPunct="1">
+              <a:lnSpc>
+                <a:spcPct val="90000"/>
+              </a:lnSpc>
+              <a:spcBef>
+                <a:spcPts val="500"/>
+              </a:spcBef>
+              <a:buFont typeface="Arial" panose="020B0604020202020204" pitchFamily="34" charset="0"/>
+              <a:buChar char="•"/>
+              <a:defRPr sz="1800" kern="1200">
+                <a:solidFill>
+                  <a:schemeClr val="tx1"/>
+                </a:solidFill>
+                <a:latin typeface="+mn-lt"/>
+                <a:ea typeface="+mn-ea"/>
+                <a:cs typeface="+mn-cs"/>
+              </a:defRPr>
+            </a:lvl9pPr>
+          </a:lstStyle>
+          <a:p>
+            <a:pPr>
+              <a:lnSpc>
+                <a:spcPct val="130000"/>
+              </a:lnSpc>
+            </a:pPr>
+            <a:r>
+              <a:rPr lang="en-US" altLang="ko-KR" dirty="0"/>
+              <a:t>Animation-timing-function</a:t>
+            </a:r>
+          </a:p>
+          <a:p>
+            <a:pPr marL="0" indent="0">
+              <a:lnSpc>
+                <a:spcPct val="130000"/>
+              </a:lnSpc>
+              <a:buNone/>
+            </a:pPr>
+            <a:endParaRPr lang="en-US" altLang="ko-KR" dirty="0"/>
           </a:p>
         </p:txBody>
       </p:sp>
       <p:pic>
         <p:nvPicPr>
-          <p:cNvPr id="1026" name="Picture 2">
-            <a:extLst>
-              <a:ext uri="{FF2B5EF4-FFF2-40B4-BE49-F238E27FC236}">
-                <a16:creationId xmlns:a16="http://schemas.microsoft.com/office/drawing/2014/main" id="{BF5E712C-996F-C78C-AAEF-7A8ED1EBE40A}"/>
+          <p:cNvPr id="1028" name="Picture 4">
+            <a:extLst>
+              <a:ext uri="{FF2B5EF4-FFF2-40B4-BE49-F238E27FC236}">
+                <a16:creationId xmlns:a16="http://schemas.microsoft.com/office/drawing/2014/main" id="{AC4354F2-3D8A-0128-3312-3AD029D5BCB0}"/>
               </a:ext>
             </a:extLst>
           </p:cNvPr>
@@ -12297,20 +12352,20 @@
           <p:nvPr/>
         </p:nvPicPr>
         <p:blipFill rotWithShape="1">
-          <a:blip r:embed="rId2">
+          <a:blip r:embed="rId3">
             <a:extLst>
               <a:ext uri="{28A0092B-C50C-407E-A947-70E740481C1C}">
                 <a14:useLocalDpi xmlns:a14="http://schemas.microsoft.com/office/drawing/2010/main" val="0"/>
               </a:ext>
             </a:extLst>
           </a:blip>
-          <a:srcRect r="79022" b="60967"/>
+          <a:srcRect/>
           <a:stretch/>
         </p:blipFill>
         <p:spPr bwMode="auto">
           <a:xfrm>
-            <a:off x="6944140" y="1168167"/>
-            <a:ext cx="4320207" cy="4521666"/>
+            <a:off x="363152" y="2407021"/>
+            <a:ext cx="11465695" cy="3230883"/>
           </a:xfrm>
           <a:prstGeom prst="rect">
             <a:avLst/>
@@ -12330,7 +12385,7 @@
     </p:spTree>
     <p:extLst>
       <p:ext uri="{BB962C8B-B14F-4D97-AF65-F5344CB8AC3E}">
-        <p14:creationId xmlns:p14="http://schemas.microsoft.com/office/powerpoint/2010/main" val="225431309"/>
+        <p14:creationId xmlns:p14="http://schemas.microsoft.com/office/powerpoint/2010/main" val="3962503383"/>
       </p:ext>
     </p:extLst>
   </p:cSld>
@@ -12375,13 +12430,13 @@
         </p:nvSpPr>
         <p:spPr>
           <a:xfrm>
-            <a:off x="704850" y="1645603"/>
-            <a:ext cx="10713720" cy="3786948"/>
+            <a:off x="577251" y="1614224"/>
+            <a:ext cx="6274125" cy="3786948"/>
           </a:xfrm>
         </p:spPr>
         <p:txBody>
           <a:bodyPr>
-            <a:normAutofit/>
+            <a:normAutofit fontScale="92500" lnSpcReduction="10000"/>
           </a:bodyPr>
           <a:lstStyle/>
           <a:p>
@@ -12392,20 +12447,17 @@
               <a:buNone/>
             </a:pPr>
             <a:r>
-              <a:rPr lang="en-US" altLang="ko-KR" sz="2400" dirty="0">
-                <a:hlinkClick r:id="rId3"/>
-              </a:rPr>
-              <a:t>https://d2iwdqgro8i2ew.cloudfront.net/lesson/script/53006-1.html</a:t>
-            </a:r>
-            <a:r>
-              <a:rPr lang="en-US" altLang="ko-KR" sz="2400" dirty="0"/>
-              <a:t> </a:t>
+              <a:rPr lang="en-US" altLang="ko-KR" dirty="0"/>
+              <a:t>1. </a:t>
             </a:r>
             <a:r>
               <a:rPr lang="ko-KR" altLang="en-US" dirty="0"/>
-              <a:t> </a:t>
-            </a:r>
-            <a:endParaRPr lang="en-US" altLang="ko-KR" dirty="0"/>
+              <a:t>키프레임을 사용하세요</a:t>
+            </a:r>
+            <a:r>
+              <a:rPr lang="en-US" altLang="ko-KR" dirty="0"/>
+              <a:t>.</a:t>
+            </a:r>
           </a:p>
           <a:p>
             <a:pPr marL="0" indent="0">
@@ -12415,12 +12467,92 @@
               <a:buNone/>
             </a:pPr>
             <a:r>
+              <a:rPr lang="en-US" altLang="ko-KR" dirty="0"/>
+              <a:t>2. </a:t>
+            </a:r>
+            <a:r>
               <a:rPr lang="ko-KR" altLang="en-US" dirty="0"/>
-              <a:t>위 링크를 클릭해 실행되는 파일처럼 동작하도록 만들어주세요</a:t>
+              <a:t>왼쪽 상단에서 시작하여 시계 방향으로 사각형을 그리는 애니메이션을 완성하세요</a:t>
             </a:r>
             <a:r>
               <a:rPr lang="en-US" altLang="ko-KR" dirty="0"/>
-              <a:t>. </a:t>
+              <a:t>.</a:t>
+            </a:r>
+          </a:p>
+          <a:p>
+            <a:pPr marL="0" indent="0">
+              <a:lnSpc>
+                <a:spcPct val="120000"/>
+              </a:lnSpc>
+              <a:buNone/>
+            </a:pPr>
+            <a:r>
+              <a:rPr lang="en-US" altLang="ko-KR" dirty="0"/>
+              <a:t>3. </a:t>
+            </a:r>
+            <a:r>
+              <a:rPr lang="ko-KR" altLang="en-US" dirty="0"/>
+              <a:t>애니메이션 대상은 원입니다</a:t>
+            </a:r>
+            <a:r>
+              <a:rPr lang="en-US" altLang="ko-KR" dirty="0"/>
+              <a:t>.</a:t>
+            </a:r>
+          </a:p>
+          <a:p>
+            <a:pPr marL="0" indent="0">
+              <a:lnSpc>
+                <a:spcPct val="120000"/>
+              </a:lnSpc>
+              <a:buNone/>
+            </a:pPr>
+            <a:r>
+              <a:rPr lang="en-US" altLang="ko-KR" dirty="0"/>
+              <a:t>4. </a:t>
+            </a:r>
+            <a:r>
+              <a:rPr lang="ko-KR" altLang="en-US" dirty="0"/>
+              <a:t>애니메이션은 </a:t>
+            </a:r>
+            <a:r>
+              <a:rPr lang="en-US" altLang="ko-KR" dirty="0"/>
+              <a:t>3</a:t>
+            </a:r>
+            <a:r>
+              <a:rPr lang="ko-KR" altLang="en-US" dirty="0"/>
+              <a:t>초 동안 지속됩니다</a:t>
+            </a:r>
+            <a:r>
+              <a:rPr lang="en-US" altLang="ko-KR" dirty="0"/>
+              <a:t>.</a:t>
+            </a:r>
+          </a:p>
+          <a:p>
+            <a:pPr marL="0" indent="0">
+              <a:lnSpc>
+                <a:spcPct val="120000"/>
+              </a:lnSpc>
+              <a:buNone/>
+            </a:pPr>
+            <a:r>
+              <a:rPr lang="en-US" altLang="ko-KR" dirty="0"/>
+              <a:t>5. </a:t>
+            </a:r>
+            <a:r>
+              <a:rPr lang="ko-KR" altLang="en-US" dirty="0"/>
+              <a:t>애니메이션은 </a:t>
+            </a:r>
+            <a:r>
+              <a:rPr lang="en-US" altLang="ko-KR" dirty="0"/>
+              <a:t>6</a:t>
+            </a:r>
+            <a:r>
+              <a:rPr lang="ko-KR" altLang="en-US" dirty="0"/>
+              <a:t>번 반복됩니다</a:t>
+            </a:r>
+            <a:r>
+              <a:rPr lang="en-US" altLang="ko-KR" dirty="0"/>
+              <a:t>.</a:t>
             </a:r>
           </a:p>
         </p:txBody>
@@ -12448,7 +12580,7 @@
           <a:p>
             <a:fld id="{0F78D9C4-20C1-4B15-A116-16DC77AD9A1E}" type="datetime1">
               <a:rPr lang="ko-KR" altLang="en-US" smtClean="0"/>
-              <a:t>2024-05-17</a:t>
+              <a:t>2024-05-20</a:t>
             </a:fld>
             <a:endParaRPr lang="ko-KR" altLang="en-US"/>
           </a:p>
@@ -12478,6 +12610,251 @@
             <a:fld id="{083A2CE0-18CD-4102-B738-4ACFF9E68BA4}" type="slidenum">
               <a:rPr lang="ko-KR" altLang="en-US" smtClean="0"/>
               <a:t>25</a:t>
+            </a:fld>
+            <a:endParaRPr lang="ko-KR" altLang="en-US"/>
+          </a:p>
+        </p:txBody>
+      </p:sp>
+      <p:sp>
+        <p:nvSpPr>
+          <p:cNvPr id="2" name="제목 1">
+            <a:extLst>
+              <a:ext uri="{FF2B5EF4-FFF2-40B4-BE49-F238E27FC236}">
+                <a16:creationId xmlns:a16="http://schemas.microsoft.com/office/drawing/2014/main" id="{5FAC57F5-99D7-9C46-B6C1-D16224151FE9}"/>
+              </a:ext>
+            </a:extLst>
+          </p:cNvPr>
+          <p:cNvSpPr>
+            <a:spLocks noGrp="1"/>
+          </p:cNvSpPr>
+          <p:nvPr>
+            <p:ph type="title"/>
+          </p:nvPr>
+        </p:nvSpPr>
+        <p:spPr/>
+        <p:txBody>
+          <a:bodyPr/>
+          <a:lstStyle/>
+          <a:p>
+            <a:r>
+              <a:rPr lang="ko-KR" altLang="en-US" dirty="0">
+                <a:solidFill>
+                  <a:srgbClr val="6EC173"/>
+                </a:solidFill>
+              </a:rPr>
+              <a:t>실습</a:t>
+            </a:r>
+            <a:r>
+              <a:rPr lang="en-US" altLang="ko-KR" dirty="0">
+                <a:solidFill>
+                  <a:srgbClr val="6EC173"/>
+                </a:solidFill>
+              </a:rPr>
+              <a:t>. </a:t>
+            </a:r>
+            <a:r>
+              <a:rPr lang="ko-KR" altLang="en-US" dirty="0"/>
+              <a:t>원 움직이기</a:t>
+            </a:r>
+          </a:p>
+        </p:txBody>
+      </p:sp>
+      <p:pic>
+        <p:nvPicPr>
+          <p:cNvPr id="1026" name="Picture 2">
+            <a:extLst>
+              <a:ext uri="{FF2B5EF4-FFF2-40B4-BE49-F238E27FC236}">
+                <a16:creationId xmlns:a16="http://schemas.microsoft.com/office/drawing/2014/main" id="{BF5E712C-996F-C78C-AAEF-7A8ED1EBE40A}"/>
+              </a:ext>
+            </a:extLst>
+          </p:cNvPr>
+          <p:cNvPicPr>
+            <a:picLocks noChangeAspect="1" noChangeArrowheads="1"/>
+          </p:cNvPicPr>
+          <p:nvPr/>
+        </p:nvPicPr>
+        <p:blipFill rotWithShape="1">
+          <a:blip r:embed="rId2">
+            <a:extLst>
+              <a:ext uri="{28A0092B-C50C-407E-A947-70E740481C1C}">
+                <a14:useLocalDpi xmlns:a14="http://schemas.microsoft.com/office/drawing/2010/main" val="0"/>
+              </a:ext>
+            </a:extLst>
+          </a:blip>
+          <a:srcRect r="79022" b="60967"/>
+          <a:stretch/>
+        </p:blipFill>
+        <p:spPr bwMode="auto">
+          <a:xfrm>
+            <a:off x="6944140" y="1168167"/>
+            <a:ext cx="4320207" cy="4521666"/>
+          </a:xfrm>
+          <a:prstGeom prst="rect">
+            <a:avLst/>
+          </a:prstGeom>
+          <a:noFill/>
+          <a:extLst>
+            <a:ext uri="{909E8E84-426E-40DD-AFC4-6F175D3DCCD1}">
+              <a14:hiddenFill xmlns:a14="http://schemas.microsoft.com/office/drawing/2010/main">
+                <a:solidFill>
+                  <a:srgbClr val="FFFFFF"/>
+                </a:solidFill>
+              </a14:hiddenFill>
+            </a:ext>
+          </a:extLst>
+        </p:spPr>
+      </p:pic>
+    </p:spTree>
+    <p:extLst>
+      <p:ext uri="{BB962C8B-B14F-4D97-AF65-F5344CB8AC3E}">
+        <p14:creationId xmlns:p14="http://schemas.microsoft.com/office/powerpoint/2010/main" val="225431309"/>
+      </p:ext>
+    </p:extLst>
+  </p:cSld>
+  <p:clrMapOvr>
+    <a:masterClrMapping/>
+  </p:clrMapOvr>
+</p:sld>
+</file>
+
+<file path=ppt/slides/slide26.xml><?xml version="1.0" encoding="utf-8"?>
+<p:sld xmlns:a="http://schemas.openxmlformats.org/drawingml/2006/main" xmlns:r="http://schemas.openxmlformats.org/officeDocument/2006/relationships" xmlns:p="http://schemas.openxmlformats.org/presentationml/2006/main">
+  <p:cSld>
+    <p:spTree>
+      <p:nvGrpSpPr>
+        <p:cNvPr id="1" name=""/>
+        <p:cNvGrpSpPr/>
+        <p:nvPr/>
+      </p:nvGrpSpPr>
+      <p:grpSpPr>
+        <a:xfrm>
+          <a:off x="0" y="0"/>
+          <a:ext cx="0" cy="0"/>
+          <a:chOff x="0" y="0"/>
+          <a:chExt cx="0" cy="0"/>
+        </a:xfrm>
+      </p:grpSpPr>
+      <p:sp>
+        <p:nvSpPr>
+          <p:cNvPr id="13" name="내용 개체 틀 2">
+            <a:extLst>
+              <a:ext uri="{FF2B5EF4-FFF2-40B4-BE49-F238E27FC236}">
+                <a16:creationId xmlns:a16="http://schemas.microsoft.com/office/drawing/2014/main" id="{847FD532-7F61-A001-537F-B970BD821AF3}"/>
+              </a:ext>
+            </a:extLst>
+          </p:cNvPr>
+          <p:cNvSpPr>
+            <a:spLocks noGrp="1"/>
+          </p:cNvSpPr>
+          <p:nvPr>
+            <p:ph idx="1"/>
+          </p:nvPr>
+        </p:nvSpPr>
+        <p:spPr>
+          <a:xfrm>
+            <a:off x="704850" y="1645603"/>
+            <a:ext cx="10713720" cy="3786948"/>
+          </a:xfrm>
+        </p:spPr>
+        <p:txBody>
+          <a:bodyPr>
+            <a:normAutofit/>
+          </a:bodyPr>
+          <a:lstStyle/>
+          <a:p>
+            <a:pPr marL="0" indent="0">
+              <a:lnSpc>
+                <a:spcPct val="120000"/>
+              </a:lnSpc>
+              <a:buNone/>
+            </a:pPr>
+            <a:r>
+              <a:rPr lang="en-US" altLang="ko-KR" sz="2400" dirty="0">
+                <a:hlinkClick r:id="rId3"/>
+              </a:rPr>
+              <a:t>https://d2iwdqgro8i2ew.cloudfront.net/lesson/script/53006-1.html</a:t>
+            </a:r>
+            <a:r>
+              <a:rPr lang="en-US" altLang="ko-KR" sz="2400" dirty="0"/>
+              <a:t> </a:t>
+            </a:r>
+            <a:r>
+              <a:rPr lang="ko-KR" altLang="en-US" dirty="0"/>
+              <a:t> </a:t>
+            </a:r>
+            <a:endParaRPr lang="en-US" altLang="ko-KR" dirty="0"/>
+          </a:p>
+          <a:p>
+            <a:pPr marL="0" indent="0">
+              <a:lnSpc>
+                <a:spcPct val="120000"/>
+              </a:lnSpc>
+              <a:buNone/>
+            </a:pPr>
+            <a:r>
+              <a:rPr lang="ko-KR" altLang="en-US" dirty="0"/>
+              <a:t>위 링크를 클릭해 실행되는 파일처럼 동작하도록 만들어주세요</a:t>
+            </a:r>
+            <a:r>
+              <a:rPr lang="en-US" altLang="ko-KR" dirty="0"/>
+              <a:t>. </a:t>
+            </a:r>
+          </a:p>
+        </p:txBody>
+      </p:sp>
+      <p:sp>
+        <p:nvSpPr>
+          <p:cNvPr id="4" name="날짜 개체 틀 3">
+            <a:extLst>
+              <a:ext uri="{FF2B5EF4-FFF2-40B4-BE49-F238E27FC236}">
+                <a16:creationId xmlns:a16="http://schemas.microsoft.com/office/drawing/2014/main" id="{A695DDE5-0A39-A366-4CFE-A283911999CD}"/>
+              </a:ext>
+            </a:extLst>
+          </p:cNvPr>
+          <p:cNvSpPr>
+            <a:spLocks noGrp="1"/>
+          </p:cNvSpPr>
+          <p:nvPr>
+            <p:ph type="dt" sz="half" idx="10"/>
+          </p:nvPr>
+        </p:nvSpPr>
+        <p:spPr/>
+        <p:txBody>
+          <a:bodyPr/>
+          <a:lstStyle/>
+          <a:p>
+            <a:fld id="{0F78D9C4-20C1-4B15-A116-16DC77AD9A1E}" type="datetime1">
+              <a:rPr lang="ko-KR" altLang="en-US" smtClean="0"/>
+              <a:t>2024-05-20</a:t>
+            </a:fld>
+            <a:endParaRPr lang="ko-KR" altLang="en-US"/>
+          </a:p>
+        </p:txBody>
+      </p:sp>
+      <p:sp>
+        <p:nvSpPr>
+          <p:cNvPr id="5" name="슬라이드 번호 개체 틀 4">
+            <a:extLst>
+              <a:ext uri="{FF2B5EF4-FFF2-40B4-BE49-F238E27FC236}">
+                <a16:creationId xmlns:a16="http://schemas.microsoft.com/office/drawing/2014/main" id="{5E040F43-60A7-C50D-1F5B-F984054F2D7C}"/>
+              </a:ext>
+            </a:extLst>
+          </p:cNvPr>
+          <p:cNvSpPr>
+            <a:spLocks noGrp="1"/>
+          </p:cNvSpPr>
+          <p:nvPr>
+            <p:ph type="sldNum" sz="quarter" idx="12"/>
+          </p:nvPr>
+        </p:nvSpPr>
+        <p:spPr/>
+        <p:txBody>
+          <a:bodyPr/>
+          <a:lstStyle/>
+          <a:p>
+            <a:fld id="{083A2CE0-18CD-4102-B738-4ACFF9E68BA4}" type="slidenum">
+              <a:rPr lang="ko-KR" altLang="en-US" smtClean="0"/>
+              <a:t>26</a:t>
             </a:fld>
             <a:endParaRPr lang="ko-KR" altLang="en-US"/>
           </a:p>
@@ -12559,98 +12936,10 @@
       </p:grpSpPr>
       <p:sp>
         <p:nvSpPr>
-          <p:cNvPr id="7" name="내용 개체 틀 6">
-            <a:extLst>
-              <a:ext uri="{FF2B5EF4-FFF2-40B4-BE49-F238E27FC236}">
-                <a16:creationId xmlns:a16="http://schemas.microsoft.com/office/drawing/2014/main" id="{57654206-EECB-4A13-81A8-6C5D73A49275}"/>
-              </a:ext>
-            </a:extLst>
-          </p:cNvPr>
-          <p:cNvSpPr>
-            <a:spLocks noGrp="1"/>
-          </p:cNvSpPr>
-          <p:nvPr>
-            <p:ph idx="1"/>
-          </p:nvPr>
-        </p:nvSpPr>
-        <p:spPr>
-          <a:xfrm>
-            <a:off x="838200" y="1780292"/>
-            <a:ext cx="10515600" cy="4351338"/>
-          </a:xfrm>
-        </p:spPr>
-        <p:txBody>
-          <a:bodyPr>
-            <a:normAutofit/>
-          </a:bodyPr>
-          <a:lstStyle/>
-          <a:p>
-            <a:pPr algn="ctr"/>
-            <a:r>
-              <a:rPr lang="en-US" altLang="ko-KR" sz="3200" dirty="0"/>
-              <a:t>static : </a:t>
-            </a:r>
-            <a:r>
-              <a:rPr lang="ko-KR" altLang="en-US" sz="3200" dirty="0"/>
-              <a:t>정적 위치 지정 방식</a:t>
-            </a:r>
-            <a:endParaRPr lang="en-US" altLang="ko-KR" sz="3200" dirty="0"/>
-          </a:p>
-          <a:p>
-            <a:pPr algn="ctr"/>
-            <a:endParaRPr lang="en-US" altLang="ko-KR" sz="3200" dirty="0"/>
-          </a:p>
-          <a:p>
-            <a:pPr algn="ctr"/>
-            <a:r>
-              <a:rPr lang="en-US" altLang="ko-KR" sz="3200" dirty="0"/>
-              <a:t>relative : </a:t>
-            </a:r>
-            <a:r>
-              <a:rPr lang="ko-KR" altLang="en-US" sz="3200" dirty="0"/>
-              <a:t>상대 위치 지정 방식</a:t>
-            </a:r>
-            <a:endParaRPr lang="en-US" altLang="ko-KR" sz="3200" dirty="0"/>
-          </a:p>
-          <a:p>
-            <a:pPr algn="ctr"/>
-            <a:endParaRPr lang="en-US" altLang="ko-KR" sz="3200" dirty="0"/>
-          </a:p>
-          <a:p>
-            <a:pPr algn="ctr"/>
-            <a:r>
-              <a:rPr lang="en-US" altLang="ko-KR" sz="3200" dirty="0"/>
-              <a:t>absolute : </a:t>
-            </a:r>
-            <a:r>
-              <a:rPr lang="ko-KR" altLang="en-US" sz="3200" dirty="0"/>
-              <a:t>절대 위치 지정 방식</a:t>
-            </a:r>
-            <a:endParaRPr lang="en-US" altLang="ko-KR" sz="3200" dirty="0"/>
-          </a:p>
-          <a:p>
-            <a:pPr algn="ctr"/>
-            <a:endParaRPr lang="en-US" altLang="ko-KR" sz="3200" dirty="0"/>
-          </a:p>
-          <a:p>
-            <a:pPr algn="ctr"/>
-            <a:r>
-              <a:rPr lang="en-US" altLang="ko-KR" sz="3200" dirty="0"/>
-              <a:t>fixed : </a:t>
-            </a:r>
-            <a:r>
-              <a:rPr lang="ko-KR" altLang="en-US" sz="3200" dirty="0"/>
-              <a:t>고정 위치 지정 방식</a:t>
-            </a:r>
-          </a:p>
-        </p:txBody>
-      </p:sp>
-      <p:sp>
-        <p:nvSpPr>
-          <p:cNvPr id="4" name="날짜 개체 틀 3">
-            <a:extLst>
-              <a:ext uri="{FF2B5EF4-FFF2-40B4-BE49-F238E27FC236}">
-                <a16:creationId xmlns:a16="http://schemas.microsoft.com/office/drawing/2014/main" id="{A1630AAA-9B55-18D3-332D-AFBF264CC9F9}"/>
+          <p:cNvPr id="2" name="날짜 개체 틀 1">
+            <a:extLst>
+              <a:ext uri="{FF2B5EF4-FFF2-40B4-BE49-F238E27FC236}">
+                <a16:creationId xmlns:a16="http://schemas.microsoft.com/office/drawing/2014/main" id="{55BDFA10-ECF7-38FE-C364-618B7085F1E3}"/>
               </a:ext>
             </a:extLst>
           </p:cNvPr>
@@ -12666,20 +12955,20 @@
           <a:bodyPr/>
           <a:lstStyle/>
           <a:p>
-            <a:fld id="{0F78D9C4-20C1-4B15-A116-16DC77AD9A1E}" type="datetime1">
+            <a:fld id="{0E19CB95-6D28-40F1-9DA3-1BAC5D4B5B4F}" type="datetime6">
               <a:rPr lang="ko-KR" altLang="en-US" smtClean="0"/>
-              <a:t>2024-05-17</a:t>
+              <a:t>2024년 5월</a:t>
             </a:fld>
-            <a:endParaRPr lang="ko-KR" altLang="en-US" dirty="0"/>
-          </a:p>
-        </p:txBody>
-      </p:sp>
-      <p:sp>
-        <p:nvSpPr>
-          <p:cNvPr id="5" name="슬라이드 번호 개체 틀 4">
-            <a:extLst>
-              <a:ext uri="{FF2B5EF4-FFF2-40B4-BE49-F238E27FC236}">
-                <a16:creationId xmlns:a16="http://schemas.microsoft.com/office/drawing/2014/main" id="{4309EF4C-6CBF-F353-816C-0A042A42791D}"/>
+            <a:endParaRPr lang="ko-KR" altLang="en-US"/>
+          </a:p>
+        </p:txBody>
+      </p:sp>
+      <p:sp>
+        <p:nvSpPr>
+          <p:cNvPr id="3" name="슬라이드 번호 개체 틀 2">
+            <a:extLst>
+              <a:ext uri="{FF2B5EF4-FFF2-40B4-BE49-F238E27FC236}">
+                <a16:creationId xmlns:a16="http://schemas.microsoft.com/office/drawing/2014/main" id="{BEAC1192-3240-5090-C940-3FE8EE2E796E}"/>
               </a:ext>
             </a:extLst>
           </p:cNvPr>
@@ -12705,10 +12994,10 @@
       </p:sp>
       <p:sp>
         <p:nvSpPr>
-          <p:cNvPr id="2" name="제목 1">
-            <a:extLst>
-              <a:ext uri="{FF2B5EF4-FFF2-40B4-BE49-F238E27FC236}">
-                <a16:creationId xmlns:a16="http://schemas.microsoft.com/office/drawing/2014/main" id="{8E711374-53F0-4A81-B742-9C03D3E374AB}"/>
+          <p:cNvPr id="4" name="제목 3">
+            <a:extLst>
+              <a:ext uri="{FF2B5EF4-FFF2-40B4-BE49-F238E27FC236}">
+                <a16:creationId xmlns:a16="http://schemas.microsoft.com/office/drawing/2014/main" id="{45DC42BC-3382-7592-84ED-A0A40D69B177}"/>
               </a:ext>
             </a:extLst>
           </p:cNvPr>
@@ -12725,25 +13014,17 @@
           <a:lstStyle/>
           <a:p>
             <a:r>
-              <a:rPr lang="en-US" altLang="ko-KR" dirty="0"/>
-              <a:t>CSS</a:t>
-            </a:r>
-            <a:r>
-              <a:rPr lang="ko-KR" altLang="en-US" dirty="0"/>
-              <a:t> 복잡한 속성 </a:t>
-            </a:r>
-            <a:r>
-              <a:rPr lang="en-US" altLang="ko-KR" dirty="0"/>
-              <a:t>- position</a:t>
-            </a:r>
-            <a:endParaRPr lang="ko-KR" altLang="en-US" dirty="0"/>
+              <a:rPr lang="en-US" altLang="ko-KR" sz="11500" dirty="0"/>
+              <a:t>position</a:t>
+            </a:r>
+            <a:endParaRPr lang="ko-KR" altLang="en-US" sz="11500" dirty="0"/>
           </a:p>
         </p:txBody>
       </p:sp>
     </p:spTree>
     <p:extLst>
       <p:ext uri="{BB962C8B-B14F-4D97-AF65-F5344CB8AC3E}">
-        <p14:creationId xmlns:p14="http://schemas.microsoft.com/office/powerpoint/2010/main" val="2259047760"/>
+        <p14:creationId xmlns:p14="http://schemas.microsoft.com/office/powerpoint/2010/main" val="696798197"/>
       </p:ext>
     </p:extLst>
   </p:cSld>
@@ -12772,7 +13053,95 @@
       </p:grpSpPr>
       <p:sp>
         <p:nvSpPr>
-          <p:cNvPr id="6" name="날짜 개체 틀 3">
+          <p:cNvPr id="7" name="내용 개체 틀 6">
+            <a:extLst>
+              <a:ext uri="{FF2B5EF4-FFF2-40B4-BE49-F238E27FC236}">
+                <a16:creationId xmlns:a16="http://schemas.microsoft.com/office/drawing/2014/main" id="{57654206-EECB-4A13-81A8-6C5D73A49275}"/>
+              </a:ext>
+            </a:extLst>
+          </p:cNvPr>
+          <p:cNvSpPr>
+            <a:spLocks noGrp="1"/>
+          </p:cNvSpPr>
+          <p:nvPr>
+            <p:ph idx="1"/>
+          </p:nvPr>
+        </p:nvSpPr>
+        <p:spPr>
+          <a:xfrm>
+            <a:off x="838200" y="1780292"/>
+            <a:ext cx="10515600" cy="4351338"/>
+          </a:xfrm>
+        </p:spPr>
+        <p:txBody>
+          <a:bodyPr>
+            <a:normAutofit/>
+          </a:bodyPr>
+          <a:lstStyle/>
+          <a:p>
+            <a:pPr algn="ctr"/>
+            <a:r>
+              <a:rPr lang="en-US" altLang="ko-KR" sz="3200" dirty="0"/>
+              <a:t>static : </a:t>
+            </a:r>
+            <a:r>
+              <a:rPr lang="ko-KR" altLang="en-US" sz="3200" dirty="0"/>
+              <a:t>정적 위치 지정 방식</a:t>
+            </a:r>
+            <a:endParaRPr lang="en-US" altLang="ko-KR" sz="3200" dirty="0"/>
+          </a:p>
+          <a:p>
+            <a:pPr algn="ctr"/>
+            <a:endParaRPr lang="en-US" altLang="ko-KR" sz="3200" dirty="0"/>
+          </a:p>
+          <a:p>
+            <a:pPr algn="ctr"/>
+            <a:r>
+              <a:rPr lang="en-US" altLang="ko-KR" sz="3200" dirty="0"/>
+              <a:t>relative : </a:t>
+            </a:r>
+            <a:r>
+              <a:rPr lang="ko-KR" altLang="en-US" sz="3200" dirty="0"/>
+              <a:t>상대 위치 지정 방식</a:t>
+            </a:r>
+            <a:endParaRPr lang="en-US" altLang="ko-KR" sz="3200" dirty="0"/>
+          </a:p>
+          <a:p>
+            <a:pPr algn="ctr"/>
+            <a:endParaRPr lang="en-US" altLang="ko-KR" sz="3200" dirty="0"/>
+          </a:p>
+          <a:p>
+            <a:pPr algn="ctr"/>
+            <a:r>
+              <a:rPr lang="en-US" altLang="ko-KR" sz="3200" dirty="0"/>
+              <a:t>absolute : </a:t>
+            </a:r>
+            <a:r>
+              <a:rPr lang="ko-KR" altLang="en-US" sz="3200" dirty="0"/>
+              <a:t>절대 위치 지정 방식</a:t>
+            </a:r>
+            <a:endParaRPr lang="en-US" altLang="ko-KR" sz="3200" dirty="0"/>
+          </a:p>
+          <a:p>
+            <a:pPr algn="ctr"/>
+            <a:endParaRPr lang="en-US" altLang="ko-KR" sz="3200" dirty="0"/>
+          </a:p>
+          <a:p>
+            <a:pPr algn="ctr"/>
+            <a:r>
+              <a:rPr lang="en-US" altLang="ko-KR" sz="3200" dirty="0"/>
+              <a:t>fixed : </a:t>
+            </a:r>
+            <a:r>
+              <a:rPr lang="ko-KR" altLang="en-US" sz="3200" dirty="0"/>
+              <a:t>고정 위치 지정 방식</a:t>
+            </a:r>
+          </a:p>
+        </p:txBody>
+      </p:sp>
+      <p:sp>
+        <p:nvSpPr>
+          <p:cNvPr id="4" name="날짜 개체 틀 3">
             <a:extLst>
               <a:ext uri="{FF2B5EF4-FFF2-40B4-BE49-F238E27FC236}">
                 <a16:creationId xmlns:a16="http://schemas.microsoft.com/office/drawing/2014/main" id="{A1630AAA-9B55-18D3-332D-AFBF264CC9F9}"/>
@@ -12793,7 +13162,7 @@
           <a:p>
             <a:fld id="{0F78D9C4-20C1-4B15-A116-16DC77AD9A1E}" type="datetime1">
               <a:rPr lang="ko-KR" altLang="en-US" smtClean="0"/>
-              <a:t>2024-05-17</a:t>
+              <a:t>2024-05-20</a:t>
             </a:fld>
             <a:endParaRPr lang="ko-KR" altLang="en-US" dirty="0"/>
           </a:p>
@@ -12823,6 +13192,131 @@
             <a:fld id="{083A2CE0-18CD-4102-B738-4ACFF9E68BA4}" type="slidenum">
               <a:rPr lang="ko-KR" altLang="en-US" smtClean="0"/>
               <a:t>4</a:t>
+            </a:fld>
+            <a:endParaRPr lang="ko-KR" altLang="en-US"/>
+          </a:p>
+        </p:txBody>
+      </p:sp>
+      <p:sp>
+        <p:nvSpPr>
+          <p:cNvPr id="2" name="제목 1">
+            <a:extLst>
+              <a:ext uri="{FF2B5EF4-FFF2-40B4-BE49-F238E27FC236}">
+                <a16:creationId xmlns:a16="http://schemas.microsoft.com/office/drawing/2014/main" id="{8E711374-53F0-4A81-B742-9C03D3E374AB}"/>
+              </a:ext>
+            </a:extLst>
+          </p:cNvPr>
+          <p:cNvSpPr>
+            <a:spLocks noGrp="1"/>
+          </p:cNvSpPr>
+          <p:nvPr>
+            <p:ph type="title"/>
+          </p:nvPr>
+        </p:nvSpPr>
+        <p:spPr/>
+        <p:txBody>
+          <a:bodyPr/>
+          <a:lstStyle/>
+          <a:p>
+            <a:r>
+              <a:rPr lang="en-US" altLang="ko-KR" dirty="0"/>
+              <a:t>CSS</a:t>
+            </a:r>
+            <a:r>
+              <a:rPr lang="ko-KR" altLang="en-US" dirty="0"/>
+              <a:t> 복잡한 속성 </a:t>
+            </a:r>
+            <a:r>
+              <a:rPr lang="en-US" altLang="ko-KR" dirty="0"/>
+              <a:t>- position</a:t>
+            </a:r>
+            <a:endParaRPr lang="ko-KR" altLang="en-US" dirty="0"/>
+          </a:p>
+        </p:txBody>
+      </p:sp>
+    </p:spTree>
+    <p:extLst>
+      <p:ext uri="{BB962C8B-B14F-4D97-AF65-F5344CB8AC3E}">
+        <p14:creationId xmlns:p14="http://schemas.microsoft.com/office/powerpoint/2010/main" val="2259047760"/>
+      </p:ext>
+    </p:extLst>
+  </p:cSld>
+  <p:clrMapOvr>
+    <a:masterClrMapping/>
+  </p:clrMapOvr>
+</p:sld>
+</file>
+
+<file path=ppt/slides/slide5.xml><?xml version="1.0" encoding="utf-8"?>
+<p:sld xmlns:a="http://schemas.openxmlformats.org/drawingml/2006/main" xmlns:r="http://schemas.openxmlformats.org/officeDocument/2006/relationships" xmlns:p="http://schemas.openxmlformats.org/presentationml/2006/main">
+  <p:cSld>
+    <p:spTree>
+      <p:nvGrpSpPr>
+        <p:cNvPr id="1" name=""/>
+        <p:cNvGrpSpPr/>
+        <p:nvPr/>
+      </p:nvGrpSpPr>
+      <p:grpSpPr>
+        <a:xfrm>
+          <a:off x="0" y="0"/>
+          <a:ext cx="0" cy="0"/>
+          <a:chOff x="0" y="0"/>
+          <a:chExt cx="0" cy="0"/>
+        </a:xfrm>
+      </p:grpSpPr>
+      <p:sp>
+        <p:nvSpPr>
+          <p:cNvPr id="6" name="날짜 개체 틀 3">
+            <a:extLst>
+              <a:ext uri="{FF2B5EF4-FFF2-40B4-BE49-F238E27FC236}">
+                <a16:creationId xmlns:a16="http://schemas.microsoft.com/office/drawing/2014/main" id="{A1630AAA-9B55-18D3-332D-AFBF264CC9F9}"/>
+              </a:ext>
+            </a:extLst>
+          </p:cNvPr>
+          <p:cNvSpPr>
+            <a:spLocks noGrp="1"/>
+          </p:cNvSpPr>
+          <p:nvPr>
+            <p:ph type="dt" sz="half" idx="10"/>
+          </p:nvPr>
+        </p:nvSpPr>
+        <p:spPr/>
+        <p:txBody>
+          <a:bodyPr/>
+          <a:lstStyle/>
+          <a:p>
+            <a:fld id="{0F78D9C4-20C1-4B15-A116-16DC77AD9A1E}" type="datetime1">
+              <a:rPr lang="ko-KR" altLang="en-US" smtClean="0"/>
+              <a:t>2024-05-20</a:t>
+            </a:fld>
+            <a:endParaRPr lang="ko-KR" altLang="en-US" dirty="0"/>
+          </a:p>
+        </p:txBody>
+      </p:sp>
+      <p:sp>
+        <p:nvSpPr>
+          <p:cNvPr id="5" name="슬라이드 번호 개체 틀 4">
+            <a:extLst>
+              <a:ext uri="{FF2B5EF4-FFF2-40B4-BE49-F238E27FC236}">
+                <a16:creationId xmlns:a16="http://schemas.microsoft.com/office/drawing/2014/main" id="{4309EF4C-6CBF-F353-816C-0A042A42791D}"/>
+              </a:ext>
+            </a:extLst>
+          </p:cNvPr>
+          <p:cNvSpPr>
+            <a:spLocks noGrp="1"/>
+          </p:cNvSpPr>
+          <p:nvPr>
+            <p:ph type="sldNum" sz="quarter" idx="12"/>
+          </p:nvPr>
+        </p:nvSpPr>
+        <p:spPr/>
+        <p:txBody>
+          <a:bodyPr/>
+          <a:lstStyle/>
+          <a:p>
+            <a:fld id="{083A2CE0-18CD-4102-B738-4ACFF9E68BA4}" type="slidenum">
+              <a:rPr lang="ko-KR" altLang="en-US" smtClean="0"/>
+              <a:t>5</a:t>
             </a:fld>
             <a:endParaRPr lang="ko-KR" altLang="en-US"/>
           </a:p>
@@ -13039,7 +13533,7 @@
 </p:sld>
 </file>
 
-<file path=ppt/slides/slide5.xml><?xml version="1.0" encoding="utf-8"?>
+<file path=ppt/slides/slide6.xml><?xml version="1.0" encoding="utf-8"?>
 <p:sld xmlns:a="http://schemas.openxmlformats.org/drawingml/2006/main" xmlns:r="http://schemas.openxmlformats.org/officeDocument/2006/relationships" xmlns:p="http://schemas.openxmlformats.org/presentationml/2006/main">
   <p:cSld>
     <p:spTree>
@@ -13129,7 +13623,7 @@
           <a:p>
             <a:fld id="{0F78D9C4-20C1-4B15-A116-16DC77AD9A1E}" type="datetime1">
               <a:rPr lang="ko-KR" altLang="en-US" smtClean="0"/>
-              <a:t>2024-05-17</a:t>
+              <a:t>2024-05-20</a:t>
             </a:fld>
             <a:endParaRPr lang="ko-KR" altLang="en-US"/>
           </a:p>
@@ -13158,7 +13652,7 @@
           <a:p>
             <a:fld id="{083A2CE0-18CD-4102-B738-4ACFF9E68BA4}" type="slidenum">
               <a:rPr lang="ko-KR" altLang="en-US" smtClean="0"/>
-              <a:t>5</a:t>
+              <a:t>6</a:t>
             </a:fld>
             <a:endParaRPr lang="ko-KR" altLang="en-US"/>
           </a:p>
@@ -13415,123 +13909,6 @@
 </p:sld>
 </file>
 
-<file path=ppt/slides/slide6.xml><?xml version="1.0" encoding="utf-8"?>
-<p:sld xmlns:a="http://schemas.openxmlformats.org/drawingml/2006/main" xmlns:r="http://schemas.openxmlformats.org/officeDocument/2006/relationships" xmlns:p="http://schemas.openxmlformats.org/presentationml/2006/main">
-  <p:cSld>
-    <p:spTree>
-      <p:nvGrpSpPr>
-        <p:cNvPr id="1" name=""/>
-        <p:cNvGrpSpPr/>
-        <p:nvPr/>
-      </p:nvGrpSpPr>
-      <p:grpSpPr>
-        <a:xfrm>
-          <a:off x="0" y="0"/>
-          <a:ext cx="0" cy="0"/>
-          <a:chOff x="0" y="0"/>
-          <a:chExt cx="0" cy="0"/>
-        </a:xfrm>
-      </p:grpSpPr>
-      <p:sp>
-        <p:nvSpPr>
-          <p:cNvPr id="2" name="날짜 개체 틀 1">
-            <a:extLst>
-              <a:ext uri="{FF2B5EF4-FFF2-40B4-BE49-F238E27FC236}">
-                <a16:creationId xmlns:a16="http://schemas.microsoft.com/office/drawing/2014/main" id="{55BDFA10-ECF7-38FE-C364-618B7085F1E3}"/>
-              </a:ext>
-            </a:extLst>
-          </p:cNvPr>
-          <p:cNvSpPr>
-            <a:spLocks noGrp="1"/>
-          </p:cNvSpPr>
-          <p:nvPr>
-            <p:ph type="dt" sz="half" idx="10"/>
-          </p:nvPr>
-        </p:nvSpPr>
-        <p:spPr/>
-        <p:txBody>
-          <a:bodyPr/>
-          <a:lstStyle/>
-          <a:p>
-            <a:fld id="{0E19CB95-6D28-40F1-9DA3-1BAC5D4B5B4F}" type="datetime6">
-              <a:rPr lang="ko-KR" altLang="en-US" smtClean="0"/>
-              <a:t>2024년 5월</a:t>
-            </a:fld>
-            <a:endParaRPr lang="ko-KR" altLang="en-US"/>
-          </a:p>
-        </p:txBody>
-      </p:sp>
-      <p:sp>
-        <p:nvSpPr>
-          <p:cNvPr id="3" name="슬라이드 번호 개체 틀 2">
-            <a:extLst>
-              <a:ext uri="{FF2B5EF4-FFF2-40B4-BE49-F238E27FC236}">
-                <a16:creationId xmlns:a16="http://schemas.microsoft.com/office/drawing/2014/main" id="{BEAC1192-3240-5090-C940-3FE8EE2E796E}"/>
-              </a:ext>
-            </a:extLst>
-          </p:cNvPr>
-          <p:cNvSpPr>
-            <a:spLocks noGrp="1"/>
-          </p:cNvSpPr>
-          <p:nvPr>
-            <p:ph type="sldNum" sz="quarter" idx="12"/>
-          </p:nvPr>
-        </p:nvSpPr>
-        <p:spPr/>
-        <p:txBody>
-          <a:bodyPr/>
-          <a:lstStyle/>
-          <a:p>
-            <a:fld id="{083A2CE0-18CD-4102-B738-4ACFF9E68BA4}" type="slidenum">
-              <a:rPr lang="ko-KR" altLang="en-US" smtClean="0"/>
-              <a:t>6</a:t>
-            </a:fld>
-            <a:endParaRPr lang="ko-KR" altLang="en-US"/>
-          </a:p>
-        </p:txBody>
-      </p:sp>
-      <p:sp>
-        <p:nvSpPr>
-          <p:cNvPr id="4" name="제목 3">
-            <a:extLst>
-              <a:ext uri="{FF2B5EF4-FFF2-40B4-BE49-F238E27FC236}">
-                <a16:creationId xmlns:a16="http://schemas.microsoft.com/office/drawing/2014/main" id="{45DC42BC-3382-7592-84ED-A0A40D69B177}"/>
-              </a:ext>
-            </a:extLst>
-          </p:cNvPr>
-          <p:cNvSpPr>
-            <a:spLocks noGrp="1"/>
-          </p:cNvSpPr>
-          <p:nvPr>
-            <p:ph type="title"/>
-          </p:nvPr>
-        </p:nvSpPr>
-        <p:spPr/>
-        <p:txBody>
-          <a:bodyPr/>
-          <a:lstStyle/>
-          <a:p>
-            <a:r>
-              <a:rPr lang="en-US" altLang="ko-KR" sz="11500" dirty="0"/>
-              <a:t>transform</a:t>
-            </a:r>
-            <a:endParaRPr lang="ko-KR" altLang="en-US" sz="11500" dirty="0"/>
-          </a:p>
-        </p:txBody>
-      </p:sp>
-    </p:spTree>
-    <p:extLst>
-      <p:ext uri="{BB962C8B-B14F-4D97-AF65-F5344CB8AC3E}">
-        <p14:creationId xmlns:p14="http://schemas.microsoft.com/office/powerpoint/2010/main" val="3336738032"/>
-      </p:ext>
-    </p:extLst>
-  </p:cSld>
-  <p:clrMapOvr>
-    <a:masterClrMapping/>
-  </p:clrMapOvr>
-</p:sld>
-</file>
-
 <file path=ppt/slides/slide7.xml><?xml version="1.0" encoding="utf-8"?>
 <p:sld xmlns:a="http://schemas.openxmlformats.org/drawingml/2006/main" xmlns:r="http://schemas.openxmlformats.org/officeDocument/2006/relationships" xmlns:p="http://schemas.openxmlformats.org/presentationml/2006/main">
   <p:cSld>
@@ -13551,105 +13928,10 @@
       </p:grpSpPr>
       <p:sp>
         <p:nvSpPr>
-          <p:cNvPr id="6" name="내용 개체 틀 6">
-            <a:extLst>
-              <a:ext uri="{FF2B5EF4-FFF2-40B4-BE49-F238E27FC236}">
-                <a16:creationId xmlns:a16="http://schemas.microsoft.com/office/drawing/2014/main" id="{21AC2E97-18FD-4237-589C-515E36846713}"/>
-              </a:ext>
-            </a:extLst>
-          </p:cNvPr>
-          <p:cNvSpPr>
-            <a:spLocks noGrp="1"/>
-          </p:cNvSpPr>
-          <p:nvPr>
-            <p:ph idx="1"/>
-          </p:nvPr>
-        </p:nvSpPr>
-        <p:spPr>
-          <a:xfrm>
-            <a:off x="4654947" y="2200120"/>
-            <a:ext cx="6344478" cy="3644686"/>
-          </a:xfrm>
-        </p:spPr>
-        <p:txBody>
-          <a:bodyPr/>
-          <a:lstStyle/>
-          <a:p>
-            <a:r>
-              <a:rPr lang="en-US" altLang="ko-KR" b="1" dirty="0"/>
-              <a:t>skew</a:t>
-            </a:r>
-            <a:r>
-              <a:rPr lang="en-US" altLang="ko-KR" dirty="0"/>
-              <a:t> : </a:t>
-            </a:r>
-            <a:r>
-              <a:rPr lang="ko-KR" altLang="en-US" dirty="0"/>
-              <a:t>기울기</a:t>
-            </a:r>
-            <a:endParaRPr lang="en-US" altLang="ko-KR" dirty="0"/>
-          </a:p>
-          <a:p>
-            <a:endParaRPr lang="en-US" altLang="ko-KR" dirty="0"/>
-          </a:p>
-          <a:p>
-            <a:r>
-              <a:rPr lang="en-US" altLang="ko-KR" b="1" dirty="0"/>
-              <a:t>scale</a:t>
-            </a:r>
-            <a:r>
-              <a:rPr lang="en-US" altLang="ko-KR" dirty="0"/>
-              <a:t> : </a:t>
-            </a:r>
-            <a:r>
-              <a:rPr lang="ko-KR" altLang="en-US" dirty="0"/>
-              <a:t>확대</a:t>
-            </a:r>
-            <a:endParaRPr lang="en-US" altLang="ko-KR" dirty="0"/>
-          </a:p>
-          <a:p>
-            <a:endParaRPr lang="en-US" altLang="ko-KR" dirty="0"/>
-          </a:p>
-          <a:p>
-            <a:r>
-              <a:rPr lang="en-US" altLang="ko-KR" b="1" dirty="0"/>
-              <a:t>rotate</a:t>
-            </a:r>
-            <a:r>
-              <a:rPr lang="en-US" altLang="ko-KR" dirty="0"/>
-              <a:t> : </a:t>
-            </a:r>
-            <a:r>
-              <a:rPr lang="ko-KR" altLang="en-US" dirty="0"/>
-              <a:t>회전</a:t>
-            </a:r>
-            <a:endParaRPr lang="en-US" altLang="ko-KR" dirty="0"/>
-          </a:p>
-          <a:p>
-            <a:endParaRPr lang="en-US" altLang="ko-KR" dirty="0"/>
-          </a:p>
-          <a:p>
-            <a:r>
-              <a:rPr lang="en-US" altLang="ko-KR" b="1" dirty="0"/>
-              <a:t>translate</a:t>
-            </a:r>
-            <a:r>
-              <a:rPr lang="en-US" altLang="ko-KR" dirty="0"/>
-              <a:t> : </a:t>
-            </a:r>
-            <a:r>
-              <a:rPr lang="ko-KR" altLang="en-US" dirty="0"/>
-              <a:t>이동</a:t>
-            </a:r>
-          </a:p>
-        </p:txBody>
-      </p:sp>
-      <p:sp>
-        <p:nvSpPr>
-          <p:cNvPr id="7" name="날짜 개체 틀 3">
-            <a:extLst>
-              <a:ext uri="{FF2B5EF4-FFF2-40B4-BE49-F238E27FC236}">
-                <a16:creationId xmlns:a16="http://schemas.microsoft.com/office/drawing/2014/main" id="{6FD7CA5C-A72D-FFC1-A78B-FE0820A75160}"/>
+          <p:cNvPr id="2" name="날짜 개체 틀 1">
+            <a:extLst>
+              <a:ext uri="{FF2B5EF4-FFF2-40B4-BE49-F238E27FC236}">
+                <a16:creationId xmlns:a16="http://schemas.microsoft.com/office/drawing/2014/main" id="{55BDFA10-ECF7-38FE-C364-618B7085F1E3}"/>
               </a:ext>
             </a:extLst>
           </p:cNvPr>
@@ -13665,9 +13947,9 @@
           <a:bodyPr/>
           <a:lstStyle/>
           <a:p>
-            <a:fld id="{0F78D9C4-20C1-4B15-A116-16DC77AD9A1E}" type="datetime1">
+            <a:fld id="{0E19CB95-6D28-40F1-9DA3-1BAC5D4B5B4F}" type="datetime6">
               <a:rPr lang="ko-KR" altLang="en-US" smtClean="0"/>
-              <a:t>2024-05-17</a:t>
+              <a:t>2024년 5월</a:t>
             </a:fld>
             <a:endParaRPr lang="ko-KR" altLang="en-US"/>
           </a:p>
@@ -13675,10 +13957,10 @@
       </p:sp>
       <p:sp>
         <p:nvSpPr>
-          <p:cNvPr id="5" name="슬라이드 번호 개체 틀 4">
-            <a:extLst>
-              <a:ext uri="{FF2B5EF4-FFF2-40B4-BE49-F238E27FC236}">
-                <a16:creationId xmlns:a16="http://schemas.microsoft.com/office/drawing/2014/main" id="{2299A0EE-47F7-D110-E2A1-2ACF334E18E3}"/>
+          <p:cNvPr id="3" name="슬라이드 번호 개체 틀 2">
+            <a:extLst>
+              <a:ext uri="{FF2B5EF4-FFF2-40B4-BE49-F238E27FC236}">
+                <a16:creationId xmlns:a16="http://schemas.microsoft.com/office/drawing/2014/main" id="{BEAC1192-3240-5090-C940-3FE8EE2E796E}"/>
               </a:ext>
             </a:extLst>
           </p:cNvPr>
@@ -13704,10 +13986,10 @@
       </p:sp>
       <p:sp>
         <p:nvSpPr>
-          <p:cNvPr id="2" name="제목 1">
-            <a:extLst>
-              <a:ext uri="{FF2B5EF4-FFF2-40B4-BE49-F238E27FC236}">
-                <a16:creationId xmlns:a16="http://schemas.microsoft.com/office/drawing/2014/main" id="{02C53F9D-FAD3-2E9F-1E65-5F5FB3F0F6C0}"/>
+          <p:cNvPr id="4" name="제목 3">
+            <a:extLst>
+              <a:ext uri="{FF2B5EF4-FFF2-40B4-BE49-F238E27FC236}">
+                <a16:creationId xmlns:a16="http://schemas.microsoft.com/office/drawing/2014/main" id="{45DC42BC-3382-7592-84ED-A0A40D69B177}"/>
               </a:ext>
             </a:extLst>
           </p:cNvPr>
@@ -13724,111 +14006,17 @@
           <a:lstStyle/>
           <a:p>
             <a:r>
-              <a:rPr lang="en-US" altLang="ko-KR" dirty="0"/>
-              <a:t>CSS </a:t>
-            </a:r>
-            <a:r>
-              <a:rPr lang="ko-KR" altLang="en-US" dirty="0"/>
-              <a:t>복잡한 속성 </a:t>
-            </a:r>
-            <a:r>
-              <a:rPr lang="en-US" altLang="ko-KR" dirty="0"/>
-              <a:t>- transform</a:t>
-            </a:r>
-            <a:endParaRPr lang="ko-KR" altLang="en-US" dirty="0"/>
-          </a:p>
-        </p:txBody>
-      </p:sp>
-      <p:sp>
-        <p:nvSpPr>
-          <p:cNvPr id="3" name="TextBox 2">
-            <a:extLst>
-              <a:ext uri="{FF2B5EF4-FFF2-40B4-BE49-F238E27FC236}">
-                <a16:creationId xmlns:a16="http://schemas.microsoft.com/office/drawing/2014/main" id="{90D1175A-699D-3F6A-9D29-A3C0D8BFFAA6}"/>
-              </a:ext>
-            </a:extLst>
-          </p:cNvPr>
-          <p:cNvSpPr txBox="1"/>
-          <p:nvPr/>
-        </p:nvSpPr>
-        <p:spPr>
-          <a:xfrm>
-            <a:off x="484909" y="1325563"/>
-            <a:ext cx="11222182" cy="830997"/>
-          </a:xfrm>
-          <a:prstGeom prst="rect">
-            <a:avLst/>
-          </a:prstGeom>
-          <a:noFill/>
-        </p:spPr>
-        <p:txBody>
-          <a:bodyPr wrap="square" rtlCol="0">
-            <a:spAutoFit/>
-          </a:bodyPr>
-          <a:lstStyle/>
-          <a:p>
-            <a:r>
-              <a:rPr lang="ko-KR" altLang="en-US" sz="2400" b="0" i="0" dirty="0">
-                <a:effectLst/>
-              </a:rPr>
-              <a:t>요소에 이동</a:t>
-            </a:r>
-            <a:r>
-              <a:rPr lang="en-US" altLang="ko-KR" sz="2400" b="0" i="0" dirty="0">
-                <a:effectLst/>
-              </a:rPr>
-              <a:t>(translate), </a:t>
-            </a:r>
-            <a:r>
-              <a:rPr lang="ko-KR" altLang="en-US" sz="2400" b="0" i="0" dirty="0">
-                <a:effectLst/>
-              </a:rPr>
-              <a:t>회전</a:t>
-            </a:r>
-            <a:r>
-              <a:rPr lang="en-US" altLang="ko-KR" sz="2400" b="0" i="0" dirty="0">
-                <a:effectLst/>
-              </a:rPr>
-              <a:t>(rotate), </a:t>
-            </a:r>
-            <a:r>
-              <a:rPr lang="ko-KR" altLang="en-US" sz="2400" b="0" i="0" dirty="0">
-                <a:effectLst/>
-              </a:rPr>
-              <a:t>확대축소</a:t>
-            </a:r>
-            <a:r>
-              <a:rPr lang="en-US" altLang="ko-KR" sz="2400" b="0" i="0" dirty="0">
-                <a:effectLst/>
-              </a:rPr>
-              <a:t>(scale), </a:t>
-            </a:r>
-            <a:r>
-              <a:rPr lang="ko-KR" altLang="en-US" sz="2400" b="0" i="0" dirty="0">
-                <a:effectLst/>
-              </a:rPr>
-              <a:t>비틀기</a:t>
-            </a:r>
-            <a:r>
-              <a:rPr lang="en-US" altLang="ko-KR" sz="2400" b="0" i="0" dirty="0">
-                <a:effectLst/>
-              </a:rPr>
-              <a:t>(skew) </a:t>
-            </a:r>
-            <a:r>
-              <a:rPr lang="ko-KR" altLang="en-US" sz="2400" b="0" i="0" dirty="0">
-                <a:effectLst/>
-              </a:rPr>
-              <a:t>효과를 부여하기 위한 함수를 제공</a:t>
-            </a:r>
-            <a:endParaRPr lang="ko-KR" altLang="en-US" sz="2400" dirty="0"/>
+              <a:rPr lang="en-US" altLang="ko-KR" sz="11500" dirty="0"/>
+              <a:t>transform</a:t>
+            </a:r>
+            <a:endParaRPr lang="ko-KR" altLang="en-US" sz="11500" dirty="0"/>
           </a:p>
         </p:txBody>
       </p:sp>
     </p:spTree>
     <p:extLst>
       <p:ext uri="{BB962C8B-B14F-4D97-AF65-F5344CB8AC3E}">
-        <p14:creationId xmlns:p14="http://schemas.microsoft.com/office/powerpoint/2010/main" val="1052419596"/>
+        <p14:creationId xmlns:p14="http://schemas.microsoft.com/office/powerpoint/2010/main" val="3336738032"/>
       </p:ext>
     </p:extLst>
   </p:cSld>
@@ -13857,10 +14045,105 @@
       </p:grpSpPr>
       <p:sp>
         <p:nvSpPr>
-          <p:cNvPr id="5" name="날짜 개체 틀 4">
-            <a:extLst>
-              <a:ext uri="{FF2B5EF4-FFF2-40B4-BE49-F238E27FC236}">
-                <a16:creationId xmlns:a16="http://schemas.microsoft.com/office/drawing/2014/main" id="{A4A2773C-C95C-C839-F80C-240482F6D665}"/>
+          <p:cNvPr id="6" name="내용 개체 틀 6">
+            <a:extLst>
+              <a:ext uri="{FF2B5EF4-FFF2-40B4-BE49-F238E27FC236}">
+                <a16:creationId xmlns:a16="http://schemas.microsoft.com/office/drawing/2014/main" id="{21AC2E97-18FD-4237-589C-515E36846713}"/>
+              </a:ext>
+            </a:extLst>
+          </p:cNvPr>
+          <p:cNvSpPr>
+            <a:spLocks noGrp="1"/>
+          </p:cNvSpPr>
+          <p:nvPr>
+            <p:ph idx="1"/>
+          </p:nvPr>
+        </p:nvSpPr>
+        <p:spPr>
+          <a:xfrm>
+            <a:off x="4654947" y="2200120"/>
+            <a:ext cx="6344478" cy="3644686"/>
+          </a:xfrm>
+        </p:spPr>
+        <p:txBody>
+          <a:bodyPr/>
+          <a:lstStyle/>
+          <a:p>
+            <a:r>
+              <a:rPr lang="en-US" altLang="ko-KR" b="1" dirty="0"/>
+              <a:t>skew</a:t>
+            </a:r>
+            <a:r>
+              <a:rPr lang="en-US" altLang="ko-KR" dirty="0"/>
+              <a:t> : </a:t>
+            </a:r>
+            <a:r>
+              <a:rPr lang="ko-KR" altLang="en-US" dirty="0"/>
+              <a:t>기울기</a:t>
+            </a:r>
+            <a:endParaRPr lang="en-US" altLang="ko-KR" dirty="0"/>
+          </a:p>
+          <a:p>
+            <a:endParaRPr lang="en-US" altLang="ko-KR" dirty="0"/>
+          </a:p>
+          <a:p>
+            <a:r>
+              <a:rPr lang="en-US" altLang="ko-KR" b="1" dirty="0"/>
+              <a:t>scale</a:t>
+            </a:r>
+            <a:r>
+              <a:rPr lang="en-US" altLang="ko-KR" dirty="0"/>
+              <a:t> : </a:t>
+            </a:r>
+            <a:r>
+              <a:rPr lang="ko-KR" altLang="en-US" dirty="0"/>
+              <a:t>확대</a:t>
+            </a:r>
+            <a:endParaRPr lang="en-US" altLang="ko-KR" dirty="0"/>
+          </a:p>
+          <a:p>
+            <a:endParaRPr lang="en-US" altLang="ko-KR" dirty="0"/>
+          </a:p>
+          <a:p>
+            <a:r>
+              <a:rPr lang="en-US" altLang="ko-KR" b="1" dirty="0"/>
+              <a:t>rotate</a:t>
+            </a:r>
+            <a:r>
+              <a:rPr lang="en-US" altLang="ko-KR" dirty="0"/>
+              <a:t> : </a:t>
+            </a:r>
+            <a:r>
+              <a:rPr lang="ko-KR" altLang="en-US" dirty="0"/>
+              <a:t>회전</a:t>
+            </a:r>
+            <a:endParaRPr lang="en-US" altLang="ko-KR" dirty="0"/>
+          </a:p>
+          <a:p>
+            <a:endParaRPr lang="en-US" altLang="ko-KR" dirty="0"/>
+          </a:p>
+          <a:p>
+            <a:r>
+              <a:rPr lang="en-US" altLang="ko-KR" b="1" dirty="0"/>
+              <a:t>translate</a:t>
+            </a:r>
+            <a:r>
+              <a:rPr lang="en-US" altLang="ko-KR" dirty="0"/>
+              <a:t> : </a:t>
+            </a:r>
+            <a:r>
+              <a:rPr lang="ko-KR" altLang="en-US" dirty="0"/>
+              <a:t>이동</a:t>
+            </a:r>
+          </a:p>
+        </p:txBody>
+      </p:sp>
+      <p:sp>
+        <p:nvSpPr>
+          <p:cNvPr id="7" name="날짜 개체 틀 3">
+            <a:extLst>
+              <a:ext uri="{FF2B5EF4-FFF2-40B4-BE49-F238E27FC236}">
+                <a16:creationId xmlns:a16="http://schemas.microsoft.com/office/drawing/2014/main" id="{6FD7CA5C-A72D-FFC1-A78B-FE0820A75160}"/>
               </a:ext>
             </a:extLst>
           </p:cNvPr>
@@ -13876,20 +14159,20 @@
           <a:bodyPr/>
           <a:lstStyle/>
           <a:p>
-            <a:fld id="{972064E1-7F13-44DE-8021-CDAF6015FD20}" type="datetime6">
+            <a:fld id="{0F78D9C4-20C1-4B15-A116-16DC77AD9A1E}" type="datetime1">
               <a:rPr lang="ko-KR" altLang="en-US" smtClean="0"/>
-              <a:t>2024년 5월</a:t>
+              <a:t>2024-05-20</a:t>
             </a:fld>
-            <a:endParaRPr lang="ko-KR" altLang="en-US" dirty="0"/>
-          </a:p>
-        </p:txBody>
-      </p:sp>
-      <p:sp>
-        <p:nvSpPr>
-          <p:cNvPr id="4" name="슬라이드 번호 개체 틀 3">
-            <a:extLst>
-              <a:ext uri="{FF2B5EF4-FFF2-40B4-BE49-F238E27FC236}">
-                <a16:creationId xmlns:a16="http://schemas.microsoft.com/office/drawing/2014/main" id="{00C9C8E9-1013-83FC-78A7-FAC88BA2D4DC}"/>
+            <a:endParaRPr lang="ko-KR" altLang="en-US"/>
+          </a:p>
+        </p:txBody>
+      </p:sp>
+      <p:sp>
+        <p:nvSpPr>
+          <p:cNvPr id="5" name="슬라이드 번호 개체 틀 4">
+            <a:extLst>
+              <a:ext uri="{FF2B5EF4-FFF2-40B4-BE49-F238E27FC236}">
+                <a16:creationId xmlns:a16="http://schemas.microsoft.com/office/drawing/2014/main" id="{2299A0EE-47F7-D110-E2A1-2ACF334E18E3}"/>
               </a:ext>
             </a:extLst>
           </p:cNvPr>
@@ -13918,7 +14201,7 @@
           <p:cNvPr id="2" name="제목 1">
             <a:extLst>
               <a:ext uri="{FF2B5EF4-FFF2-40B4-BE49-F238E27FC236}">
-                <a16:creationId xmlns:a16="http://schemas.microsoft.com/office/drawing/2014/main" id="{6EC54C0C-A81C-EA63-CA0A-E67C1DF70C62}"/>
+                <a16:creationId xmlns:a16="http://schemas.microsoft.com/office/drawing/2014/main" id="{02C53F9D-FAD3-2E9F-1E65-5F5FB3F0F6C0}"/>
               </a:ext>
             </a:extLst>
           </p:cNvPr>
@@ -13952,54 +14235,20 @@
       </p:sp>
       <p:sp>
         <p:nvSpPr>
-          <p:cNvPr id="8" name="날짜 개체 틀 3">
-            <a:extLst>
-              <a:ext uri="{FF2B5EF4-FFF2-40B4-BE49-F238E27FC236}">
-                <a16:creationId xmlns:a16="http://schemas.microsoft.com/office/drawing/2014/main" id="{6FD7CA5C-A72D-FFC1-A78B-FE0820A75160}"/>
-              </a:ext>
-            </a:extLst>
-          </p:cNvPr>
-          <p:cNvSpPr>
-            <a:spLocks noGrp="1"/>
-          </p:cNvSpPr>
-          <p:nvPr>
-            <p:ph type="dt" sz="half" idx="4294967295"/>
-          </p:nvPr>
+          <p:cNvPr id="3" name="TextBox 2">
+            <a:extLst>
+              <a:ext uri="{FF2B5EF4-FFF2-40B4-BE49-F238E27FC236}">
+                <a16:creationId xmlns:a16="http://schemas.microsoft.com/office/drawing/2014/main" id="{90D1175A-699D-3F6A-9D29-A3C0D8BFFAA6}"/>
+              </a:ext>
+            </a:extLst>
+          </p:cNvPr>
+          <p:cNvSpPr txBox="1"/>
+          <p:nvPr/>
         </p:nvSpPr>
         <p:spPr>
           <a:xfrm>
-            <a:off x="0" y="6480175"/>
-            <a:ext cx="2743200" cy="365125"/>
-          </a:xfrm>
-        </p:spPr>
-        <p:txBody>
-          <a:bodyPr/>
-          <a:lstStyle/>
-          <a:p>
-            <a:fld id="{0F78D9C4-20C1-4B15-A116-16DC77AD9A1E}" type="datetime1">
-              <a:rPr lang="ko-KR" altLang="en-US" smtClean="0"/>
-              <a:t>2024-05-17</a:t>
-            </a:fld>
-            <a:endParaRPr lang="ko-KR" altLang="en-US"/>
-          </a:p>
-        </p:txBody>
-      </p:sp>
-      <p:sp>
-        <p:nvSpPr>
-          <p:cNvPr id="7" name="TextBox 6">
-            <a:extLst>
-              <a:ext uri="{FF2B5EF4-FFF2-40B4-BE49-F238E27FC236}">
-                <a16:creationId xmlns:a16="http://schemas.microsoft.com/office/drawing/2014/main" id="{B7028815-C171-2CEF-7C76-A8138A5CDC06}"/>
-              </a:ext>
-            </a:extLst>
-          </p:cNvPr>
-          <p:cNvSpPr txBox="1"/>
-          <p:nvPr/>
-        </p:nvSpPr>
-        <p:spPr>
-          <a:xfrm>
-            <a:off x="578895" y="1403122"/>
-            <a:ext cx="6134582" cy="461665"/>
+            <a:off x="484909" y="1325563"/>
+            <a:ext cx="11222182" cy="830997"/>
           </a:xfrm>
           <a:prstGeom prst="rect">
             <a:avLst/>
@@ -14007,119 +14256,73 @@
           <a:noFill/>
         </p:spPr>
         <p:txBody>
-          <a:bodyPr wrap="square">
+          <a:bodyPr wrap="square" rtlCol="0">
             <a:spAutoFit/>
           </a:bodyPr>
           <a:lstStyle/>
           <a:p>
-            <a:pPr marL="285750" indent="-285750">
-              <a:buFont typeface="Arial" panose="020B0604020202020204" pitchFamily="34" charset="0"/>
-              <a:buChar char="•"/>
-            </a:pPr>
-            <a:r>
-              <a:rPr lang="en-US" altLang="ko-KR" sz="2400" dirty="0"/>
-              <a:t>skew : </a:t>
-            </a:r>
-            <a:r>
-              <a:rPr lang="ko-KR" altLang="en-US" sz="2400" dirty="0"/>
-              <a:t>기울기</a:t>
-            </a:r>
-            <a:endParaRPr lang="en-US" altLang="ko-KR" sz="2400" dirty="0"/>
-          </a:p>
-        </p:txBody>
-      </p:sp>
-      <p:pic>
-        <p:nvPicPr>
-          <p:cNvPr id="12" name="그림 11">
-            <a:extLst>
-              <a:ext uri="{FF2B5EF4-FFF2-40B4-BE49-F238E27FC236}">
-                <a16:creationId xmlns:a16="http://schemas.microsoft.com/office/drawing/2014/main" id="{40174F42-5A06-BBCB-2633-071872223BA8}"/>
-              </a:ext>
-            </a:extLst>
-          </p:cNvPr>
-          <p:cNvPicPr>
-            <a:picLocks noChangeAspect="1"/>
-          </p:cNvPicPr>
-          <p:nvPr/>
-        </p:nvPicPr>
-        <p:blipFill rotWithShape="1">
-          <a:blip r:embed="rId3"/>
-          <a:srcRect r="12366"/>
-          <a:stretch/>
-        </p:blipFill>
-        <p:spPr>
-          <a:xfrm>
-            <a:off x="556185" y="1915517"/>
-            <a:ext cx="11079630" cy="4012476"/>
-          </a:xfrm>
-          <a:prstGeom prst="rect">
-            <a:avLst/>
-          </a:prstGeom>
-        </p:spPr>
-      </p:pic>
-      <p:sp>
-        <p:nvSpPr>
-          <p:cNvPr id="14" name="TextBox 13">
-            <a:extLst>
-              <a:ext uri="{FF2B5EF4-FFF2-40B4-BE49-F238E27FC236}">
-                <a16:creationId xmlns:a16="http://schemas.microsoft.com/office/drawing/2014/main" id="{A1F341D5-9ECF-0D34-E40E-D274ACAD45C7}"/>
-              </a:ext>
-            </a:extLst>
-          </p:cNvPr>
-          <p:cNvSpPr txBox="1"/>
-          <p:nvPr/>
-        </p:nvSpPr>
-        <p:spPr>
-          <a:xfrm>
-            <a:off x="1615440" y="6089209"/>
-            <a:ext cx="10414517" cy="276999"/>
-          </a:xfrm>
-          <a:prstGeom prst="rect">
-            <a:avLst/>
-          </a:prstGeom>
-          <a:noFill/>
-        </p:spPr>
-        <p:txBody>
-          <a:bodyPr wrap="square">
-            <a:spAutoFit/>
-          </a:bodyPr>
-          <a:lstStyle/>
-          <a:p>
-            <a:pPr algn="r"/>
-            <a:r>
-              <a:rPr lang="ko-KR" altLang="en-US" sz="1200" dirty="0">
-                <a:solidFill>
-                  <a:schemeClr val="bg2">
-                    <a:lumMod val="50000"/>
-                  </a:schemeClr>
-                </a:solidFill>
-              </a:rPr>
-              <a:t>사진 출처</a:t>
-            </a:r>
-            <a:r>
-              <a:rPr lang="en-US" altLang="ko-KR" sz="1200" dirty="0">
-                <a:solidFill>
-                  <a:schemeClr val="bg2">
-                    <a:lumMod val="50000"/>
-                  </a:schemeClr>
-                </a:solidFill>
-              </a:rPr>
-              <a:t>: https://dev.to/kunaal438/css-transform-complete-guide-on-css-transform-everything-you-need-for-good-developer-841</a:t>
-            </a:r>
-            <a:endParaRPr lang="ko-KR" altLang="en-US" sz="1200" dirty="0">
-              <a:solidFill>
-                <a:schemeClr val="bg2">
-                  <a:lumMod val="50000"/>
-                </a:schemeClr>
-              </a:solidFill>
-            </a:endParaRPr>
+            <a:r>
+              <a:rPr lang="ko-KR" altLang="en-US" sz="2400" b="0" i="0" dirty="0">
+                <a:effectLst/>
+              </a:rPr>
+              <a:t>요소에 이동</a:t>
+            </a:r>
+            <a:r>
+              <a:rPr lang="en-US" altLang="ko-KR" sz="2400" b="0" i="0" dirty="0">
+                <a:effectLst/>
+              </a:rPr>
+              <a:t>(translate), </a:t>
+            </a:r>
+            <a:r>
+              <a:rPr lang="ko-KR" altLang="en-US" sz="2400" b="0" i="0" dirty="0">
+                <a:effectLst/>
+              </a:rPr>
+              <a:t>회전</a:t>
+            </a:r>
+            <a:r>
+              <a:rPr lang="en-US" altLang="ko-KR" sz="2400" b="0" i="0" dirty="0">
+                <a:effectLst/>
+              </a:rPr>
+              <a:t>(rotate), </a:t>
+            </a:r>
+            <a:r>
+              <a:rPr lang="ko-KR" altLang="en-US" sz="2400" b="0" i="0" dirty="0">
+                <a:effectLst/>
+              </a:rPr>
+              <a:t>확대축소</a:t>
+            </a:r>
+            <a:r>
+              <a:rPr lang="en-US" altLang="ko-KR" sz="2400" b="0" i="0" dirty="0">
+                <a:effectLst/>
+              </a:rPr>
+              <a:t>(scale), </a:t>
+            </a:r>
+            <a:r>
+              <a:rPr lang="ko-KR" altLang="en-US" sz="2400" b="0" i="0" dirty="0">
+                <a:effectLst/>
+              </a:rPr>
+              <a:t>비틀기</a:t>
+            </a:r>
+            <a:r>
+              <a:rPr lang="en-US" altLang="ko-KR" sz="2400" b="0" i="0" dirty="0">
+                <a:effectLst/>
+              </a:rPr>
+              <a:t>(skew) </a:t>
+            </a:r>
+            <a:r>
+              <a:rPr lang="ko-KR" altLang="en-US" sz="2400" b="0" i="0" dirty="0">
+                <a:effectLst/>
+              </a:rPr>
+              <a:t>효과를 부여하기 위한 함수를 제공</a:t>
+            </a:r>
+            <a:endParaRPr lang="ko-KR" altLang="en-US" sz="2400" dirty="0"/>
           </a:p>
         </p:txBody>
       </p:sp>
     </p:spTree>
     <p:extLst>
       <p:ext uri="{BB962C8B-B14F-4D97-AF65-F5344CB8AC3E}">
-        <p14:creationId xmlns:p14="http://schemas.microsoft.com/office/powerpoint/2010/main" val="374594887"/>
+        <p14:creationId xmlns:p14="http://schemas.microsoft.com/office/powerpoint/2010/main" val="1052419596"/>
       </p:ext>
     </p:extLst>
   </p:cSld>
@@ -14151,7 +14354,7 @@
           <p:cNvPr id="5" name="날짜 개체 틀 4">
             <a:extLst>
               <a:ext uri="{FF2B5EF4-FFF2-40B4-BE49-F238E27FC236}">
-                <a16:creationId xmlns:a16="http://schemas.microsoft.com/office/drawing/2014/main" id="{FF28005D-C3B3-0345-8E72-EAC850CC55BB}"/>
+                <a16:creationId xmlns:a16="http://schemas.microsoft.com/office/drawing/2014/main" id="{A4A2773C-C95C-C839-F80C-240482F6D665}"/>
               </a:ext>
             </a:extLst>
           </p:cNvPr>
@@ -14167,6 +14370,10 @@
           <a:bodyPr/>
           <a:lstStyle/>
           <a:p>
+            <a:fld id="{972064E1-7F13-44DE-8021-CDAF6015FD20}" type="datetime6">
+              <a:rPr lang="ko-KR" altLang="en-US" smtClean="0"/>
+              <a:t>2024년 5월</a:t>
+            </a:fld>
             <a:endParaRPr lang="ko-KR" altLang="en-US" dirty="0"/>
           </a:p>
         </p:txBody>
@@ -14176,7 +14383,7 @@
           <p:cNvPr id="4" name="슬라이드 번호 개체 틀 3">
             <a:extLst>
               <a:ext uri="{FF2B5EF4-FFF2-40B4-BE49-F238E27FC236}">
-                <a16:creationId xmlns:a16="http://schemas.microsoft.com/office/drawing/2014/main" id="{6AB730F9-1B38-77DA-37B0-877B8EE83F64}"/>
+                <a16:creationId xmlns:a16="http://schemas.microsoft.com/office/drawing/2014/main" id="{00C9C8E9-1013-83FC-78A7-FAC88BA2D4DC}"/>
               </a:ext>
             </a:extLst>
           </p:cNvPr>
@@ -14202,10 +14409,10 @@
       </p:sp>
       <p:sp>
         <p:nvSpPr>
-          <p:cNvPr id="6" name="제목 1">
-            <a:extLst>
-              <a:ext uri="{FF2B5EF4-FFF2-40B4-BE49-F238E27FC236}">
-                <a16:creationId xmlns:a16="http://schemas.microsoft.com/office/drawing/2014/main" id="{588C3C44-5967-85DC-3ED4-2830FAE370C6}"/>
+          <p:cNvPr id="2" name="제목 1">
+            <a:extLst>
+              <a:ext uri="{FF2B5EF4-FFF2-40B4-BE49-F238E27FC236}">
+                <a16:creationId xmlns:a16="http://schemas.microsoft.com/office/drawing/2014/main" id="{6EC54C0C-A81C-EA63-CA0A-E67C1DF70C62}"/>
               </a:ext>
             </a:extLst>
           </p:cNvPr>
@@ -14265,7 +14472,7 @@
           <a:p>
             <a:fld id="{0F78D9C4-20C1-4B15-A116-16DC77AD9A1E}" type="datetime1">
               <a:rPr lang="ko-KR" altLang="en-US" smtClean="0"/>
-              <a:t>2024-05-17</a:t>
+              <a:t>2024-05-20</a:t>
             </a:fld>
             <a:endParaRPr lang="ko-KR" altLang="en-US"/>
           </a:p>
@@ -14276,7 +14483,7 @@
           <p:cNvPr id="7" name="TextBox 6">
             <a:extLst>
               <a:ext uri="{FF2B5EF4-FFF2-40B4-BE49-F238E27FC236}">
-                <a16:creationId xmlns:a16="http://schemas.microsoft.com/office/drawing/2014/main" id="{A2B1B55B-F1C6-0A10-1027-CFD8B7D83D79}"/>
+                <a16:creationId xmlns:a16="http://schemas.microsoft.com/office/drawing/2014/main" id="{B7028815-C171-2CEF-7C76-A8138A5CDC06}"/>
               </a:ext>
             </a:extLst>
           </p:cNvPr>
@@ -14305,22 +14512,51 @@
             </a:pPr>
             <a:r>
               <a:rPr lang="en-US" altLang="ko-KR" sz="2400" dirty="0"/>
-              <a:t>rotate : </a:t>
+              <a:t>skew : </a:t>
             </a:r>
             <a:r>
               <a:rPr lang="ko-KR" altLang="en-US" sz="2400" dirty="0"/>
-              <a:t>회전</a:t>
+              <a:t>기울기</a:t>
             </a:r>
             <a:endParaRPr lang="en-US" altLang="ko-KR" sz="2400" dirty="0"/>
           </a:p>
         </p:txBody>
       </p:sp>
-      <p:sp>
-        <p:nvSpPr>
-          <p:cNvPr id="10" name="TextBox 9">
-            <a:extLst>
-              <a:ext uri="{FF2B5EF4-FFF2-40B4-BE49-F238E27FC236}">
-                <a16:creationId xmlns:a16="http://schemas.microsoft.com/office/drawing/2014/main" id="{0E43F812-1055-34ED-1764-51CA5AAD8D34}"/>
+      <p:pic>
+        <p:nvPicPr>
+          <p:cNvPr id="12" name="그림 11">
+            <a:extLst>
+              <a:ext uri="{FF2B5EF4-FFF2-40B4-BE49-F238E27FC236}">
+                <a16:creationId xmlns:a16="http://schemas.microsoft.com/office/drawing/2014/main" id="{40174F42-5A06-BBCB-2633-071872223BA8}"/>
+              </a:ext>
+            </a:extLst>
+          </p:cNvPr>
+          <p:cNvPicPr>
+            <a:picLocks noChangeAspect="1"/>
+          </p:cNvPicPr>
+          <p:nvPr/>
+        </p:nvPicPr>
+        <p:blipFill rotWithShape="1">
+          <a:blip r:embed="rId3"/>
+          <a:srcRect r="12366"/>
+          <a:stretch/>
+        </p:blipFill>
+        <p:spPr>
+          <a:xfrm>
+            <a:off x="556185" y="1915517"/>
+            <a:ext cx="11079630" cy="4012476"/>
+          </a:xfrm>
+          <a:prstGeom prst="rect">
+            <a:avLst/>
+          </a:prstGeom>
+        </p:spPr>
+      </p:pic>
+      <p:sp>
+        <p:nvSpPr>
+          <p:cNvPr id="14" name="TextBox 13">
+            <a:extLst>
+              <a:ext uri="{FF2B5EF4-FFF2-40B4-BE49-F238E27FC236}">
+                <a16:creationId xmlns:a16="http://schemas.microsoft.com/office/drawing/2014/main" id="{A1F341D5-9ECF-0D34-E40E-D274ACAD45C7}"/>
               </a:ext>
             </a:extLst>
           </p:cNvPr>
@@ -14374,40 +14610,10 @@
           </a:p>
         </p:txBody>
       </p:sp>
-      <p:pic>
-        <p:nvPicPr>
-          <p:cNvPr id="12" name="그림 11">
-            <a:extLst>
-              <a:ext uri="{FF2B5EF4-FFF2-40B4-BE49-F238E27FC236}">
-                <a16:creationId xmlns:a16="http://schemas.microsoft.com/office/drawing/2014/main" id="{8127D8A1-0953-615B-45A2-D16B65AEB6CB}"/>
-              </a:ext>
-            </a:extLst>
-          </p:cNvPr>
-          <p:cNvPicPr>
-            <a:picLocks noChangeAspect="1"/>
-          </p:cNvPicPr>
-          <p:nvPr/>
-        </p:nvPicPr>
-        <p:blipFill>
-          <a:blip r:embed="rId3"/>
-          <a:stretch>
-            <a:fillRect/>
-          </a:stretch>
-        </p:blipFill>
-        <p:spPr>
-          <a:xfrm>
-            <a:off x="3201326" y="1179517"/>
-            <a:ext cx="7619074" cy="4714143"/>
-          </a:xfrm>
-          <a:prstGeom prst="rect">
-            <a:avLst/>
-          </a:prstGeom>
-        </p:spPr>
-      </p:pic>
     </p:spTree>
     <p:extLst>
       <p:ext uri="{BB962C8B-B14F-4D97-AF65-F5344CB8AC3E}">
-        <p14:creationId xmlns:p14="http://schemas.microsoft.com/office/powerpoint/2010/main" val="4116496482"/>
+        <p14:creationId xmlns:p14="http://schemas.microsoft.com/office/powerpoint/2010/main" val="374594887"/>
       </p:ext>
     </p:extLst>
   </p:cSld>

--- a/material/[SeSAC_YDP_6] 03_CSS_3.pptx
+++ b/material/[SeSAC_YDP_6] 03_CSS_3.pptx
@@ -5,7 +5,7 @@
     <p:sldMasterId id="2147483661" r:id="rId1"/>
   </p:sldMasterIdLst>
   <p:notesMasterIdLst>
-    <p:notesMasterId r:id="rId28"/>
+    <p:notesMasterId r:id="rId31"/>
   </p:notesMasterIdLst>
   <p:sldIdLst>
     <p:sldId id="675" r:id="rId2"/>
@@ -26,14 +26,17 @@
     <p:sldId id="687" r:id="rId17"/>
     <p:sldId id="693" r:id="rId18"/>
     <p:sldId id="314" r:id="rId19"/>
-    <p:sldId id="398" r:id="rId20"/>
-    <p:sldId id="317" r:id="rId21"/>
-    <p:sldId id="374" r:id="rId22"/>
-    <p:sldId id="375" r:id="rId23"/>
-    <p:sldId id="376" r:id="rId24"/>
-    <p:sldId id="330" r:id="rId25"/>
-    <p:sldId id="318" r:id="rId26"/>
-    <p:sldId id="319" r:id="rId27"/>
+    <p:sldId id="696" r:id="rId20"/>
+    <p:sldId id="695" r:id="rId21"/>
+    <p:sldId id="398" r:id="rId22"/>
+    <p:sldId id="694" r:id="rId23"/>
+    <p:sldId id="317" r:id="rId24"/>
+    <p:sldId id="374" r:id="rId25"/>
+    <p:sldId id="375" r:id="rId26"/>
+    <p:sldId id="376" r:id="rId27"/>
+    <p:sldId id="330" r:id="rId28"/>
+    <p:sldId id="318" r:id="rId29"/>
+    <p:sldId id="319" r:id="rId30"/>
   </p:sldIdLst>
   <p:sldSz cx="12192000" cy="6858000"/>
   <p:notesSz cx="6858000" cy="9144000"/>
@@ -222,7 +225,7 @@
           <a:p>
             <a:fld id="{00524019-D21D-4F04-AF43-2AEEE922364E}" type="datetimeFigureOut">
               <a:rPr lang="ko-KR" altLang="en-US" smtClean="0"/>
-              <a:t>2024-05-20</a:t>
+              <a:t>2024-05-24</a:t>
             </a:fld>
             <a:endParaRPr lang="ko-KR" altLang="en-US"/>
           </a:p>
@@ -1554,16 +1557,88 @@
           <a:lstStyle/>
           <a:p>
             <a:r>
-              <a:rPr lang="en-US" altLang="ko-KR" dirty="0"/>
+              <a:rPr lang="en-US" altLang="ko-KR" dirty="0" smtClean="0"/>
+              <a:t>Display</a:t>
+            </a:r>
+            <a:r>
+              <a:rPr lang="en-US" altLang="ko-KR" baseline="0" dirty="0" smtClean="0"/>
+              <a:t> </a:t>
+            </a:r>
+            <a:r>
+              <a:rPr lang="ko-KR" altLang="en-US" baseline="0" dirty="0" smtClean="0"/>
+              <a:t>속성은 </a:t>
+            </a:r>
+            <a:r>
+              <a:rPr lang="en-US" altLang="ko-KR" baseline="0" dirty="0" smtClean="0"/>
+              <a:t>HTML </a:t>
+            </a:r>
+            <a:r>
+              <a:rPr lang="ko-KR" altLang="en-US" baseline="0" dirty="0" smtClean="0"/>
+              <a:t>요소가 페이지에 어떻게 배치될지를 결정하는 아주 중요한 속성</a:t>
+            </a:r>
+            <a:endParaRPr lang="en-US" altLang="ko-KR" baseline="0" dirty="0" smtClean="0"/>
+          </a:p>
+          <a:p>
+            <a:r>
+              <a:rPr lang="ko-KR" altLang="en-US" baseline="0" dirty="0" smtClean="0"/>
+              <a:t>다양한 값이 있으며</a:t>
+            </a:r>
+            <a:r>
+              <a:rPr lang="en-US" altLang="ko-KR" baseline="0" dirty="0" smtClean="0"/>
+              <a:t>, </a:t>
+            </a:r>
+            <a:r>
+              <a:rPr lang="ko-KR" altLang="en-US" baseline="0" dirty="0" smtClean="0"/>
+              <a:t>이 값들에 따라 요소의 레이아웃 및 자식 요소의 배치가 크게 달라진다</a:t>
+            </a:r>
+            <a:r>
+              <a:rPr lang="en-US" altLang="ko-KR" baseline="0" dirty="0" smtClean="0"/>
+              <a:t>.</a:t>
+            </a:r>
+            <a:endParaRPr lang="en-US" altLang="ko-KR" dirty="0" smtClean="0"/>
+          </a:p>
+          <a:p>
+            <a:endParaRPr lang="en-US" altLang="ko-KR" dirty="0" smtClean="0"/>
+          </a:p>
+          <a:p>
+            <a:r>
+              <a:rPr lang="en-US" altLang="ko-KR" dirty="0" smtClean="0"/>
               <a:t>grid</a:t>
             </a:r>
             <a:r>
+              <a:rPr lang="ko-KR" altLang="en-US" dirty="0" smtClean="0"/>
+              <a:t> </a:t>
+            </a:r>
+            <a:r>
               <a:rPr lang="ko-KR" altLang="en-US" dirty="0"/>
-              <a:t> 는 지금 배우기에 너무 어지러우니 나중에 다시 만나요</a:t>
-            </a:r>
-            <a:r>
-              <a:rPr lang="en-US" altLang="ko-KR" dirty="0"/>
+              <a:t>는 지금 배우기에 너무 어지러우니 나중에 다시 만나요</a:t>
+            </a:r>
+            <a:r>
+              <a:rPr lang="en-US" altLang="ko-KR" dirty="0" smtClean="0"/>
               <a:t>!!</a:t>
+            </a:r>
+          </a:p>
+          <a:p>
+            <a:endParaRPr lang="en-US" altLang="ko-KR" dirty="0" smtClean="0"/>
+          </a:p>
+          <a:p>
+            <a:r>
+              <a:rPr lang="ko-KR" altLang="en-US" dirty="0" smtClean="0"/>
+              <a:t>코드 치러 </a:t>
+            </a:r>
+            <a:r>
+              <a:rPr lang="en-US" altLang="ko-KR" dirty="0" err="1" smtClean="0"/>
+              <a:t>rr</a:t>
+            </a:r>
+            <a:endParaRPr lang="en-US" altLang="ko-KR" dirty="0" smtClean="0"/>
+          </a:p>
+          <a:p>
+            <a:endParaRPr lang="en-US" altLang="ko-KR" dirty="0" smtClean="0"/>
+          </a:p>
+          <a:p>
+            <a:r>
+              <a:rPr lang="en-US" altLang="ko-KR" dirty="0" smtClean="0"/>
+              <a:t>Html 10</a:t>
             </a:r>
             <a:endParaRPr lang="ko-KR" altLang="en-US" dirty="0"/>
           </a:p>
@@ -1649,65 +1724,7 @@
           <a:bodyPr/>
           <a:lstStyle/>
           <a:p>
-            <a:r>
-              <a:rPr lang="ko-KR" altLang="en-US" dirty="0"/>
-              <a:t>요거는 수업 끝나고 만들어 볼 것</a:t>
-            </a:r>
-            <a:r>
-              <a:rPr lang="en-US" altLang="ko-KR" dirty="0"/>
-              <a:t>. </a:t>
-            </a:r>
-          </a:p>
-          <a:p>
-            <a:r>
-              <a:rPr lang="ko-KR" altLang="en-US" dirty="0"/>
-              <a:t>윤곽이 잡혀있는 </a:t>
-            </a:r>
-            <a:r>
-              <a:rPr lang="en-US" altLang="ko-KR" dirty="0"/>
-              <a:t>html</a:t>
-            </a:r>
-            <a:r>
-              <a:rPr lang="ko-KR" altLang="en-US" dirty="0"/>
-              <a:t>파일과  </a:t>
-            </a:r>
-            <a:r>
-              <a:rPr lang="en-US" altLang="ko-KR" dirty="0" err="1"/>
-              <a:t>css</a:t>
-            </a:r>
-            <a:r>
-              <a:rPr lang="ko-KR" altLang="en-US" dirty="0"/>
-              <a:t>파일을 드릴 것이니 미리 풀지 말라</a:t>
-            </a:r>
-            <a:r>
-              <a:rPr lang="en-US" altLang="ko-KR" dirty="0"/>
-              <a:t>~~~~~~</a:t>
-            </a:r>
-          </a:p>
-          <a:p>
-            <a:endParaRPr lang="en-US" altLang="ko-KR" dirty="0"/>
-          </a:p>
-          <a:p>
-            <a:r>
-              <a:rPr lang="ko-KR" altLang="en-US" dirty="0"/>
-              <a:t>수업준비</a:t>
-            </a:r>
-            <a:r>
-              <a:rPr lang="en-US" altLang="ko-KR" dirty="0"/>
-              <a:t>/230705/practice/header.html </a:t>
-            </a:r>
-            <a:r>
-              <a:rPr lang="ko-KR" altLang="en-US" dirty="0"/>
-              <a:t>과 </a:t>
-            </a:r>
-            <a:r>
-              <a:rPr lang="en-US" altLang="ko-KR" dirty="0"/>
-              <a:t>header.css </a:t>
-            </a:r>
-            <a:r>
-              <a:rPr lang="ko-KR" altLang="en-US" dirty="0"/>
-              <a:t>전달하기</a:t>
-            </a:r>
+            <a:endParaRPr lang="ko-KR" altLang="en-US" dirty="0"/>
           </a:p>
         </p:txBody>
       </p:sp>
@@ -1718,15 +1735,15 @@
             <a:spLocks noGrp="1"/>
           </p:cNvSpPr>
           <p:nvPr>
-            <p:ph type="sldNum" sz="quarter" idx="10"/>
-          </p:nvPr>
-        </p:nvSpPr>
-        <p:spPr/>
-        <p:txBody>
-          <a:bodyPr/>
-          <a:lstStyle/>
-          <a:p>
-            <a:fld id="{A55743F5-9E7E-4395-8C78-F5A3CC3D6840}" type="slidenum">
+            <p:ph type="sldNum" sz="quarter" idx="5"/>
+          </p:nvPr>
+        </p:nvSpPr>
+        <p:spPr/>
+        <p:txBody>
+          <a:bodyPr/>
+          <a:lstStyle/>
+          <a:p>
+            <a:fld id="{C09E5BFC-1559-42F1-8940-AB342D56BF02}" type="slidenum">
               <a:rPr lang="ko-KR" altLang="en-US" smtClean="0"/>
               <a:t>19</a:t>
             </a:fld>
@@ -1737,7 +1754,7 @@
     </p:spTree>
     <p:extLst>
       <p:ext uri="{BB962C8B-B14F-4D97-AF65-F5344CB8AC3E}">
-        <p14:creationId xmlns:p14="http://schemas.microsoft.com/office/powerpoint/2010/main" val="864912781"/>
+        <p14:creationId xmlns:p14="http://schemas.microsoft.com/office/powerpoint/2010/main" val="164527025"/>
       </p:ext>
     </p:extLst>
   </p:cSld>
@@ -1791,6 +1808,25 @@
           <a:bodyPr/>
           <a:lstStyle/>
           <a:p>
+            <a:r>
+              <a:rPr lang="ko-KR" altLang="en-US" dirty="0" smtClean="0"/>
+              <a:t>코드</a:t>
+            </a:r>
+            <a:r>
+              <a:rPr lang="ko-KR" altLang="en-US" baseline="0" dirty="0" smtClean="0"/>
+              <a:t> 치러 </a:t>
+            </a:r>
+            <a:r>
+              <a:rPr lang="ko-KR" altLang="en-US" baseline="0" dirty="0" err="1" smtClean="0"/>
+              <a:t>ㄱㄱ</a:t>
+            </a:r>
+            <a:endParaRPr lang="en-US" altLang="ko-KR" baseline="0" dirty="0" smtClean="0"/>
+          </a:p>
+          <a:p>
+            <a:r>
+              <a:rPr lang="en-US" altLang="ko-KR" baseline="0" dirty="0" smtClean="0"/>
+              <a:t>Html11 </a:t>
+            </a:r>
             <a:endParaRPr lang="ko-KR" altLang="en-US" dirty="0"/>
           </a:p>
         </p:txBody>
@@ -1802,17 +1838,17 @@
             <a:spLocks noGrp="1"/>
           </p:cNvSpPr>
           <p:nvPr>
-            <p:ph type="sldNum" sz="quarter" idx="5"/>
-          </p:nvPr>
-        </p:nvSpPr>
-        <p:spPr/>
-        <p:txBody>
-          <a:bodyPr/>
-          <a:lstStyle/>
-          <a:p>
-            <a:fld id="{C09E5BFC-1559-42F1-8940-AB342D56BF02}" type="slidenum">
+            <p:ph type="sldNum" sz="quarter" idx="10"/>
+          </p:nvPr>
+        </p:nvSpPr>
+        <p:spPr/>
+        <p:txBody>
+          <a:bodyPr/>
+          <a:lstStyle/>
+          <a:p>
+            <a:fld id="{FA70C596-B40F-4F83-8FE4-5CF99F6F6723}" type="slidenum">
               <a:rPr lang="ko-KR" altLang="en-US" smtClean="0"/>
-              <a:t>21</a:t>
+              <a:t>20</a:t>
             </a:fld>
             <a:endParaRPr lang="ko-KR" altLang="en-US"/>
           </a:p>
@@ -1821,7 +1857,7 @@
     </p:spTree>
     <p:extLst>
       <p:ext uri="{BB962C8B-B14F-4D97-AF65-F5344CB8AC3E}">
-        <p14:creationId xmlns:p14="http://schemas.microsoft.com/office/powerpoint/2010/main" val="1031924123"/>
+        <p14:creationId xmlns:p14="http://schemas.microsoft.com/office/powerpoint/2010/main" val="1127114302"/>
       </p:ext>
     </p:extLst>
   </p:cSld>
@@ -1877,126 +1913,72 @@
           <a:p>
             <a:r>
               <a:rPr lang="ko-KR" altLang="en-US" dirty="0"/>
-              <a:t>우리가 만들어주는 이름</a:t>
+              <a:t>요거는 수업 끝나고 만들어 볼 것</a:t>
+            </a:r>
+            <a:r>
+              <a:rPr lang="en-US" altLang="ko-KR" dirty="0"/>
+              <a:t>. </a:t>
+            </a:r>
+            <a:r>
+              <a:rPr lang="ko-KR" altLang="en-US" dirty="0" smtClean="0"/>
+              <a:t>과제</a:t>
+            </a:r>
+            <a:r>
+              <a:rPr lang="en-US" altLang="ko-KR" dirty="0" smtClean="0"/>
+              <a:t>!</a:t>
             </a:r>
             <a:endParaRPr lang="en-US" altLang="ko-KR" dirty="0"/>
           </a:p>
           <a:p>
             <a:r>
               <a:rPr lang="ko-KR" altLang="en-US" dirty="0"/>
-              <a:t>지속시간 </a:t>
+              <a:t>윤곽이 잡혀있는 </a:t>
             </a:r>
             <a:r>
               <a:rPr lang="en-US" altLang="ko-KR" dirty="0"/>
-              <a:t>~s</a:t>
-            </a:r>
-            <a:r>
-              <a:rPr lang="en-US" altLang="ko-KR" baseline="0" dirty="0"/>
-              <a:t> </a:t>
-            </a:r>
-            <a:r>
-              <a:rPr lang="ko-KR" altLang="en-US" baseline="0" dirty="0"/>
-              <a:t>의 몇 초 형태</a:t>
-            </a:r>
-            <a:endParaRPr lang="en-US" altLang="ko-KR" baseline="0" dirty="0"/>
-          </a:p>
-          <a:p>
-            <a:r>
-              <a:rPr lang="ko-KR" altLang="en-US" baseline="0" dirty="0"/>
-              <a:t>진행 형태 </a:t>
-            </a:r>
-            <a:r>
-              <a:rPr lang="en-US" altLang="ko-KR" baseline="0" dirty="0"/>
-              <a:t>: </a:t>
-            </a:r>
-            <a:r>
-              <a:rPr lang="ko-KR" altLang="en-US" baseline="0" dirty="0"/>
-              <a:t>시간 함수</a:t>
-            </a:r>
-            <a:r>
-              <a:rPr lang="en-US" altLang="ko-KR" baseline="0" dirty="0"/>
-              <a:t>, transition </a:t>
-            </a:r>
-            <a:r>
-              <a:rPr lang="ko-KR" altLang="en-US" baseline="0" dirty="0"/>
-              <a:t>의 </a:t>
-            </a:r>
-            <a:r>
-              <a:rPr lang="en-US" altLang="ko-KR" baseline="0" dirty="0"/>
-              <a:t>timing-function</a:t>
-            </a:r>
-            <a:r>
-              <a:rPr lang="ko-KR" altLang="en-US" baseline="0" dirty="0"/>
-              <a:t>과 동일</a:t>
-            </a:r>
-            <a:r>
-              <a:rPr lang="en-US" altLang="ko-KR" baseline="0" dirty="0"/>
-              <a:t>. </a:t>
-            </a:r>
-            <a:r>
-              <a:rPr lang="en-US" altLang="ko-KR" baseline="0" dirty="0" err="1"/>
-              <a:t>animatio</a:t>
-            </a:r>
-            <a:r>
-              <a:rPr lang="ko-KR" altLang="en-US" baseline="0" dirty="0"/>
-              <a:t>의 길이는 </a:t>
-            </a:r>
-            <a:r>
-              <a:rPr lang="en-US" altLang="ko-KR" baseline="0" dirty="0" err="1"/>
-              <a:t>transitio</a:t>
-            </a:r>
-            <a:r>
-              <a:rPr lang="ko-KR" altLang="en-US" baseline="0" dirty="0"/>
-              <a:t>과 다르게 지속 시간이 긴 경우가 많기 때문에 움직임이 </a:t>
-            </a:r>
-            <a:r>
-              <a:rPr lang="en-US" altLang="ko-KR" baseline="0" dirty="0"/>
-              <a:t>timing </a:t>
-            </a:r>
-            <a:r>
-              <a:rPr lang="en-US" altLang="ko-KR" baseline="0" dirty="0" err="1"/>
-              <a:t>functio</a:t>
-            </a:r>
-            <a:r>
-              <a:rPr lang="ko-KR" altLang="en-US" baseline="0" dirty="0"/>
-              <a:t>에 따라서 바뀐다</a:t>
-            </a:r>
-            <a:r>
-              <a:rPr lang="en-US" altLang="ko-KR" baseline="0" dirty="0"/>
-              <a:t>. </a:t>
-            </a:r>
-            <a:r>
-              <a:rPr lang="en-US" altLang="ko-KR" baseline="0" dirty="0" err="1"/>
-              <a:t>animaitio</a:t>
-            </a:r>
-            <a:r>
-              <a:rPr lang="ko-KR" altLang="en-US" baseline="0" dirty="0"/>
-              <a:t>에서의 </a:t>
-            </a:r>
-            <a:r>
-              <a:rPr lang="en-US" altLang="ko-KR" baseline="0" dirty="0"/>
-              <a:t>ease linear </a:t>
-            </a:r>
-            <a:r>
-              <a:rPr lang="ko-KR" altLang="en-US" baseline="0" dirty="0"/>
-              <a:t>등의 시간 함수는 꽤 중요한 역할을 함</a:t>
-            </a:r>
-            <a:endParaRPr lang="en-US" altLang="ko-KR" baseline="0" dirty="0"/>
-          </a:p>
-          <a:p>
-            <a:r>
-              <a:rPr lang="ko-KR" altLang="en-US" dirty="0" err="1"/>
-              <a:t>반복횟수</a:t>
+              <a:t>html</a:t>
             </a:r>
             <a:r>
               <a:rPr lang="ko-KR" altLang="en-US" dirty="0"/>
-              <a:t> </a:t>
+              <a:t>파일과  </a:t>
+            </a:r>
+            <a:r>
+              <a:rPr lang="en-US" altLang="ko-KR" dirty="0" err="1"/>
+              <a:t>css</a:t>
+            </a:r>
+            <a:r>
+              <a:rPr lang="ko-KR" altLang="en-US" dirty="0"/>
+              <a:t>파일을 드릴 것이니 미리 풀지 말라</a:t>
             </a:r>
             <a:r>
               <a:rPr lang="en-US" altLang="ko-KR" dirty="0"/>
-              <a:t>(iteration-count)</a:t>
-            </a:r>
-            <a:endParaRPr lang="ko-KR" altLang="en-US" dirty="0"/>
+              <a:t>~~~~~~</a:t>
+            </a:r>
+          </a:p>
+          <a:p>
+            <a:endParaRPr lang="en-US" altLang="ko-KR" dirty="0"/>
+          </a:p>
+          <a:p>
+            <a:r>
+              <a:rPr lang="ko-KR" altLang="en-US" dirty="0"/>
+              <a:t>수업준비</a:t>
+            </a:r>
+            <a:r>
+              <a:rPr lang="en-US" altLang="ko-KR" dirty="0"/>
+              <a:t>/230705/practice/header.html </a:t>
+            </a:r>
+            <a:r>
+              <a:rPr lang="ko-KR" altLang="en-US" dirty="0"/>
+              <a:t>과 </a:t>
+            </a:r>
+            <a:r>
+              <a:rPr lang="en-US" altLang="ko-KR" dirty="0"/>
+              <a:t>header.css </a:t>
+            </a:r>
+            <a:r>
+              <a:rPr lang="ko-KR" altLang="en-US" dirty="0"/>
+              <a:t>전달하기</a:t>
+            </a:r>
           </a:p>
         </p:txBody>
       </p:sp>
@@ -2015,19 +1997,18 @@
           <a:bodyPr/>
           <a:lstStyle/>
           <a:p>
-            <a:fld id="{B4FAD15D-3FC6-4EBB-8A1D-F20C53EB7780}" type="slidenum">
+            <a:fld id="{A55743F5-9E7E-4395-8C78-F5A3CC3D6840}" type="slidenum">
               <a:rPr lang="ko-KR" altLang="en-US" smtClean="0"/>
-              <a:pPr/>
-              <a:t>22</a:t>
+              <a:t>21</a:t>
             </a:fld>
-            <a:endParaRPr lang="ko-KR" altLang="en-US" dirty="0"/>
+            <a:endParaRPr lang="ko-KR" altLang="en-US"/>
           </a:p>
         </p:txBody>
       </p:sp>
     </p:spTree>
     <p:extLst>
       <p:ext uri="{BB962C8B-B14F-4D97-AF65-F5344CB8AC3E}">
-        <p14:creationId xmlns:p14="http://schemas.microsoft.com/office/powerpoint/2010/main" val="2638017959"/>
+        <p14:creationId xmlns:p14="http://schemas.microsoft.com/office/powerpoint/2010/main" val="864912781"/>
       </p:ext>
     </p:extLst>
   </p:cSld>
@@ -2082,59 +2063,37 @@
           <a:lstStyle/>
           <a:p>
             <a:r>
-              <a:rPr lang="ko-KR" altLang="en-US" dirty="0" err="1"/>
-              <a:t>파란글씨</a:t>
-            </a:r>
-            <a:r>
-              <a:rPr lang="ko-KR" altLang="en-US" dirty="0"/>
-              <a:t> 필수 속성 </a:t>
-            </a:r>
-            <a:endParaRPr lang="en-US" altLang="ko-KR" dirty="0"/>
-          </a:p>
-          <a:p>
-            <a:r>
-              <a:rPr lang="ko-KR" altLang="en-US" dirty="0"/>
-              <a:t>까만 글씨 생략 가능 </a:t>
-            </a:r>
-            <a:endParaRPr lang="en-US" altLang="ko-KR" dirty="0"/>
-          </a:p>
-          <a:p>
-            <a:r>
-              <a:rPr lang="en-US" altLang="ko-KR" dirty="0"/>
-              <a:t>Timing-</a:t>
-            </a:r>
-            <a:r>
-              <a:rPr lang="en-US" altLang="ko-KR" dirty="0" err="1"/>
-              <a:t>funciton</a:t>
-            </a:r>
-            <a:r>
-              <a:rPr lang="ko-KR" altLang="en-US" dirty="0"/>
-              <a:t>은 보통 써주지만 </a:t>
-            </a:r>
-            <a:r>
-              <a:rPr lang="en-US" altLang="ko-KR" dirty="0"/>
-              <a:t>delay</a:t>
-            </a:r>
-            <a:r>
-              <a:rPr lang="ko-KR" altLang="en-US" dirty="0"/>
-              <a:t>랑 </a:t>
-            </a:r>
-            <a:r>
-              <a:rPr lang="en-US" altLang="ko-KR" dirty="0"/>
-              <a:t>direction</a:t>
-            </a:r>
-            <a:r>
-              <a:rPr lang="ko-KR" altLang="en-US" dirty="0"/>
-              <a:t>은 안써주는 경우가 </a:t>
-            </a:r>
-            <a:r>
-              <a:rPr lang="ko-KR" altLang="en-US" dirty="0" err="1"/>
-              <a:t>만타</a:t>
-            </a:r>
-            <a:r>
-              <a:rPr lang="en-US" altLang="ko-KR" dirty="0"/>
-              <a:t>!</a:t>
-            </a:r>
+              <a:rPr lang="en-US" altLang="ko-KR" dirty="0" smtClean="0"/>
+              <a:t>Animation </a:t>
+            </a:r>
+            <a:r>
+              <a:rPr lang="ko-KR" altLang="en-US" dirty="0" smtClean="0"/>
+              <a:t>속성은 요소에 애니메이션 효과를 적용할 수 있게 함</a:t>
+            </a:r>
+            <a:r>
+              <a:rPr lang="en-US" altLang="ko-KR" dirty="0" smtClean="0"/>
+              <a:t>.</a:t>
+            </a:r>
+          </a:p>
+          <a:p>
+            <a:r>
+              <a:rPr lang="ko-KR" altLang="en-US" dirty="0" smtClean="0"/>
+              <a:t>요소의 스타일을 점진적으로 변화시켜주는 기능으로 다양한 시각적 효과를 </a:t>
+            </a:r>
+            <a:r>
+              <a:rPr lang="ko-KR" altLang="en-US" dirty="0" err="1" smtClean="0"/>
+              <a:t>구현할수</a:t>
+            </a:r>
+            <a:r>
+              <a:rPr lang="ko-KR" altLang="en-US" dirty="0" smtClean="0"/>
+              <a:t> 있음</a:t>
+            </a:r>
+            <a:r>
+              <a:rPr lang="en-US" altLang="ko-KR" dirty="0" smtClean="0"/>
+              <a:t>.</a:t>
+            </a:r>
+          </a:p>
+          <a:p>
             <a:endParaRPr lang="ko-KR" altLang="en-US" dirty="0"/>
           </a:p>
         </p:txBody>
@@ -2146,17 +2105,17 @@
             <a:spLocks noGrp="1"/>
           </p:cNvSpPr>
           <p:nvPr>
-            <p:ph type="sldNum" sz="quarter" idx="10"/>
-          </p:nvPr>
-        </p:nvSpPr>
-        <p:spPr/>
-        <p:txBody>
-          <a:bodyPr/>
-          <a:lstStyle/>
-          <a:p>
-            <a:fld id="{B4FAD15D-3FC6-4EBB-8A1D-F20C53EB7780}" type="slidenum">
+            <p:ph type="sldNum" sz="quarter" idx="5"/>
+          </p:nvPr>
+        </p:nvSpPr>
+        <p:spPr/>
+        <p:txBody>
+          <a:bodyPr/>
+          <a:lstStyle/>
+          <a:p>
+            <a:fld id="{C09E5BFC-1559-42F1-8940-AB342D56BF02}" type="slidenum">
               <a:rPr lang="ko-KR" altLang="en-US" smtClean="0"/>
-              <a:t>23</a:t>
+              <a:t>22</a:t>
             </a:fld>
             <a:endParaRPr lang="ko-KR" altLang="en-US"/>
           </a:p>
@@ -2165,7 +2124,7 @@
     </p:spTree>
     <p:extLst>
       <p:ext uri="{BB962C8B-B14F-4D97-AF65-F5344CB8AC3E}">
-        <p14:creationId xmlns:p14="http://schemas.microsoft.com/office/powerpoint/2010/main" val="2277054390"/>
+        <p14:creationId xmlns:p14="http://schemas.microsoft.com/office/powerpoint/2010/main" val="524032485"/>
       </p:ext>
     </p:extLst>
   </p:cSld>
@@ -2303,410 +2262,12 @@
           <a:bodyPr/>
           <a:lstStyle/>
           <a:p>
-            <a:pPr marL="0" marR="0" lvl="0" indent="0" algn="l" defTabSz="914400" rtl="0" eaLnBrk="1" fontAlgn="auto" latinLnBrk="1" hangingPunct="1">
-              <a:lnSpc>
-                <a:spcPct val="100000"/>
-              </a:lnSpc>
-              <a:spcBef>
-                <a:spcPts val="0"/>
-              </a:spcBef>
-              <a:spcAft>
-                <a:spcPts val="0"/>
-              </a:spcAft>
-              <a:buClrTx/>
-              <a:buSzTx/>
-              <a:buFontTx/>
-              <a:buNone/>
-              <a:tabLst/>
-              <a:defRPr/>
-            </a:pPr>
-            <a:r>
-              <a:rPr lang="en-US" altLang="ko-KR" dirty="0"/>
-              <a:t>kdt3rd-workspace/03_css/</a:t>
-            </a:r>
-            <a:r>
-              <a:rPr lang="en-US" altLang="ko-KR" b="1" dirty="0"/>
-              <a:t>index10.html </a:t>
-            </a:r>
-          </a:p>
-          <a:p>
-            <a:pPr marL="0" marR="0" lvl="0" indent="0" algn="l" defTabSz="914400" rtl="0" eaLnBrk="1" fontAlgn="auto" latinLnBrk="1" hangingPunct="1">
-              <a:lnSpc>
-                <a:spcPct val="100000"/>
-              </a:lnSpc>
-              <a:spcBef>
-                <a:spcPts val="0"/>
-              </a:spcBef>
-              <a:spcAft>
-                <a:spcPts val="0"/>
-              </a:spcAft>
-              <a:buClrTx/>
-              <a:buSzTx/>
-              <a:buFontTx/>
-              <a:buNone/>
-              <a:tabLst/>
-              <a:defRPr/>
-            </a:pPr>
-            <a:r>
-              <a:rPr lang="en-US" altLang="ko-KR" dirty="0"/>
-              <a:t>kdt3rd-workspace/03_css/</a:t>
-            </a:r>
-            <a:r>
-              <a:rPr lang="en-US" altLang="ko-KR" b="1" dirty="0"/>
-              <a:t>index10.css</a:t>
-            </a:r>
-          </a:p>
-          <a:p>
-            <a:pPr marL="0" marR="0" lvl="0" indent="0" algn="l" defTabSz="914400" rtl="0" eaLnBrk="1" fontAlgn="auto" latinLnBrk="1" hangingPunct="1">
-              <a:lnSpc>
-                <a:spcPct val="100000"/>
-              </a:lnSpc>
-              <a:spcBef>
-                <a:spcPts val="0"/>
-              </a:spcBef>
-              <a:spcAft>
-                <a:spcPts val="0"/>
-              </a:spcAft>
-              <a:buClrTx/>
-              <a:buSzTx/>
-              <a:buFontTx/>
-              <a:buNone/>
-              <a:tabLst/>
-              <a:defRPr/>
-            </a:pPr>
-            <a:endParaRPr lang="en-US" altLang="ko-KR" b="1" dirty="0"/>
-          </a:p>
-          <a:p>
-            <a:pPr marL="0" marR="0" lvl="0" indent="0" algn="l" defTabSz="914400" rtl="0" eaLnBrk="1" fontAlgn="auto" latinLnBrk="1" hangingPunct="1">
-              <a:lnSpc>
-                <a:spcPct val="100000"/>
-              </a:lnSpc>
-              <a:spcBef>
-                <a:spcPts val="0"/>
-              </a:spcBef>
-              <a:spcAft>
-                <a:spcPts val="0"/>
-              </a:spcAft>
-              <a:buClrTx/>
-              <a:buSzTx/>
-              <a:buFontTx/>
-              <a:buNone/>
-              <a:tabLst/>
-              <a:defRPr/>
-            </a:pPr>
-            <a:endParaRPr lang="en-US" altLang="ko-KR" b="1" dirty="0"/>
-          </a:p>
-          <a:p>
-            <a:pPr marL="0" marR="0" lvl="0" indent="0" algn="l" defTabSz="914400" rtl="0" eaLnBrk="1" fontAlgn="auto" latinLnBrk="1" hangingPunct="1">
-              <a:lnSpc>
-                <a:spcPct val="100000"/>
-              </a:lnSpc>
-              <a:spcBef>
-                <a:spcPts val="0"/>
-              </a:spcBef>
-              <a:spcAft>
-                <a:spcPts val="0"/>
-              </a:spcAft>
-              <a:buClrTx/>
-              <a:buSzTx/>
-              <a:buFontTx/>
-              <a:buNone/>
-              <a:tabLst/>
-              <a:defRPr/>
-            </a:pPr>
-            <a:r>
-              <a:rPr lang="en-US" altLang="ko-KR" b="1" dirty="0"/>
-              <a:t>=============================</a:t>
-            </a:r>
-          </a:p>
-          <a:p>
-            <a:pPr marL="0" marR="0" lvl="0" indent="0" algn="l" defTabSz="914400" rtl="0" eaLnBrk="1" fontAlgn="auto" latinLnBrk="1" hangingPunct="1">
-              <a:lnSpc>
-                <a:spcPct val="100000"/>
-              </a:lnSpc>
-              <a:spcBef>
-                <a:spcPts val="0"/>
-              </a:spcBef>
-              <a:spcAft>
-                <a:spcPts val="0"/>
-              </a:spcAft>
-              <a:buClrTx/>
-              <a:buSzTx/>
-              <a:buFontTx/>
-              <a:buNone/>
-              <a:tabLst/>
-              <a:defRPr/>
-            </a:pPr>
-            <a:r>
-              <a:rPr lang="ko-KR" altLang="en-US" b="1" dirty="0"/>
-              <a:t>다음 페이지 </a:t>
-            </a:r>
-            <a:r>
-              <a:rPr lang="en-US" altLang="ko-KR" b="1" dirty="0"/>
-              <a:t>&gt; </a:t>
-            </a:r>
-            <a:r>
-              <a:rPr lang="ko-KR" altLang="en-US" b="1" dirty="0"/>
-              <a:t>실습 </a:t>
-            </a:r>
-            <a:r>
-              <a:rPr lang="en-US" altLang="ko-KR" b="1" dirty="0"/>
-              <a:t>10</a:t>
-            </a:r>
-          </a:p>
-          <a:p>
-            <a:pPr marL="0" marR="0" lvl="0" indent="0" algn="l" defTabSz="914400" rtl="0" eaLnBrk="1" fontAlgn="auto" latinLnBrk="1" hangingPunct="1">
-              <a:lnSpc>
-                <a:spcPct val="100000"/>
-              </a:lnSpc>
-              <a:spcBef>
-                <a:spcPts val="0"/>
-              </a:spcBef>
-              <a:spcAft>
-                <a:spcPts val="0"/>
-              </a:spcAft>
-              <a:buClrTx/>
-              <a:buSzTx/>
-              <a:buFontTx/>
-              <a:buNone/>
-              <a:tabLst/>
-              <a:defRPr/>
-            </a:pPr>
-            <a:r>
-              <a:rPr lang="en-US" altLang="ko-KR" dirty="0"/>
-              <a:t>kdt3rd-workspace/03_css/</a:t>
-            </a:r>
-            <a:r>
-              <a:rPr lang="en-US" altLang="ko-KR" b="1" dirty="0"/>
-              <a:t>practice10.html </a:t>
-            </a:r>
-          </a:p>
-          <a:p>
-            <a:pPr marL="0" marR="0" lvl="0" indent="0" algn="l" defTabSz="914400" rtl="0" eaLnBrk="1" fontAlgn="auto" latinLnBrk="1" hangingPunct="1">
-              <a:lnSpc>
-                <a:spcPct val="100000"/>
-              </a:lnSpc>
-              <a:spcBef>
-                <a:spcPts val="0"/>
-              </a:spcBef>
-              <a:spcAft>
-                <a:spcPts val="0"/>
-              </a:spcAft>
-              <a:buClrTx/>
-              <a:buSzTx/>
-              <a:buFontTx/>
-              <a:buNone/>
-              <a:tabLst/>
-              <a:defRPr/>
-            </a:pPr>
-            <a:r>
-              <a:rPr lang="en-US" altLang="ko-KR" dirty="0"/>
-              <a:t>kdt3rd-workspace/03_css/</a:t>
-            </a:r>
-            <a:r>
-              <a:rPr lang="en-US" altLang="ko-KR" b="1" dirty="0"/>
-              <a:t>practice10.css</a:t>
-            </a:r>
-          </a:p>
-          <a:p>
-            <a:pPr marL="0" marR="0" lvl="0" indent="0" algn="l" defTabSz="914400" rtl="0" eaLnBrk="1" fontAlgn="auto" latinLnBrk="1" hangingPunct="1">
-              <a:lnSpc>
-                <a:spcPct val="100000"/>
-              </a:lnSpc>
-              <a:spcBef>
-                <a:spcPts val="0"/>
-              </a:spcBef>
-              <a:spcAft>
-                <a:spcPts val="0"/>
-              </a:spcAft>
-              <a:buClrTx/>
-              <a:buSzTx/>
-              <a:buFontTx/>
-              <a:buNone/>
-              <a:tabLst/>
-              <a:defRPr/>
-            </a:pPr>
-            <a:endParaRPr lang="en-US" altLang="ko-KR" b="1" dirty="0"/>
-          </a:p>
-          <a:p>
-            <a:pPr marL="0" marR="0" lvl="0" indent="0" algn="l" defTabSz="914400" rtl="0" eaLnBrk="1" fontAlgn="auto" latinLnBrk="1" hangingPunct="1">
-              <a:lnSpc>
-                <a:spcPct val="100000"/>
-              </a:lnSpc>
-              <a:spcBef>
-                <a:spcPts val="0"/>
-              </a:spcBef>
-              <a:spcAft>
-                <a:spcPts val="0"/>
-              </a:spcAft>
-              <a:buClrTx/>
-              <a:buSzTx/>
-              <a:buFontTx/>
-              <a:buNone/>
-              <a:tabLst/>
-              <a:defRPr/>
-            </a:pPr>
-            <a:r>
-              <a:rPr lang="en-US" altLang="ko-KR" b="1" dirty="0"/>
-              <a:t>=============================</a:t>
-            </a:r>
-          </a:p>
-          <a:p>
-            <a:pPr marL="0" marR="0" lvl="0" indent="0" algn="l" defTabSz="914400" rtl="0" eaLnBrk="1" fontAlgn="auto" latinLnBrk="1" hangingPunct="1">
-              <a:lnSpc>
-                <a:spcPct val="100000"/>
-              </a:lnSpc>
-              <a:spcBef>
-                <a:spcPts val="0"/>
-              </a:spcBef>
-              <a:spcAft>
-                <a:spcPts val="0"/>
-              </a:spcAft>
-              <a:buClrTx/>
-              <a:buSzTx/>
-              <a:buFontTx/>
-              <a:buNone/>
-              <a:tabLst/>
-              <a:defRPr/>
-            </a:pPr>
-            <a:r>
-              <a:rPr lang="ko-KR" altLang="en-US" b="1" dirty="0"/>
-              <a:t>다음 페이지 </a:t>
-            </a:r>
-            <a:r>
-              <a:rPr lang="en-US" altLang="ko-KR" b="1" dirty="0"/>
-              <a:t>&gt; </a:t>
-            </a:r>
-            <a:r>
-              <a:rPr lang="ko-KR" altLang="en-US" b="1" dirty="0"/>
-              <a:t>실습 </a:t>
-            </a:r>
-            <a:r>
-              <a:rPr lang="en-US" altLang="ko-KR" b="1" dirty="0"/>
-              <a:t>11</a:t>
-            </a:r>
-          </a:p>
-          <a:p>
-            <a:pPr marL="0" marR="0" lvl="0" indent="0" algn="l" defTabSz="914400" rtl="0" eaLnBrk="1" fontAlgn="auto" latinLnBrk="1" hangingPunct="1">
-              <a:lnSpc>
-                <a:spcPct val="100000"/>
-              </a:lnSpc>
-              <a:spcBef>
-                <a:spcPts val="0"/>
-              </a:spcBef>
-              <a:spcAft>
-                <a:spcPts val="0"/>
-              </a:spcAft>
-              <a:buClrTx/>
-              <a:buSzTx/>
-              <a:buFontTx/>
-              <a:buNone/>
-              <a:tabLst/>
-              <a:defRPr/>
-            </a:pPr>
-            <a:r>
-              <a:rPr lang="en-US" altLang="ko-KR" dirty="0"/>
-              <a:t>kdt3rd-workspace/03_css/</a:t>
-            </a:r>
-            <a:r>
-              <a:rPr lang="en-US" altLang="ko-KR" b="1" dirty="0"/>
-              <a:t>practice11.html </a:t>
-            </a:r>
-          </a:p>
-          <a:p>
-            <a:pPr marL="0" marR="0" lvl="0" indent="0" algn="l" defTabSz="914400" rtl="0" eaLnBrk="1" fontAlgn="auto" latinLnBrk="1" hangingPunct="1">
-              <a:lnSpc>
-                <a:spcPct val="100000"/>
-              </a:lnSpc>
-              <a:spcBef>
-                <a:spcPts val="0"/>
-              </a:spcBef>
-              <a:spcAft>
-                <a:spcPts val="0"/>
-              </a:spcAft>
-              <a:buClrTx/>
-              <a:buSzTx/>
-              <a:buFontTx/>
-              <a:buNone/>
-              <a:tabLst/>
-              <a:defRPr/>
-            </a:pPr>
-            <a:r>
-              <a:rPr lang="en-US" altLang="ko-KR" dirty="0"/>
-              <a:t>kdt3rd-workspace/03_css</a:t>
-            </a:r>
-            <a:r>
-              <a:rPr lang="en-US" altLang="ko-KR"/>
-              <a:t>/</a:t>
-            </a:r>
-            <a:r>
-              <a:rPr lang="en-US" altLang="ko-KR" b="1"/>
-              <a:t>practice11.</a:t>
-            </a:r>
-            <a:r>
-              <a:rPr lang="en-US" altLang="ko-KR" b="1" dirty="0"/>
-              <a:t>css</a:t>
-            </a:r>
-            <a:endParaRPr lang="en-US" altLang="ko-KR" dirty="0"/>
-          </a:p>
-          <a:p>
-            <a:pPr marL="0" marR="0" lvl="0" indent="0" algn="l" defTabSz="914400" rtl="0" eaLnBrk="1" fontAlgn="auto" latinLnBrk="1" hangingPunct="1">
-              <a:lnSpc>
-                <a:spcPct val="100000"/>
-              </a:lnSpc>
-              <a:spcBef>
-                <a:spcPts val="0"/>
-              </a:spcBef>
-              <a:spcAft>
-                <a:spcPts val="0"/>
-              </a:spcAft>
-              <a:buClrTx/>
-              <a:buSzTx/>
-              <a:buFontTx/>
-              <a:buNone/>
-              <a:tabLst/>
-              <a:defRPr/>
-            </a:pPr>
-            <a:endParaRPr lang="en-US" altLang="ko-KR" dirty="0"/>
-          </a:p>
-          <a:p>
+            <a:r>
+              <a:rPr lang="ko-KR" altLang="en-US" dirty="0" smtClean="0"/>
+              <a:t>구성 모양</a:t>
+            </a:r>
             <a:endParaRPr lang="ko-KR" altLang="en-US" dirty="0"/>
           </a:p>
-          <a:p>
-            <a:endParaRPr lang="ko-KR" altLang="en-US" dirty="0"/>
-          </a:p>
-          <a:p>
-            <a:pPr marL="0" marR="0" lvl="0" indent="0" algn="l" defTabSz="914400" rtl="0" eaLnBrk="1" fontAlgn="auto" latinLnBrk="1" hangingPunct="1">
-              <a:lnSpc>
-                <a:spcPct val="100000"/>
-              </a:lnSpc>
-              <a:spcBef>
-                <a:spcPts val="0"/>
-              </a:spcBef>
-              <a:spcAft>
-                <a:spcPts val="0"/>
-              </a:spcAft>
-              <a:buClrTx/>
-              <a:buSzTx/>
-              <a:buFontTx/>
-              <a:buNone/>
-              <a:tabLst/>
-              <a:defRPr/>
-            </a:pPr>
-            <a:endParaRPr lang="en-US" altLang="ko-KR" dirty="0"/>
-          </a:p>
-          <a:p>
-            <a:endParaRPr lang="ko-KR" altLang="en-US" dirty="0"/>
-          </a:p>
-          <a:p>
-            <a:endParaRPr lang="ko-KR" altLang="en-US" dirty="0"/>
-          </a:p>
-          <a:p>
-            <a:endParaRPr lang="ko-KR" altLang="en-US" dirty="0"/>
-          </a:p>
-          <a:p>
-            <a:endParaRPr lang="ko-KR" altLang="en-US" dirty="0"/>
-          </a:p>
         </p:txBody>
       </p:sp>
       <p:sp>
@@ -2716,17 +2277,17 @@
             <a:spLocks noGrp="1"/>
           </p:cNvSpPr>
           <p:nvPr>
-            <p:ph type="sldNum" sz="quarter" idx="5"/>
-          </p:nvPr>
-        </p:nvSpPr>
-        <p:spPr/>
-        <p:txBody>
-          <a:bodyPr/>
-          <a:lstStyle/>
-          <a:p>
-            <a:fld id="{C09E5BFC-1559-42F1-8940-AB342D56BF02}" type="slidenum">
+            <p:ph type="sldNum" sz="quarter" idx="10"/>
+          </p:nvPr>
+        </p:nvSpPr>
+        <p:spPr/>
+        <p:txBody>
+          <a:bodyPr/>
+          <a:lstStyle/>
+          <a:p>
+            <a:fld id="{FA70C596-B40F-4F83-8FE4-5CF99F6F6723}" type="slidenum">
               <a:rPr lang="ko-KR" altLang="en-US" smtClean="0"/>
-              <a:t>24</a:t>
+              <a:t>23</a:t>
             </a:fld>
             <a:endParaRPr lang="ko-KR" altLang="en-US"/>
           </a:p>
@@ -2735,7 +2296,7 @@
     </p:spTree>
     <p:extLst>
       <p:ext uri="{BB962C8B-B14F-4D97-AF65-F5344CB8AC3E}">
-        <p14:creationId xmlns:p14="http://schemas.microsoft.com/office/powerpoint/2010/main" val="3704610732"/>
+        <p14:creationId xmlns:p14="http://schemas.microsoft.com/office/powerpoint/2010/main" val="3822268058"/>
       </p:ext>
     </p:extLst>
   </p:cSld>
@@ -2789,6 +2350,584 @@
           <a:bodyPr/>
           <a:lstStyle/>
           <a:p>
+            <a:r>
+              <a:rPr lang="en-US" altLang="ko-KR" dirty="0" err="1" smtClean="0"/>
+              <a:t>Keyframes</a:t>
+            </a:r>
+            <a:r>
+              <a:rPr lang="en-US" altLang="ko-KR" baseline="0" dirty="0" smtClean="0"/>
+              <a:t> </a:t>
+            </a:r>
+            <a:r>
+              <a:rPr lang="ko-KR" altLang="en-US" baseline="0" dirty="0" smtClean="0"/>
+              <a:t>규칙은 </a:t>
+            </a:r>
+            <a:r>
+              <a:rPr lang="en-US" altLang="ko-KR" baseline="0" dirty="0" smtClean="0"/>
+              <a:t>CSS</a:t>
+            </a:r>
+            <a:r>
+              <a:rPr lang="ko-KR" altLang="en-US" baseline="0" dirty="0" smtClean="0"/>
+              <a:t>에서 애니메이션의 특정 지점에서 애니메이션 효과를 개발자가 직접 지정하는 기능</a:t>
+            </a:r>
+            <a:endParaRPr lang="en-US" altLang="ko-KR" baseline="0" dirty="0" smtClean="0"/>
+          </a:p>
+          <a:p>
+            <a:endParaRPr lang="ko-KR" altLang="en-US" dirty="0"/>
+          </a:p>
+        </p:txBody>
+      </p:sp>
+      <p:sp>
+        <p:nvSpPr>
+          <p:cNvPr id="4" name="슬라이드 번호 개체 틀 3"/>
+          <p:cNvSpPr>
+            <a:spLocks noGrp="1"/>
+          </p:cNvSpPr>
+          <p:nvPr>
+            <p:ph type="sldNum" sz="quarter" idx="5"/>
+          </p:nvPr>
+        </p:nvSpPr>
+        <p:spPr/>
+        <p:txBody>
+          <a:bodyPr/>
+          <a:lstStyle/>
+          <a:p>
+            <a:fld id="{C09E5BFC-1559-42F1-8940-AB342D56BF02}" type="slidenum">
+              <a:rPr lang="ko-KR" altLang="en-US" smtClean="0"/>
+              <a:t>24</a:t>
+            </a:fld>
+            <a:endParaRPr lang="ko-KR" altLang="en-US"/>
+          </a:p>
+        </p:txBody>
+      </p:sp>
+    </p:spTree>
+    <p:extLst>
+      <p:ext uri="{BB962C8B-B14F-4D97-AF65-F5344CB8AC3E}">
+        <p14:creationId xmlns:p14="http://schemas.microsoft.com/office/powerpoint/2010/main" val="1031924123"/>
+      </p:ext>
+    </p:extLst>
+  </p:cSld>
+  <p:clrMapOvr>
+    <a:masterClrMapping/>
+  </p:clrMapOvr>
+</p:notes>
+</file>
+
+<file path=ppt/notesSlides/notesSlide22.xml><?xml version="1.0" encoding="utf-8"?>
+<p:notes xmlns:a="http://schemas.openxmlformats.org/drawingml/2006/main" xmlns:r="http://schemas.openxmlformats.org/officeDocument/2006/relationships" xmlns:p="http://schemas.openxmlformats.org/presentationml/2006/main">
+  <p:cSld>
+    <p:spTree>
+      <p:nvGrpSpPr>
+        <p:cNvPr id="1" name=""/>
+        <p:cNvGrpSpPr/>
+        <p:nvPr/>
+      </p:nvGrpSpPr>
+      <p:grpSpPr>
+        <a:xfrm>
+          <a:off x="0" y="0"/>
+          <a:ext cx="0" cy="0"/>
+          <a:chOff x="0" y="0"/>
+          <a:chExt cx="0" cy="0"/>
+        </a:xfrm>
+      </p:grpSpPr>
+      <p:sp>
+        <p:nvSpPr>
+          <p:cNvPr id="2" name="슬라이드 이미지 개체 틀 1"/>
+          <p:cNvSpPr>
+            <a:spLocks noGrp="1" noRot="1" noChangeAspect="1"/>
+          </p:cNvSpPr>
+          <p:nvPr>
+            <p:ph type="sldImg"/>
+          </p:nvPr>
+        </p:nvSpPr>
+        <p:spPr/>
+      </p:sp>
+      <p:sp>
+        <p:nvSpPr>
+          <p:cNvPr id="3" name="슬라이드 노트 개체 틀 2"/>
+          <p:cNvSpPr>
+            <a:spLocks noGrp="1"/>
+          </p:cNvSpPr>
+          <p:nvPr>
+            <p:ph type="body" idx="1"/>
+          </p:nvPr>
+        </p:nvSpPr>
+        <p:spPr/>
+        <p:txBody>
+          <a:bodyPr/>
+          <a:lstStyle/>
+          <a:p>
+            <a:r>
+              <a:rPr lang="ko-KR" altLang="en-US" dirty="0"/>
+              <a:t>우리가 만들어주는 이름</a:t>
+            </a:r>
+            <a:endParaRPr lang="en-US" altLang="ko-KR" dirty="0"/>
+          </a:p>
+          <a:p>
+            <a:r>
+              <a:rPr lang="ko-KR" altLang="en-US" dirty="0"/>
+              <a:t>지속시간 </a:t>
+            </a:r>
+            <a:r>
+              <a:rPr lang="en-US" altLang="ko-KR" dirty="0"/>
+              <a:t>~s</a:t>
+            </a:r>
+            <a:r>
+              <a:rPr lang="en-US" altLang="ko-KR" baseline="0" dirty="0"/>
+              <a:t> </a:t>
+            </a:r>
+            <a:r>
+              <a:rPr lang="ko-KR" altLang="en-US" baseline="0" dirty="0"/>
+              <a:t>의 몇 초 형태</a:t>
+            </a:r>
+            <a:endParaRPr lang="en-US" altLang="ko-KR" baseline="0" dirty="0"/>
+          </a:p>
+          <a:p>
+            <a:r>
+              <a:rPr lang="ko-KR" altLang="en-US" baseline="0" dirty="0"/>
+              <a:t>진행 형태 </a:t>
+            </a:r>
+            <a:r>
+              <a:rPr lang="en-US" altLang="ko-KR" baseline="0" dirty="0"/>
+              <a:t>: </a:t>
+            </a:r>
+            <a:r>
+              <a:rPr lang="ko-KR" altLang="en-US" baseline="0" dirty="0"/>
+              <a:t>시간 함수</a:t>
+            </a:r>
+            <a:r>
+              <a:rPr lang="en-US" altLang="ko-KR" baseline="0" dirty="0"/>
+              <a:t>, transition </a:t>
+            </a:r>
+            <a:r>
+              <a:rPr lang="ko-KR" altLang="en-US" baseline="0" dirty="0"/>
+              <a:t>의 </a:t>
+            </a:r>
+            <a:r>
+              <a:rPr lang="en-US" altLang="ko-KR" baseline="0" dirty="0"/>
+              <a:t>timing-function</a:t>
+            </a:r>
+            <a:r>
+              <a:rPr lang="ko-KR" altLang="en-US" baseline="0" dirty="0"/>
+              <a:t>과 동일</a:t>
+            </a:r>
+            <a:r>
+              <a:rPr lang="en-US" altLang="ko-KR" baseline="0" dirty="0"/>
+              <a:t>. </a:t>
+            </a:r>
+            <a:r>
+              <a:rPr lang="en-US" altLang="ko-KR" baseline="0" dirty="0" err="1"/>
+              <a:t>animatio</a:t>
+            </a:r>
+            <a:r>
+              <a:rPr lang="ko-KR" altLang="en-US" baseline="0" dirty="0"/>
+              <a:t>의 길이는 </a:t>
+            </a:r>
+            <a:r>
+              <a:rPr lang="en-US" altLang="ko-KR" baseline="0" dirty="0" err="1"/>
+              <a:t>transitio</a:t>
+            </a:r>
+            <a:r>
+              <a:rPr lang="ko-KR" altLang="en-US" baseline="0" dirty="0"/>
+              <a:t>과 다르게 지속 시간이 긴 경우가 많기 때문에 움직임이 </a:t>
+            </a:r>
+            <a:r>
+              <a:rPr lang="en-US" altLang="ko-KR" baseline="0" dirty="0"/>
+              <a:t>timing </a:t>
+            </a:r>
+            <a:r>
+              <a:rPr lang="en-US" altLang="ko-KR" baseline="0" dirty="0" err="1"/>
+              <a:t>functio</a:t>
+            </a:r>
+            <a:r>
+              <a:rPr lang="ko-KR" altLang="en-US" baseline="0" dirty="0"/>
+              <a:t>에 따라서 바뀐다</a:t>
+            </a:r>
+            <a:r>
+              <a:rPr lang="en-US" altLang="ko-KR" baseline="0" dirty="0"/>
+              <a:t>. </a:t>
+            </a:r>
+            <a:r>
+              <a:rPr lang="en-US" altLang="ko-KR" baseline="0" dirty="0" err="1"/>
+              <a:t>animaitio</a:t>
+            </a:r>
+            <a:r>
+              <a:rPr lang="ko-KR" altLang="en-US" baseline="0" dirty="0"/>
+              <a:t>에서의 </a:t>
+            </a:r>
+            <a:r>
+              <a:rPr lang="en-US" altLang="ko-KR" baseline="0" dirty="0"/>
+              <a:t>ease linear </a:t>
+            </a:r>
+            <a:r>
+              <a:rPr lang="ko-KR" altLang="en-US" baseline="0" dirty="0"/>
+              <a:t>등의 시간 함수는 꽤 중요한 역할을 함</a:t>
+            </a:r>
+            <a:endParaRPr lang="en-US" altLang="ko-KR" baseline="0" dirty="0"/>
+          </a:p>
+          <a:p>
+            <a:r>
+              <a:rPr lang="ko-KR" altLang="en-US" dirty="0" err="1"/>
+              <a:t>반복횟수</a:t>
+            </a:r>
+            <a:r>
+              <a:rPr lang="ko-KR" altLang="en-US" dirty="0"/>
+              <a:t> </a:t>
+            </a:r>
+            <a:r>
+              <a:rPr lang="en-US" altLang="ko-KR" dirty="0"/>
+              <a:t>(iteration-count)</a:t>
+            </a:r>
+            <a:endParaRPr lang="ko-KR" altLang="en-US" dirty="0"/>
+          </a:p>
+        </p:txBody>
+      </p:sp>
+      <p:sp>
+        <p:nvSpPr>
+          <p:cNvPr id="4" name="슬라이드 번호 개체 틀 3"/>
+          <p:cNvSpPr>
+            <a:spLocks noGrp="1"/>
+          </p:cNvSpPr>
+          <p:nvPr>
+            <p:ph type="sldNum" sz="quarter" idx="10"/>
+          </p:nvPr>
+        </p:nvSpPr>
+        <p:spPr/>
+        <p:txBody>
+          <a:bodyPr/>
+          <a:lstStyle/>
+          <a:p>
+            <a:fld id="{B4FAD15D-3FC6-4EBB-8A1D-F20C53EB7780}" type="slidenum">
+              <a:rPr lang="ko-KR" altLang="en-US" smtClean="0"/>
+              <a:pPr/>
+              <a:t>25</a:t>
+            </a:fld>
+            <a:endParaRPr lang="ko-KR" altLang="en-US" dirty="0"/>
+          </a:p>
+        </p:txBody>
+      </p:sp>
+    </p:spTree>
+    <p:extLst>
+      <p:ext uri="{BB962C8B-B14F-4D97-AF65-F5344CB8AC3E}">
+        <p14:creationId xmlns:p14="http://schemas.microsoft.com/office/powerpoint/2010/main" val="2638017959"/>
+      </p:ext>
+    </p:extLst>
+  </p:cSld>
+  <p:clrMapOvr>
+    <a:masterClrMapping/>
+  </p:clrMapOvr>
+</p:notes>
+</file>
+
+<file path=ppt/notesSlides/notesSlide23.xml><?xml version="1.0" encoding="utf-8"?>
+<p:notes xmlns:a="http://schemas.openxmlformats.org/drawingml/2006/main" xmlns:r="http://schemas.openxmlformats.org/officeDocument/2006/relationships" xmlns:p="http://schemas.openxmlformats.org/presentationml/2006/main">
+  <p:cSld>
+    <p:spTree>
+      <p:nvGrpSpPr>
+        <p:cNvPr id="1" name=""/>
+        <p:cNvGrpSpPr/>
+        <p:nvPr/>
+      </p:nvGrpSpPr>
+      <p:grpSpPr>
+        <a:xfrm>
+          <a:off x="0" y="0"/>
+          <a:ext cx="0" cy="0"/>
+          <a:chOff x="0" y="0"/>
+          <a:chExt cx="0" cy="0"/>
+        </a:xfrm>
+      </p:grpSpPr>
+      <p:sp>
+        <p:nvSpPr>
+          <p:cNvPr id="2" name="슬라이드 이미지 개체 틀 1"/>
+          <p:cNvSpPr>
+            <a:spLocks noGrp="1" noRot="1" noChangeAspect="1"/>
+          </p:cNvSpPr>
+          <p:nvPr>
+            <p:ph type="sldImg"/>
+          </p:nvPr>
+        </p:nvSpPr>
+        <p:spPr/>
+      </p:sp>
+      <p:sp>
+        <p:nvSpPr>
+          <p:cNvPr id="3" name="슬라이드 노트 개체 틀 2"/>
+          <p:cNvSpPr>
+            <a:spLocks noGrp="1"/>
+          </p:cNvSpPr>
+          <p:nvPr>
+            <p:ph type="body" idx="1"/>
+          </p:nvPr>
+        </p:nvSpPr>
+        <p:spPr/>
+        <p:txBody>
+          <a:bodyPr/>
+          <a:lstStyle/>
+          <a:p>
+            <a:r>
+              <a:rPr lang="ko-KR" altLang="en-US" dirty="0" err="1"/>
+              <a:t>파란글씨</a:t>
+            </a:r>
+            <a:r>
+              <a:rPr lang="ko-KR" altLang="en-US" dirty="0"/>
+              <a:t> 필수 속성 </a:t>
+            </a:r>
+            <a:endParaRPr lang="en-US" altLang="ko-KR" dirty="0"/>
+          </a:p>
+          <a:p>
+            <a:r>
+              <a:rPr lang="ko-KR" altLang="en-US" dirty="0"/>
+              <a:t>까만 글씨 생략 가능 </a:t>
+            </a:r>
+            <a:endParaRPr lang="en-US" altLang="ko-KR" dirty="0"/>
+          </a:p>
+          <a:p>
+            <a:r>
+              <a:rPr lang="en-US" altLang="ko-KR" dirty="0"/>
+              <a:t>Timing-</a:t>
+            </a:r>
+            <a:r>
+              <a:rPr lang="en-US" altLang="ko-KR" dirty="0" err="1"/>
+              <a:t>funciton</a:t>
+            </a:r>
+            <a:r>
+              <a:rPr lang="ko-KR" altLang="en-US" dirty="0"/>
+              <a:t>은 보통 써주지만 </a:t>
+            </a:r>
+            <a:r>
+              <a:rPr lang="en-US" altLang="ko-KR" dirty="0"/>
+              <a:t>delay</a:t>
+            </a:r>
+            <a:r>
+              <a:rPr lang="ko-KR" altLang="en-US" dirty="0"/>
+              <a:t>랑 </a:t>
+            </a:r>
+            <a:r>
+              <a:rPr lang="en-US" altLang="ko-KR" dirty="0"/>
+              <a:t>direction</a:t>
+            </a:r>
+            <a:r>
+              <a:rPr lang="ko-KR" altLang="en-US" dirty="0"/>
+              <a:t>은 안써주는 경우가 </a:t>
+            </a:r>
+            <a:r>
+              <a:rPr lang="ko-KR" altLang="en-US" dirty="0" smtClean="0"/>
+              <a:t>많다</a:t>
+            </a:r>
+            <a:r>
+              <a:rPr lang="en-US" altLang="ko-KR" dirty="0" smtClean="0"/>
+              <a:t>!</a:t>
+            </a:r>
+            <a:endParaRPr lang="ko-KR" altLang="en-US" dirty="0"/>
+          </a:p>
+        </p:txBody>
+      </p:sp>
+      <p:sp>
+        <p:nvSpPr>
+          <p:cNvPr id="4" name="슬라이드 번호 개체 틀 3"/>
+          <p:cNvSpPr>
+            <a:spLocks noGrp="1"/>
+          </p:cNvSpPr>
+          <p:nvPr>
+            <p:ph type="sldNum" sz="quarter" idx="10"/>
+          </p:nvPr>
+        </p:nvSpPr>
+        <p:spPr/>
+        <p:txBody>
+          <a:bodyPr/>
+          <a:lstStyle/>
+          <a:p>
+            <a:fld id="{B4FAD15D-3FC6-4EBB-8A1D-F20C53EB7780}" type="slidenum">
+              <a:rPr lang="ko-KR" altLang="en-US" smtClean="0"/>
+              <a:t>26</a:t>
+            </a:fld>
+            <a:endParaRPr lang="ko-KR" altLang="en-US"/>
+          </a:p>
+        </p:txBody>
+      </p:sp>
+    </p:spTree>
+    <p:extLst>
+      <p:ext uri="{BB962C8B-B14F-4D97-AF65-F5344CB8AC3E}">
+        <p14:creationId xmlns:p14="http://schemas.microsoft.com/office/powerpoint/2010/main" val="2277054390"/>
+      </p:ext>
+    </p:extLst>
+  </p:cSld>
+  <p:clrMapOvr>
+    <a:masterClrMapping/>
+  </p:clrMapOvr>
+</p:notes>
+</file>
+
+<file path=ppt/notesSlides/notesSlide24.xml><?xml version="1.0" encoding="utf-8"?>
+<p:notes xmlns:a="http://schemas.openxmlformats.org/drawingml/2006/main" xmlns:r="http://schemas.openxmlformats.org/officeDocument/2006/relationships" xmlns:p="http://schemas.openxmlformats.org/presentationml/2006/main">
+  <p:cSld>
+    <p:spTree>
+      <p:nvGrpSpPr>
+        <p:cNvPr id="1" name=""/>
+        <p:cNvGrpSpPr/>
+        <p:nvPr/>
+      </p:nvGrpSpPr>
+      <p:grpSpPr>
+        <a:xfrm>
+          <a:off x="0" y="0"/>
+          <a:ext cx="0" cy="0"/>
+          <a:chOff x="0" y="0"/>
+          <a:chExt cx="0" cy="0"/>
+        </a:xfrm>
+      </p:grpSpPr>
+      <p:sp>
+        <p:nvSpPr>
+          <p:cNvPr id="2" name="슬라이드 이미지 개체 틀 1"/>
+          <p:cNvSpPr>
+            <a:spLocks noGrp="1" noRot="1" noChangeAspect="1"/>
+          </p:cNvSpPr>
+          <p:nvPr>
+            <p:ph type="sldImg"/>
+          </p:nvPr>
+        </p:nvSpPr>
+        <p:spPr/>
+      </p:sp>
+      <p:sp>
+        <p:nvSpPr>
+          <p:cNvPr id="3" name="슬라이드 노트 개체 틀 2"/>
+          <p:cNvSpPr>
+            <a:spLocks noGrp="1"/>
+          </p:cNvSpPr>
+          <p:nvPr>
+            <p:ph type="body" idx="1"/>
+          </p:nvPr>
+        </p:nvSpPr>
+        <p:spPr/>
+        <p:txBody>
+          <a:bodyPr/>
+          <a:lstStyle/>
+          <a:p>
+            <a:r>
+              <a:rPr lang="ko-KR" altLang="en-US" dirty="0" smtClean="0"/>
+              <a:t>코드 치러 </a:t>
+            </a:r>
+            <a:r>
+              <a:rPr lang="ko-KR" altLang="en-US" dirty="0" err="1" smtClean="0"/>
+              <a:t>ㄱㄱ</a:t>
+            </a:r>
+            <a:endParaRPr lang="ko-KR" altLang="en-US" dirty="0"/>
+          </a:p>
+          <a:p>
+            <a:endParaRPr lang="ko-KR" altLang="en-US" dirty="0"/>
+          </a:p>
+          <a:p>
+            <a:pPr marL="0" marR="0" lvl="0" indent="0" algn="l" defTabSz="914400" rtl="0" eaLnBrk="1" fontAlgn="auto" latinLnBrk="1" hangingPunct="1">
+              <a:lnSpc>
+                <a:spcPct val="100000"/>
+              </a:lnSpc>
+              <a:spcBef>
+                <a:spcPts val="0"/>
+              </a:spcBef>
+              <a:spcAft>
+                <a:spcPts val="0"/>
+              </a:spcAft>
+              <a:buClrTx/>
+              <a:buSzTx/>
+              <a:buFontTx/>
+              <a:buNone/>
+              <a:tabLst/>
+              <a:defRPr/>
+            </a:pPr>
+            <a:endParaRPr lang="en-US" altLang="ko-KR" dirty="0"/>
+          </a:p>
+          <a:p>
+            <a:endParaRPr lang="ko-KR" altLang="en-US" dirty="0"/>
+          </a:p>
+          <a:p>
+            <a:endParaRPr lang="ko-KR" altLang="en-US" dirty="0"/>
+          </a:p>
+          <a:p>
+            <a:endParaRPr lang="ko-KR" altLang="en-US" dirty="0"/>
+          </a:p>
+          <a:p>
+            <a:endParaRPr lang="ko-KR" altLang="en-US" dirty="0"/>
+          </a:p>
+        </p:txBody>
+      </p:sp>
+      <p:sp>
+        <p:nvSpPr>
+          <p:cNvPr id="4" name="슬라이드 번호 개체 틀 3"/>
+          <p:cNvSpPr>
+            <a:spLocks noGrp="1"/>
+          </p:cNvSpPr>
+          <p:nvPr>
+            <p:ph type="sldNum" sz="quarter" idx="5"/>
+          </p:nvPr>
+        </p:nvSpPr>
+        <p:spPr/>
+        <p:txBody>
+          <a:bodyPr/>
+          <a:lstStyle/>
+          <a:p>
+            <a:fld id="{C09E5BFC-1559-42F1-8940-AB342D56BF02}" type="slidenum">
+              <a:rPr lang="ko-KR" altLang="en-US" smtClean="0"/>
+              <a:t>27</a:t>
+            </a:fld>
+            <a:endParaRPr lang="ko-KR" altLang="en-US"/>
+          </a:p>
+        </p:txBody>
+      </p:sp>
+    </p:spTree>
+    <p:extLst>
+      <p:ext uri="{BB962C8B-B14F-4D97-AF65-F5344CB8AC3E}">
+        <p14:creationId xmlns:p14="http://schemas.microsoft.com/office/powerpoint/2010/main" val="3704610732"/>
+      </p:ext>
+    </p:extLst>
+  </p:cSld>
+  <p:clrMapOvr>
+    <a:masterClrMapping/>
+  </p:clrMapOvr>
+</p:notes>
+</file>
+
+<file path=ppt/notesSlides/notesSlide25.xml><?xml version="1.0" encoding="utf-8"?>
+<p:notes xmlns:a="http://schemas.openxmlformats.org/drawingml/2006/main" xmlns:r="http://schemas.openxmlformats.org/officeDocument/2006/relationships" xmlns:p="http://schemas.openxmlformats.org/presentationml/2006/main">
+  <p:cSld>
+    <p:spTree>
+      <p:nvGrpSpPr>
+        <p:cNvPr id="1" name=""/>
+        <p:cNvGrpSpPr/>
+        <p:nvPr/>
+      </p:nvGrpSpPr>
+      <p:grpSpPr>
+        <a:xfrm>
+          <a:off x="0" y="0"/>
+          <a:ext cx="0" cy="0"/>
+          <a:chOff x="0" y="0"/>
+          <a:chExt cx="0" cy="0"/>
+        </a:xfrm>
+      </p:grpSpPr>
+      <p:sp>
+        <p:nvSpPr>
+          <p:cNvPr id="2" name="슬라이드 이미지 개체 틀 1"/>
+          <p:cNvSpPr>
+            <a:spLocks noGrp="1" noRot="1" noChangeAspect="1"/>
+          </p:cNvSpPr>
+          <p:nvPr>
+            <p:ph type="sldImg"/>
+          </p:nvPr>
+        </p:nvSpPr>
+        <p:spPr/>
+      </p:sp>
+      <p:sp>
+        <p:nvSpPr>
+          <p:cNvPr id="3" name="슬라이드 노트 개체 틀 2"/>
+          <p:cNvSpPr>
+            <a:spLocks noGrp="1"/>
+          </p:cNvSpPr>
+          <p:nvPr>
+            <p:ph type="body" idx="1"/>
+          </p:nvPr>
+        </p:nvSpPr>
+        <p:spPr/>
+        <p:txBody>
+          <a:bodyPr/>
+          <a:lstStyle/>
+          <a:p>
             <a:endParaRPr lang="en-US" altLang="ko-KR" b="0" dirty="0">
               <a:solidFill>
                 <a:srgbClr val="D4D4D4"/>
@@ -2975,7 +3114,7 @@
           <a:p>
             <a:fld id="{C09E5BFC-1559-42F1-8940-AB342D56BF02}" type="slidenum">
               <a:rPr lang="ko-KR" altLang="en-US" smtClean="0"/>
-              <a:t>26</a:t>
+              <a:t>29</a:t>
             </a:fld>
             <a:endParaRPr lang="ko-KR" altLang="en-US"/>
           </a:p>
@@ -4210,7 +4349,7 @@
           <p:nvPr userDrawn="1"/>
         </p:nvPicPr>
         <p:blipFill>
-          <a:blip r:embed="rId2">
+          <a:blip r:embed="rId2" cstate="hqprint">
             <a:alphaModFix amt="20000"/>
             <a:extLst>
               <a:ext uri="{28A0092B-C50C-407E-A947-70E740481C1C}">
@@ -7427,7 +7566,7 @@
           <p:nvPr userDrawn="1"/>
         </p:nvPicPr>
         <p:blipFill>
-          <a:blip r:embed="rId15">
+          <a:blip r:embed="rId15" cstate="hqprint">
             <a:extLst>
               <a:ext uri="{28A0092B-C50C-407E-A947-70E740481C1C}">
                 <a14:useLocalDpi xmlns:a14="http://schemas.microsoft.com/office/drawing/2010/main" val="0"/>
@@ -8012,7 +8151,7 @@
           <a:p>
             <a:fld id="{0F78D9C4-20C1-4B15-A116-16DC77AD9A1E}" type="datetime1">
               <a:rPr lang="ko-KR" altLang="en-US" smtClean="0"/>
-              <a:t>2024-05-20</a:t>
+              <a:t>2024-05-24</a:t>
             </a:fld>
             <a:endParaRPr lang="ko-KR" altLang="en-US"/>
           </a:p>
@@ -8300,7 +8439,7 @@
           <a:p>
             <a:fld id="{0F78D9C4-20C1-4B15-A116-16DC77AD9A1E}" type="datetime1">
               <a:rPr lang="ko-KR" altLang="en-US" smtClean="0"/>
-              <a:t>2024-05-20</a:t>
+              <a:t>2024-05-24</a:t>
             </a:fld>
             <a:endParaRPr lang="ko-KR" altLang="en-US" dirty="0"/>
           </a:p>
@@ -9252,7 +9391,7 @@
           <a:p>
             <a:fld id="{0F78D9C4-20C1-4B15-A116-16DC77AD9A1E}" type="datetime1">
               <a:rPr lang="ko-KR" altLang="en-US" smtClean="0"/>
-              <a:t>2024-05-20</a:t>
+              <a:t>2024-05-24</a:t>
             </a:fld>
             <a:endParaRPr lang="ko-KR" altLang="en-US"/>
           </a:p>
@@ -9482,7 +9621,7 @@
           <a:p>
             <a:fld id="{0F78D9C4-20C1-4B15-A116-16DC77AD9A1E}" type="datetime1">
               <a:rPr lang="ko-KR" altLang="en-US" smtClean="0"/>
-              <a:t>2024-05-20</a:t>
+              <a:t>2024-05-24</a:t>
             </a:fld>
             <a:endParaRPr lang="ko-KR" altLang="en-US"/>
           </a:p>
@@ -10517,8 +10656,8 @@
         </p:nvSpPr>
         <p:spPr>
           <a:xfrm>
-            <a:off x="4721087" y="1573833"/>
-            <a:ext cx="3654286" cy="4351338"/>
+            <a:off x="2183363" y="2631233"/>
+            <a:ext cx="7688425" cy="3425044"/>
           </a:xfrm>
         </p:spPr>
         <p:txBody>
@@ -10527,46 +10666,45 @@
           </a:bodyPr>
           <a:lstStyle/>
           <a:p>
+            <a:pPr algn="ctr"/>
             <a:r>
               <a:rPr lang="en-US" altLang="ko-KR" dirty="0"/>
               <a:t>inline / block</a:t>
             </a:r>
           </a:p>
           <a:p>
+            <a:pPr algn="ctr"/>
             <a:endParaRPr lang="en-US" altLang="ko-KR" dirty="0"/>
           </a:p>
           <a:p>
+            <a:pPr algn="ctr"/>
             <a:r>
               <a:rPr lang="en-US" altLang="ko-KR" dirty="0"/>
               <a:t>inline-block</a:t>
             </a:r>
           </a:p>
           <a:p>
+            <a:pPr algn="ctr"/>
             <a:endParaRPr lang="en-US" altLang="ko-KR" dirty="0"/>
           </a:p>
           <a:p>
-            <a:r>
-              <a:rPr lang="en-US" altLang="ko-KR" dirty="0"/>
+            <a:pPr algn="ctr"/>
+            <a:r>
+              <a:rPr lang="en-US" altLang="ko-KR" dirty="0" smtClean="0"/>
               <a:t>flex</a:t>
             </a:r>
           </a:p>
           <a:p>
+            <a:pPr algn="ctr"/>
             <a:endParaRPr lang="en-US" altLang="ko-KR" dirty="0"/>
           </a:p>
           <a:p>
-            <a:r>
-              <a:rPr lang="en-US" altLang="ko-KR" dirty="0"/>
+            <a:pPr algn="ctr"/>
+            <a:r>
+              <a:rPr lang="en-US" altLang="ko-KR" dirty="0" smtClean="0"/>
               <a:t>grid</a:t>
             </a:r>
-          </a:p>
-          <a:p>
             <a:endParaRPr lang="en-US" altLang="ko-KR" dirty="0"/>
-          </a:p>
-          <a:p>
-            <a:r>
-              <a:rPr lang="en-US" altLang="ko-KR" dirty="0"/>
-              <a:t>grid</a:t>
-            </a:r>
           </a:p>
         </p:txBody>
       </p:sp>
@@ -10593,7 +10731,7 @@
           <a:p>
             <a:fld id="{0F78D9C4-20C1-4B15-A116-16DC77AD9A1E}" type="datetime1">
               <a:rPr lang="ko-KR" altLang="en-US" smtClean="0"/>
-              <a:t>2024-05-20</a:t>
+              <a:t>2024-05-24</a:t>
             </a:fld>
             <a:endParaRPr lang="ko-KR" altLang="en-US"/>
           </a:p>
@@ -10695,42 +10833,70 @@
           <a:chExt cx="0" cy="0"/>
         </a:xfrm>
       </p:grpSpPr>
-      <p:pic>
-        <p:nvPicPr>
-          <p:cNvPr id="3" name="그림 2"/>
-          <p:cNvPicPr>
-            <a:picLocks noChangeAspect="1"/>
-          </p:cNvPicPr>
-          <p:nvPr/>
-        </p:nvPicPr>
-        <p:blipFill>
-          <a:blip r:embed="rId3">
-            <a:extLst>
-              <a:ext uri="{28A0092B-C50C-407E-A947-70E740481C1C}">
-                <a14:useLocalDpi xmlns:a14="http://schemas.microsoft.com/office/drawing/2010/main" val="0"/>
-              </a:ext>
-            </a:extLst>
-          </a:blip>
-          <a:stretch>
-            <a:fillRect/>
-          </a:stretch>
-        </p:blipFill>
-        <p:spPr>
-          <a:xfrm>
-            <a:off x="920261" y="1565213"/>
-            <a:ext cx="10351478" cy="4548585"/>
-          </a:xfrm>
-          <a:prstGeom prst="rect">
-            <a:avLst/>
-          </a:prstGeom>
-        </p:spPr>
-      </p:pic>
-      <p:sp>
-        <p:nvSpPr>
-          <p:cNvPr id="2" name="제목 1">
-            <a:extLst>
-              <a:ext uri="{FF2B5EF4-FFF2-40B4-BE49-F238E27FC236}">
-                <a16:creationId xmlns:a16="http://schemas.microsoft.com/office/drawing/2014/main" id="{2281EE9B-083C-1657-437D-D3E4A1E0D007}"/>
+      <p:sp>
+        <p:nvSpPr>
+          <p:cNvPr id="2" name="날짜 개체 틀 1">
+            <a:extLst>
+              <a:ext uri="{FF2B5EF4-FFF2-40B4-BE49-F238E27FC236}">
+                <a16:creationId xmlns:a16="http://schemas.microsoft.com/office/drawing/2014/main" id="{55BDFA10-ECF7-38FE-C364-618B7085F1E3}"/>
+              </a:ext>
+            </a:extLst>
+          </p:cNvPr>
+          <p:cNvSpPr>
+            <a:spLocks noGrp="1"/>
+          </p:cNvSpPr>
+          <p:nvPr>
+            <p:ph type="dt" sz="half" idx="10"/>
+          </p:nvPr>
+        </p:nvSpPr>
+        <p:spPr/>
+        <p:txBody>
+          <a:bodyPr/>
+          <a:lstStyle/>
+          <a:p>
+            <a:fld id="{0E19CB95-6D28-40F1-9DA3-1BAC5D4B5B4F}" type="datetime6">
+              <a:rPr lang="ko-KR" altLang="en-US" smtClean="0"/>
+              <a:t>2024년 5월</a:t>
+            </a:fld>
+            <a:endParaRPr lang="ko-KR" altLang="en-US"/>
+          </a:p>
+        </p:txBody>
+      </p:sp>
+      <p:sp>
+        <p:nvSpPr>
+          <p:cNvPr id="3" name="슬라이드 번호 개체 틀 2">
+            <a:extLst>
+              <a:ext uri="{FF2B5EF4-FFF2-40B4-BE49-F238E27FC236}">
+                <a16:creationId xmlns:a16="http://schemas.microsoft.com/office/drawing/2014/main" id="{BEAC1192-3240-5090-C940-3FE8EE2E796E}"/>
+              </a:ext>
+            </a:extLst>
+          </p:cNvPr>
+          <p:cNvSpPr>
+            <a:spLocks noGrp="1"/>
+          </p:cNvSpPr>
+          <p:nvPr>
+            <p:ph type="sldNum" sz="quarter" idx="12"/>
+          </p:nvPr>
+        </p:nvSpPr>
+        <p:spPr/>
+        <p:txBody>
+          <a:bodyPr/>
+          <a:lstStyle/>
+          <a:p>
+            <a:fld id="{083A2CE0-18CD-4102-B738-4ACFF9E68BA4}" type="slidenum">
+              <a:rPr lang="ko-KR" altLang="en-US" smtClean="0"/>
+              <a:t>19</a:t>
+            </a:fld>
+            <a:endParaRPr lang="ko-KR" altLang="en-US"/>
+          </a:p>
+        </p:txBody>
+      </p:sp>
+      <p:sp>
+        <p:nvSpPr>
+          <p:cNvPr id="4" name="제목 3">
+            <a:extLst>
+              <a:ext uri="{FF2B5EF4-FFF2-40B4-BE49-F238E27FC236}">
+                <a16:creationId xmlns:a16="http://schemas.microsoft.com/office/drawing/2014/main" id="{45DC42BC-3382-7592-84ED-A0A40D69B177}"/>
               </a:ext>
             </a:extLst>
           </p:cNvPr>
@@ -10747,28 +10913,23 @@
           <a:lstStyle/>
           <a:p>
             <a:r>
-              <a:rPr lang="ko-KR" altLang="en-US" dirty="0">
-                <a:solidFill>
-                  <a:srgbClr val="6EC173"/>
-                </a:solidFill>
-              </a:rPr>
-              <a:t>실습</a:t>
-            </a:r>
-            <a:r>
-              <a:rPr lang="en-US" altLang="ko-KR" dirty="0">
-                <a:solidFill>
-                  <a:srgbClr val="6EC173"/>
-                </a:solidFill>
-              </a:rPr>
-              <a:t>. </a:t>
-            </a:r>
-            <a:r>
-              <a:rPr lang="ko-KR" altLang="en-US" dirty="0"/>
-              <a:t>다양한 헤더 만들기 </a:t>
-            </a:r>
-            <a:r>
-              <a:rPr lang="en-US" altLang="ko-KR" dirty="0"/>
-              <a:t>(with. flex)</a:t>
+              <a:rPr lang="ko-KR" altLang="en-US" dirty="0" smtClean="0"/>
+              <a:t>요소를 숨기는 </a:t>
+            </a:r>
+            <a:r>
+              <a:rPr lang="en-US" altLang="ko-KR" dirty="0" smtClean="0"/>
+              <a:t/>
+            </a:r>
+            <a:br>
+              <a:rPr lang="en-US" altLang="ko-KR" dirty="0" smtClean="0"/>
+            </a:br>
+            <a:r>
+              <a:rPr lang="en-US" altLang="ko-KR" dirty="0" smtClean="0"/>
+              <a:t>3</a:t>
+            </a:r>
+            <a:r>
+              <a:rPr lang="ko-KR" altLang="en-US" dirty="0" smtClean="0"/>
+              <a:t>가지 속성</a:t>
             </a:r>
             <a:endParaRPr lang="ko-KR" altLang="en-US" dirty="0"/>
           </a:p>
@@ -10777,7 +10938,7 @@
     </p:spTree>
     <p:extLst>
       <p:ext uri="{BB962C8B-B14F-4D97-AF65-F5344CB8AC3E}">
-        <p14:creationId xmlns:p14="http://schemas.microsoft.com/office/powerpoint/2010/main" val="3887244353"/>
+        <p14:creationId xmlns:p14="http://schemas.microsoft.com/office/powerpoint/2010/main" val="529591250"/>
       </p:ext>
     </p:extLst>
   </p:cSld>
@@ -10908,6 +11069,349 @@
       </p:grpSpPr>
       <p:sp>
         <p:nvSpPr>
+          <p:cNvPr id="3" name="날짜 개체 틀 2"/>
+          <p:cNvSpPr>
+            <a:spLocks noGrp="1"/>
+          </p:cNvSpPr>
+          <p:nvPr>
+            <p:ph type="dt" sz="half" idx="10"/>
+          </p:nvPr>
+        </p:nvSpPr>
+        <p:spPr/>
+        <p:txBody>
+          <a:bodyPr/>
+          <a:lstStyle/>
+          <a:p>
+            <a:fld id="{3C9CE3CE-253F-4F9D-BA15-C226C8D8501E}" type="datetime6">
+              <a:rPr lang="ko-KR" altLang="en-US" smtClean="0"/>
+              <a:t>2024년 5월</a:t>
+            </a:fld>
+            <a:endParaRPr lang="ko-KR" altLang="en-US"/>
+          </a:p>
+        </p:txBody>
+      </p:sp>
+      <p:sp>
+        <p:nvSpPr>
+          <p:cNvPr id="4" name="슬라이드 번호 개체 틀 3"/>
+          <p:cNvSpPr>
+            <a:spLocks noGrp="1"/>
+          </p:cNvSpPr>
+          <p:nvPr>
+            <p:ph type="sldNum" sz="quarter" idx="12"/>
+          </p:nvPr>
+        </p:nvSpPr>
+        <p:spPr/>
+        <p:txBody>
+          <a:bodyPr/>
+          <a:lstStyle/>
+          <a:p>
+            <a:fld id="{083A2CE0-18CD-4102-B738-4ACFF9E68BA4}" type="slidenum">
+              <a:rPr lang="ko-KR" altLang="en-US" smtClean="0"/>
+              <a:t>20</a:t>
+            </a:fld>
+            <a:endParaRPr lang="ko-KR" altLang="en-US"/>
+          </a:p>
+        </p:txBody>
+      </p:sp>
+      <p:pic>
+        <p:nvPicPr>
+          <p:cNvPr id="1026" name="Picture 2" descr="https://blog.kakaocdn.net/dn/b12xKr/btszwcGkMe2/hCyN9XhQn8ovfcR4q8Lp61/img.png"/>
+          <p:cNvPicPr>
+            <a:picLocks noChangeAspect="1" noChangeArrowheads="1"/>
+          </p:cNvPicPr>
+          <p:nvPr/>
+        </p:nvPicPr>
+        <p:blipFill>
+          <a:blip r:embed="rId3">
+            <a:extLst>
+              <a:ext uri="{28A0092B-C50C-407E-A947-70E740481C1C}">
+                <a14:useLocalDpi xmlns:a14="http://schemas.microsoft.com/office/drawing/2010/main" val="0"/>
+              </a:ext>
+            </a:extLst>
+          </a:blip>
+          <a:srcRect/>
+          <a:stretch>
+            <a:fillRect/>
+          </a:stretch>
+        </p:blipFill>
+        <p:spPr bwMode="auto">
+          <a:xfrm>
+            <a:off x="1884784" y="773581"/>
+            <a:ext cx="8763454" cy="5323360"/>
+          </a:xfrm>
+          <a:prstGeom prst="rect">
+            <a:avLst/>
+          </a:prstGeom>
+          <a:noFill/>
+          <a:extLst>
+            <a:ext uri="{909E8E84-426E-40DD-AFC4-6F175D3DCCD1}">
+              <a14:hiddenFill xmlns:a14="http://schemas.microsoft.com/office/drawing/2010/main">
+                <a:solidFill>
+                  <a:srgbClr val="FFFFFF"/>
+                </a:solidFill>
+              </a14:hiddenFill>
+            </a:ext>
+          </a:extLst>
+        </p:spPr>
+      </p:pic>
+    </p:spTree>
+    <p:extLst>
+      <p:ext uri="{BB962C8B-B14F-4D97-AF65-F5344CB8AC3E}">
+        <p14:creationId xmlns:p14="http://schemas.microsoft.com/office/powerpoint/2010/main" val="1268411816"/>
+      </p:ext>
+    </p:extLst>
+  </p:cSld>
+  <p:clrMapOvr>
+    <a:masterClrMapping/>
+  </p:clrMapOvr>
+</p:sld>
+</file>
+
+<file path=ppt/slides/slide21.xml><?xml version="1.0" encoding="utf-8"?>
+<p:sld xmlns:a="http://schemas.openxmlformats.org/drawingml/2006/main" xmlns:r="http://schemas.openxmlformats.org/officeDocument/2006/relationships" xmlns:p="http://schemas.openxmlformats.org/presentationml/2006/main">
+  <p:cSld>
+    <p:spTree>
+      <p:nvGrpSpPr>
+        <p:cNvPr id="1" name=""/>
+        <p:cNvGrpSpPr/>
+        <p:nvPr/>
+      </p:nvGrpSpPr>
+      <p:grpSpPr>
+        <a:xfrm>
+          <a:off x="0" y="0"/>
+          <a:ext cx="0" cy="0"/>
+          <a:chOff x="0" y="0"/>
+          <a:chExt cx="0" cy="0"/>
+        </a:xfrm>
+      </p:grpSpPr>
+      <p:pic>
+        <p:nvPicPr>
+          <p:cNvPr id="3" name="그림 2"/>
+          <p:cNvPicPr>
+            <a:picLocks noChangeAspect="1"/>
+          </p:cNvPicPr>
+          <p:nvPr/>
+        </p:nvPicPr>
+        <p:blipFill>
+          <a:blip r:embed="rId3">
+            <a:extLst>
+              <a:ext uri="{28A0092B-C50C-407E-A947-70E740481C1C}">
+                <a14:useLocalDpi xmlns:a14="http://schemas.microsoft.com/office/drawing/2010/main" val="0"/>
+              </a:ext>
+            </a:extLst>
+          </a:blip>
+          <a:stretch>
+            <a:fillRect/>
+          </a:stretch>
+        </p:blipFill>
+        <p:spPr>
+          <a:xfrm>
+            <a:off x="920261" y="1565213"/>
+            <a:ext cx="10351478" cy="4548585"/>
+          </a:xfrm>
+          <a:prstGeom prst="rect">
+            <a:avLst/>
+          </a:prstGeom>
+        </p:spPr>
+      </p:pic>
+      <p:sp>
+        <p:nvSpPr>
+          <p:cNvPr id="2" name="제목 1">
+            <a:extLst>
+              <a:ext uri="{FF2B5EF4-FFF2-40B4-BE49-F238E27FC236}">
+                <a16:creationId xmlns:a16="http://schemas.microsoft.com/office/drawing/2014/main" id="{2281EE9B-083C-1657-437D-D3E4A1E0D007}"/>
+              </a:ext>
+            </a:extLst>
+          </p:cNvPr>
+          <p:cNvSpPr>
+            <a:spLocks noGrp="1"/>
+          </p:cNvSpPr>
+          <p:nvPr>
+            <p:ph type="title"/>
+          </p:nvPr>
+        </p:nvSpPr>
+        <p:spPr/>
+        <p:txBody>
+          <a:bodyPr/>
+          <a:lstStyle/>
+          <a:p>
+            <a:r>
+              <a:rPr lang="ko-KR" altLang="en-US" dirty="0">
+                <a:solidFill>
+                  <a:srgbClr val="6EC173"/>
+                </a:solidFill>
+              </a:rPr>
+              <a:t>실습</a:t>
+            </a:r>
+            <a:r>
+              <a:rPr lang="en-US" altLang="ko-KR" dirty="0">
+                <a:solidFill>
+                  <a:srgbClr val="6EC173"/>
+                </a:solidFill>
+              </a:rPr>
+              <a:t>. </a:t>
+            </a:r>
+            <a:r>
+              <a:rPr lang="ko-KR" altLang="en-US" dirty="0"/>
+              <a:t>다양한 헤더 만들기 </a:t>
+            </a:r>
+            <a:r>
+              <a:rPr lang="en-US" altLang="ko-KR" dirty="0"/>
+              <a:t>(with. flex)</a:t>
+            </a:r>
+            <a:endParaRPr lang="ko-KR" altLang="en-US" dirty="0"/>
+          </a:p>
+        </p:txBody>
+      </p:sp>
+    </p:spTree>
+    <p:extLst>
+      <p:ext uri="{BB962C8B-B14F-4D97-AF65-F5344CB8AC3E}">
+        <p14:creationId xmlns:p14="http://schemas.microsoft.com/office/powerpoint/2010/main" val="3887244353"/>
+      </p:ext>
+    </p:extLst>
+  </p:cSld>
+  <p:clrMapOvr>
+    <a:masterClrMapping/>
+  </p:clrMapOvr>
+</p:sld>
+</file>
+
+<file path=ppt/slides/slide22.xml><?xml version="1.0" encoding="utf-8"?>
+<p:sld xmlns:a="http://schemas.openxmlformats.org/drawingml/2006/main" xmlns:r="http://schemas.openxmlformats.org/officeDocument/2006/relationships" xmlns:p="http://schemas.openxmlformats.org/presentationml/2006/main">
+  <p:cSld>
+    <p:spTree>
+      <p:nvGrpSpPr>
+        <p:cNvPr id="1" name=""/>
+        <p:cNvGrpSpPr/>
+        <p:nvPr/>
+      </p:nvGrpSpPr>
+      <p:grpSpPr>
+        <a:xfrm>
+          <a:off x="0" y="0"/>
+          <a:ext cx="0" cy="0"/>
+          <a:chOff x="0" y="0"/>
+          <a:chExt cx="0" cy="0"/>
+        </a:xfrm>
+      </p:grpSpPr>
+      <p:sp>
+        <p:nvSpPr>
+          <p:cNvPr id="2" name="날짜 개체 틀 1">
+            <a:extLst>
+              <a:ext uri="{FF2B5EF4-FFF2-40B4-BE49-F238E27FC236}">
+                <a16:creationId xmlns:a16="http://schemas.microsoft.com/office/drawing/2014/main" id="{55BDFA10-ECF7-38FE-C364-618B7085F1E3}"/>
+              </a:ext>
+            </a:extLst>
+          </p:cNvPr>
+          <p:cNvSpPr>
+            <a:spLocks noGrp="1"/>
+          </p:cNvSpPr>
+          <p:nvPr>
+            <p:ph type="dt" sz="half" idx="10"/>
+          </p:nvPr>
+        </p:nvSpPr>
+        <p:spPr/>
+        <p:txBody>
+          <a:bodyPr/>
+          <a:lstStyle/>
+          <a:p>
+            <a:fld id="{0E19CB95-6D28-40F1-9DA3-1BAC5D4B5B4F}" type="datetime6">
+              <a:rPr lang="ko-KR" altLang="en-US" smtClean="0"/>
+              <a:t>2024년 5월</a:t>
+            </a:fld>
+            <a:endParaRPr lang="ko-KR" altLang="en-US"/>
+          </a:p>
+        </p:txBody>
+      </p:sp>
+      <p:sp>
+        <p:nvSpPr>
+          <p:cNvPr id="3" name="슬라이드 번호 개체 틀 2">
+            <a:extLst>
+              <a:ext uri="{FF2B5EF4-FFF2-40B4-BE49-F238E27FC236}">
+                <a16:creationId xmlns:a16="http://schemas.microsoft.com/office/drawing/2014/main" id="{BEAC1192-3240-5090-C940-3FE8EE2E796E}"/>
+              </a:ext>
+            </a:extLst>
+          </p:cNvPr>
+          <p:cNvSpPr>
+            <a:spLocks noGrp="1"/>
+          </p:cNvSpPr>
+          <p:nvPr>
+            <p:ph type="sldNum" sz="quarter" idx="12"/>
+          </p:nvPr>
+        </p:nvSpPr>
+        <p:spPr/>
+        <p:txBody>
+          <a:bodyPr/>
+          <a:lstStyle/>
+          <a:p>
+            <a:fld id="{083A2CE0-18CD-4102-B738-4ACFF9E68BA4}" type="slidenum">
+              <a:rPr lang="ko-KR" altLang="en-US" smtClean="0"/>
+              <a:t>22</a:t>
+            </a:fld>
+            <a:endParaRPr lang="ko-KR" altLang="en-US"/>
+          </a:p>
+        </p:txBody>
+      </p:sp>
+      <p:sp>
+        <p:nvSpPr>
+          <p:cNvPr id="4" name="제목 3">
+            <a:extLst>
+              <a:ext uri="{FF2B5EF4-FFF2-40B4-BE49-F238E27FC236}">
+                <a16:creationId xmlns:a16="http://schemas.microsoft.com/office/drawing/2014/main" id="{45DC42BC-3382-7592-84ED-A0A40D69B177}"/>
+              </a:ext>
+            </a:extLst>
+          </p:cNvPr>
+          <p:cNvSpPr>
+            <a:spLocks noGrp="1"/>
+          </p:cNvSpPr>
+          <p:nvPr>
+            <p:ph type="title"/>
+          </p:nvPr>
+        </p:nvSpPr>
+        <p:spPr/>
+        <p:txBody>
+          <a:bodyPr/>
+          <a:lstStyle/>
+          <a:p>
+            <a:r>
+              <a:rPr lang="en-US" altLang="ko-KR" sz="11500" dirty="0" smtClean="0"/>
+              <a:t>animation</a:t>
+            </a:r>
+            <a:endParaRPr lang="ko-KR" altLang="en-US" sz="11500" dirty="0"/>
+          </a:p>
+        </p:txBody>
+      </p:sp>
+    </p:spTree>
+    <p:extLst>
+      <p:ext uri="{BB962C8B-B14F-4D97-AF65-F5344CB8AC3E}">
+        <p14:creationId xmlns:p14="http://schemas.microsoft.com/office/powerpoint/2010/main" val="1010795179"/>
+      </p:ext>
+    </p:extLst>
+  </p:cSld>
+  <p:clrMapOvr>
+    <a:masterClrMapping/>
+  </p:clrMapOvr>
+</p:sld>
+</file>
+
+<file path=ppt/slides/slide23.xml><?xml version="1.0" encoding="utf-8"?>
+<p:sld xmlns:a="http://schemas.openxmlformats.org/drawingml/2006/main" xmlns:r="http://schemas.openxmlformats.org/officeDocument/2006/relationships" xmlns:p="http://schemas.openxmlformats.org/presentationml/2006/main">
+  <p:cSld>
+    <p:spTree>
+      <p:nvGrpSpPr>
+        <p:cNvPr id="1" name=""/>
+        <p:cNvGrpSpPr/>
+        <p:nvPr/>
+      </p:nvGrpSpPr>
+      <p:grpSpPr>
+        <a:xfrm>
+          <a:off x="0" y="0"/>
+          <a:ext cx="0" cy="0"/>
+          <a:chOff x="0" y="0"/>
+          <a:chExt cx="0" cy="0"/>
+        </a:xfrm>
+      </p:grpSpPr>
+      <p:sp>
+        <p:nvSpPr>
           <p:cNvPr id="6" name="내용 개체 틀 6">
             <a:extLst>
               <a:ext uri="{FF2B5EF4-FFF2-40B4-BE49-F238E27FC236}">
@@ -10938,12 +11442,20 @@
               <a:buNone/>
             </a:pPr>
             <a:r>
-              <a:rPr lang="ko-KR" altLang="en-US" dirty="0" err="1"/>
-              <a:t>애니매이션을</a:t>
+              <a:rPr lang="ko-KR" altLang="en-US" dirty="0" smtClean="0"/>
+              <a:t>애니</a:t>
             </a:r>
             <a:r>
               <a:rPr lang="ko-KR" altLang="en-US" dirty="0"/>
-              <a:t> 나타내는 </a:t>
+              <a:t>메</a:t>
+            </a:r>
+            <a:r>
+              <a:rPr lang="ko-KR" altLang="en-US" dirty="0" smtClean="0"/>
+              <a:t>이션을 </a:t>
+            </a:r>
+            <a:r>
+              <a:rPr lang="ko-KR" altLang="en-US" dirty="0"/>
+              <a:t>나타내는 </a:t>
             </a:r>
             <a:r>
               <a:rPr lang="en-US" altLang="ko-KR" dirty="0" err="1"/>
@@ -10977,12 +11489,12 @@
               <a:buNone/>
             </a:pPr>
             <a:r>
-              <a:rPr lang="ko-KR" altLang="en-US" dirty="0" err="1"/>
-              <a:t>애니매이션의</a:t>
+              <a:rPr lang="ko-KR" altLang="en-US" dirty="0" smtClean="0"/>
+              <a:t>애니메이션의 </a:t>
             </a:r>
             <a:r>
               <a:rPr lang="ko-KR" altLang="en-US" dirty="0"/>
-              <a:t> 중간 상태를 나타내는 키 프레임</a:t>
+              <a:t>중간 상태를 나타내는 키 프레임</a:t>
             </a:r>
             <a:endParaRPr lang="en-US" altLang="ko-KR" dirty="0"/>
           </a:p>
@@ -11011,7 +11523,7 @@
           <a:p>
             <a:fld id="{0F78D9C4-20C1-4B15-A116-16DC77AD9A1E}" type="datetime1">
               <a:rPr lang="ko-KR" altLang="en-US" smtClean="0"/>
-              <a:t>2024-05-20</a:t>
+              <a:t>2024-05-24</a:t>
             </a:fld>
             <a:endParaRPr lang="ko-KR" altLang="en-US"/>
           </a:p>
@@ -11040,7 +11552,7 @@
           <a:p>
             <a:fld id="{083A2CE0-18CD-4102-B738-4ACFF9E68BA4}" type="slidenum">
               <a:rPr lang="ko-KR" altLang="en-US" smtClean="0"/>
-              <a:t>20</a:t>
+              <a:t>23</a:t>
             </a:fld>
             <a:endParaRPr lang="ko-KR" altLang="en-US"/>
           </a:p>
@@ -11161,7 +11673,7 @@
 </p:sld>
 </file>
 
-<file path=ppt/slides/slide21.xml><?xml version="1.0" encoding="utf-8"?>
+<file path=ppt/slides/slide24.xml><?xml version="1.0" encoding="utf-8"?>
 <p:sld xmlns:a="http://schemas.openxmlformats.org/drawingml/2006/main" xmlns:r="http://schemas.openxmlformats.org/officeDocument/2006/relationships" xmlns:p="http://schemas.openxmlformats.org/presentationml/2006/main">
   <p:cSld>
     <p:spTree>
@@ -11364,7 +11876,7 @@
 </p:sld>
 </file>
 
-<file path=ppt/slides/slide22.xml><?xml version="1.0" encoding="utf-8"?>
+<file path=ppt/slides/slide25.xml><?xml version="1.0" encoding="utf-8"?>
 <p:sld xmlns:a="http://schemas.openxmlformats.org/drawingml/2006/main" xmlns:r="http://schemas.openxmlformats.org/officeDocument/2006/relationships" xmlns:p="http://schemas.openxmlformats.org/presentationml/2006/main">
   <p:cSld>
     <p:spTree>
@@ -11572,7 +12084,7 @@
 </p:sld>
 </file>
 
-<file path=ppt/slides/slide23.xml><?xml version="1.0" encoding="utf-8"?>
+<file path=ppt/slides/slide26.xml><?xml version="1.0" encoding="utf-8"?>
 <p:sld xmlns:a="http://schemas.openxmlformats.org/drawingml/2006/main" xmlns:r="http://schemas.openxmlformats.org/officeDocument/2006/relationships" xmlns:p="http://schemas.openxmlformats.org/presentationml/2006/main">
   <p:cSld>
     <p:spTree>
@@ -11931,7 +12443,7 @@
         </p:blipFill>
         <p:spPr>
           <a:xfrm>
-            <a:off x="1794587" y="5214968"/>
+            <a:off x="1810540" y="5214968"/>
             <a:ext cx="7597906" cy="429511"/>
           </a:xfrm>
           <a:prstGeom prst="rect">
@@ -12012,7 +12524,7 @@
 </p:sld>
 </file>
 
-<file path=ppt/slides/slide24.xml><?xml version="1.0" encoding="utf-8"?>
+<file path=ppt/slides/slide27.xml><?xml version="1.0" encoding="utf-8"?>
 <p:sld xmlns:a="http://schemas.openxmlformats.org/drawingml/2006/main" xmlns:r="http://schemas.openxmlformats.org/officeDocument/2006/relationships" xmlns:p="http://schemas.openxmlformats.org/presentationml/2006/main">
   <p:cSld>
     <p:spTree>
@@ -12052,7 +12564,7 @@
           <a:p>
             <a:fld id="{0F78D9C4-20C1-4B15-A116-16DC77AD9A1E}" type="datetime1">
               <a:rPr lang="ko-KR" altLang="en-US" smtClean="0"/>
-              <a:t>2024-05-20</a:t>
+              <a:t>2024-05-24</a:t>
             </a:fld>
             <a:endParaRPr lang="ko-KR" altLang="en-US" dirty="0"/>
           </a:p>
@@ -12081,7 +12593,7 @@
           <a:p>
             <a:fld id="{083A2CE0-18CD-4102-B738-4ACFF9E68BA4}" type="slidenum">
               <a:rPr lang="ko-KR" altLang="en-US" smtClean="0"/>
-              <a:t>24</a:t>
+              <a:t>27</a:t>
             </a:fld>
             <a:endParaRPr lang="ko-KR" altLang="en-US"/>
           </a:p>
@@ -12395,7 +12907,7 @@
 </p:sld>
 </file>
 
-<file path=ppt/slides/slide25.xml><?xml version="1.0" encoding="utf-8"?>
+<file path=ppt/slides/slide28.xml><?xml version="1.0" encoding="utf-8"?>
 <p:sld xmlns:a="http://schemas.openxmlformats.org/drawingml/2006/main" xmlns:r="http://schemas.openxmlformats.org/officeDocument/2006/relationships" xmlns:p="http://schemas.openxmlformats.org/presentationml/2006/main">
   <p:cSld>
     <p:spTree>
@@ -12580,7 +13092,7 @@
           <a:p>
             <a:fld id="{0F78D9C4-20C1-4B15-A116-16DC77AD9A1E}" type="datetime1">
               <a:rPr lang="ko-KR" altLang="en-US" smtClean="0"/>
-              <a:t>2024-05-20</a:t>
+              <a:t>2024-05-24</a:t>
             </a:fld>
             <a:endParaRPr lang="ko-KR" altLang="en-US"/>
           </a:p>
@@ -12609,7 +13121,7 @@
           <a:p>
             <a:fld id="{083A2CE0-18CD-4102-B738-4ACFF9E68BA4}" type="slidenum">
               <a:rPr lang="ko-KR" altLang="en-US" smtClean="0"/>
-              <a:t>25</a:t>
+              <a:t>28</a:t>
             </a:fld>
             <a:endParaRPr lang="ko-KR" altLang="en-US"/>
           </a:p>
@@ -12717,7 +13229,7 @@
 </p:sld>
 </file>
 
-<file path=ppt/slides/slide26.xml><?xml version="1.0" encoding="utf-8"?>
+<file path=ppt/slides/slide29.xml><?xml version="1.0" encoding="utf-8"?>
 <p:sld xmlns:a="http://schemas.openxmlformats.org/drawingml/2006/main" xmlns:r="http://schemas.openxmlformats.org/officeDocument/2006/relationships" xmlns:p="http://schemas.openxmlformats.org/presentationml/2006/main">
   <p:cSld>
     <p:spTree>
@@ -12825,7 +13337,7 @@
           <a:p>
             <a:fld id="{0F78D9C4-20C1-4B15-A116-16DC77AD9A1E}" type="datetime1">
               <a:rPr lang="ko-KR" altLang="en-US" smtClean="0"/>
-              <a:t>2024-05-20</a:t>
+              <a:t>2024-05-24</a:t>
             </a:fld>
             <a:endParaRPr lang="ko-KR" altLang="en-US"/>
           </a:p>
@@ -12854,7 +13366,7 @@
           <a:p>
             <a:fld id="{083A2CE0-18CD-4102-B738-4ACFF9E68BA4}" type="slidenum">
               <a:rPr lang="ko-KR" altLang="en-US" smtClean="0"/>
-              <a:t>26</a:t>
+              <a:t>29</a:t>
             </a:fld>
             <a:endParaRPr lang="ko-KR" altLang="en-US"/>
           </a:p>
@@ -13162,7 +13674,7 @@
           <a:p>
             <a:fld id="{0F78D9C4-20C1-4B15-A116-16DC77AD9A1E}" type="datetime1">
               <a:rPr lang="ko-KR" altLang="en-US" smtClean="0"/>
-              <a:t>2024-05-20</a:t>
+              <a:t>2024-05-24</a:t>
             </a:fld>
             <a:endParaRPr lang="ko-KR" altLang="en-US" dirty="0"/>
           </a:p>
@@ -13287,7 +13799,7 @@
           <a:p>
             <a:fld id="{0F78D9C4-20C1-4B15-A116-16DC77AD9A1E}" type="datetime1">
               <a:rPr lang="ko-KR" altLang="en-US" smtClean="0"/>
-              <a:t>2024-05-20</a:t>
+              <a:t>2024-05-24</a:t>
             </a:fld>
             <a:endParaRPr lang="ko-KR" altLang="en-US" dirty="0"/>
           </a:p>
@@ -13402,8 +13914,8 @@
         </p:nvSpPr>
         <p:spPr>
           <a:xfrm>
-            <a:off x="7576151" y="4563466"/>
-            <a:ext cx="3982802" cy="830997"/>
+            <a:off x="7562291" y="5433062"/>
+            <a:ext cx="4367597" cy="830997"/>
           </a:xfrm>
           <a:prstGeom prst="rect">
             <a:avLst/>
@@ -13623,7 +14135,7 @@
           <a:p>
             <a:fld id="{0F78D9C4-20C1-4B15-A116-16DC77AD9A1E}" type="datetime1">
               <a:rPr lang="ko-KR" altLang="en-US" smtClean="0"/>
-              <a:t>2024-05-20</a:t>
+              <a:t>2024-05-24</a:t>
             </a:fld>
             <a:endParaRPr lang="ko-KR" altLang="en-US"/>
           </a:p>
@@ -14161,7 +14673,7 @@
           <a:p>
             <a:fld id="{0F78D9C4-20C1-4B15-A116-16DC77AD9A1E}" type="datetime1">
               <a:rPr lang="ko-KR" altLang="en-US" smtClean="0"/>
-              <a:t>2024-05-20</a:t>
+              <a:t>2024-05-24</a:t>
             </a:fld>
             <a:endParaRPr lang="ko-KR" altLang="en-US"/>
           </a:p>
@@ -14472,7 +14984,7 @@
           <a:p>
             <a:fld id="{0F78D9C4-20C1-4B15-A116-16DC77AD9A1E}" type="datetime1">
               <a:rPr lang="ko-KR" altLang="en-US" smtClean="0"/>
-              <a:t>2024-05-20</a:t>
+              <a:t>2024-05-24</a:t>
             </a:fld>
             <a:endParaRPr lang="ko-KR" altLang="en-US"/>
           </a:p>

--- a/material/[SeSAC_YDP_6] 03_CSS_3.pptx
+++ b/material/[SeSAC_YDP_6] 03_CSS_3.pptx
@@ -228,7 +228,7 @@
           <a:p>
             <a:fld id="{00524019-D21D-4F04-AF43-2AEEE922364E}" type="datetimeFigureOut">
               <a:rPr lang="ko-KR" altLang="en-US" smtClean="0"/>
-              <a:t>2024-05-24</a:t>
+              <a:t>2024-05-27</a:t>
             </a:fld>
             <a:endParaRPr lang="ko-KR" altLang="en-US"/>
           </a:p>
@@ -2675,6 +2675,29 @@
             <a:endParaRPr lang="en-US" altLang="ko-KR" baseline="0" dirty="0"/>
           </a:p>
           <a:p>
+            <a:endParaRPr lang="en-US" altLang="ko-KR" dirty="0"/>
+          </a:p>
+          <a:p>
+            <a:r>
+              <a:rPr lang="en-US" altLang="ko-KR" dirty="0"/>
+              <a:t>(</a:t>
+            </a:r>
+            <a:r>
+              <a:rPr lang="ko-KR" altLang="en-US" dirty="0"/>
+              <a:t>시작 </a:t>
+            </a:r>
+            <a:r>
+              <a:rPr lang="en-US" altLang="ko-KR" dirty="0"/>
+              <a:t>~ </a:t>
+            </a:r>
+            <a:r>
+              <a:rPr lang="ko-KR" altLang="en-US" dirty="0"/>
+              <a:t>끝</a:t>
+            </a:r>
+            <a:r>
+              <a:rPr lang="en-US" altLang="ko-KR" dirty="0"/>
+              <a:t>)</a:t>
+            </a:r>
             <a:endParaRPr lang="ko-KR" altLang="en-US" dirty="0"/>
           </a:p>
         </p:txBody>
@@ -3015,7 +3038,31 @@
               <a:rPr lang="en-US" altLang="ko-KR" dirty="0"/>
               <a:t>!</a:t>
             </a:r>
-            <a:endParaRPr lang="ko-KR" altLang="en-US" dirty="0"/>
+          </a:p>
+          <a:p>
+            <a:endParaRPr lang="en-US" altLang="ko-KR" dirty="0"/>
+          </a:p>
+          <a:p>
+            <a:r>
+              <a:rPr lang="ko-KR" altLang="en-US" dirty="0"/>
+              <a:t>필수 속성 </a:t>
+            </a:r>
+            <a:r>
+              <a:rPr lang="en-US" altLang="ko-KR" dirty="0"/>
+              <a:t>: </a:t>
+            </a:r>
+            <a:r>
+              <a:rPr lang="ko-KR" altLang="en-US" dirty="0"/>
+              <a:t>이름</a:t>
+            </a:r>
+            <a:r>
+              <a:rPr lang="en-US" altLang="ko-KR" dirty="0"/>
+              <a:t>, </a:t>
+            </a:r>
+            <a:r>
+              <a:rPr lang="ko-KR" altLang="en-US" dirty="0"/>
+              <a:t>지속시간</a:t>
+            </a:r>
           </a:p>
         </p:txBody>
       </p:sp>
@@ -8479,7 +8526,7 @@
           <a:p>
             <a:fld id="{0F78D9C4-20C1-4B15-A116-16DC77AD9A1E}" type="datetime1">
               <a:rPr lang="ko-KR" altLang="en-US" smtClean="0"/>
-              <a:t>2024-05-24</a:t>
+              <a:t>2024-05-27</a:t>
             </a:fld>
             <a:endParaRPr lang="ko-KR" altLang="en-US"/>
           </a:p>
@@ -8766,7 +8813,7 @@
           <a:p>
             <a:fld id="{0F78D9C4-20C1-4B15-A116-16DC77AD9A1E}" type="datetime1">
               <a:rPr lang="ko-KR" altLang="en-US" smtClean="0"/>
-              <a:t>2024-05-24</a:t>
+              <a:t>2024-05-27</a:t>
             </a:fld>
             <a:endParaRPr lang="ko-KR" altLang="en-US"/>
           </a:p>
@@ -9054,7 +9101,7 @@
           <a:p>
             <a:fld id="{0F78D9C4-20C1-4B15-A116-16DC77AD9A1E}" type="datetime1">
               <a:rPr lang="ko-KR" altLang="en-US" smtClean="0"/>
-              <a:t>2024-05-24</a:t>
+              <a:t>2024-05-27</a:t>
             </a:fld>
             <a:endParaRPr lang="ko-KR" altLang="en-US" dirty="0"/>
           </a:p>
@@ -10006,7 +10053,7 @@
           <a:p>
             <a:fld id="{0F78D9C4-20C1-4B15-A116-16DC77AD9A1E}" type="datetime1">
               <a:rPr lang="ko-KR" altLang="en-US" smtClean="0"/>
-              <a:t>2024-05-24</a:t>
+              <a:t>2024-05-27</a:t>
             </a:fld>
             <a:endParaRPr lang="ko-KR" altLang="en-US"/>
           </a:p>
@@ -10221,7 +10268,7 @@
           <a:p>
             <a:fld id="{0F78D9C4-20C1-4B15-A116-16DC77AD9A1E}" type="datetime1">
               <a:rPr lang="ko-KR" altLang="en-US" smtClean="0"/>
-              <a:t>2024-05-24</a:t>
+              <a:t>2024-05-27</a:t>
             </a:fld>
             <a:endParaRPr lang="ko-KR" altLang="en-US"/>
           </a:p>
@@ -10784,7 +10831,7 @@
           <a:p>
             <a:fld id="{0F78D9C4-20C1-4B15-A116-16DC77AD9A1E}" type="datetime1">
               <a:rPr lang="ko-KR" altLang="en-US" smtClean="0"/>
-              <a:t>2024-05-24</a:t>
+              <a:t>2024-05-27</a:t>
             </a:fld>
             <a:endParaRPr lang="ko-KR" altLang="en-US"/>
           </a:p>
@@ -11492,7 +11539,7 @@
           <a:p>
             <a:fld id="{0F78D9C4-20C1-4B15-A116-16DC77AD9A1E}" type="datetime1">
               <a:rPr lang="ko-KR" altLang="en-US" smtClean="0"/>
-              <a:t>2024-05-24</a:t>
+              <a:t>2024-05-27</a:t>
             </a:fld>
             <a:endParaRPr lang="ko-KR" altLang="en-US"/>
           </a:p>
@@ -12004,7 +12051,7 @@
           <a:p>
             <a:fld id="{0F78D9C4-20C1-4B15-A116-16DC77AD9A1E}" type="datetime1">
               <a:rPr lang="ko-KR" altLang="en-US" smtClean="0"/>
-              <a:t>2024-05-24</a:t>
+              <a:t>2024-05-27</a:t>
             </a:fld>
             <a:endParaRPr lang="ko-KR" altLang="en-US"/>
           </a:p>
@@ -12603,7 +12650,7 @@
           <a:p>
             <a:fld id="{0F78D9C4-20C1-4B15-A116-16DC77AD9A1E}" type="datetime1">
               <a:rPr lang="ko-KR" altLang="en-US" smtClean="0"/>
-              <a:t>2024-05-24</a:t>
+              <a:t>2024-05-27</a:t>
             </a:fld>
             <a:endParaRPr lang="ko-KR" altLang="en-US"/>
           </a:p>
@@ -13355,7 +13402,7 @@
           <a:p>
             <a:fld id="{0F78D9C4-20C1-4B15-A116-16DC77AD9A1E}" type="datetime1">
               <a:rPr lang="ko-KR" altLang="en-US" smtClean="0"/>
-              <a:t>2024-05-24</a:t>
+              <a:t>2024-05-27</a:t>
             </a:fld>
             <a:endParaRPr lang="ko-KR" altLang="en-US"/>
           </a:p>
@@ -14396,7 +14443,7 @@
           <a:p>
             <a:fld id="{0F78D9C4-20C1-4B15-A116-16DC77AD9A1E}" type="datetime1">
               <a:rPr lang="ko-KR" altLang="en-US" smtClean="0"/>
-              <a:t>2024-05-24</a:t>
+              <a:t>2024-05-27</a:t>
             </a:fld>
             <a:endParaRPr lang="ko-KR" altLang="en-US" dirty="0"/>
           </a:p>
@@ -14937,7 +14984,7 @@
           <a:p>
             <a:fld id="{0F78D9C4-20C1-4B15-A116-16DC77AD9A1E}" type="datetime1">
               <a:rPr lang="ko-KR" altLang="en-US" smtClean="0"/>
-              <a:t>2024-05-24</a:t>
+              <a:t>2024-05-27</a:t>
             </a:fld>
             <a:endParaRPr lang="ko-KR" altLang="en-US"/>
           </a:p>
@@ -15521,7 +15568,7 @@
           <a:p>
             <a:fld id="{0F78D9C4-20C1-4B15-A116-16DC77AD9A1E}" type="datetime1">
               <a:rPr lang="ko-KR" altLang="en-US" smtClean="0"/>
-              <a:t>2024-05-24</a:t>
+              <a:t>2024-05-27</a:t>
             </a:fld>
             <a:endParaRPr lang="ko-KR" altLang="en-US"/>
           </a:p>
@@ -16064,7 +16111,7 @@
           <a:p>
             <a:fld id="{0F78D9C4-20C1-4B15-A116-16DC77AD9A1E}" type="datetime1">
               <a:rPr lang="ko-KR" altLang="en-US" smtClean="0"/>
-              <a:t>2024-05-24</a:t>
+              <a:t>2024-05-27</a:t>
             </a:fld>
             <a:endParaRPr lang="ko-KR" altLang="en-US"/>
           </a:p>
@@ -16535,7 +16582,7 @@
           <a:p>
             <a:fld id="{0F78D9C4-20C1-4B15-A116-16DC77AD9A1E}" type="datetime1">
               <a:rPr lang="ko-KR" altLang="en-US" smtClean="0"/>
-              <a:t>2024-05-24</a:t>
+              <a:t>2024-05-27</a:t>
             </a:fld>
             <a:endParaRPr lang="ko-KR" altLang="en-US" dirty="0"/>
           </a:p>
@@ -16660,7 +16707,7 @@
           <a:p>
             <a:fld id="{0F78D9C4-20C1-4B15-A116-16DC77AD9A1E}" type="datetime1">
               <a:rPr lang="ko-KR" altLang="en-US" smtClean="0"/>
-              <a:t>2024-05-24</a:t>
+              <a:t>2024-05-27</a:t>
             </a:fld>
             <a:endParaRPr lang="ko-KR" altLang="en-US" dirty="0"/>
           </a:p>
@@ -17486,7 +17533,7 @@
           <a:p>
             <a:fld id="{0F78D9C4-20C1-4B15-A116-16DC77AD9A1E}" type="datetime1">
               <a:rPr lang="ko-KR" altLang="en-US" smtClean="0"/>
-              <a:t>2024-05-24</a:t>
+              <a:t>2024-05-27</a:t>
             </a:fld>
             <a:endParaRPr lang="ko-KR" altLang="en-US"/>
           </a:p>
@@ -18237,7 +18284,7 @@
           <a:p>
             <a:fld id="{0F78D9C4-20C1-4B15-A116-16DC77AD9A1E}" type="datetime1">
               <a:rPr lang="ko-KR" altLang="en-US" smtClean="0"/>
-              <a:t>2024-05-24</a:t>
+              <a:t>2024-05-27</a:t>
             </a:fld>
             <a:endParaRPr lang="ko-KR" altLang="en-US"/>
           </a:p>

--- a/material/[SeSAC_YDP_6] 03_CSS_3.pptx
+++ b/material/[SeSAC_YDP_6] 03_CSS_3.pptx
@@ -3786,8 +3786,29 @@
             </a:r>
             <a:r>
               <a:rPr lang="ko-KR" altLang="en-US" dirty="0"/>
-              <a:t>나중에 수업 끝나고</a:t>
-            </a:r>
+              <a:t>나중에 수업 끝나고 </a:t>
+            </a:r>
+            <a:r>
+              <a:rPr lang="en-US" altLang="ko-KR" dirty="0"/>
+              <a:t>+ </a:t>
+            </a:r>
+            <a:r>
+              <a:rPr lang="ko-KR" altLang="en-US" dirty="0"/>
+              <a:t>동영상 </a:t>
+            </a:r>
+            <a:r>
+              <a:rPr lang="en-US" altLang="ko-KR" dirty="0"/>
+              <a:t>+ </a:t>
+            </a:r>
+            <a:r>
+              <a:rPr lang="ko-KR" altLang="en-US" dirty="0"/>
+              <a:t>힌트 주기</a:t>
+            </a:r>
+            <a:r>
+              <a:rPr lang="en-US" altLang="ko-KR" dirty="0"/>
+              <a:t>.</a:t>
+            </a:r>
+            <a:endParaRPr lang="ko-KR" altLang="en-US" dirty="0"/>
           </a:p>
         </p:txBody>
       </p:sp>

--- a/material/[SeSAC_YDP_6] 03_CSS_3.pptx
+++ b/material/[SeSAC_YDP_6] 03_CSS_3.pptx
@@ -228,7 +228,7 @@
           <a:p>
             <a:fld id="{00524019-D21D-4F04-AF43-2AEEE922364E}" type="datetimeFigureOut">
               <a:rPr lang="ko-KR" altLang="en-US" smtClean="0"/>
-              <a:t>2024-05-24</a:t>
+              <a:t>2024-05-27</a:t>
             </a:fld>
             <a:endParaRPr lang="ko-KR" altLang="en-US"/>
           </a:p>
@@ -8479,7 +8479,7 @@
           <a:p>
             <a:fld id="{0F78D9C4-20C1-4B15-A116-16DC77AD9A1E}" type="datetime1">
               <a:rPr lang="ko-KR" altLang="en-US" smtClean="0"/>
-              <a:t>2024-05-24</a:t>
+              <a:t>2024-05-27</a:t>
             </a:fld>
             <a:endParaRPr lang="ko-KR" altLang="en-US"/>
           </a:p>
@@ -8766,7 +8766,7 @@
           <a:p>
             <a:fld id="{0F78D9C4-20C1-4B15-A116-16DC77AD9A1E}" type="datetime1">
               <a:rPr lang="ko-KR" altLang="en-US" smtClean="0"/>
-              <a:t>2024-05-24</a:t>
+              <a:t>2024-05-27</a:t>
             </a:fld>
             <a:endParaRPr lang="ko-KR" altLang="en-US"/>
           </a:p>
@@ -9054,7 +9054,7 @@
           <a:p>
             <a:fld id="{0F78D9C4-20C1-4B15-A116-16DC77AD9A1E}" type="datetime1">
               <a:rPr lang="ko-KR" altLang="en-US" smtClean="0"/>
-              <a:t>2024-05-24</a:t>
+              <a:t>2024-05-27</a:t>
             </a:fld>
             <a:endParaRPr lang="ko-KR" altLang="en-US" dirty="0"/>
           </a:p>
@@ -10006,7 +10006,7 @@
           <a:p>
             <a:fld id="{0F78D9C4-20C1-4B15-A116-16DC77AD9A1E}" type="datetime1">
               <a:rPr lang="ko-KR" altLang="en-US" smtClean="0"/>
-              <a:t>2024-05-24</a:t>
+              <a:t>2024-05-27</a:t>
             </a:fld>
             <a:endParaRPr lang="ko-KR" altLang="en-US"/>
           </a:p>
@@ -10221,7 +10221,7 @@
           <a:p>
             <a:fld id="{0F78D9C4-20C1-4B15-A116-16DC77AD9A1E}" type="datetime1">
               <a:rPr lang="ko-KR" altLang="en-US" smtClean="0"/>
-              <a:t>2024-05-24</a:t>
+              <a:t>2024-05-27</a:t>
             </a:fld>
             <a:endParaRPr lang="ko-KR" altLang="en-US"/>
           </a:p>
@@ -10784,7 +10784,7 @@
           <a:p>
             <a:fld id="{0F78D9C4-20C1-4B15-A116-16DC77AD9A1E}" type="datetime1">
               <a:rPr lang="ko-KR" altLang="en-US" smtClean="0"/>
-              <a:t>2024-05-24</a:t>
+              <a:t>2024-05-27</a:t>
             </a:fld>
             <a:endParaRPr lang="ko-KR" altLang="en-US"/>
           </a:p>
@@ -11492,7 +11492,7 @@
           <a:p>
             <a:fld id="{0F78D9C4-20C1-4B15-A116-16DC77AD9A1E}" type="datetime1">
               <a:rPr lang="ko-KR" altLang="en-US" smtClean="0"/>
-              <a:t>2024-05-24</a:t>
+              <a:t>2024-05-27</a:t>
             </a:fld>
             <a:endParaRPr lang="ko-KR" altLang="en-US"/>
           </a:p>
@@ -12004,7 +12004,7 @@
           <a:p>
             <a:fld id="{0F78D9C4-20C1-4B15-A116-16DC77AD9A1E}" type="datetime1">
               <a:rPr lang="ko-KR" altLang="en-US" smtClean="0"/>
-              <a:t>2024-05-24</a:t>
+              <a:t>2024-05-27</a:t>
             </a:fld>
             <a:endParaRPr lang="ko-KR" altLang="en-US"/>
           </a:p>
@@ -12603,7 +12603,7 @@
           <a:p>
             <a:fld id="{0F78D9C4-20C1-4B15-A116-16DC77AD9A1E}" type="datetime1">
               <a:rPr lang="ko-KR" altLang="en-US" smtClean="0"/>
-              <a:t>2024-05-24</a:t>
+              <a:t>2024-05-27</a:t>
             </a:fld>
             <a:endParaRPr lang="ko-KR" altLang="en-US"/>
           </a:p>
@@ -13355,7 +13355,7 @@
           <a:p>
             <a:fld id="{0F78D9C4-20C1-4B15-A116-16DC77AD9A1E}" type="datetime1">
               <a:rPr lang="ko-KR" altLang="en-US" smtClean="0"/>
-              <a:t>2024-05-24</a:t>
+              <a:t>2024-05-27</a:t>
             </a:fld>
             <a:endParaRPr lang="ko-KR" altLang="en-US"/>
           </a:p>
@@ -14396,7 +14396,7 @@
           <a:p>
             <a:fld id="{0F78D9C4-20C1-4B15-A116-16DC77AD9A1E}" type="datetime1">
               <a:rPr lang="ko-KR" altLang="en-US" smtClean="0"/>
-              <a:t>2024-05-24</a:t>
+              <a:t>2024-05-27</a:t>
             </a:fld>
             <a:endParaRPr lang="ko-KR" altLang="en-US" dirty="0"/>
           </a:p>
@@ -14937,7 +14937,7 @@
           <a:p>
             <a:fld id="{0F78D9C4-20C1-4B15-A116-16DC77AD9A1E}" type="datetime1">
               <a:rPr lang="ko-KR" altLang="en-US" smtClean="0"/>
-              <a:t>2024-05-24</a:t>
+              <a:t>2024-05-27</a:t>
             </a:fld>
             <a:endParaRPr lang="ko-KR" altLang="en-US"/>
           </a:p>
@@ -15521,7 +15521,7 @@
           <a:p>
             <a:fld id="{0F78D9C4-20C1-4B15-A116-16DC77AD9A1E}" type="datetime1">
               <a:rPr lang="ko-KR" altLang="en-US" smtClean="0"/>
-              <a:t>2024-05-24</a:t>
+              <a:t>2024-05-27</a:t>
             </a:fld>
             <a:endParaRPr lang="ko-KR" altLang="en-US"/>
           </a:p>
@@ -16064,7 +16064,7 @@
           <a:p>
             <a:fld id="{0F78D9C4-20C1-4B15-A116-16DC77AD9A1E}" type="datetime1">
               <a:rPr lang="ko-KR" altLang="en-US" smtClean="0"/>
-              <a:t>2024-05-24</a:t>
+              <a:t>2024-05-27</a:t>
             </a:fld>
             <a:endParaRPr lang="ko-KR" altLang="en-US"/>
           </a:p>
@@ -16535,7 +16535,7 @@
           <a:p>
             <a:fld id="{0F78D9C4-20C1-4B15-A116-16DC77AD9A1E}" type="datetime1">
               <a:rPr lang="ko-KR" altLang="en-US" smtClean="0"/>
-              <a:t>2024-05-24</a:t>
+              <a:t>2024-05-27</a:t>
             </a:fld>
             <a:endParaRPr lang="ko-KR" altLang="en-US" dirty="0"/>
           </a:p>
@@ -16660,7 +16660,7 @@
           <a:p>
             <a:fld id="{0F78D9C4-20C1-4B15-A116-16DC77AD9A1E}" type="datetime1">
               <a:rPr lang="ko-KR" altLang="en-US" smtClean="0"/>
-              <a:t>2024-05-24</a:t>
+              <a:t>2024-05-27</a:t>
             </a:fld>
             <a:endParaRPr lang="ko-KR" altLang="en-US" dirty="0"/>
           </a:p>
@@ -17486,7 +17486,7 @@
           <a:p>
             <a:fld id="{0F78D9C4-20C1-4B15-A116-16DC77AD9A1E}" type="datetime1">
               <a:rPr lang="ko-KR" altLang="en-US" smtClean="0"/>
-              <a:t>2024-05-24</a:t>
+              <a:t>2024-05-27</a:t>
             </a:fld>
             <a:endParaRPr lang="ko-KR" altLang="en-US"/>
           </a:p>
@@ -18237,7 +18237,7 @@
           <a:p>
             <a:fld id="{0F78D9C4-20C1-4B15-A116-16DC77AD9A1E}" type="datetime1">
               <a:rPr lang="ko-KR" altLang="en-US" smtClean="0"/>
-              <a:t>2024-05-24</a:t>
+              <a:t>2024-05-27</a:t>
             </a:fld>
             <a:endParaRPr lang="ko-KR" altLang="en-US"/>
           </a:p>
